--- a/docs/publications/Drishti-Design-and-Evidence.pptx
+++ b/docs/publications/Drishti-Design-and-Evidence.pptx
@@ -149,13 +149,13 @@
   <p:extLst>
     <p:ext uri="{521415D9-36F7-43E2-AB2F-B90AF26B5E84}">
       <p14:sectionLst xmlns:p14="http://schemas.microsoft.com/office/powerpoint/2010/main">
-        <p14:section name="Opening" id="{96c02db4-0cc6-c589-c93e-a6b3dbfcf01f}">
+        <p14:section name="Opening" id="{8fff05ea-7e3f-edc1-6e4c-b237f484a65c}">
           <p14:sldIdLst>
             <p14:sldId id="256"/>
             <p14:sldId id="257"/>
           </p14:sldIdLst>
         </p14:section>
-        <p14:section name="1 The idea" id="{a712c8e3-2178-97ee-3172-b8604ae84330}">
+        <p14:section name="1 The idea" id="{ca601b58-0b8b-3761-3239-43cfc2554691}">
           <p14:sldIdLst>
             <p14:sldId id="258"/>
             <p14:sldId id="259"/>
@@ -171,7 +171,7 @@
             <p14:sldId id="269"/>
           </p14:sldIdLst>
         </p14:section>
-        <p14:section name="2 The product" id="{9352e20f-24e3-42ef-e003-d4d571d5bd1c}">
+        <p14:section name="2 The product" id="{426419ec-ae60-8af7-70b6-913aa38d3bca}">
           <p14:sldIdLst>
             <p14:sldId id="270"/>
             <p14:sldId id="271"/>
@@ -187,7 +187,7 @@
             <p14:sldId id="281"/>
           </p14:sldIdLst>
         </p14:section>
-        <p14:section name="3 Security" id="{ce4dddd9-208d-b13c-ccce-4a890378107e}">
+        <p14:section name="3 Security" id="{31e90070-bf08-f842-13da-c475a1110454}">
           <p14:sldIdLst>
             <p14:sldId id="282"/>
             <p14:sldId id="283"/>
@@ -197,7 +197,7 @@
             <p14:sldId id="287"/>
           </p14:sldIdLst>
         </p14:section>
-        <p14:section name="4 Evidence" id="{7e735013-be5a-282d-ee1e-eb4bc37820be}">
+        <p14:section name="4 Evidence" id="{c3cbb4b4-ca8c-870f-e402-1568eefc4f50}">
           <p14:sldIdLst>
             <p14:sldId id="288"/>
             <p14:sldId id="289"/>
@@ -208,7 +208,7 @@
             <p14:sldId id="294"/>
           </p14:sldIdLst>
         </p14:section>
-        <p14:section name="5 Where it is going" id="{14d0c23b-9cff-963d-922b-0020955d72a0}">
+        <p14:section name="5 Where it is going" id="{40493725-4708-b045-208a-8e178f7cb474}">
           <p14:sldIdLst>
             <p14:sldId id="295"/>
             <p14:sldId id="296"/>
@@ -12020,13 +12020,49 @@
       </p:grpSpPr>
       <p:sp>
         <p:nvSpPr>
-          <p:cNvPr id="2" name="Shape 0"/>
+          <p:cNvPr id="2" name="Chapter watermark"/>
+          <p:cNvSpPr txBox="1"/>
+          <p:nvPr/>
+        </p:nvSpPr>
+        <p:spPr>
+          <a:xfrm>
+            <a:off x="7589520" y="502920"/>
+            <a:ext cx="4206240" cy="3017520"/>
+          </a:xfrm>
+          <a:prstGeom prst="rect">
+            <a:avLst/>
+          </a:prstGeom>
+          <a:noFill/>
+          <a:ln/>
+        </p:spPr>
+        <p:txBody>
+          <a:bodyPr wrap="square" lIns="0" tIns="0" rIns="0" bIns="0" rtlCol="0" anchor="t"/>
+          <a:lstStyle/>
+          <a:p>
+            <a:pPr algn="r" indent="0" marL="0">
+              <a:buNone/>
+            </a:pPr>
+            <a:r>
+              <a:rPr lang="en-US" sz="16000" b="1" dirty="0">
+                <a:solidFill>
+                  <a:srgbClr val="A51C30"/>
+                </a:solidFill>
+              </a:rPr>
+              <a:t>02</a:t>
+            </a:r>
+            <a:endParaRPr lang="en-US" sz="16000" dirty="0"/>
+          </a:p>
+        </p:txBody>
+      </p:sp>
+      <p:sp>
+        <p:nvSpPr>
+          <p:cNvPr id="3" name="Shape 1"/>
           <p:cNvSpPr/>
           <p:nvPr/>
         </p:nvSpPr>
         <p:spPr>
           <a:xfrm>
-            <a:off x="1051560" y="768096"/>
+            <a:off x="822960" y="768096"/>
             <a:ext cx="512064" cy="256032"/>
           </a:xfrm>
           <a:prstGeom prst="arc">
@@ -12045,13 +12081,13 @@
       </p:sp>
       <p:sp>
         <p:nvSpPr>
-          <p:cNvPr id="3" name="Shape 1"/>
+          <p:cNvPr id="4" name="Shape 2"/>
           <p:cNvSpPr/>
           <p:nvPr/>
         </p:nvSpPr>
         <p:spPr>
           <a:xfrm>
-            <a:off x="1051560" y="914400"/>
+            <a:off x="822960" y="914400"/>
             <a:ext cx="512064" cy="256032"/>
           </a:xfrm>
           <a:prstGeom prst="arc">
@@ -12070,13 +12106,13 @@
       </p:sp>
       <p:sp>
         <p:nvSpPr>
-          <p:cNvPr id="4" name="Shape 2"/>
+          <p:cNvPr id="5" name="Shape 3"/>
           <p:cNvSpPr/>
           <p:nvPr/>
         </p:nvSpPr>
         <p:spPr>
           <a:xfrm>
-            <a:off x="1051560" y="1060704"/>
+            <a:off x="822960" y="1060704"/>
             <a:ext cx="512064" cy="256032"/>
           </a:xfrm>
           <a:prstGeom prst="arc">
@@ -12095,106 +12131,14 @@
       </p:sp>
       <p:sp>
         <p:nvSpPr>
-          <p:cNvPr id="5" name="Shape 3"/>
+          <p:cNvPr id="6" name="Shape 4"/>
           <p:cNvSpPr/>
           <p:nvPr/>
         </p:nvSpPr>
         <p:spPr>
           <a:xfrm>
-            <a:off x="5431536" y="1325880"/>
-            <a:ext cx="1325880" cy="1325880"/>
-          </a:xfrm>
-          <a:prstGeom prst="ellipse">
-            <a:avLst/>
-          </a:prstGeom>
-          <a:solidFill>
-            <a:srgbClr val="FFFFFF"/>
-          </a:solidFill>
-          <a:ln/>
-        </p:spPr>
-      </p:sp>
-      <p:sp>
-        <p:nvSpPr>
-          <p:cNvPr id="6" name="Text 4"/>
-          <p:cNvSpPr txBox="1"/>
-          <p:nvPr/>
-        </p:nvSpPr>
-        <p:spPr>
-          <a:xfrm>
-            <a:off x="5431536" y="1325880"/>
-            <a:ext cx="1325880" cy="1325880"/>
-          </a:xfrm>
-          <a:prstGeom prst="rect">
-            <a:avLst/>
-          </a:prstGeom>
-          <a:noFill/>
-          <a:ln/>
-        </p:spPr>
-        <p:txBody>
-          <a:bodyPr wrap="square" lIns="0" tIns="0" rIns="0" bIns="0" rtlCol="0" anchor="ctr"/>
-          <a:lstStyle/>
-          <a:p>
-            <a:pPr algn="ctr" indent="0" marL="0">
-              <a:buNone/>
-            </a:pPr>
-            <a:r>
-              <a:rPr lang="en-US" sz="4400" b="1" dirty="0">
-                <a:solidFill>
-                  <a:srgbClr val="8A1626"/>
-                </a:solidFill>
-              </a:rPr>
-              <a:t>2</a:t>
-            </a:r>
-            <a:endParaRPr lang="en-US" sz="4400" dirty="0"/>
-          </a:p>
-        </p:txBody>
-      </p:sp>
-      <p:sp>
-        <p:nvSpPr>
-          <p:cNvPr id="7" name="Text 5"/>
-          <p:cNvSpPr txBox="1"/>
-          <p:nvPr/>
-        </p:nvSpPr>
-        <p:spPr>
-          <a:xfrm>
-            <a:off x="1234440" y="2926080"/>
-            <a:ext cx="9720072" cy="731520"/>
-          </a:xfrm>
-          <a:prstGeom prst="rect">
-            <a:avLst/>
-          </a:prstGeom>
-          <a:noFill/>
-          <a:ln/>
-        </p:spPr>
-        <p:txBody>
-          <a:bodyPr wrap="square" lIns="0" tIns="0" rIns="0" bIns="0" rtlCol="0" anchor="ctr"/>
-          <a:lstStyle/>
-          <a:p>
-            <a:pPr algn="ctr" indent="0" marL="0">
-              <a:buNone/>
-            </a:pPr>
-            <a:r>
-              <a:rPr lang="en-US" sz="3800" b="1" dirty="0">
-                <a:solidFill>
-                  <a:srgbClr val="FFFFFF"/>
-                </a:solidFill>
-              </a:rPr>
-              <a:t>Drishti 1.18: the product</a:t>
-            </a:r>
-            <a:endParaRPr lang="en-US" sz="3800" dirty="0"/>
-          </a:p>
-        </p:txBody>
-      </p:sp>
-      <p:sp>
-        <p:nvSpPr>
-          <p:cNvPr id="8" name="Shape 6"/>
-          <p:cNvSpPr/>
-          <p:nvPr/>
-        </p:nvSpPr>
-        <p:spPr>
-          <a:xfrm>
-            <a:off x="5413248" y="3849624"/>
-            <a:ext cx="1371600" cy="36576"/>
+            <a:off x="822960" y="2788920"/>
+            <a:ext cx="2194560" cy="54864"/>
           </a:xfrm>
           <a:prstGeom prst="rect">
             <a:avLst/>
@@ -12207,14 +12151,14 @@
       </p:sp>
       <p:sp>
         <p:nvSpPr>
-          <p:cNvPr id="9" name="Text 7"/>
+          <p:cNvPr id="7" name="Text 5"/>
           <p:cNvSpPr txBox="1"/>
           <p:nvPr/>
         </p:nvSpPr>
         <p:spPr>
           <a:xfrm>
-            <a:off x="1874520" y="4069080"/>
-            <a:ext cx="8439912" cy="1097280"/>
+            <a:off x="822960" y="2971800"/>
+            <a:ext cx="10058400" cy="1097280"/>
           </a:xfrm>
           <a:prstGeom prst="rect">
             <a:avLst/>
@@ -12226,7 +12170,43 @@
           <a:bodyPr wrap="square" lIns="0" tIns="0" rIns="0" bIns="0" rtlCol="0" anchor="t"/>
           <a:lstStyle/>
           <a:p>
-            <a:pPr algn="ctr" indent="0" marL="0">
+            <a:pPr indent="0" marL="0">
+              <a:buNone/>
+            </a:pPr>
+            <a:r>
+              <a:rPr lang="en-US" sz="4000" b="1" dirty="0">
+                <a:solidFill>
+                  <a:srgbClr val="FFFFFF"/>
+                </a:solidFill>
+              </a:rPr>
+              <a:t>Drishti 1.18: the product</a:t>
+            </a:r>
+            <a:endParaRPr lang="en-US" sz="4000" dirty="0"/>
+          </a:p>
+        </p:txBody>
+      </p:sp>
+      <p:sp>
+        <p:nvSpPr>
+          <p:cNvPr id="8" name="Text 6"/>
+          <p:cNvSpPr txBox="1"/>
+          <p:nvPr/>
+        </p:nvSpPr>
+        <p:spPr>
+          <a:xfrm>
+            <a:off x="822960" y="4160520"/>
+            <a:ext cx="9601200" cy="914400"/>
+          </a:xfrm>
+          <a:prstGeom prst="rect">
+            <a:avLst/>
+          </a:prstGeom>
+          <a:noFill/>
+          <a:ln/>
+        </p:spPr>
+        <p:txBody>
+          <a:bodyPr wrap="square" lIns="0" tIns="0" rIns="0" bIns="0" rtlCol="0" anchor="t"/>
+          <a:lstStyle/>
+          <a:p>
+            <a:pPr indent="0" marL="0">
               <a:buNone/>
             </a:pPr>
             <a:r>
@@ -20369,13 +20349,49 @@
       </p:grpSpPr>
       <p:sp>
         <p:nvSpPr>
-          <p:cNvPr id="2" name="Shape 0"/>
+          <p:cNvPr id="2" name="Chapter watermark"/>
+          <p:cNvSpPr txBox="1"/>
+          <p:nvPr/>
+        </p:nvSpPr>
+        <p:spPr>
+          <a:xfrm>
+            <a:off x="7589520" y="502920"/>
+            <a:ext cx="4206240" cy="3017520"/>
+          </a:xfrm>
+          <a:prstGeom prst="rect">
+            <a:avLst/>
+          </a:prstGeom>
+          <a:noFill/>
+          <a:ln/>
+        </p:spPr>
+        <p:txBody>
+          <a:bodyPr wrap="square" lIns="0" tIns="0" rIns="0" bIns="0" rtlCol="0" anchor="t"/>
+          <a:lstStyle/>
+          <a:p>
+            <a:pPr algn="r" indent="0" marL="0">
+              <a:buNone/>
+            </a:pPr>
+            <a:r>
+              <a:rPr lang="en-US" sz="16000" b="1" dirty="0">
+                <a:solidFill>
+                  <a:srgbClr val="A51C30"/>
+                </a:solidFill>
+              </a:rPr>
+              <a:t>03</a:t>
+            </a:r>
+            <a:endParaRPr lang="en-US" sz="16000" dirty="0"/>
+          </a:p>
+        </p:txBody>
+      </p:sp>
+      <p:sp>
+        <p:nvSpPr>
+          <p:cNvPr id="3" name="Shape 1"/>
           <p:cNvSpPr/>
           <p:nvPr/>
         </p:nvSpPr>
         <p:spPr>
           <a:xfrm>
-            <a:off x="1051560" y="768096"/>
+            <a:off x="822960" y="768096"/>
             <a:ext cx="512064" cy="256032"/>
           </a:xfrm>
           <a:prstGeom prst="arc">
@@ -20394,13 +20410,13 @@
       </p:sp>
       <p:sp>
         <p:nvSpPr>
-          <p:cNvPr id="3" name="Shape 1"/>
+          <p:cNvPr id="4" name="Shape 2"/>
           <p:cNvSpPr/>
           <p:nvPr/>
         </p:nvSpPr>
         <p:spPr>
           <a:xfrm>
-            <a:off x="1051560" y="914400"/>
+            <a:off x="822960" y="914400"/>
             <a:ext cx="512064" cy="256032"/>
           </a:xfrm>
           <a:prstGeom prst="arc">
@@ -20419,13 +20435,13 @@
       </p:sp>
       <p:sp>
         <p:nvSpPr>
-          <p:cNvPr id="4" name="Shape 2"/>
+          <p:cNvPr id="5" name="Shape 3"/>
           <p:cNvSpPr/>
           <p:nvPr/>
         </p:nvSpPr>
         <p:spPr>
           <a:xfrm>
-            <a:off x="1051560" y="1060704"/>
+            <a:off x="822960" y="1060704"/>
             <a:ext cx="512064" cy="256032"/>
           </a:xfrm>
           <a:prstGeom prst="arc">
@@ -20444,106 +20460,14 @@
       </p:sp>
       <p:sp>
         <p:nvSpPr>
-          <p:cNvPr id="5" name="Shape 3"/>
+          <p:cNvPr id="6" name="Shape 4"/>
           <p:cNvSpPr/>
           <p:nvPr/>
         </p:nvSpPr>
         <p:spPr>
           <a:xfrm>
-            <a:off x="5431536" y="1325880"/>
-            <a:ext cx="1325880" cy="1325880"/>
-          </a:xfrm>
-          <a:prstGeom prst="ellipse">
-            <a:avLst/>
-          </a:prstGeom>
-          <a:solidFill>
-            <a:srgbClr val="FFFFFF"/>
-          </a:solidFill>
-          <a:ln/>
-        </p:spPr>
-      </p:sp>
-      <p:sp>
-        <p:nvSpPr>
-          <p:cNvPr id="6" name="Text 4"/>
-          <p:cNvSpPr txBox="1"/>
-          <p:nvPr/>
-        </p:nvSpPr>
-        <p:spPr>
-          <a:xfrm>
-            <a:off x="5431536" y="1325880"/>
-            <a:ext cx="1325880" cy="1325880"/>
-          </a:xfrm>
-          <a:prstGeom prst="rect">
-            <a:avLst/>
-          </a:prstGeom>
-          <a:noFill/>
-          <a:ln/>
-        </p:spPr>
-        <p:txBody>
-          <a:bodyPr wrap="square" lIns="0" tIns="0" rIns="0" bIns="0" rtlCol="0" anchor="ctr"/>
-          <a:lstStyle/>
-          <a:p>
-            <a:pPr algn="ctr" indent="0" marL="0">
-              <a:buNone/>
-            </a:pPr>
-            <a:r>
-              <a:rPr lang="en-US" sz="4400" b="1" dirty="0">
-                <a:solidFill>
-                  <a:srgbClr val="8A1626"/>
-                </a:solidFill>
-              </a:rPr>
-              <a:t>3</a:t>
-            </a:r>
-            <a:endParaRPr lang="en-US" sz="4400" dirty="0"/>
-          </a:p>
-        </p:txBody>
-      </p:sp>
-      <p:sp>
-        <p:nvSpPr>
-          <p:cNvPr id="7" name="Text 5"/>
-          <p:cNvSpPr txBox="1"/>
-          <p:nvPr/>
-        </p:nvSpPr>
-        <p:spPr>
-          <a:xfrm>
-            <a:off x="1234440" y="2926080"/>
-            <a:ext cx="9720072" cy="731520"/>
-          </a:xfrm>
-          <a:prstGeom prst="rect">
-            <a:avLst/>
-          </a:prstGeom>
-          <a:noFill/>
-          <a:ln/>
-        </p:spPr>
-        <p:txBody>
-          <a:bodyPr wrap="square" lIns="0" tIns="0" rIns="0" bIns="0" rtlCol="0" anchor="ctr"/>
-          <a:lstStyle/>
-          <a:p>
-            <a:pPr algn="ctr" indent="0" marL="0">
-              <a:buNone/>
-            </a:pPr>
-            <a:r>
-              <a:rPr lang="en-US" sz="3800" b="1" dirty="0">
-                <a:solidFill>
-                  <a:srgbClr val="FFFFFF"/>
-                </a:solidFill>
-              </a:rPr>
-              <a:t>Security, drawn as flows</a:t>
-            </a:r>
-            <a:endParaRPr lang="en-US" sz="3800" dirty="0"/>
-          </a:p>
-        </p:txBody>
-      </p:sp>
-      <p:sp>
-        <p:nvSpPr>
-          <p:cNvPr id="8" name="Shape 6"/>
-          <p:cNvSpPr/>
-          <p:nvPr/>
-        </p:nvSpPr>
-        <p:spPr>
-          <a:xfrm>
-            <a:off x="5413248" y="3849624"/>
-            <a:ext cx="1371600" cy="36576"/>
+            <a:off x="822960" y="2788920"/>
+            <a:ext cx="2194560" cy="54864"/>
           </a:xfrm>
           <a:prstGeom prst="rect">
             <a:avLst/>
@@ -20556,14 +20480,14 @@
       </p:sp>
       <p:sp>
         <p:nvSpPr>
-          <p:cNvPr id="9" name="Text 7"/>
+          <p:cNvPr id="7" name="Text 5"/>
           <p:cNvSpPr txBox="1"/>
           <p:nvPr/>
         </p:nvSpPr>
         <p:spPr>
           <a:xfrm>
-            <a:off x="1874520" y="4069080"/>
-            <a:ext cx="8439912" cy="1097280"/>
+            <a:off x="822960" y="2971800"/>
+            <a:ext cx="10058400" cy="1097280"/>
           </a:xfrm>
           <a:prstGeom prst="rect">
             <a:avLst/>
@@ -20575,7 +20499,43 @@
           <a:bodyPr wrap="square" lIns="0" tIns="0" rIns="0" bIns="0" rtlCol="0" anchor="t"/>
           <a:lstStyle/>
           <a:p>
-            <a:pPr algn="ctr" indent="0" marL="0">
+            <a:pPr indent="0" marL="0">
+              <a:buNone/>
+            </a:pPr>
+            <a:r>
+              <a:rPr lang="en-US" sz="4000" b="1" dirty="0">
+                <a:solidFill>
+                  <a:srgbClr val="FFFFFF"/>
+                </a:solidFill>
+              </a:rPr>
+              <a:t>Security, drawn as flows</a:t>
+            </a:r>
+            <a:endParaRPr lang="en-US" sz="4000" dirty="0"/>
+          </a:p>
+        </p:txBody>
+      </p:sp>
+      <p:sp>
+        <p:nvSpPr>
+          <p:cNvPr id="8" name="Text 6"/>
+          <p:cNvSpPr txBox="1"/>
+          <p:nvPr/>
+        </p:nvSpPr>
+        <p:spPr>
+          <a:xfrm>
+            <a:off x="822960" y="4160520"/>
+            <a:ext cx="9601200" cy="914400"/>
+          </a:xfrm>
+          <a:prstGeom prst="rect">
+            <a:avLst/>
+          </a:prstGeom>
+          <a:noFill/>
+          <a:ln/>
+        </p:spPr>
+        <p:txBody>
+          <a:bodyPr wrap="square" lIns="0" tIns="0" rIns="0" bIns="0" rtlCol="0" anchor="t"/>
+          <a:lstStyle/>
+          <a:p>
+            <a:pPr indent="0" marL="0">
               <a:buNone/>
             </a:pPr>
             <a:r>
@@ -22133,13 +22093,49 @@
       </p:grpSpPr>
       <p:sp>
         <p:nvSpPr>
-          <p:cNvPr id="2" name="Shape 0"/>
+          <p:cNvPr id="2" name="Chapter watermark"/>
+          <p:cNvSpPr txBox="1"/>
+          <p:nvPr/>
+        </p:nvSpPr>
+        <p:spPr>
+          <a:xfrm>
+            <a:off x="7589520" y="502920"/>
+            <a:ext cx="4206240" cy="3017520"/>
+          </a:xfrm>
+          <a:prstGeom prst="rect">
+            <a:avLst/>
+          </a:prstGeom>
+          <a:noFill/>
+          <a:ln/>
+        </p:spPr>
+        <p:txBody>
+          <a:bodyPr wrap="square" lIns="0" tIns="0" rIns="0" bIns="0" rtlCol="0" anchor="t"/>
+          <a:lstStyle/>
+          <a:p>
+            <a:pPr algn="r" indent="0" marL="0">
+              <a:buNone/>
+            </a:pPr>
+            <a:r>
+              <a:rPr lang="en-US" sz="16000" b="1" dirty="0">
+                <a:solidFill>
+                  <a:srgbClr val="A51C30"/>
+                </a:solidFill>
+              </a:rPr>
+              <a:t>01</a:t>
+            </a:r>
+            <a:endParaRPr lang="en-US" sz="16000" dirty="0"/>
+          </a:p>
+        </p:txBody>
+      </p:sp>
+      <p:sp>
+        <p:nvSpPr>
+          <p:cNvPr id="3" name="Shape 1"/>
           <p:cNvSpPr/>
           <p:nvPr/>
         </p:nvSpPr>
         <p:spPr>
           <a:xfrm>
-            <a:off x="1051560" y="768096"/>
+            <a:off x="822960" y="768096"/>
             <a:ext cx="512064" cy="256032"/>
           </a:xfrm>
           <a:prstGeom prst="arc">
@@ -22158,13 +22154,13 @@
       </p:sp>
       <p:sp>
         <p:nvSpPr>
-          <p:cNvPr id="3" name="Shape 1"/>
+          <p:cNvPr id="4" name="Shape 2"/>
           <p:cNvSpPr/>
           <p:nvPr/>
         </p:nvSpPr>
         <p:spPr>
           <a:xfrm>
-            <a:off x="1051560" y="914400"/>
+            <a:off x="822960" y="914400"/>
             <a:ext cx="512064" cy="256032"/>
           </a:xfrm>
           <a:prstGeom prst="arc">
@@ -22183,13 +22179,13 @@
       </p:sp>
       <p:sp>
         <p:nvSpPr>
-          <p:cNvPr id="4" name="Shape 2"/>
+          <p:cNvPr id="5" name="Shape 3"/>
           <p:cNvSpPr/>
           <p:nvPr/>
         </p:nvSpPr>
         <p:spPr>
           <a:xfrm>
-            <a:off x="1051560" y="1060704"/>
+            <a:off x="822960" y="1060704"/>
             <a:ext cx="512064" cy="256032"/>
           </a:xfrm>
           <a:prstGeom prst="arc">
@@ -22208,106 +22204,14 @@
       </p:sp>
       <p:sp>
         <p:nvSpPr>
-          <p:cNvPr id="5" name="Shape 3"/>
+          <p:cNvPr id="6" name="Shape 4"/>
           <p:cNvSpPr/>
           <p:nvPr/>
         </p:nvSpPr>
         <p:spPr>
           <a:xfrm>
-            <a:off x="5431536" y="1325880"/>
-            <a:ext cx="1325880" cy="1325880"/>
-          </a:xfrm>
-          <a:prstGeom prst="ellipse">
-            <a:avLst/>
-          </a:prstGeom>
-          <a:solidFill>
-            <a:srgbClr val="FFFFFF"/>
-          </a:solidFill>
-          <a:ln/>
-        </p:spPr>
-      </p:sp>
-      <p:sp>
-        <p:nvSpPr>
-          <p:cNvPr id="6" name="Text 4"/>
-          <p:cNvSpPr txBox="1"/>
-          <p:nvPr/>
-        </p:nvSpPr>
-        <p:spPr>
-          <a:xfrm>
-            <a:off x="5431536" y="1325880"/>
-            <a:ext cx="1325880" cy="1325880"/>
-          </a:xfrm>
-          <a:prstGeom prst="rect">
-            <a:avLst/>
-          </a:prstGeom>
-          <a:noFill/>
-          <a:ln/>
-        </p:spPr>
-        <p:txBody>
-          <a:bodyPr wrap="square" lIns="0" tIns="0" rIns="0" bIns="0" rtlCol="0" anchor="ctr"/>
-          <a:lstStyle/>
-          <a:p>
-            <a:pPr algn="ctr" indent="0" marL="0">
-              <a:buNone/>
-            </a:pPr>
-            <a:r>
-              <a:rPr lang="en-US" sz="4400" b="1" dirty="0">
-                <a:solidFill>
-                  <a:srgbClr val="8A1626"/>
-                </a:solidFill>
-              </a:rPr>
-              <a:t>1</a:t>
-            </a:r>
-            <a:endParaRPr lang="en-US" sz="4400" dirty="0"/>
-          </a:p>
-        </p:txBody>
-      </p:sp>
-      <p:sp>
-        <p:nvSpPr>
-          <p:cNvPr id="7" name="Text 5"/>
-          <p:cNvSpPr txBox="1"/>
-          <p:nvPr/>
-        </p:nvSpPr>
-        <p:spPr>
-          <a:xfrm>
-            <a:off x="1234440" y="2926080"/>
-            <a:ext cx="9720072" cy="731520"/>
-          </a:xfrm>
-          <a:prstGeom prst="rect">
-            <a:avLst/>
-          </a:prstGeom>
-          <a:noFill/>
-          <a:ln/>
-        </p:spPr>
-        <p:txBody>
-          <a:bodyPr wrap="square" lIns="0" tIns="0" rIns="0" bIns="0" rtlCol="0" anchor="ctr"/>
-          <a:lstStyle/>
-          <a:p>
-            <a:pPr algn="ctr" indent="0" marL="0">
-              <a:buNone/>
-            </a:pPr>
-            <a:r>
-              <a:rPr lang="en-US" sz="3800" b="1" dirty="0">
-                <a:solidFill>
-                  <a:srgbClr val="FFFFFF"/>
-                </a:solidFill>
-              </a:rPr>
-              <a:t>The idea: a screen is a paragraph</a:t>
-            </a:r>
-            <a:endParaRPr lang="en-US" sz="3800" dirty="0"/>
-          </a:p>
-        </p:txBody>
-      </p:sp>
-      <p:sp>
-        <p:nvSpPr>
-          <p:cNvPr id="8" name="Shape 6"/>
-          <p:cNvSpPr/>
-          <p:nvPr/>
-        </p:nvSpPr>
-        <p:spPr>
-          <a:xfrm>
-            <a:off x="5413248" y="3849624"/>
-            <a:ext cx="1371600" cy="36576"/>
+            <a:off x="822960" y="2788920"/>
+            <a:ext cx="2194560" cy="54864"/>
           </a:xfrm>
           <a:prstGeom prst="rect">
             <a:avLst/>
@@ -22320,14 +22224,14 @@
       </p:sp>
       <p:sp>
         <p:nvSpPr>
-          <p:cNvPr id="9" name="Text 7"/>
+          <p:cNvPr id="7" name="Text 5"/>
           <p:cNvSpPr txBox="1"/>
           <p:nvPr/>
         </p:nvSpPr>
         <p:spPr>
           <a:xfrm>
-            <a:off x="1874520" y="4069080"/>
-            <a:ext cx="8439912" cy="1097280"/>
+            <a:off x="822960" y="2971800"/>
+            <a:ext cx="10058400" cy="1097280"/>
           </a:xfrm>
           <a:prstGeom prst="rect">
             <a:avLst/>
@@ -22339,7 +22243,43 @@
           <a:bodyPr wrap="square" lIns="0" tIns="0" rIns="0" bIns="0" rtlCol="0" anchor="t"/>
           <a:lstStyle/>
           <a:p>
-            <a:pPr algn="ctr" indent="0" marL="0">
+            <a:pPr indent="0" marL="0">
+              <a:buNone/>
+            </a:pPr>
+            <a:r>
+              <a:rPr lang="en-US" sz="4000" b="1" dirty="0">
+                <a:solidFill>
+                  <a:srgbClr val="FFFFFF"/>
+                </a:solidFill>
+              </a:rPr>
+              <a:t>The idea: a screen is a paragraph</a:t>
+            </a:r>
+            <a:endParaRPr lang="en-US" sz="4000" dirty="0"/>
+          </a:p>
+        </p:txBody>
+      </p:sp>
+      <p:sp>
+        <p:nvSpPr>
+          <p:cNvPr id="8" name="Text 6"/>
+          <p:cNvSpPr txBox="1"/>
+          <p:nvPr/>
+        </p:nvSpPr>
+        <p:spPr>
+          <a:xfrm>
+            <a:off x="822960" y="4160520"/>
+            <a:ext cx="9601200" cy="914400"/>
+          </a:xfrm>
+          <a:prstGeom prst="rect">
+            <a:avLst/>
+          </a:prstGeom>
+          <a:noFill/>
+          <a:ln/>
+        </p:spPr>
+        <p:txBody>
+          <a:bodyPr wrap="square" lIns="0" tIns="0" rIns="0" bIns="0" rtlCol="0" anchor="t"/>
+          <a:lstStyle/>
+          <a:p>
+            <a:pPr indent="0" marL="0">
               <a:buNone/>
             </a:pPr>
             <a:r>
@@ -25468,13 +25408,49 @@
       </p:grpSpPr>
       <p:sp>
         <p:nvSpPr>
-          <p:cNvPr id="2" name="Shape 0"/>
+          <p:cNvPr id="2" name="Chapter watermark"/>
+          <p:cNvSpPr txBox="1"/>
+          <p:nvPr/>
+        </p:nvSpPr>
+        <p:spPr>
+          <a:xfrm>
+            <a:off x="7589520" y="502920"/>
+            <a:ext cx="4206240" cy="3017520"/>
+          </a:xfrm>
+          <a:prstGeom prst="rect">
+            <a:avLst/>
+          </a:prstGeom>
+          <a:noFill/>
+          <a:ln/>
+        </p:spPr>
+        <p:txBody>
+          <a:bodyPr wrap="square" lIns="0" tIns="0" rIns="0" bIns="0" rtlCol="0" anchor="t"/>
+          <a:lstStyle/>
+          <a:p>
+            <a:pPr algn="r" indent="0" marL="0">
+              <a:buNone/>
+            </a:pPr>
+            <a:r>
+              <a:rPr lang="en-US" sz="16000" b="1" dirty="0">
+                <a:solidFill>
+                  <a:srgbClr val="A51C30"/>
+                </a:solidFill>
+              </a:rPr>
+              <a:t>04</a:t>
+            </a:r>
+            <a:endParaRPr lang="en-US" sz="16000" dirty="0"/>
+          </a:p>
+        </p:txBody>
+      </p:sp>
+      <p:sp>
+        <p:nvSpPr>
+          <p:cNvPr id="3" name="Shape 1"/>
           <p:cNvSpPr/>
           <p:nvPr/>
         </p:nvSpPr>
         <p:spPr>
           <a:xfrm>
-            <a:off x="1051560" y="768096"/>
+            <a:off x="822960" y="768096"/>
             <a:ext cx="512064" cy="256032"/>
           </a:xfrm>
           <a:prstGeom prst="arc">
@@ -25493,13 +25469,13 @@
       </p:sp>
       <p:sp>
         <p:nvSpPr>
-          <p:cNvPr id="3" name="Shape 1"/>
+          <p:cNvPr id="4" name="Shape 2"/>
           <p:cNvSpPr/>
           <p:nvPr/>
         </p:nvSpPr>
         <p:spPr>
           <a:xfrm>
-            <a:off x="1051560" y="914400"/>
+            <a:off x="822960" y="914400"/>
             <a:ext cx="512064" cy="256032"/>
           </a:xfrm>
           <a:prstGeom prst="arc">
@@ -25518,13 +25494,13 @@
       </p:sp>
       <p:sp>
         <p:nvSpPr>
-          <p:cNvPr id="4" name="Shape 2"/>
+          <p:cNvPr id="5" name="Shape 3"/>
           <p:cNvSpPr/>
           <p:nvPr/>
         </p:nvSpPr>
         <p:spPr>
           <a:xfrm>
-            <a:off x="1051560" y="1060704"/>
+            <a:off x="822960" y="1060704"/>
             <a:ext cx="512064" cy="256032"/>
           </a:xfrm>
           <a:prstGeom prst="arc">
@@ -25543,106 +25519,14 @@
       </p:sp>
       <p:sp>
         <p:nvSpPr>
-          <p:cNvPr id="5" name="Shape 3"/>
+          <p:cNvPr id="6" name="Shape 4"/>
           <p:cNvSpPr/>
           <p:nvPr/>
         </p:nvSpPr>
         <p:spPr>
           <a:xfrm>
-            <a:off x="5431536" y="1325880"/>
-            <a:ext cx="1325880" cy="1325880"/>
-          </a:xfrm>
-          <a:prstGeom prst="ellipse">
-            <a:avLst/>
-          </a:prstGeom>
-          <a:solidFill>
-            <a:srgbClr val="FFFFFF"/>
-          </a:solidFill>
-          <a:ln/>
-        </p:spPr>
-      </p:sp>
-      <p:sp>
-        <p:nvSpPr>
-          <p:cNvPr id="6" name="Text 4"/>
-          <p:cNvSpPr txBox="1"/>
-          <p:nvPr/>
-        </p:nvSpPr>
-        <p:spPr>
-          <a:xfrm>
-            <a:off x="5431536" y="1325880"/>
-            <a:ext cx="1325880" cy="1325880"/>
-          </a:xfrm>
-          <a:prstGeom prst="rect">
-            <a:avLst/>
-          </a:prstGeom>
-          <a:noFill/>
-          <a:ln/>
-        </p:spPr>
-        <p:txBody>
-          <a:bodyPr wrap="square" lIns="0" tIns="0" rIns="0" bIns="0" rtlCol="0" anchor="ctr"/>
-          <a:lstStyle/>
-          <a:p>
-            <a:pPr algn="ctr" indent="0" marL="0">
-              <a:buNone/>
-            </a:pPr>
-            <a:r>
-              <a:rPr lang="en-US" sz="4400" b="1" dirty="0">
-                <a:solidFill>
-                  <a:srgbClr val="8A1626"/>
-                </a:solidFill>
-              </a:rPr>
-              <a:t>4</a:t>
-            </a:r>
-            <a:endParaRPr lang="en-US" sz="4400" dirty="0"/>
-          </a:p>
-        </p:txBody>
-      </p:sp>
-      <p:sp>
-        <p:nvSpPr>
-          <p:cNvPr id="7" name="Text 5"/>
-          <p:cNvSpPr txBox="1"/>
-          <p:nvPr/>
-        </p:nvSpPr>
-        <p:spPr>
-          <a:xfrm>
-            <a:off x="1234440" y="2926080"/>
-            <a:ext cx="9720072" cy="731520"/>
-          </a:xfrm>
-          <a:prstGeom prst="rect">
-            <a:avLst/>
-          </a:prstGeom>
-          <a:noFill/>
-          <a:ln/>
-        </p:spPr>
-        <p:txBody>
-          <a:bodyPr wrap="square" lIns="0" tIns="0" rIns="0" bIns="0" rtlCol="0" anchor="ctr"/>
-          <a:lstStyle/>
-          <a:p>
-            <a:pPr algn="ctr" indent="0" marL="0">
-              <a:buNone/>
-            </a:pPr>
-            <a:r>
-              <a:rPr lang="en-US" sz="3800" b="1" dirty="0">
-                <a:solidFill>
-                  <a:srgbClr val="FFFFFF"/>
-                </a:solidFill>
-              </a:rPr>
-              <a:t>Evidence, by the numbers</a:t>
-            </a:r>
-            <a:endParaRPr lang="en-US" sz="3800" dirty="0"/>
-          </a:p>
-        </p:txBody>
-      </p:sp>
-      <p:sp>
-        <p:nvSpPr>
-          <p:cNvPr id="8" name="Shape 6"/>
-          <p:cNvSpPr/>
-          <p:nvPr/>
-        </p:nvSpPr>
-        <p:spPr>
-          <a:xfrm>
-            <a:off x="5413248" y="3849624"/>
-            <a:ext cx="1371600" cy="36576"/>
+            <a:off x="822960" y="2788920"/>
+            <a:ext cx="2194560" cy="54864"/>
           </a:xfrm>
           <a:prstGeom prst="rect">
             <a:avLst/>
@@ -25655,14 +25539,14 @@
       </p:sp>
       <p:sp>
         <p:nvSpPr>
-          <p:cNvPr id="9" name="Text 7"/>
+          <p:cNvPr id="7" name="Text 5"/>
           <p:cNvSpPr txBox="1"/>
           <p:nvPr/>
         </p:nvSpPr>
         <p:spPr>
           <a:xfrm>
-            <a:off x="1874520" y="4069080"/>
-            <a:ext cx="8439912" cy="1097280"/>
+            <a:off x="822960" y="2971800"/>
+            <a:ext cx="10058400" cy="1097280"/>
           </a:xfrm>
           <a:prstGeom prst="rect">
             <a:avLst/>
@@ -25674,7 +25558,43 @@
           <a:bodyPr wrap="square" lIns="0" tIns="0" rIns="0" bIns="0" rtlCol="0" anchor="t"/>
           <a:lstStyle/>
           <a:p>
-            <a:pPr algn="ctr" indent="0" marL="0">
+            <a:pPr indent="0" marL="0">
+              <a:buNone/>
+            </a:pPr>
+            <a:r>
+              <a:rPr lang="en-US" sz="4000" b="1" dirty="0">
+                <a:solidFill>
+                  <a:srgbClr val="FFFFFF"/>
+                </a:solidFill>
+              </a:rPr>
+              <a:t>Evidence, by the numbers</a:t>
+            </a:r>
+            <a:endParaRPr lang="en-US" sz="4000" dirty="0"/>
+          </a:p>
+        </p:txBody>
+      </p:sp>
+      <p:sp>
+        <p:nvSpPr>
+          <p:cNvPr id="8" name="Text 6"/>
+          <p:cNvSpPr txBox="1"/>
+          <p:nvPr/>
+        </p:nvSpPr>
+        <p:spPr>
+          <a:xfrm>
+            <a:off x="822960" y="4160520"/>
+            <a:ext cx="9601200" cy="914400"/>
+          </a:xfrm>
+          <a:prstGeom prst="rect">
+            <a:avLst/>
+          </a:prstGeom>
+          <a:noFill/>
+          <a:ln/>
+        </p:spPr>
+        <p:txBody>
+          <a:bodyPr wrap="square" lIns="0" tIns="0" rIns="0" bIns="0" rtlCol="0" anchor="t"/>
+          <a:lstStyle/>
+          <a:p>
+            <a:pPr indent="0" marL="0">
               <a:buNone/>
             </a:pPr>
             <a:r>
@@ -34053,13 +33973,49 @@
       </p:grpSpPr>
       <p:sp>
         <p:nvSpPr>
-          <p:cNvPr id="2" name="Shape 0"/>
+          <p:cNvPr id="2" name="Chapter watermark"/>
+          <p:cNvSpPr txBox="1"/>
+          <p:nvPr/>
+        </p:nvSpPr>
+        <p:spPr>
+          <a:xfrm>
+            <a:off x="7589520" y="502920"/>
+            <a:ext cx="4206240" cy="3017520"/>
+          </a:xfrm>
+          <a:prstGeom prst="rect">
+            <a:avLst/>
+          </a:prstGeom>
+          <a:noFill/>
+          <a:ln/>
+        </p:spPr>
+        <p:txBody>
+          <a:bodyPr wrap="square" lIns="0" tIns="0" rIns="0" bIns="0" rtlCol="0" anchor="t"/>
+          <a:lstStyle/>
+          <a:p>
+            <a:pPr algn="r" indent="0" marL="0">
+              <a:buNone/>
+            </a:pPr>
+            <a:r>
+              <a:rPr lang="en-US" sz="16000" b="1" dirty="0">
+                <a:solidFill>
+                  <a:srgbClr val="A51C30"/>
+                </a:solidFill>
+              </a:rPr>
+              <a:t>05</a:t>
+            </a:r>
+            <a:endParaRPr lang="en-US" sz="16000" dirty="0"/>
+          </a:p>
+        </p:txBody>
+      </p:sp>
+      <p:sp>
+        <p:nvSpPr>
+          <p:cNvPr id="3" name="Shape 1"/>
           <p:cNvSpPr/>
           <p:nvPr/>
         </p:nvSpPr>
         <p:spPr>
           <a:xfrm>
-            <a:off x="1051560" y="768096"/>
+            <a:off x="822960" y="768096"/>
             <a:ext cx="512064" cy="256032"/>
           </a:xfrm>
           <a:prstGeom prst="arc">
@@ -34078,13 +34034,13 @@
       </p:sp>
       <p:sp>
         <p:nvSpPr>
-          <p:cNvPr id="3" name="Shape 1"/>
+          <p:cNvPr id="4" name="Shape 2"/>
           <p:cNvSpPr/>
           <p:nvPr/>
         </p:nvSpPr>
         <p:spPr>
           <a:xfrm>
-            <a:off x="1051560" y="914400"/>
+            <a:off x="822960" y="914400"/>
             <a:ext cx="512064" cy="256032"/>
           </a:xfrm>
           <a:prstGeom prst="arc">
@@ -34103,13 +34059,13 @@
       </p:sp>
       <p:sp>
         <p:nvSpPr>
-          <p:cNvPr id="4" name="Shape 2"/>
+          <p:cNvPr id="5" name="Shape 3"/>
           <p:cNvSpPr/>
           <p:nvPr/>
         </p:nvSpPr>
         <p:spPr>
           <a:xfrm>
-            <a:off x="1051560" y="1060704"/>
+            <a:off x="822960" y="1060704"/>
             <a:ext cx="512064" cy="256032"/>
           </a:xfrm>
           <a:prstGeom prst="arc">
@@ -34128,106 +34084,14 @@
       </p:sp>
       <p:sp>
         <p:nvSpPr>
-          <p:cNvPr id="5" name="Shape 3"/>
+          <p:cNvPr id="6" name="Shape 4"/>
           <p:cNvSpPr/>
           <p:nvPr/>
         </p:nvSpPr>
         <p:spPr>
           <a:xfrm>
-            <a:off x="5431536" y="1325880"/>
-            <a:ext cx="1325880" cy="1325880"/>
-          </a:xfrm>
-          <a:prstGeom prst="ellipse">
-            <a:avLst/>
-          </a:prstGeom>
-          <a:solidFill>
-            <a:srgbClr val="FFFFFF"/>
-          </a:solidFill>
-          <a:ln/>
-        </p:spPr>
-      </p:sp>
-      <p:sp>
-        <p:nvSpPr>
-          <p:cNvPr id="6" name="Text 4"/>
-          <p:cNvSpPr txBox="1"/>
-          <p:nvPr/>
-        </p:nvSpPr>
-        <p:spPr>
-          <a:xfrm>
-            <a:off x="5431536" y="1325880"/>
-            <a:ext cx="1325880" cy="1325880"/>
-          </a:xfrm>
-          <a:prstGeom prst="rect">
-            <a:avLst/>
-          </a:prstGeom>
-          <a:noFill/>
-          <a:ln/>
-        </p:spPr>
-        <p:txBody>
-          <a:bodyPr wrap="square" lIns="0" tIns="0" rIns="0" bIns="0" rtlCol="0" anchor="ctr"/>
-          <a:lstStyle/>
-          <a:p>
-            <a:pPr algn="ctr" indent="0" marL="0">
-              <a:buNone/>
-            </a:pPr>
-            <a:r>
-              <a:rPr lang="en-US" sz="4400" b="1" dirty="0">
-                <a:solidFill>
-                  <a:srgbClr val="8A1626"/>
-                </a:solidFill>
-              </a:rPr>
-              <a:t>5</a:t>
-            </a:r>
-            <a:endParaRPr lang="en-US" sz="4400" dirty="0"/>
-          </a:p>
-        </p:txBody>
-      </p:sp>
-      <p:sp>
-        <p:nvSpPr>
-          <p:cNvPr id="7" name="Text 5"/>
-          <p:cNvSpPr txBox="1"/>
-          <p:nvPr/>
-        </p:nvSpPr>
-        <p:spPr>
-          <a:xfrm>
-            <a:off x="1234440" y="2926080"/>
-            <a:ext cx="9720072" cy="731520"/>
-          </a:xfrm>
-          <a:prstGeom prst="rect">
-            <a:avLst/>
-          </a:prstGeom>
-          <a:noFill/>
-          <a:ln/>
-        </p:spPr>
-        <p:txBody>
-          <a:bodyPr wrap="square" lIns="0" tIns="0" rIns="0" bIns="0" rtlCol="0" anchor="ctr"/>
-          <a:lstStyle/>
-          <a:p>
-            <a:pPr algn="ctr" indent="0" marL="0">
-              <a:buNone/>
-            </a:pPr>
-            <a:r>
-              <a:rPr lang="en-US" sz="3800" b="1" dirty="0">
-                <a:solidFill>
-                  <a:srgbClr val="FFFFFF"/>
-                </a:solidFill>
-              </a:rPr>
-              <a:t>Where it is going</a:t>
-            </a:r>
-            <a:endParaRPr lang="en-US" sz="3800" dirty="0"/>
-          </a:p>
-        </p:txBody>
-      </p:sp>
-      <p:sp>
-        <p:nvSpPr>
-          <p:cNvPr id="8" name="Shape 6"/>
-          <p:cNvSpPr/>
-          <p:nvPr/>
-        </p:nvSpPr>
-        <p:spPr>
-          <a:xfrm>
-            <a:off x="5413248" y="3849624"/>
-            <a:ext cx="1371600" cy="36576"/>
+            <a:off x="822960" y="2788920"/>
+            <a:ext cx="2194560" cy="54864"/>
           </a:xfrm>
           <a:prstGeom prst="rect">
             <a:avLst/>
@@ -34240,14 +34104,14 @@
       </p:sp>
       <p:sp>
         <p:nvSpPr>
-          <p:cNvPr id="9" name="Text 7"/>
+          <p:cNvPr id="7" name="Text 5"/>
           <p:cNvSpPr txBox="1"/>
           <p:nvPr/>
         </p:nvSpPr>
         <p:spPr>
           <a:xfrm>
-            <a:off x="1874520" y="4069080"/>
-            <a:ext cx="8439912" cy="1097280"/>
+            <a:off x="822960" y="2971800"/>
+            <a:ext cx="10058400" cy="1097280"/>
           </a:xfrm>
           <a:prstGeom prst="rect">
             <a:avLst/>
@@ -34259,7 +34123,43 @@
           <a:bodyPr wrap="square" lIns="0" tIns="0" rIns="0" bIns="0" rtlCol="0" anchor="t"/>
           <a:lstStyle/>
           <a:p>
-            <a:pPr algn="ctr" indent="0" marL="0">
+            <a:pPr indent="0" marL="0">
+              <a:buNone/>
+            </a:pPr>
+            <a:r>
+              <a:rPr lang="en-US" sz="4000" b="1" dirty="0">
+                <a:solidFill>
+                  <a:srgbClr val="FFFFFF"/>
+                </a:solidFill>
+              </a:rPr>
+              <a:t>Where it is going</a:t>
+            </a:r>
+            <a:endParaRPr lang="en-US" sz="4000" dirty="0"/>
+          </a:p>
+        </p:txBody>
+      </p:sp>
+      <p:sp>
+        <p:nvSpPr>
+          <p:cNvPr id="8" name="Text 6"/>
+          <p:cNvSpPr txBox="1"/>
+          <p:nvPr/>
+        </p:nvSpPr>
+        <p:spPr>
+          <a:xfrm>
+            <a:off x="822960" y="4160520"/>
+            <a:ext cx="9601200" cy="914400"/>
+          </a:xfrm>
+          <a:prstGeom prst="rect">
+            <a:avLst/>
+          </a:prstGeom>
+          <a:noFill/>
+          <a:ln/>
+        </p:spPr>
+        <p:txBody>
+          <a:bodyPr wrap="square" lIns="0" tIns="0" rIns="0" bIns="0" rtlCol="0" anchor="t"/>
+          <a:lstStyle/>
+          <a:p>
+            <a:pPr indent="0" marL="0">
               <a:buNone/>
             </a:pPr>
             <a:r>

--- a/docs/publications/Drishti-Design-and-Evidence.pptx
+++ b/docs/publications/Drishti-Design-and-Evidence.pptx
@@ -24,12 +24,16 @@
     <p:sldId id="272" r:id="rId18"/>
     <p:sldId id="273" r:id="rId19"/>
     <p:sldId id="274" r:id="rId20"/>
+    <p:sldId id="299" r:id="rId50"/>
+    <p:sldId id="300" r:id="rId51"/>
+    <p:sldId id="301" r:id="rId52"/>
     <p:sldId id="275" r:id="rId21"/>
     <p:sldId id="276" r:id="rId22"/>
     <p:sldId id="277" r:id="rId23"/>
     <p:sldId id="278" r:id="rId24"/>
     <p:sldId id="279" r:id="rId25"/>
     <p:sldId id="280" r:id="rId26"/>
+    <p:sldId id="302" r:id="rId53"/>
     <p:sldId id="281" r:id="rId27"/>
     <p:sldId id="282" r:id="rId28"/>
     <p:sldId id="283" r:id="rId29"/>
@@ -41,6 +45,7 @@
     <p:sldId id="289" r:id="rId35"/>
     <p:sldId id="290" r:id="rId36"/>
     <p:sldId id="291" r:id="rId37"/>
+    <p:sldId id="303" r:id="rId54"/>
     <p:sldId id="292" r:id="rId38"/>
     <p:sldId id="293" r:id="rId39"/>
     <p:sldId id="294" r:id="rId40"/>
@@ -625,25 +630,25 @@
                 <c:formatCode>General</c:formatCode>
                 <c:ptCount val="7"/>
                 <c:pt idx="0">
-                  <c:v>91089</c:v>
+                  <c:v>201646</c:v>
                 </c:pt>
                 <c:pt idx="1">
-                  <c:v>34555</c:v>
+                  <c:v>77123</c:v>
                 </c:pt>
                 <c:pt idx="2">
-                  <c:v>62785</c:v>
+                  <c:v>133784</c:v>
                 </c:pt>
                 <c:pt idx="3">
-                  <c:v>54360</c:v>
+                  <c:v>96765</c:v>
                 </c:pt>
                 <c:pt idx="4">
-                  <c:v>30927</c:v>
+                  <c:v>44521</c:v>
                 </c:pt>
                 <c:pt idx="5">
-                  <c:v>24337</c:v>
+                  <c:v>38584</c:v>
                 </c:pt>
                 <c:pt idx="6">
-                  <c:v>10684</c:v>
+                  <c:v>16450</c:v>
                 </c:pt>
               </c:numCache>
             </c:numRef>
@@ -1178,7 +1183,7 @@
           <a:p>
             <a:r>
               <a:rPr lang="en-US" dirty="0"/>
-              <a:t>Source: README.md (name, 'sight', the tagline 'Any data. Any domain. One grammar.'); RELEASE_NOTES.md 1.18.0; pom.xml (Java 21 bytecode).
+              <a:t>Source: README.md (name, 'sight', the tagline 'Any data. Any domain. One grammar.'); CHANGELOG.md 2.5.0 (unreleased) and RELEASE_NOTES.md 2.4.0; pom.xml (Java 21 bytecode).
 Talk track: Drishti is Sanskrit for sight. The promise is in the tagline: any record from any system, in any domain, shown through one grammar instead of a screen written per product. The deck runs idea, product, security, evidence and roadmap; every number in it is measured or counted from the repository.</a:t>
             </a:r>
             <a:endParaRPr lang="en-US" dirty="0"/>
@@ -1267,8 +1272,8 @@
           <a:p>
             <a:r>
               <a:rPr lang="en-US" dirty="0"/>
-              <a:t>Source: README.md 'How it is built'; pom.xml modules; ARCHITECTURE.md §2.
-Talk track: Modules depend one way only, and an architecture test enforces it. The plugin interface is Spring-free so connectors stay small.</a:t>
+              <a:t>Source: README.md 'How it is built'; pom.xml modules (drishti-net, drishti-deltalake); ARCHITECTURE.md §2, §13 and §13a; NET.md.
+Talk track: Modules depend one way only, and an architecture test enforces it. The plugin interface is Spring-free so connectors stay small. With Drishti*net on, several such servers act as one: each keeps its own sources, and any of them answers.</a:t>
             </a:r>
             <a:endParaRPr lang="en-US" dirty="0"/>
           </a:p>
@@ -1445,8 +1450,8 @@
           <a:p>
             <a:r>
               <a:rPr lang="en-US" dirty="0"/>
-              <a:t>Source: packs/finance/sutras/rates/irs-vanilla.v3.sutra.yaml (98 lines); RACHANA_REFERENCE.md; ADR-013 (Sutras go live through review).
-Talk track: This is the real file, trimmed. Four things in one statement: when it applies, what the title says, the strip, and the panels. Everything it does not mention, inference lays out.</a:t>
+              <a:t>Source: config/packs/trading/sutras/murex/irs-fixfloat.v1.sutra.yaml (41 lines, its shared blocks in sutras/common); RACHANA_REFERENCE.md; ADR-013 (Sutras go live through review); CHANGELOG 2.3.0 (UPPER_SNAKE production-shaped trades, shared blocks).
+Talk track: This is the real file, trimmed. When it applies, what the title says, the strip, and the panels, which here are shared blocks every product type reuses. Everything it does not mention, inference lays out.</a:t>
             </a:r>
             <a:endParaRPr lang="en-US" dirty="0"/>
           </a:p>
@@ -1623,7 +1628,7 @@
           <a:p>
             <a:r>
               <a:rPr lang="en-US" dirty="0"/>
-              <a:t>Source: ARCHITECTURE.md §1; competitive.yaml; PANEL_KINDS.md; README.
+              <a:t>Source: ARCHITECTURE.md §1; competitive.yaml; PANELS.md; README.
 Talk track: Five benefits, each tied to something built and shown later in the deck.</a:t>
             </a:r>
             <a:endParaRPr lang="en-US" dirty="0"/>
@@ -1712,8 +1717,8 @@
           <a:p>
             <a:r>
               <a:rPr lang="en-US" dirty="0"/>
-              <a:t>Source: RELEASE_NOTES.md; USER_GUIDE.md 'The pages at a glance'.
-Talk track: Now the product as it stands at 1.18, page by page.</a:t>
+              <a:t>Source: RELEASE_NOTES.md; CHANGELOG.md 2.5.0; USER_GUIDE.md 'The pages at a glance'.
+Talk track: Now the product as it stands at 2.5, page by page.</a:t>
             </a:r>
             <a:endParaRPr lang="en-US" dirty="0"/>
           </a:p>
@@ -1801,8 +1806,8 @@
           <a:p>
             <a:r>
               <a:rPr lang="en-US" dirty="0"/>
-              <a:t>Source: README.md; packs/ (14 packs, 230 Sutra files); PANEL_KINDS.md; pom.xml plugins (15); git tag (23 releases, 2026-09-30 to 2026-10-06).
-Talk track: The numbers are counted from the repository on 6 October 2026.</a:t>
+              <a:t>Source: README.md; config/packs (7 packs, 197 Sutra files); PANELS.md (22 kinds); pom.xml plugins (17); CHANGELOG 2.3.0 to 2.5.0.
+Talk track: The numbers are counted from the repository on 19 October 2026.</a:t>
             </a:r>
             <a:endParaRPr lang="en-US" dirty="0"/>
           </a:p>
@@ -1890,8 +1895,8 @@
           <a:p>
             <a:r>
               <a:rPr lang="en-US" dirty="0"/>
-              <a:t>Source: Fresh capture of /v/trade/MX-20000001 on a scratch 1.18 server (dark theme).
-Talk track: Headline strip, then panels by F-key: terms, legs, the zero curve, DV01 by bucket, daily P&amp;L. The top bar shows live state; the footer lists every panel's key.</a:t>
+              <a:t>Source: docs/tutorials/img/t01/04-trade.jpg (TRD MX-20000001 on the demo lakes, 2.4.0); USER_GUIDE 'A deep trade'.
+Talk track: Headline strip, then panels by F-key: the deal ticket, legs, the cash-flow schedule, events and netted payments. Since 2.3.0 a trade is static and its valuations tick (TVAL); the footer lists every panel's key.</a:t>
             </a:r>
             <a:endParaRPr lang="en-US" dirty="0"/>
           </a:p>
@@ -2157,7 +2162,7 @@
           <a:p>
             <a:r>
               <a:rPr lang="en-US" dirty="0"/>
-              <a:t>Source: README.md; ARCHITECTURE.md §1; RELEASE_NOTES.md 1.18.0; docs/admin/PERFORMANCE.md; ELEMENTS.md; IMPLEMENTATION_PLAN.md Roadmap.
+              <a:t>Source: README.md; ARCHITECTURE.md §1; CHANGELOG.md 2.4.0 and 2.5.0; docs/admin/PERFORMANCE.md (35.7 million trades, 50 users, 179 requests/s); BI_DESIGN.md §12.2 (release order); counts from git ls-files on 19 October 2026.
 Talk track: If you remember one slide, make it this one. Five questions and five short answers; the rest of the deck earns each answer.</a:t>
             </a:r>
             <a:endParaRPr lang="en-US" dirty="0"/>
@@ -2246,8 +2251,8 @@
           <a:p>
             <a:r>
               <a:rPr lang="en-US" dirty="0"/>
-              <a:t>Source: README.md example commands; USER_GUIDE search and pivot; capture drishti-console/web/static/img/guide/pivot-search.png; PERFORMANCE.md (1M trades/day).
-Talk track: The plain-words parser is deterministic: no AI service is involved. Searches across a million trades a day come back in about a seventh of a second.</a:t>
+              <a:t>Source: USER_GUIDE search, plain words and pivot; QUERY_BY_FORM.md; capture docs/tutorials/img/t01/06-search.jpg; PERFORMANCE.md (1M trades/day: 134 ms search, 29 ms type-ahead; 35.7 million trades: form search p50 0.21 s).
+Talk track: The plain-words parser is deterministic: no AI service is involved. Searches across a million trades a day come back in about a seventh of a second; a form search over 35.7 million trades in about a fifth.</a:t>
             </a:r>
             <a:endParaRPr lang="en-US" dirty="0"/>
           </a:p>
@@ -2270,7 +2275,7 @@
           <a:p>
             <a:fld id="{F7021451-1387-4CA6-816F-3879F97B5CBC}" type="slidenum">
               <a:rPr lang="en-US"/>
-              <a:t>20</a:t>
+              <a:t>23</a:t>
             </a:fld>
             <a:endParaRPr lang="en-US"/>
           </a:p>
@@ -2359,7 +2364,7 @@
           <a:p>
             <a:fld id="{F7021451-1387-4CA6-816F-3879F97B5CBC}" type="slidenum">
               <a:rPr lang="en-US"/>
-              <a:t>21</a:t>
+              <a:t>24</a:t>
             </a:fld>
             <a:endParaRPr lang="en-US"/>
           </a:p>
@@ -2424,7 +2429,7 @@
           <a:p>
             <a:r>
               <a:rPr lang="en-US" dirty="0"/>
-              <a:t>Source: docs/guides/DATA_LOADS.md; RELEASE_NOTES 1.18.0; capture loads/01-data-loads-history.jpg.
+              <a:t>Source: docs/guides/DATA_LOADS.md; CHANGELOG 1.18.0; capture loads/01-data-loads-history.jpg.
 Talk track: Drishti does not ingest data; your ETL does. One call says a batch landed, and Drishti refreshes, verifies, evaluates alerts and tells people. Expectations flag late or missing data once.</a:t>
             </a:r>
             <a:endParaRPr lang="en-US" dirty="0"/>
@@ -2448,7 +2453,7 @@
           <a:p>
             <a:fld id="{F7021451-1387-4CA6-816F-3879F97B5CBC}" type="slidenum">
               <a:rPr lang="en-US"/>
-              <a:t>22</a:t>
+              <a:t>25</a:t>
             </a:fld>
             <a:endParaRPr lang="en-US"/>
           </a:p>
@@ -2537,7 +2542,7 @@
           <a:p>
             <a:fld id="{F7021451-1387-4CA6-816F-3879F97B5CBC}" type="slidenum">
               <a:rPr lang="en-US"/>
-              <a:t>23</a:t>
+              <a:t>26</a:t>
             </a:fld>
             <a:endParaRPr lang="en-US"/>
           </a:p>
@@ -2602,7 +2607,7 @@
           <a:p>
             <a:r>
               <a:rPr lang="en-US" dirty="0"/>
-              <a:t>Source: docs/guides/CLI_GUIDE.md (six groups, exit codes, PyCharm section); tools/drishti.py.
+              <a:t>Source: docs/guides/CLI_GUIDE.md; tools/drishti.py --help (fourteen groups: sutra, pack, data, server, connector, net, design, docs, doctor, bi, view, lake, testdata, completion).
 Talk track: Production runs Java 21 and every build activity is scriptable. Exit codes are a contract: 0 ok, 1 problems found, 2 usage.</a:t>
             </a:r>
             <a:endParaRPr lang="en-US" dirty="0"/>
@@ -2626,7 +2631,7 @@
           <a:p>
             <a:fld id="{F7021451-1387-4CA6-816F-3879F97B5CBC}" type="slidenum">
               <a:rPr lang="en-US"/>
-              <a:t>24</a:t>
+              <a:t>27</a:t>
             </a:fld>
             <a:endParaRPr lang="en-US"/>
           </a:p>
@@ -2691,8 +2696,8 @@
           <a:p>
             <a:r>
               <a:rPr lang="en-US" dirty="0"/>
-              <a:t>Source: docs/architecture/ELEMENTS.md (design, build plan, steps 0 to 10 as built); fresh capture of Admin → Embedding.
-Talk track: A host page adds one tag. The console sends HTML over the wire into a Shadow DOM, so styles never leak either way, and one live connection serves every view on the page.</a:t>
+              <a:t>Source: docs/guides/ELEMENTS.md (Elements 1.4.2: view, panel, report, about, search); docs/architecture/ELEMENTS.md; Admin → Embedding.
+Talk track: A host page adds one tag, pinned to an exact version with SRI. The console sends HTML over the wire into a Shadow DOM, so styles never leak either way, and one live connection serves every view on the page.</a:t>
             </a:r>
             <a:endParaRPr lang="en-US" dirty="0"/>
           </a:p>
@@ -2715,7 +2720,7 @@
           <a:p>
             <a:fld id="{F7021451-1387-4CA6-816F-3879F97B5CBC}" type="slidenum">
               <a:rPr lang="en-US"/>
-              <a:t>25</a:t>
+              <a:t>28</a:t>
             </a:fld>
             <a:endParaRPr lang="en-US"/>
           </a:p>
@@ -2804,7 +2809,7 @@
           <a:p>
             <a:fld id="{F7021451-1387-4CA6-816F-3879F97B5CBC}" type="slidenum">
               <a:rPr lang="en-US"/>
-              <a:t>26</a:t>
+              <a:t>30</a:t>
             </a:fld>
             <a:endParaRPr lang="en-US"/>
           </a:p>
@@ -2893,7 +2898,7 @@
           <a:p>
             <a:fld id="{F7021451-1387-4CA6-816F-3879F97B5CBC}" type="slidenum">
               <a:rPr lang="en-US"/>
-              <a:t>27</a:t>
+              <a:t>31</a:t>
             </a:fld>
             <a:endParaRPr lang="en-US"/>
           </a:p>
@@ -2982,7 +2987,7 @@
           <a:p>
             <a:fld id="{F7021451-1387-4CA6-816F-3879F97B5CBC}" type="slidenum">
               <a:rPr lang="en-US"/>
-              <a:t>28</a:t>
+              <a:t>32</a:t>
             </a:fld>
             <a:endParaRPr lang="en-US"/>
           </a:p>
@@ -3071,7 +3076,7 @@
           <a:p>
             <a:fld id="{F7021451-1387-4CA6-816F-3879F97B5CBC}" type="slidenum">
               <a:rPr lang="en-US"/>
-              <a:t>29</a:t>
+              <a:t>33</a:t>
             </a:fld>
             <a:endParaRPr lang="en-US"/>
           </a:p>
@@ -3225,7 +3230,7 @@
           <a:p>
             <a:r>
               <a:rPr lang="en-US" dirty="0"/>
-              <a:t>Source: USER_MANAGEMENT.md 'Personal API tokens'; RELEASE_NOTES 1.17.0.
+              <a:t>Source: USER_MANAGEMENT.md 'Personal API tokens' (write scopes design:write, design:approve, packs:admin, bi:write, bi:approve, bi:admin, ai:use, ai:admin, loads:write).
 Talk track: A token is a person's key for scripts and notebooks. It is read-only unless a write scope is named, and write scopes expire.</a:t>
             </a:r>
             <a:endParaRPr lang="en-US" dirty="0"/>
@@ -3249,7 +3254,7 @@
           <a:p>
             <a:fld id="{F7021451-1387-4CA6-816F-3879F97B5CBC}" type="slidenum">
               <a:rPr lang="en-US"/>
-              <a:t>30</a:t>
+              <a:t>34</a:t>
             </a:fld>
             <a:endParaRPr lang="en-US"/>
           </a:p>
@@ -3338,7 +3343,7 @@
           <a:p>
             <a:fld id="{F7021451-1387-4CA6-816F-3879F97B5CBC}" type="slidenum">
               <a:rPr lang="en-US"/>
-              <a:t>31</a:t>
+              <a:t>35</a:t>
             </a:fld>
             <a:endParaRPr lang="en-US"/>
           </a:p>
@@ -3427,7 +3432,7 @@
           <a:p>
             <a:fld id="{F7021451-1387-4CA6-816F-3879F97B5CBC}" type="slidenum">
               <a:rPr lang="en-US"/>
-              <a:t>32</a:t>
+              <a:t>36</a:t>
             </a:fld>
             <a:endParaRPr lang="en-US"/>
           </a:p>
@@ -3516,7 +3521,7 @@
           <a:p>
             <a:fld id="{F7021451-1387-4CA6-816F-3879F97B5CBC}" type="slidenum">
               <a:rPr lang="en-US"/>
-              <a:t>33</a:t>
+              <a:t>37</a:t>
             </a:fld>
             <a:endParaRPr lang="en-US"/>
           </a:p>
@@ -3581,8 +3586,8 @@
           <a:p>
             <a:r>
               <a:rPr lang="en-US" dirty="0"/>
-              <a:t>Source: drishti-common ErrorCode enum; docs/guides/API_GUIDE.md 'Error code table' (65 rows); RACHANA_REFERENCE.md 'Problem codes' (34).
-Talk track: Every error is RFC 7807 problem+json with a stable DRS code, and every code has a row that says what it means and what to do. Sutra problems have their own 34 codes.</a:t>
+              <a:t>Source: drishti-common ErrorCode enum (187 codes); docs/guides/API_GUIDE.md 'Error code table' (187 rows); RACHANA_REFERENCE.md 'Problem codes' (42), 19 October 2026.
+Talk track: Every error is RFC 7807 problem+json with a stable DRS code, and every code has a row that says what it means and what to do. Sutra problems have their own 42 codes.</a:t>
             </a:r>
             <a:endParaRPr lang="en-US" dirty="0"/>
           </a:p>
@@ -3605,7 +3610,7 @@
           <a:p>
             <a:fld id="{F7021451-1387-4CA6-816F-3879F97B5CBC}" type="slidenum">
               <a:rPr lang="en-US"/>
-              <a:t>34</a:t>
+              <a:t>38</a:t>
             </a:fld>
             <a:endParaRPr lang="en-US"/>
           </a:p>
@@ -3670,7 +3675,7 @@
           <a:p>
             <a:r>
               <a:rPr lang="en-US" dirty="0"/>
-              <a:t>Source: git ls-files: 1,063 Java @Test (+19 parameterised), 739 console pytest, 137 tools pytest; tests/test_embed_elements_browser.py; tests/test_page_widths_browser.py; tools/drill.sh.
+              <a:t>Source: git grep on 19 October 2026: 2,396 Java @Test (+36 parameterised), 1,759 console pytest functions (520 in *_browser.py), 280 tools pytest; tests/test_embed_elements_browser.py; tests/test_page_widths_browser.py; tools/drill.sh.
 Talk track: Counts are test methods, before parameterised expansion. The console's browser tests run in Chromium; embedded views in Chromium, Firefox and WebKit.</a:t>
             </a:r>
             <a:endParaRPr lang="en-US" dirty="0"/>
@@ -3694,7 +3699,7 @@
           <a:p>
             <a:fld id="{F7021451-1387-4CA6-816F-3879F97B5CBC}" type="slidenum">
               <a:rPr lang="en-US"/>
-              <a:t>35</a:t>
+              <a:t>39</a:t>
             </a:fld>
             <a:endParaRPr lang="en-US"/>
           </a:p>
@@ -3783,7 +3788,7 @@
           <a:p>
             <a:fld id="{F7021451-1387-4CA6-816F-3879F97B5CBC}" type="slidenum">
               <a:rPr lang="en-US"/>
-              <a:t>36</a:t>
+              <a:t>40</a:t>
             </a:fld>
             <a:endParaRPr lang="en-US"/>
           </a:p>
@@ -3872,7 +3877,7 @@
           <a:p>
             <a:fld id="{F7021451-1387-4CA6-816F-3879F97B5CBC}" type="slidenum">
               <a:rPr lang="en-US"/>
-              <a:t>37</a:t>
+              <a:t>42</a:t>
             </a:fld>
             <a:endParaRPr lang="en-US"/>
           </a:p>
@@ -3937,8 +3942,8 @@
           <a:p>
             <a:r>
               <a:rPr lang="en-US" dirty="0"/>
-              <a:t>Source: tools/drill.sh; RELEASE_NOTES 1.17.1 ('about 9 minutes instead of about 22'); pom.xml enforcer (maxJdkVersion 21).
-Talk track: One command verifies and only then pushes. Production runs Java 21; the same commit is also verified on Java 25 so upgrades are not a surprise.</a:t>
+              <a:t>Source: tools/drill.sh; git tag (32 releases, v1.0.0 to v2.4.0); git rev-list --count (1,421 commits, 19 October 2026); pom.xml enforcer (bytecode 21).
+Talk track: One command verifies and only then pushes. Production runs Java 21; the same commit is also verified on Java 25 so upgrades are not a surprise. A failed console test is re-run from the run's own summary, one file at a time.</a:t>
             </a:r>
             <a:endParaRPr lang="en-US" dirty="0"/>
           </a:p>
@@ -3961,7 +3966,7 @@
           <a:p>
             <a:fld id="{F7021451-1387-4CA6-816F-3879F97B5CBC}" type="slidenum">
               <a:rPr lang="en-US"/>
-              <a:t>38</a:t>
+              <a:t>43</a:t>
             </a:fld>
             <a:endParaRPr lang="en-US"/>
           </a:p>
@@ -4026,7 +4031,7 @@
           <a:p>
             <a:r>
               <a:rPr lang="en-US" dirty="0"/>
-              <a:t>Source: git ls-files | wc -l by top folder and by language, 2026-10-06.
+              <a:t>Source: git ls-files | wc -l by language, 19 October 2026 (vendored and built assets left out); docs/ (155 Markdown documents outside qa/).
 Talk track: Packs are mostly sample data and Sutras. The Java is split into small modules that depend one way.</a:t>
             </a:r>
             <a:endParaRPr lang="en-US" dirty="0"/>
@@ -4050,7 +4055,7 @@
           <a:p>
             <a:fld id="{F7021451-1387-4CA6-816F-3879F97B5CBC}" type="slidenum">
               <a:rPr lang="en-US"/>
-              <a:t>39</a:t>
+              <a:t>44</a:t>
             </a:fld>
             <a:endParaRPr lang="en-US"/>
           </a:p>
@@ -4204,7 +4209,7 @@
           <a:p>
             <a:r>
               <a:rPr lang="en-US" dirty="0"/>
-              <a:t>Source: ELEMENTS.md build plan; IMPLEMENTATION_PLAN.md 'Roadmap'.
+              <a:t>Source: docs/architecture/BI_DESIGN.md §12.2 (the release order agreed on 2026-10-19); IMPLEMENTATION_PLAN.md 'Roadmap'.
 Talk track: What is left, in order.</a:t>
             </a:r>
             <a:endParaRPr lang="en-US" dirty="0"/>
@@ -4228,7 +4233,7 @@
           <a:p>
             <a:fld id="{F7021451-1387-4CA6-816F-3879F97B5CBC}" type="slidenum">
               <a:rPr lang="en-US"/>
-              <a:t>40</a:t>
+              <a:t>45</a:t>
             </a:fld>
             <a:endParaRPr lang="en-US"/>
           </a:p>
@@ -4293,8 +4298,8 @@
           <a:p>
             <a:r>
               <a:rPr lang="en-US" dirty="0"/>
-              <a:t>Source: ELEMENTS.md steps 11–15; docs/architecture/IMPLEMENTATION_PLAN.md 'Roadmap' (everything planned up to 1.18.0 is built).
-Talk track: Embedding is two-thirds done. After it, the order is pricing, Windows, a real deployment, scale and load.</a:t>
+              <a:t>Source: docs/architecture/BI_DESIGN.md §12.2 (waves N, D, I, E; after E, 3.0); IMPLEMENTATION_PLAN.md 'Roadmap'; GENUI.md; AI_MANAGEMENT.md; QUANT_SERVICE.md.
+Talk track: 2.5.0 is built and in its release testing. Then sharing and integration, then AI, then the product owner's real-life QA, whose findings lead 2.8.0, then 3.0.</a:t>
             </a:r>
             <a:endParaRPr lang="en-US" dirty="0"/>
           </a:p>
@@ -4317,7 +4322,7 @@
           <a:p>
             <a:fld id="{F7021451-1387-4CA6-816F-3879F97B5CBC}" type="slidenum">
               <a:rPr lang="en-US"/>
-              <a:t>41</a:t>
+              <a:t>46</a:t>
             </a:fld>
             <a:endParaRPr lang="en-US"/>
           </a:p>
@@ -4382,8 +4387,8 @@
           <a:p>
             <a:r>
               <a:rPr lang="en-US" dirty="0"/>
-              <a:t>Source: docs/guides/QUICKSTART.md; IDE_GUIDE.md; CLI_GUIDE.md; USER_GUIDE.md.
-Talk track: QUICKSTART is the ten-minute path; IDE_GUIDE runs both halves in IntelliJ and PyCharm; CLI_GUIDE starts with pack make.</a:t>
+              <a:t>Source: docs/guides/GETTING_STARTED.md (the demo lakes in one command, -Djava.io.tmpdir); IDE_GUIDE.md; CLI_GUIDE.md; USER_GUIDE.md; README 'Try it'.
+Talk track: GETTING_STARTED is the ten-minute path: build, the console's Python, the demo lakes from the committed test data, then the server and the console; IDE_GUIDE runs both halves in IntelliJ and PyCharm; CLI_GUIDE starts with pack make.</a:t>
             </a:r>
             <a:endParaRPr lang="en-US" dirty="0"/>
           </a:p>
@@ -4406,7 +4411,7 @@
           <a:p>
             <a:fld id="{F7021451-1387-4CA6-816F-3879F97B5CBC}" type="slidenum">
               <a:rPr lang="en-US"/>
-              <a:t>42</a:t>
+              <a:t>47</a:t>
             </a:fld>
             <a:endParaRPr lang="en-US"/>
           </a:p>
@@ -4495,7 +4500,452 @@
           <a:p>
             <a:fld id="{F7021451-1387-4CA6-816F-3879F97B5CBC}" type="slidenum">
               <a:rPr lang="en-US"/>
-              <a:t>43</a:t>
+              <a:t>48</a:t>
+            </a:fld>
+            <a:endParaRPr lang="en-US"/>
+          </a:p>
+        </p:txBody>
+      </p:sp>
+    </p:spTree>
+    <p:extLst>
+      <p:ext uri="{BB962C8B-B14F-4D97-AF65-F5344CB8AC3E}">
+        <p14:creationId xmlns:p14="http://schemas.microsoft.com/office/powerpoint/2010/main" val="1024086991"/>
+      </p:ext>
+    </p:extLst>
+  </p:cSld>
+  <p:clrMapOvr>
+    <a:masterClrMapping/>
+  </p:clrMapOvr>
+</p:notes>
+</file>
+
+<file path=ppt/notesSlides/notesSlide44.xml><?xml version="1.0" encoding="utf-8"?>
+<p:notes xmlns:a="http://schemas.openxmlformats.org/drawingml/2006/main" xmlns:r="http://schemas.openxmlformats.org/officeDocument/2006/relationships" xmlns:p="http://schemas.openxmlformats.org/presentationml/2006/main">
+  <p:cSld>
+    <p:spTree>
+      <p:nvGrpSpPr>
+        <p:cNvPr id="1" name=""/>
+        <p:cNvGrpSpPr/>
+        <p:nvPr/>
+      </p:nvGrpSpPr>
+      <p:grpSpPr>
+        <a:xfrm>
+          <a:off x="0" y="0"/>
+          <a:ext cx="0" cy="0"/>
+          <a:chOff x="0" y="0"/>
+          <a:chExt cx="0" cy="0"/>
+        </a:xfrm>
+      </p:grpSpPr>
+      <p:sp>
+        <p:nvSpPr>
+          <p:cNvPr id="2" name="Slide Image Placeholder 1"/>
+          <p:cNvSpPr>
+            <a:spLocks noGrp="1" noRot="1" noChangeAspect="1"/>
+          </p:cNvSpPr>
+          <p:nvPr>
+            <p:ph type="sldImg"/>
+          </p:nvPr>
+        </p:nvSpPr>
+        <p:spPr/>
+      </p:sp>
+      <p:sp>
+        <p:nvSpPr>
+          <p:cNvPr id="3" name="Notes Placeholder 2"/>
+          <p:cNvSpPr>
+            <a:spLocks noGrp="1"/>
+          </p:cNvSpPr>
+          <p:nvPr>
+            <p:ph type="body" idx="1"/>
+          </p:nvPr>
+        </p:nvSpPr>
+        <p:spPr/>
+        <p:txBody>
+          <a:bodyPr/>
+          <a:lstStyle/>
+          <a:p>
+            <a:r>
+              <a:rPr lang="en-US" dirty="0"/>
+              <a:t>Source: docs/guides/BI_GUIDE.md; DATASETS.md; EXPRESSIONS.md; SQL.md; BI_DESIGN.md (principles, the one logical plan); CHANGELOG 2.2.0 to 2.4.0.
+Talk track: Rūpaka is BI inside Drishti, not beside it: models are rooted in the packs, three languages compile to one plan, and the servers compute every number for the person looking.</a:t>
+            </a:r>
+            <a:endParaRPr lang="en-US" dirty="0"/>
+          </a:p>
+        </p:txBody>
+      </p:sp>
+      <p:sp>
+        <p:nvSpPr>
+          <p:cNvPr id="4" name="Slide Number Placeholder 3"/>
+          <p:cNvSpPr>
+            <a:spLocks noGrp="1"/>
+          </p:cNvSpPr>
+          <p:nvPr>
+            <p:ph type="sldNum" sz="quarter" idx="10"/>
+          </p:nvPr>
+        </p:nvSpPr>
+        <p:spPr/>
+        <p:txBody>
+          <a:bodyPr/>
+          <a:lstStyle/>
+          <a:p>
+            <a:fld id="{F7021451-1387-4CA6-816F-3879F97B5CBC}" type="slidenum">
+              <a:rPr lang="en-US"/>
+              <a:t>20</a:t>
+            </a:fld>
+            <a:endParaRPr lang="en-US"/>
+          </a:p>
+        </p:txBody>
+      </p:sp>
+    </p:spTree>
+    <p:extLst>
+      <p:ext uri="{BB962C8B-B14F-4D97-AF65-F5344CB8AC3E}">
+        <p14:creationId xmlns:p14="http://schemas.microsoft.com/office/powerpoint/2010/main" val="1024086991"/>
+      </p:ext>
+    </p:extLst>
+  </p:cSld>
+  <p:clrMapOvr>
+    <a:masterClrMapping/>
+  </p:clrMapOvr>
+</p:notes>
+</file>
+
+<file path=ppt/notesSlides/notesSlide45.xml><?xml version="1.0" encoding="utf-8"?>
+<p:notes xmlns:a="http://schemas.openxmlformats.org/drawingml/2006/main" xmlns:r="http://schemas.openxmlformats.org/officeDocument/2006/relationships" xmlns:p="http://schemas.openxmlformats.org/presentationml/2006/main">
+  <p:cSld>
+    <p:spTree>
+      <p:nvGrpSpPr>
+        <p:cNvPr id="1" name=""/>
+        <p:cNvGrpSpPr/>
+        <p:nvPr/>
+      </p:nvGrpSpPr>
+      <p:grpSpPr>
+        <a:xfrm>
+          <a:off x="0" y="0"/>
+          <a:ext cx="0" cy="0"/>
+          <a:chOff x="0" y="0"/>
+          <a:chExt cx="0" cy="0"/>
+        </a:xfrm>
+      </p:grpSpPr>
+      <p:sp>
+        <p:nvSpPr>
+          <p:cNvPr id="2" name="Slide Image Placeholder 1"/>
+          <p:cNvSpPr>
+            <a:spLocks noGrp="1" noRot="1" noChangeAspect="1"/>
+          </p:cNvSpPr>
+          <p:nvPr>
+            <p:ph type="sldImg"/>
+          </p:nvPr>
+        </p:nvSpPr>
+        <p:spPr/>
+      </p:sp>
+      <p:sp>
+        <p:nvSpPr>
+          <p:cNvPr id="3" name="Notes Placeholder 2"/>
+          <p:cNvSpPr>
+            <a:spLocks noGrp="1"/>
+          </p:cNvSpPr>
+          <p:nvPr>
+            <p:ph type="body" idx="1"/>
+          </p:nvPr>
+        </p:nvSpPr>
+        <p:spPr/>
+        <p:txBody>
+          <a:bodyPr/>
+          <a:lstStyle/>
+          <a:p>
+            <a:r>
+              <a:rPr lang="en-US" dirty="0"/>
+              <a:t>Source: docs/guides/BI_GUIDE.md §26; REPORTS.md §5; BOARDS.md; CHANGELOG 2.4.0 (R6, R7, BI Studio); capture docs/guides/img/bistudio/studio.jpg.
+Talk track: The report, model and theme designers share one shell, as Power BI's do. A Power BI author built a desk pack in it without the YAML tab: that is the browser test of the wave.</a:t>
+            </a:r>
+            <a:endParaRPr lang="en-US" dirty="0"/>
+          </a:p>
+        </p:txBody>
+      </p:sp>
+      <p:sp>
+        <p:nvSpPr>
+          <p:cNvPr id="4" name="Slide Number Placeholder 3"/>
+          <p:cNvSpPr>
+            <a:spLocks noGrp="1"/>
+          </p:cNvSpPr>
+          <p:nvPr>
+            <p:ph type="sldNum" sz="quarter" idx="10"/>
+          </p:nvPr>
+        </p:nvSpPr>
+        <p:spPr/>
+        <p:txBody>
+          <a:bodyPr/>
+          <a:lstStyle/>
+          <a:p>
+            <a:fld id="{F7021451-1387-4CA6-816F-3879F97B5CBC}" type="slidenum">
+              <a:rPr lang="en-US"/>
+              <a:t>21</a:t>
+            </a:fld>
+            <a:endParaRPr lang="en-US"/>
+          </a:p>
+        </p:txBody>
+      </p:sp>
+    </p:spTree>
+    <p:extLst>
+      <p:ext uri="{BB962C8B-B14F-4D97-AF65-F5344CB8AC3E}">
+        <p14:creationId xmlns:p14="http://schemas.microsoft.com/office/powerpoint/2010/main" val="1024086991"/>
+      </p:ext>
+    </p:extLst>
+  </p:cSld>
+  <p:clrMapOvr>
+    <a:masterClrMapping/>
+  </p:clrMapOvr>
+</p:notes>
+</file>
+
+<file path=ppt/notesSlides/notesSlide46.xml><?xml version="1.0" encoding="utf-8"?>
+<p:notes xmlns:a="http://schemas.openxmlformats.org/drawingml/2006/main" xmlns:r="http://schemas.openxmlformats.org/officeDocument/2006/relationships" xmlns:p="http://schemas.openxmlformats.org/presentationml/2006/main">
+  <p:cSld>
+    <p:spTree>
+      <p:nvGrpSpPr>
+        <p:cNvPr id="1" name=""/>
+        <p:cNvGrpSpPr/>
+        <p:nvPr/>
+      </p:nvGrpSpPr>
+      <p:grpSpPr>
+        <a:xfrm>
+          <a:off x="0" y="0"/>
+          <a:ext cx="0" cy="0"/>
+          <a:chOff x="0" y="0"/>
+          <a:chExt cx="0" cy="0"/>
+        </a:xfrm>
+      </p:grpSpPr>
+      <p:sp>
+        <p:nvSpPr>
+          <p:cNvPr id="2" name="Slide Image Placeholder 1"/>
+          <p:cNvSpPr>
+            <a:spLocks noGrp="1" noRot="1" noChangeAspect="1"/>
+          </p:cNvSpPr>
+          <p:nvPr>
+            <p:ph type="sldImg"/>
+          </p:nvPr>
+        </p:nvSpPr>
+        <p:spPr/>
+      </p:sp>
+      <p:sp>
+        <p:nvSpPr>
+          <p:cNvPr id="3" name="Notes Placeholder 2"/>
+          <p:cNvSpPr>
+            <a:spLocks noGrp="1"/>
+          </p:cNvSpPr>
+          <p:nvPr>
+            <p:ph type="body" idx="1"/>
+          </p:nvPr>
+        </p:nvSpPr>
+        <p:spPr/>
+        <p:txBody>
+          <a:bodyPr/>
+          <a:lstStyle/>
+          <a:p>
+            <a:r>
+              <a:rPr lang="en-US" dirty="0"/>
+              <a:t>Source: docs/guides/PYTHON_BI.md §17; ANALYSE.md §16; CHANGELOG 2.4.0; capture docs/guides/img/bi-transform/05-browser-console.png.
+Talk track: Every BI page computes nothing in the browser. Python data prep runs on the console's sandbox, step by step with a preview; the Python console is the one place your own code runs in the browser, on rows already masked for you.</a:t>
+            </a:r>
+            <a:endParaRPr lang="en-US" dirty="0"/>
+          </a:p>
+        </p:txBody>
+      </p:sp>
+      <p:sp>
+        <p:nvSpPr>
+          <p:cNvPr id="4" name="Slide Number Placeholder 3"/>
+          <p:cNvSpPr>
+            <a:spLocks noGrp="1"/>
+          </p:cNvSpPr>
+          <p:nvPr>
+            <p:ph type="sldNum" sz="quarter" idx="10"/>
+          </p:nvPr>
+        </p:nvSpPr>
+        <p:spPr/>
+        <p:txBody>
+          <a:bodyPr/>
+          <a:lstStyle/>
+          <a:p>
+            <a:fld id="{F7021451-1387-4CA6-816F-3879F97B5CBC}" type="slidenum">
+              <a:rPr lang="en-US"/>
+              <a:t>22</a:t>
+            </a:fld>
+            <a:endParaRPr lang="en-US"/>
+          </a:p>
+        </p:txBody>
+      </p:sp>
+    </p:spTree>
+    <p:extLst>
+      <p:ext uri="{BB962C8B-B14F-4D97-AF65-F5344CB8AC3E}">
+        <p14:creationId xmlns:p14="http://schemas.microsoft.com/office/powerpoint/2010/main" val="1024086991"/>
+      </p:ext>
+    </p:extLst>
+  </p:cSld>
+  <p:clrMapOvr>
+    <a:masterClrMapping/>
+  </p:clrMapOvr>
+</p:notes>
+</file>
+
+<file path=ppt/notesSlides/notesSlide47.xml><?xml version="1.0" encoding="utf-8"?>
+<p:notes xmlns:a="http://schemas.openxmlformats.org/drawingml/2006/main" xmlns:r="http://schemas.openxmlformats.org/officeDocument/2006/relationships" xmlns:p="http://schemas.openxmlformats.org/presentationml/2006/main">
+  <p:cSld>
+    <p:spTree>
+      <p:nvGrpSpPr>
+        <p:cNvPr id="1" name=""/>
+        <p:cNvGrpSpPr/>
+        <p:nvPr/>
+      </p:nvGrpSpPr>
+      <p:grpSpPr>
+        <a:xfrm>
+          <a:off x="0" y="0"/>
+          <a:ext cx="0" cy="0"/>
+          <a:chOff x="0" y="0"/>
+          <a:chExt cx="0" cy="0"/>
+        </a:xfrm>
+      </p:grpSpPr>
+      <p:sp>
+        <p:nvSpPr>
+          <p:cNvPr id="2" name="Slide Image Placeholder 1"/>
+          <p:cNvSpPr>
+            <a:spLocks noGrp="1" noRot="1" noChangeAspect="1"/>
+          </p:cNvSpPr>
+          <p:nvPr>
+            <p:ph type="sldImg"/>
+          </p:nvPr>
+        </p:nvSpPr>
+        <p:spPr/>
+      </p:sp>
+      <p:sp>
+        <p:nvSpPr>
+          <p:cNvPr id="3" name="Notes Placeholder 2"/>
+          <p:cNvSpPr>
+            <a:spLocks noGrp="1"/>
+          </p:cNvSpPr>
+          <p:nvPr>
+            <p:ph type="body" idx="1"/>
+          </p:nvPr>
+        </p:nvSpPr>
+        <p:spPr/>
+        <p:txBody>
+          <a:bodyPr/>
+          <a:lstStyle/>
+          <a:p>
+            <a:r>
+              <a:rPr lang="en-US" dirty="0"/>
+              <a:t>Source: CHANGELOG.md 2.5.0 (N1 to N7: three servers in one JVM converge 52 ms after the third starts; five nodes, fake clock: dead everywhere within 40 s; a pack in the others' tables 1.0 s later; 13,542 signed calls through the rotation); docs/admin/NET.md; DRISHTI_NET.md §19.
+Talk track: Off by default. Switched on, servers gossip over HTTP with calls signed by a rotating cluster key. A request goes whole to a node that renders the kind, or the document is fetched from the node that holds it; a search is scattered and merged; the console fails over with no new sign-in.</a:t>
+            </a:r>
+            <a:endParaRPr lang="en-US" dirty="0"/>
+          </a:p>
+        </p:txBody>
+      </p:sp>
+      <p:sp>
+        <p:nvSpPr>
+          <p:cNvPr id="4" name="Slide Number Placeholder 3"/>
+          <p:cNvSpPr>
+            <a:spLocks noGrp="1"/>
+          </p:cNvSpPr>
+          <p:nvPr>
+            <p:ph type="sldNum" sz="quarter" idx="10"/>
+          </p:nvPr>
+        </p:nvSpPr>
+        <p:spPr/>
+        <p:txBody>
+          <a:bodyPr/>
+          <a:lstStyle/>
+          <a:p>
+            <a:fld id="{F7021451-1387-4CA6-816F-3879F97B5CBC}" type="slidenum">
+              <a:rPr lang="en-US"/>
+              <a:t>29</a:t>
+            </a:fld>
+            <a:endParaRPr lang="en-US"/>
+          </a:p>
+        </p:txBody>
+      </p:sp>
+    </p:spTree>
+    <p:extLst>
+      <p:ext uri="{BB962C8B-B14F-4D97-AF65-F5344CB8AC3E}">
+        <p14:creationId xmlns:p14="http://schemas.microsoft.com/office/powerpoint/2010/main" val="1024086991"/>
+      </p:ext>
+    </p:extLst>
+  </p:cSld>
+  <p:clrMapOvr>
+    <a:masterClrMapping/>
+  </p:clrMapOvr>
+</p:notes>
+</file>
+
+<file path=ppt/notesSlides/notesSlide48.xml><?xml version="1.0" encoding="utf-8"?>
+<p:notes xmlns:a="http://schemas.openxmlformats.org/drawingml/2006/main" xmlns:r="http://schemas.openxmlformats.org/officeDocument/2006/relationships" xmlns:p="http://schemas.openxmlformats.org/presentationml/2006/main">
+  <p:cSld>
+    <p:spTree>
+      <p:nvGrpSpPr>
+        <p:cNvPr id="1" name=""/>
+        <p:cNvGrpSpPr/>
+        <p:nvPr/>
+      </p:nvGrpSpPr>
+      <p:grpSpPr>
+        <a:xfrm>
+          <a:off x="0" y="0"/>
+          <a:ext cx="0" cy="0"/>
+          <a:chOff x="0" y="0"/>
+          <a:chExt cx="0" cy="0"/>
+        </a:xfrm>
+      </p:grpSpPr>
+      <p:sp>
+        <p:nvSpPr>
+          <p:cNvPr id="2" name="Slide Image Placeholder 1"/>
+          <p:cNvSpPr>
+            <a:spLocks noGrp="1" noRot="1" noChangeAspect="1"/>
+          </p:cNvSpPr>
+          <p:nvPr>
+            <p:ph type="sldImg"/>
+          </p:nvPr>
+        </p:nvSpPr>
+        <p:spPr/>
+      </p:sp>
+      <p:sp>
+        <p:nvSpPr>
+          <p:cNvPr id="3" name="Notes Placeholder 2"/>
+          <p:cNvSpPr>
+            <a:spLocks noGrp="1"/>
+          </p:cNvSpPr>
+          <p:nvPr>
+            <p:ph type="body" idx="1"/>
+          </p:nvPr>
+        </p:nvSpPr>
+        <p:spPr/>
+        <p:txBody>
+          <a:bodyPr/>
+          <a:lstStyle/>
+          <a:p>
+            <a:r>
+              <a:rPr lang="en-US" dirty="0"/>
+              <a:t>Source: docs/admin/PERFORMANCE.md (2026-10-18: 35.7 million trades, 50 users, 179 requests/s, heap 3.7 GB of 8 GB; form search p50 5.8 s to 0.21 s; console 182 pages/s; a restated day of 400,000 trades in 2 min 54 s at 202 requests/s); README 'Performance at scale'; SCALE_STRATEGY.md (8.2 million trades).
+Talk track: Three source systems, 300,000 to 500,000 trades a day each for 30 days, loaded in random date order while 50 users read. No failures; the slowest figures are single seconds, not minutes.</a:t>
+            </a:r>
+            <a:endParaRPr lang="en-US" dirty="0"/>
+          </a:p>
+        </p:txBody>
+      </p:sp>
+      <p:sp>
+        <p:nvSpPr>
+          <p:cNvPr id="4" name="Slide Number Placeholder 3"/>
+          <p:cNvSpPr>
+            <a:spLocks noGrp="1"/>
+          </p:cNvSpPr>
+          <p:nvPr>
+            <p:ph type="sldNum" sz="quarter" idx="10"/>
+          </p:nvPr>
+        </p:nvSpPr>
+        <p:spPr/>
+        <p:txBody>
+          <a:bodyPr/>
+          <a:lstStyle/>
+          <a:p>
+            <a:fld id="{F7021451-1387-4CA6-816F-3879F97B5CBC}" type="slidenum">
+              <a:rPr lang="en-US"/>
+              <a:t>41</a:t>
             </a:fld>
             <a:endParaRPr lang="en-US"/>
           </a:p>
@@ -4916,7 +5366,7 @@
           <a:p>
             <a:r>
               <a:rPr lang="en-US" dirty="0"/>
-              <a:t>Source: README.md; RACHANA_REFERENCE.md; PANEL_KINDS.md; INFERENCE.md; ADR-004; LIVE.md.
+              <a:t>Source: README.md; RACHANA_REFERENCE.md; PANELS.md (twenty-two kinds); INFERENCE.md; ADR-004; LIVE.md; config/packs (7 packs, 197 Sutra files, 19 October 2026).
 Talk track: Everything else in the product is built from these eight words.</a:t>
             </a:r>
             <a:endParaRPr lang="en-US" dirty="0"/>
@@ -6026,7 +6476,7 @@
                   <a:srgbClr val="61666E"/>
                 </a:solidFill>
               </a:rPr>
-              <a:t>Release 1.18 · Java 21 or later · console on any device</a:t>
+              <a:t>Release 2.5.0 · Java 21 or later · console on any device</a:t>
             </a:r>
             <a:endParaRPr lang="en-US" sz="2000" dirty="0"/>
           </a:p>
@@ -6118,7 +6568,7 @@
                   <a:srgbClr val="A51C30"/>
                 </a:solidFill>
               </a:rPr>
-              <a:t>2  Drishti 1.18: the product</a:t>
+              <a:t>2  Drishti 2.5: the product</a:t>
             </a:r>
             <a:endParaRPr lang="en-US" sz="1200" dirty="0"/>
           </a:p>
@@ -6852,7 +7302,7 @@
                   <a:srgbClr val="A51C30"/>
                 </a:solidFill>
               </a:rPr>
-              <a:t>DRISHTI SERVER · JAVA 21</a:t>
+              <a:t>DRISHTI SERVER · JAVA 21 · ONE OF A CLUSTER</a:t>
             </a:r>
             <a:endParaRPr lang="en-US" sz="950" dirty="0"/>
           </a:p>
@@ -6924,7 +7374,7 @@
                   <a:srgbClr val="4A5058"/>
                 </a:solidFill>
               </a:rPr>
-              <a:t>Virtual threads fetch in parallel; the engine matches a Sutra, merges inference, links ids and binds values — 15 source plugins behind one interface</a:t>
+              <a:t>Virtual threads fetch in parallel; the engine matches a Sutra, merges inference, links ids and binds values; BI models answer on DuckDB — 17 source plugins</a:t>
             </a:r>
             <a:endParaRPr lang="en-US" sz="1200" dirty="0"/>
           </a:p>
@@ -7028,7 +7478,7 @@
                   <a:srgbClr val="1A1A1A"/>
                 </a:solidFill>
               </a:rPr>
-              <a:t>Identity, packs, audit</a:t>
+              <a:t>Identity, packs, audit, Drishti*net</a:t>
             </a:r>
             <a:endParaRPr lang="en-US" sz="1500" dirty="0"/>
           </a:p>
@@ -7064,7 +7514,7 @@
                   <a:srgbClr val="4A5058"/>
                 </a:solidFill>
               </a:rPr>
-              <a:t>Users, roles and masks; packs per user; the access log and audit; a signed pack registry</a:t>
+              <a:t>Users, roles and masks; the access log and audit; a signed pack registry; peers by gossip, signed calls</a:t>
             </a:r>
             <a:endParaRPr lang="en-US" sz="1200" dirty="0"/>
           </a:p>
@@ -7376,7 +7826,7 @@
                   <a:srgbClr val="4A5058"/>
                 </a:solidFill>
               </a:rPr>
-              <a:t>tools/drishti.py, six groups</a:t>
+              <a:t>tools/drishti.py, fourteen groups</a:t>
             </a:r>
             <a:endParaRPr lang="en-US" sz="1100" dirty="0"/>
           </a:p>
@@ -7480,7 +7930,7 @@
                   <a:srgbClr val="4A5058"/>
                 </a:solidFill>
               </a:rPr>
-              <a:t>&lt;drishti-view&gt;, no iframe</a:t>
+              <a:t>&lt;drishti-view&gt;, &lt;drishti-report&gt;</a:t>
             </a:r>
             <a:endParaRPr lang="en-US" sz="1100" dirty="0"/>
           </a:p>
@@ -9419,7 +9869,7 @@
                   <a:srgbClr val="FFFFFF"/>
                 </a:solidFill>
               </a:rPr>
-              <a:t>irs-vanilla.v3.sutra.yaml (trimmed)</a:t>
+              <a:t>murex/irs-fixfloat.v1.sutra.yaml (trimmed)</a:t>
             </a:r>
             <a:endParaRPr lang="en-US" sz="1300" dirty="0"/>
           </a:p>
@@ -9481,7 +9931,7 @@
                 <a:ea typeface="Courier New" pitchFamily="34" charset="-122"/>
                 <a:cs typeface="Courier New" pitchFamily="34" charset="-120"/>
               </a:rPr>
-              <a:t>sutra: irs-vanilla</a:t>
+              <a:t>sutra: irs-fixfloat</a:t>
             </a:r>
             <a:endParaRPr lang="en-US" sz="1200" dirty="0"/>
           </a:p>
@@ -9501,7 +9951,7 @@
                 <a:ea typeface="Courier New" pitchFamily="34" charset="-122"/>
                 <a:cs typeface="Courier New" pitchFamily="34" charset="-120"/>
               </a:rPr>
-              <a:t>version: 3</a:t>
+              <a:t>version: 1</a:t>
             </a:r>
             <a:endParaRPr lang="en-US" sz="1200" dirty="0"/>
           </a:p>
@@ -9581,7 +10031,7 @@
                 <a:ea typeface="Courier New" pitchFamily="34" charset="-122"/>
                 <a:cs typeface="Courier New" pitchFamily="34" charset="-120"/>
               </a:rPr>
-              <a:t>  where: "$.productType == 'IRS' &amp;&amp; size($.legs) == 2"</a:t>
+              <a:t>  where: "$.PRODUCT_TYPE == 'IRS_FIXFLOAT'"</a:t>
             </a:r>
             <a:endParaRPr lang="en-US" sz="1200" dirty="0"/>
           </a:p>
@@ -9601,7 +10051,7 @@
                 <a:ea typeface="Courier New" pitchFamily="34" charset="-122"/>
                 <a:cs typeface="Courier New" pitchFamily="34" charset="-120"/>
               </a:rPr>
-              <a:t>title: { pill: "Trade · Interest rate swap", id: $.tradeId }</a:t>
+              <a:t>title: { pill: "Rates · IRS", id: $.TRADE_ID }</a:t>
             </a:r>
             <a:endParaRPr lang="en-US" sz="1200" dirty="0"/>
           </a:p>
@@ -9641,7 +10091,7 @@
                 <a:ea typeface="Courier New" pitchFamily="34" charset="-122"/>
                 <a:cs typeface="Courier New" pitchFamily="34" charset="-120"/>
               </a:rPr>
-              <a:t>  - { label: Notional (USD), bind: $.notional }</a:t>
+              <a:t>  - { label: Source, bind: $.SOURCE_SYSTEM }</a:t>
             </a:r>
             <a:endParaRPr lang="en-US" sz="1200" dirty="0"/>
           </a:p>
@@ -9661,7 +10111,7 @@
                 <a:ea typeface="Courier New" pitchFamily="34" charset="-122"/>
                 <a:cs typeface="Courier New" pitchFamily="34" charset="-120"/>
               </a:rPr>
-              <a:t>  - { label: MTM (USD), bind: $.mtm, tone: sign }</a:t>
+              <a:t>  - { label: Status, bind: $.TRADE_STATUS }</a:t>
             </a:r>
             <a:endParaRPr lang="en-US" sz="1200" dirty="0"/>
           </a:p>
@@ -9701,7 +10151,7 @@
                 <a:ea typeface="Courier New" pitchFamily="34" charset="-122"/>
                 <a:cs typeface="Courier New" pitchFamily="34" charset="-120"/>
               </a:rPr>
-              <a:t>  - { id: legs, kind: tabs, key: F2, each: $.legs }</a:t>
+              <a:t>  - { use: deal-ticket@1 }</a:t>
             </a:r>
             <a:endParaRPr lang="en-US" sz="1200" dirty="0"/>
           </a:p>
@@ -9721,7 +10171,7 @@
                 <a:ea typeface="Courier New" pitchFamily="34" charset="-122"/>
                 <a:cs typeface="Courier New" pitchFamily="34" charset="-120"/>
               </a:rPr>
-              <a:t>  - { id: cashflows, kind: table, key: F3,</a:t>
+              <a:t>  - { use: legs@1, with: { rate-fmt: pct4 } }</a:t>
             </a:r>
             <a:endParaRPr lang="en-US" sz="1200" dirty="0"/>
           </a:p>
@@ -9741,7 +10191,7 @@
                 <a:ea typeface="Courier New" pitchFamily="34" charset="-122"/>
                 <a:cs typeface="Courier New" pitchFamily="34" charset="-120"/>
               </a:rPr>
-              <a:t>      rows: $.legs[0].cashflows }</a:t>
+              <a:t>  - { use: flow-schedule@1 }</a:t>
             </a:r>
             <a:endParaRPr lang="en-US" sz="1200" dirty="0"/>
           </a:p>
@@ -9794,7 +10244,7 @@
                   <a:srgbClr val="4A5058"/>
                 </a:solidFill>
               </a:rPr>
-              <a:t>A trade whose product type is IRS with two legs; the highest priority match wins.</a:t>
+              <a:t>A MUREX trade whose PRODUCT_TYPE is IRS_FIXFLOAT; the highest priority match wins.</a:t>
             </a:r>
             <a:endParaRPr lang="en-US" sz="1500" dirty="0"/>
           </a:p>
@@ -9825,7 +10275,7 @@
                   <a:srgbClr val="4A5058"/>
                 </a:solidFill>
               </a:rPr>
-              <a:t>A titled, linked header, two headline figures and a panel per key — F2 legs, F3 cashflows.</a:t>
+              <a:t>A linked header, headline figures and shared blocks: the deal ticket, legs and flows, one block for 130 Sutras.</a:t>
             </a:r>
             <a:endParaRPr lang="en-US" sz="1500" dirty="0"/>
           </a:p>
@@ -12179,7 +12629,7 @@
                   <a:srgbClr val="FFFFFF"/>
                 </a:solidFill>
               </a:rPr>
-              <a:t>Drishti 1.18: the product</a:t>
+              <a:t>Drishti 2.5: the product</a:t>
             </a:r>
             <a:endParaRPr lang="en-US" sz="4000" dirty="0"/>
           </a:p>
@@ -12323,7 +12773,7 @@
                   <a:srgbClr val="A51C30"/>
                 </a:solidFill>
               </a:rPr>
-              <a:t>RELEASE 1.18 · JAVA 21 OR LATER</a:t>
+              <a:t>RELEASE 2.5 · JAVA 21 OR LATER</a:t>
             </a:r>
             <a:endParaRPr lang="en-US" sz="1050" dirty="0"/>
           </a:p>
@@ -12361,7 +12811,7 @@
                   <a:srgbClr val="1A1A1A"/>
                 </a:solidFill>
               </a:rPr>
-              <a:t>Drishti 1.18 — overview</a:t>
+              <a:t>Drishti 2.5 — overview</a:t>
             </a:r>
             <a:endParaRPr lang="en-US" sz="2600" dirty="0"/>
           </a:p>
@@ -12457,7 +12907,7 @@
                   <a:srgbClr val="8A1626"/>
                 </a:solidFill>
               </a:rPr>
-              <a:t>14</a:t>
+              <a:t>7</a:t>
             </a:r>
             <a:endParaRPr lang="en-US" sz="2600" dirty="0"/>
           </a:p>
@@ -12493,7 +12943,7 @@
                   <a:srgbClr val="4A5058"/>
                 </a:solidFill>
               </a:rPr>
-              <a:t>Domain packs: trading, market risk, genomics, logistics, climate …</a:t>
+              <a:t>Domain packs: core, market data, trading, counterparty and market risk, world economy, news</a:t>
             </a:r>
             <a:endParaRPr lang="en-US" sz="1150" dirty="0"/>
           </a:p>
@@ -12569,7 +13019,7 @@
                   <a:srgbClr val="8A1626"/>
                 </a:solidFill>
               </a:rPr>
-              <a:t>230</a:t>
+              <a:t>197</a:t>
             </a:r>
             <a:endParaRPr lang="en-US" sz="2600" dirty="0"/>
           </a:p>
@@ -12681,7 +13131,7 @@
                   <a:srgbClr val="8A1626"/>
                 </a:solidFill>
               </a:rPr>
-              <a:t>21</a:t>
+              <a:t>22</a:t>
             </a:r>
             <a:endParaRPr lang="en-US" sz="2600" dirty="0"/>
           </a:p>
@@ -12793,7 +13243,7 @@
                   <a:srgbClr val="8A1626"/>
                 </a:solidFill>
               </a:rPr>
-              <a:t>15</a:t>
+              <a:t>17</a:t>
             </a:r>
             <a:endParaRPr lang="en-US" sz="2600" dirty="0"/>
           </a:p>
@@ -12882,7 +13332,7 @@
                   <a:srgbClr val="4A5058"/>
                 </a:solidFill>
               </a:rPr>
-              <a:t>Command line with type-ahead, F-keys, seven themes, business-date time travel, and phones with finger-sized controls.</a:t>
+              <a:t>Command line, type-ahead and query by form over production-shaped trades from ENDUR, CALYPSO and MUREX; business dates; phones.</a:t>
             </a:r>
             <a:endParaRPr lang="en-US" sz="1500" dirty="0"/>
           </a:p>
@@ -12896,7 +13346,7 @@
                   <a:srgbClr val="A51C30"/>
                 </a:solidFill>
               </a:rPr>
-              <a:t>▪  Build without code</a:t>
+              <a:t>▪  Build and analyse without code</a:t>
             </a:r>
             <a:endParaRPr lang="en-US" sz="1500" dirty="0"/>
           </a:p>
@@ -12913,7 +13363,7 @@
                   <a:srgbClr val="4A5058"/>
                 </a:solidFill>
               </a:rPr>
-              <a:t>A workbench to drag panels and fields, a YAML tab with completion, tests, versions and four-eyes review.</a:t>
+              <a:t>The Build workbench for screens; BI Studio for reports, models, boards and themes; Python data prep step by step.</a:t>
             </a:r>
             <a:endParaRPr lang="en-US" sz="1500" dirty="0"/>
           </a:p>
@@ -12958,7 +13408,7 @@
                   <a:srgbClr val="A51C30"/>
                 </a:solidFill>
               </a:rPr>
-              <a:t>▪  Run it</a:t>
+              <a:t>▪  Run it, on one server or several</a:t>
             </a:r>
             <a:endParaRPr lang="en-US" sz="1500" dirty="0"/>
           </a:p>
@@ -12975,7 +13425,7 @@
                   <a:srgbClr val="4A5058"/>
                 </a:solidFill>
               </a:rPr>
-              <a:t>Pack bundles deployed with preview and rollback, data-load signals, a CLI for every build step, and views embedded in other apps.</a:t>
+              <a:t>Pack bundles with rollback, data-load signals, lake maintenance, a CLI for every step, embedding, and Drishti*net clusters.</a:t>
             </a:r>
             <a:endParaRPr lang="en-US" sz="1500" dirty="0"/>
           </a:p>
@@ -13121,7 +13571,7 @@
                   <a:srgbClr val="1A1A1A"/>
                 </a:solidFill>
               </a:rPr>
-              <a:t>One trade, live, linked and explained</a:t>
+              <a:t>One trade, linked and explained</a:t>
             </a:r>
             <a:endParaRPr lang="en-US" sz="2600" dirty="0"/>
           </a:p>
@@ -13250,7 +13700,7 @@
                   <a:srgbClr val="4A5058"/>
                 </a:solidFill>
               </a:rPr>
-              <a:t>Notional, MTM, DV01 and status, toned by sign.</a:t>
+              <a:t>Source, side, notional, quantity, dates, status and portfolio.</a:t>
             </a:r>
             <a:endParaRPr lang="en-US" sz="1500" dirty="0"/>
           </a:p>
@@ -13281,7 +13731,7 @@
                   <a:srgbClr val="4A5058"/>
                 </a:solidFill>
               </a:rPr>
-              <a:t>F2 to F9; Alt+L to rearrange; Calc for Python.</a:t>
+              <a:t>F2 deal ticket, F3 legs, F4 cash flows, F6 netted payments; Alt+L to rearrange.</a:t>
             </a:r>
             <a:endParaRPr lang="en-US" sz="1500" dirty="0"/>
           </a:p>
@@ -13312,7 +13762,7 @@
                   <a:srgbClr val="4A5058"/>
                 </a:solidFill>
               </a:rPr>
-              <a:t>Counterparty, book, netting set and curve open in one keystroke.</a:t>
+              <a:t>Counterparty, portfolio, legal entity and trader open in one click.</a:t>
             </a:r>
             <a:endParaRPr lang="en-US" sz="1500" dirty="0"/>
           </a:p>
@@ -13326,7 +13776,7 @@
                   <a:srgbClr val="A51C30"/>
                 </a:solidFill>
               </a:rPr>
-              <a:t>▪  Live</a:t>
+              <a:t>▪  Any day</a:t>
             </a:r>
             <a:endParaRPr lang="en-US" sz="1500" dirty="0"/>
           </a:p>
@@ -13343,7 +13793,7 @@
                   <a:srgbClr val="4A5058"/>
                 </a:solidFill>
               </a:rPr>
-              <a:t>The Live pill and generation update on each frame.</a:t>
+              <a:t>The business date in the top bar; Compare shows what changed between two days.</a:t>
             </a:r>
             <a:endParaRPr lang="en-US" sz="1500" dirty="0"/>
           </a:p>
@@ -13379,7 +13829,7 @@
                   <a:srgbClr val="61666E"/>
                 </a:solidFill>
               </a:rPr>
-              <a:t>A live interest-rate swap view, captured from 1.18.</a:t>
+              <a:t>A MUREX interest rate swap, UPPER_SNAKE as production data is; captured on the demo lakes (tutorial 1).</a:t>
             </a:r>
             <a:endParaRPr lang="en-US" sz="1050" dirty="0"/>
           </a:p>
@@ -14545,7 +14995,7 @@
                   <a:srgbClr val="1A1A1A"/>
                 </a:solidFill>
               </a:rPr>
-              <a:t>A Java 21 server and a web console that turn any record from any system into that screen. A short YAML Sutra describes the view; inference fills whatever it leaves out.</a:t>
+              <a:t>A Java 21 server and a web console that turn any record from any system into that screen, with BI on the same data and masks. A short YAML Sutra describes the view; inference fills the rest.</a:t>
             </a:r>
             <a:endParaRPr lang="en-US" sz="1300" dirty="0"/>
           </a:p>
@@ -14809,7 +15259,7 @@
                   <a:srgbClr val="1A1A1A"/>
                 </a:solidFill>
               </a:rPr>
-              <a:t>Release 1.18: 14 packs, 230 Sutras, 21 panel kinds, 15 source plugins, live views at p99 11 ms, collaboration with compliance, data loads, a CLI, and views embedded in other apps.</a:t>
+              <a:t>Release 2.5: 7 packs, 197 Sutras, 22 panel kinds, 17 source plugins, BI Studio, Python data prep, several servers as one (Drishti*net); 35.7 million trades served to 50 users at 179 requests/s.</a:t>
             </a:r>
             <a:endParaRPr lang="en-US" sz="1300" dirty="0"/>
           </a:p>
@@ -14941,7 +15391,7 @@
                   <a:srgbClr val="1A1A1A"/>
                 </a:solidFill>
               </a:rPr>
-              <a:t>Finish embedding (tests, npm package, more elements), then server-side pricing, a proven Windows build, a real deployment and scale on a real server.</a:t>
+              <a:t>2.6.0 sharing and integration; 2.7.0 AI (GenUI, AI management); a real-life QA; 2.8.0 production readiness; then 3.0.</a:t>
             </a:r>
             <a:endParaRPr lang="en-US" sz="1300" dirty="0"/>
           </a:p>
@@ -15225,7 +15675,7 @@
                 <a:ea typeface="Courier New" pitchFamily="34" charset="-122"/>
                 <a:cs typeface="Courier New" pitchFamily="34" charset="-120"/>
               </a:rPr>
-              <a:t>TRD where mtm &lt; -10m order by mtm</a:t>
+              <a:t>TRD where QUANTITY &gt; 1bn order by QUANTITY desc</a:t>
             </a:r>
             <a:endParaRPr lang="en-US" sz="1250" dirty="0"/>
           </a:p>
@@ -15245,7 +15695,7 @@
                 <a:ea typeface="Courier New" pitchFamily="34" charset="-122"/>
                 <a:cs typeface="Courier New" pitchFamily="34" charset="-120"/>
               </a:rPr>
-              <a:t>live trades over 5m in BOOK-RATES-3</a:t>
+              <a:t>amended trades over 5m in BOOK-RATES-3</a:t>
             </a:r>
             <a:endParaRPr lang="en-US" sz="1250" dirty="0"/>
           </a:p>
@@ -15265,7 +15715,7 @@
                 <a:ea typeface="Courier New" pitchFamily="34" charset="-122"/>
                 <a:cs typeface="Courier New" pitchFamily="34" charset="-120"/>
               </a:rPr>
-              <a:t>DPNL DESK-RATES &lt;GO&gt;</a:t>
+              <a:t>FORM trading &lt;GO&gt;</a:t>
             </a:r>
             <a:endParaRPr lang="en-US" sz="1250" dirty="0"/>
           </a:p>
@@ -15657,7 +16107,7 @@
             <a:pPr algn="r"/>
             <a:fld id="{F7021451-1387-4CA6-816F-3879F97B5CBC}" type="slidenum">
               <a:rPr b="1" lang="en-US"/>
-              <a:t>20</a:t>
+              <a:t>23</a:t>
             </a:fld>
             <a:endParaRPr lang="en-US"/>
           </a:p>
@@ -16094,7 +16544,7 @@
             <a:pPr algn="r"/>
             <a:fld id="{F7021451-1387-4CA6-816F-3879F97B5CBC}" type="slidenum">
               <a:rPr b="1" lang="en-US"/>
-              <a:t>21</a:t>
+              <a:t>24</a:t>
             </a:fld>
             <a:endParaRPr lang="en-US"/>
           </a:p>
@@ -16533,7 +16983,7 @@
             <a:pPr algn="r"/>
             <a:fld id="{F7021451-1387-4CA6-816F-3879F97B5CBC}" type="slidenum">
               <a:rPr b="1" lang="en-US"/>
-              <a:t>22</a:t>
+              <a:t>25</a:t>
             </a:fld>
             <a:endParaRPr lang="en-US"/>
           </a:p>
@@ -16792,7 +17242,7 @@
                 <a:ea typeface="Courier New" pitchFamily="34" charset="-122"/>
                 <a:cs typeface="Courier New" pitchFamily="34" charset="-120"/>
               </a:rPr>
-              <a:t>    --kind trade --key tradeId \</a:t>
+              <a:t>    --kind trade --key TRADE_ID \</a:t>
             </a:r>
             <a:endParaRPr lang="en-US" sz="1150" dirty="0"/>
           </a:p>
@@ -16812,7 +17262,7 @@
                 <a:ea typeface="Courier New" pitchFamily="34" charset="-122"/>
                 <a:cs typeface="Courier New" pitchFamily="34" charset="-120"/>
               </a:rPr>
-              <a:t>    --match product_type --date trade_date</a:t>
+              <a:t>    --match PRODUCT_TYPE --date TRADE_DATE</a:t>
             </a:r>
             <a:endParaRPr lang="en-US" sz="1150" dirty="0"/>
           </a:p>
@@ -17144,7 +17594,7 @@
             <a:pPr algn="r"/>
             <a:fld id="{F7021451-1387-4CA6-816F-3879F97B5CBC}" type="slidenum">
               <a:rPr b="1" lang="en-US"/>
-              <a:t>23</a:t>
+              <a:t>26</a:t>
             </a:fld>
             <a:endParaRPr lang="en-US"/>
           </a:p>
@@ -17868,7 +18318,7 @@
                             <a:srgbClr val="8A1626"/>
                           </a:solidFill>
                         </a:rPr>
-                        <a:t>data</a:t>
+                        <a:t>data · lake</a:t>
                       </a:r>
                       <a:endParaRPr lang="en-US" sz="1400" dirty="0"/>
                     </a:p>
@@ -17929,7 +18379,7 @@
                             <a:srgbClr val="1A1A1A"/>
                           </a:solidFill>
                         </a:rPr>
-                        <a:t>Profile and ingest JSON Lines; say a batch landed</a:t>
+                        <a:t>Ingest, profile, say a batch landed; build and maintain lakes</a:t>
                       </a:r>
                       <a:endParaRPr lang="en-US" sz="1400" dirty="0"/>
                     </a:p>
@@ -17990,7 +18440,7 @@
                             <a:srgbClr val="1A1A1A"/>
                           </a:solidFill>
                         </a:rPr>
-                        <a:t>profile, ingest --watch, landed, loads</a:t>
+                        <a:t>landed, loads, lake demo, lake build, lake maintain</a:t>
                       </a:r>
                       <a:endParaRPr lang="en-US" sz="1400" dirty="0"/>
                     </a:p>
@@ -18053,7 +18503,7 @@
                             <a:srgbClr val="8A1626"/>
                           </a:solidFill>
                         </a:rPr>
-                        <a:t>server</a:t>
+                        <a:t>server · connector</a:t>
                       </a:r>
                       <a:endParaRPr lang="en-US" sz="1400" dirty="0"/>
                     </a:p>
@@ -18114,7 +18564,7 @@
                             <a:srgbClr val="1A1A1A"/>
                           </a:solidFill>
                         </a:rPr>
-                        <a:t>Health, packs on and off, smoke tests</a:t>
+                        <a:t>Health, packs on and off, connectors as files</a:t>
                       </a:r>
                       <a:endParaRPr lang="en-US" sz="1400" dirty="0"/>
                     </a:p>
@@ -18175,7 +18625,7 @@
                             <a:srgbClr val="1A1A1A"/>
                           </a:solidFill>
                         </a:rPr>
-                        <a:t>health, packs list|load|on|off, smoke</a:t>
+                        <a:t>health, packs list|on|off, connector apply|test</a:t>
                       </a:r>
                       <a:endParaRPr lang="en-US" sz="1400" dirty="0"/>
                     </a:p>
@@ -18238,7 +18688,7 @@
                             <a:srgbClr val="8A1626"/>
                           </a:solidFill>
                         </a:rPr>
-                        <a:t>design</a:t>
+                        <a:t>bi</a:t>
                       </a:r>
                       <a:endParaRPr lang="en-US" sz="1400" dirty="0"/>
                     </a:p>
@@ -18299,7 +18749,7 @@
                             <a:srgbClr val="1A1A1A"/>
                           </a:solidFill>
                         </a:rPr>
-                        <a:t>The screen designer over REST</a:t>
+                        <a:t>Models, SQL, items, Transforms, migrations</a:t>
                       </a:r>
                       <a:endParaRPr lang="en-US" sz="1400" dirty="0"/>
                     </a:p>
@@ -18360,7 +18810,7 @@
                             <a:srgbClr val="1A1A1A"/>
                           </a:solidFill>
                         </a:rPr>
-                        <a:t>create, save, check, propose, approve, export</a:t>
+                        <a:t>model describe, sql, mq, item save, transform input</a:t>
                       </a:r>
                       <a:endParaRPr lang="en-US" sz="1400" dirty="0"/>
                     </a:p>
@@ -18423,7 +18873,7 @@
                             <a:srgbClr val="8A1626"/>
                           </a:solidFill>
                         </a:rPr>
-                        <a:t>docs · doctor</a:t>
+                        <a:t>net · design · doctor</a:t>
                       </a:r>
                       <a:endParaRPr lang="en-US" sz="1400" dirty="0"/>
                     </a:p>
@@ -18484,7 +18934,7 @@
                             <a:srgbClr val="1A1A1A"/>
                           </a:solidFill>
                         </a:rPr>
-                        <a:t>Regenerate screenshots; diagnose a setup</a:t>
+                        <a:t>Drishti*net files, the screen designer, a setup check</a:t>
                       </a:r>
                       <a:endParaRPr lang="en-US" sz="1400" dirty="0"/>
                     </a:p>
@@ -18545,7 +18995,7 @@
                             <a:srgbClr val="1A1A1A"/>
                           </a:solidFill>
                         </a:rPr>
-                        <a:t>docs screenshots, doctor, view explain</a:t>
+                        <a:t>net check|add-peer|members, design propose, doctor</a:t>
                       </a:r>
                       <a:endParaRPr lang="en-US" sz="1400" dirty="0"/>
                     </a:p>
@@ -18723,7 +19173,7 @@
             <a:pPr algn="r"/>
             <a:fld id="{F7021451-1387-4CA6-816F-3879F97B5CBC}" type="slidenum">
               <a:rPr b="1" lang="en-US"/>
-              <a:t>24</a:t>
+              <a:t>27</a:t>
             </a:fld>
             <a:endParaRPr lang="en-US"/>
           </a:p>
@@ -18926,7 +19376,7 @@
                 <a:ea typeface="Courier New" pitchFamily="34" charset="-122"/>
                 <a:cs typeface="Courier New" pitchFamily="34" charset="-120"/>
               </a:rPr>
-              <a:t>  "https://drishti.example/embed/v1/elements.js"&gt;</a:t>
+              <a:t>  "/embed/v1/elements/1.4.2/drishti-elements.js"&gt;</a:t>
             </a:r>
             <a:endParaRPr lang="en-US" sz="1150" dirty="0"/>
           </a:p>
@@ -19667,7 +20117,7 @@
             <a:pPr algn="r"/>
             <a:fld id="{F7021451-1387-4CA6-816F-3879F97B5CBC}" type="slidenum">
               <a:rPr b="1" lang="en-US"/>
-              <a:t>25</a:t>
+              <a:t>28</a:t>
             </a:fld>
             <a:endParaRPr lang="en-US"/>
           </a:p>
@@ -20316,7 +20766,7 @@
             <a:pPr algn="r"/>
             <a:fld id="{F7021451-1387-4CA6-816F-3879F97B5CBC}" type="slidenum">
               <a:rPr b="1" lang="en-US"/>
-              <a:t>26</a:t>
+              <a:t>30</a:t>
             </a:fld>
             <a:endParaRPr lang="en-US"/>
           </a:p>
@@ -20589,7 +21039,7 @@
             <a:pPr algn="r"/>
             <a:fld id="{F7021451-1387-4CA6-816F-3879F97B5CBC}" type="slidenum">
               <a:rPr b="1" lang="en-US"/>
-              <a:t>27</a:t>
+              <a:t>31</a:t>
             </a:fld>
             <a:endParaRPr lang="en-US"/>
           </a:p>
@@ -21042,7 +21492,7 @@
                   <a:srgbClr val="1A1A1A"/>
                 </a:solidFill>
               </a:rPr>
-              <a:t>Six powers: raw, author, approve, admin, calc, layout</a:t>
+              <a:t>Powers: raw, author, approve, calc, layout; BI: bi, bi-author, bi-steward</a:t>
             </a:r>
             <a:endParaRPr lang="en-US" sz="1300" dirty="0"/>
           </a:p>
@@ -21394,7 +21844,7 @@
             <a:pPr algn="r"/>
             <a:fld id="{F7021451-1387-4CA6-816F-3879F97B5CBC}" type="slidenum">
               <a:rPr b="1" lang="en-US"/>
-              <a:t>28</a:t>
+              <a:t>32</a:t>
             </a:fld>
             <a:endParaRPr lang="en-US"/>
           </a:p>
@@ -22060,7 +22510,7 @@
             <a:pPr algn="r"/>
             <a:fld id="{F7021451-1387-4CA6-816F-3879F97B5CBC}" type="slidenum">
               <a:rPr b="1" lang="en-US"/>
-              <a:t>29</a:t>
+              <a:t>33</a:t>
             </a:fld>
             <a:endParaRPr lang="en-US"/>
           </a:p>
@@ -22872,7 +23322,7 @@
                             <a:srgbClr val="8A1626"/>
                           </a:solidFill>
                         </a:rPr>
-                        <a:t>design:write</a:t>
+                        <a:t>design:write · bi:write</a:t>
                       </a:r>
                       <a:endParaRPr lang="en-US" sz="1350" dirty="0"/>
                     </a:p>
@@ -22933,7 +23383,7 @@
                             <a:srgbClr val="1A1A1A"/>
                           </a:solidFill>
                         </a:rPr>
-                        <a:t>Create and save designs</a:t>
+                        <a:t>Create and save designs and BI items</a:t>
                       </a:r>
                       <a:endParaRPr lang="en-US" sz="1350" dirty="0"/>
                     </a:p>
@@ -22994,7 +23444,7 @@
                             <a:srgbClr val="1A1A1A"/>
                           </a:solidFill>
                         </a:rPr>
-                        <a:t>The author power</a:t>
+                        <a:t>The author or bi-author power</a:t>
                       </a:r>
                       <a:endParaRPr lang="en-US" sz="1350" dirty="0"/>
                     </a:p>
@@ -23057,7 +23507,7 @@
                             <a:srgbClr val="8A1626"/>
                           </a:solidFill>
                         </a:rPr>
-                        <a:t>design:approve</a:t>
+                        <a:t>design:approve · bi:approve</a:t>
                       </a:r>
                       <a:endParaRPr lang="en-US" sz="1350" dirty="0"/>
                     </a:p>
@@ -23118,7 +23568,7 @@
                             <a:srgbClr val="1A1A1A"/>
                           </a:solidFill>
                         </a:rPr>
-                        <a:t>Approve someone else's design</a:t>
+                        <a:t>Approve someone else's design or BI item</a:t>
                       </a:r>
                       <a:endParaRPr lang="en-US" sz="1350" dirty="0"/>
                     </a:p>
@@ -23873,7 +24323,7 @@
             <a:pPr algn="r"/>
             <a:fld id="{F7021451-1387-4CA6-816F-3879F97B5CBC}" type="slidenum">
               <a:rPr b="1" lang="en-US"/>
-              <a:t>30</a:t>
+              <a:t>34</a:t>
             </a:fld>
             <a:endParaRPr lang="en-US"/>
           </a:p>
@@ -24559,7 +25009,7 @@
             <a:pPr algn="r"/>
             <a:fld id="{F7021451-1387-4CA6-816F-3879F97B5CBC}" type="slidenum">
               <a:rPr b="1" lang="en-US"/>
-              <a:t>31</a:t>
+              <a:t>35</a:t>
             </a:fld>
             <a:endParaRPr lang="en-US"/>
           </a:p>
@@ -25375,7 +25825,7 @@
             <a:pPr algn="r"/>
             <a:fld id="{F7021451-1387-4CA6-816F-3879F97B5CBC}" type="slidenum">
               <a:rPr b="1" lang="en-US"/>
-              <a:t>32</a:t>
+              <a:t>36</a:t>
             </a:fld>
             <a:endParaRPr lang="en-US"/>
           </a:p>
@@ -25603,7 +26053,7 @@
                   <a:srgbClr val="F6E6E9"/>
                 </a:solidFill>
               </a:rPr>
-              <a:t>Counted from the repository on 6 October 2026: measured, tested, found and fixed.</a:t>
+              <a:t>Counted from the repository on 19 October 2026: measured, tested, found and fixed.</a:t>
             </a:r>
             <a:endParaRPr lang="en-US" sz="1900" dirty="0"/>
           </a:p>
@@ -25648,7 +26098,7 @@
             <a:pPr algn="r"/>
             <a:fld id="{F7021451-1387-4CA6-816F-3879F97B5CBC}" type="slidenum">
               <a:rPr b="1" lang="en-US"/>
-              <a:t>33</a:t>
+              <a:t>37</a:t>
             </a:fld>
             <a:endParaRPr lang="en-US"/>
           </a:p>
@@ -25749,7 +26199,7 @@
                   <a:srgbClr val="1A1A1A"/>
                 </a:solidFill>
               </a:rPr>
-              <a:t>65 error codes, every one documented</a:t>
+              <a:t>187 error codes, every one documented</a:t>
             </a:r>
             <a:endParaRPr lang="en-US" sz="2600" dirty="0"/>
           </a:p>
@@ -26286,7 +26736,7 @@
                             <a:srgbClr val="1A1A1A"/>
                           </a:solidFill>
                         </a:rPr>
-                        <a:t>7</a:t>
+                        <a:t>8</a:t>
                       </a:r>
                       <a:endParaRPr lang="en-US" sz="1200" dirty="0"/>
                     </a:p>
@@ -26349,7 +26799,7 @@
                             <a:srgbClr val="8A1626"/>
                           </a:solidFill>
                         </a:rPr>
-                        <a:t>DRS-2xxx</a:t>
+                        <a:t>DRS-2/3xxx</a:t>
                       </a:r>
                       <a:endParaRPr lang="en-US" sz="1200" dirty="0"/>
                     </a:p>
@@ -26410,747 +26860,7 @@
                             <a:srgbClr val="1A1A1A"/>
                           </a:solidFill>
                         </a:rPr>
-                        <a:t>Grammar and Sutras</a:t>
-                      </a:r>
-                      <a:endParaRPr lang="en-US" sz="1200" dirty="0"/>
-                    </a:p>
-                  </a:txBody>
-                  <a:tcPr marL="88900" marR="88900" marT="50800" marB="50800" anchor="ctr">
-                    <a:lnL w="6350" cap="flat" cmpd="sng" algn="ctr">
-                      <a:solidFill>
-                        <a:srgbClr val="E3DED7"/>
-                      </a:solidFill>
-                      <a:prstDash val="solid"/>
-                      <a:round/>
-                      <a:headEnd type="none" w="med" len="med"/>
-                      <a:tailEnd type="none" w="med" len="med"/>
-                    </a:lnL>
-                    <a:lnR w="6350" cap="flat" cmpd="sng" algn="ctr">
-                      <a:solidFill>
-                        <a:srgbClr val="E3DED7"/>
-                      </a:solidFill>
-                      <a:prstDash val="solid"/>
-                      <a:round/>
-                      <a:headEnd type="none" w="med" len="med"/>
-                      <a:tailEnd type="none" w="med" len="med"/>
-                    </a:lnR>
-                    <a:lnT w="6350" cap="flat" cmpd="sng" algn="ctr">
-                      <a:solidFill>
-                        <a:srgbClr val="E3DED7"/>
-                      </a:solidFill>
-                      <a:prstDash val="solid"/>
-                      <a:round/>
-                      <a:headEnd type="none" w="med" len="med"/>
-                      <a:tailEnd type="none" w="med" len="med"/>
-                    </a:lnT>
-                    <a:lnB w="6350" cap="flat" cmpd="sng" algn="ctr">
-                      <a:solidFill>
-                        <a:srgbClr val="E3DED7"/>
-                      </a:solidFill>
-                      <a:prstDash val="solid"/>
-                      <a:round/>
-                      <a:headEnd type="none" w="med" len="med"/>
-                      <a:tailEnd type="none" w="med" len="med"/>
-                    </a:lnB>
-                    <a:solidFill>
-                      <a:srgbClr val="FFFFFF"/>
-                    </a:solidFill>
-                  </a:tcPr>
-                </a:tc>
-                <a:tc>
-                  <a:txBody>
-                    <a:bodyPr/>
-                    <a:lstStyle/>
-                    <a:p>
-                      <a:pPr indent="0" marL="0">
-                        <a:buNone/>
-                      </a:pPr>
-                      <a:r>
-                        <a:rPr lang="en-US" sz="1200" dirty="0">
-                          <a:solidFill>
-                            <a:srgbClr val="1A1A1A"/>
-                          </a:solidFill>
-                        </a:rPr>
-                        <a:t>8</a:t>
-                      </a:r>
-                      <a:endParaRPr lang="en-US" sz="1200" dirty="0"/>
-                    </a:p>
-                  </a:txBody>
-                  <a:tcPr marL="88900" marR="88900" marT="50800" marB="50800" anchor="ctr">
-                    <a:lnL w="6350" cap="flat" cmpd="sng" algn="ctr">
-                      <a:solidFill>
-                        <a:srgbClr val="E3DED7"/>
-                      </a:solidFill>
-                      <a:prstDash val="solid"/>
-                      <a:round/>
-                      <a:headEnd type="none" w="med" len="med"/>
-                      <a:tailEnd type="none" w="med" len="med"/>
-                    </a:lnL>
-                    <a:lnR w="6350" cap="flat" cmpd="sng" algn="ctr">
-                      <a:solidFill>
-                        <a:srgbClr val="E3DED7"/>
-                      </a:solidFill>
-                      <a:prstDash val="solid"/>
-                      <a:round/>
-                      <a:headEnd type="none" w="med" len="med"/>
-                      <a:tailEnd type="none" w="med" len="med"/>
-                    </a:lnR>
-                    <a:lnT w="6350" cap="flat" cmpd="sng" algn="ctr">
-                      <a:solidFill>
-                        <a:srgbClr val="E3DED7"/>
-                      </a:solidFill>
-                      <a:prstDash val="solid"/>
-                      <a:round/>
-                      <a:headEnd type="none" w="med" len="med"/>
-                      <a:tailEnd type="none" w="med" len="med"/>
-                    </a:lnT>
-                    <a:lnB w="6350" cap="flat" cmpd="sng" algn="ctr">
-                      <a:solidFill>
-                        <a:srgbClr val="E3DED7"/>
-                      </a:solidFill>
-                      <a:prstDash val="solid"/>
-                      <a:round/>
-                      <a:headEnd type="none" w="med" len="med"/>
-                      <a:tailEnd type="none" w="med" len="med"/>
-                    </a:lnB>
-                    <a:solidFill>
-                      <a:srgbClr val="FFFFFF"/>
-                    </a:solidFill>
-                  </a:tcPr>
-                </a:tc>
-              </a:tr>
-              <a:tr h="0">
-                <a:tc>
-                  <a:txBody>
-                    <a:bodyPr/>
-                    <a:lstStyle/>
-                    <a:p>
-                      <a:pPr indent="0" marL="0">
-                        <a:buNone/>
-                      </a:pPr>
-                      <a:r>
-                        <a:rPr lang="en-US" sz="1200" b="1" dirty="0">
-                          <a:solidFill>
-                            <a:srgbClr val="8A1626"/>
-                          </a:solidFill>
-                        </a:rPr>
-                        <a:t>DRS-3xxx</a:t>
-                      </a:r>
-                      <a:endParaRPr lang="en-US" sz="1200" dirty="0"/>
-                    </a:p>
-                  </a:txBody>
-                  <a:tcPr marL="88900" marR="88900" marT="50800" marB="50800" anchor="ctr">
-                    <a:lnL w="6350" cap="flat" cmpd="sng" algn="ctr">
-                      <a:solidFill>
-                        <a:srgbClr val="E3DED7"/>
-                      </a:solidFill>
-                      <a:prstDash val="solid"/>
-                      <a:round/>
-                      <a:headEnd type="none" w="med" len="med"/>
-                      <a:tailEnd type="none" w="med" len="med"/>
-                    </a:lnL>
-                    <a:lnR w="6350" cap="flat" cmpd="sng" algn="ctr">
-                      <a:solidFill>
-                        <a:srgbClr val="E3DED7"/>
-                      </a:solidFill>
-                      <a:prstDash val="solid"/>
-                      <a:round/>
-                      <a:headEnd type="none" w="med" len="med"/>
-                      <a:tailEnd type="none" w="med" len="med"/>
-                    </a:lnR>
-                    <a:lnT w="6350" cap="flat" cmpd="sng" algn="ctr">
-                      <a:solidFill>
-                        <a:srgbClr val="E3DED7"/>
-                      </a:solidFill>
-                      <a:prstDash val="solid"/>
-                      <a:round/>
-                      <a:headEnd type="none" w="med" len="med"/>
-                      <a:tailEnd type="none" w="med" len="med"/>
-                    </a:lnT>
-                    <a:lnB w="6350" cap="flat" cmpd="sng" algn="ctr">
-                      <a:solidFill>
-                        <a:srgbClr val="E3DED7"/>
-                      </a:solidFill>
-                      <a:prstDash val="solid"/>
-                      <a:round/>
-                      <a:headEnd type="none" w="med" len="med"/>
-                      <a:tailEnd type="none" w="med" len="med"/>
-                    </a:lnB>
-                    <a:solidFill>
-                      <a:srgbClr val="F7F5F2"/>
-                    </a:solidFill>
-                  </a:tcPr>
-                </a:tc>
-                <a:tc>
-                  <a:txBody>
-                    <a:bodyPr/>
-                    <a:lstStyle/>
-                    <a:p>
-                      <a:pPr indent="0" marL="0">
-                        <a:buNone/>
-                      </a:pPr>
-                      <a:r>
-                        <a:rPr lang="en-US" sz="1200" dirty="0">
-                          <a:solidFill>
-                            <a:srgbClr val="1A1A1A"/>
-                          </a:solidFill>
-                        </a:rPr>
-                        <a:t>Inference</a:t>
-                      </a:r>
-                      <a:endParaRPr lang="en-US" sz="1200" dirty="0"/>
-                    </a:p>
-                  </a:txBody>
-                  <a:tcPr marL="88900" marR="88900" marT="50800" marB="50800" anchor="ctr">
-                    <a:lnL w="6350" cap="flat" cmpd="sng" algn="ctr">
-                      <a:solidFill>
-                        <a:srgbClr val="E3DED7"/>
-                      </a:solidFill>
-                      <a:prstDash val="solid"/>
-                      <a:round/>
-                      <a:headEnd type="none" w="med" len="med"/>
-                      <a:tailEnd type="none" w="med" len="med"/>
-                    </a:lnL>
-                    <a:lnR w="6350" cap="flat" cmpd="sng" algn="ctr">
-                      <a:solidFill>
-                        <a:srgbClr val="E3DED7"/>
-                      </a:solidFill>
-                      <a:prstDash val="solid"/>
-                      <a:round/>
-                      <a:headEnd type="none" w="med" len="med"/>
-                      <a:tailEnd type="none" w="med" len="med"/>
-                    </a:lnR>
-                    <a:lnT w="6350" cap="flat" cmpd="sng" algn="ctr">
-                      <a:solidFill>
-                        <a:srgbClr val="E3DED7"/>
-                      </a:solidFill>
-                      <a:prstDash val="solid"/>
-                      <a:round/>
-                      <a:headEnd type="none" w="med" len="med"/>
-                      <a:tailEnd type="none" w="med" len="med"/>
-                    </a:lnT>
-                    <a:lnB w="6350" cap="flat" cmpd="sng" algn="ctr">
-                      <a:solidFill>
-                        <a:srgbClr val="E3DED7"/>
-                      </a:solidFill>
-                      <a:prstDash val="solid"/>
-                      <a:round/>
-                      <a:headEnd type="none" w="med" len="med"/>
-                      <a:tailEnd type="none" w="med" len="med"/>
-                    </a:lnB>
-                    <a:solidFill>
-                      <a:srgbClr val="F7F5F2"/>
-                    </a:solidFill>
-                  </a:tcPr>
-                </a:tc>
-                <a:tc>
-                  <a:txBody>
-                    <a:bodyPr/>
-                    <a:lstStyle/>
-                    <a:p>
-                      <a:pPr indent="0" marL="0">
-                        <a:buNone/>
-                      </a:pPr>
-                      <a:r>
-                        <a:rPr lang="en-US" sz="1200" dirty="0">
-                          <a:solidFill>
-                            <a:srgbClr val="1A1A1A"/>
-                          </a:solidFill>
-                        </a:rPr>
-                        <a:t>1</a:t>
-                      </a:r>
-                      <a:endParaRPr lang="en-US" sz="1200" dirty="0"/>
-                    </a:p>
-                  </a:txBody>
-                  <a:tcPr marL="88900" marR="88900" marT="50800" marB="50800" anchor="ctr">
-                    <a:lnL w="6350" cap="flat" cmpd="sng" algn="ctr">
-                      <a:solidFill>
-                        <a:srgbClr val="E3DED7"/>
-                      </a:solidFill>
-                      <a:prstDash val="solid"/>
-                      <a:round/>
-                      <a:headEnd type="none" w="med" len="med"/>
-                      <a:tailEnd type="none" w="med" len="med"/>
-                    </a:lnL>
-                    <a:lnR w="6350" cap="flat" cmpd="sng" algn="ctr">
-                      <a:solidFill>
-                        <a:srgbClr val="E3DED7"/>
-                      </a:solidFill>
-                      <a:prstDash val="solid"/>
-                      <a:round/>
-                      <a:headEnd type="none" w="med" len="med"/>
-                      <a:tailEnd type="none" w="med" len="med"/>
-                    </a:lnR>
-                    <a:lnT w="6350" cap="flat" cmpd="sng" algn="ctr">
-                      <a:solidFill>
-                        <a:srgbClr val="E3DED7"/>
-                      </a:solidFill>
-                      <a:prstDash val="solid"/>
-                      <a:round/>
-                      <a:headEnd type="none" w="med" len="med"/>
-                      <a:tailEnd type="none" w="med" len="med"/>
-                    </a:lnT>
-                    <a:lnB w="6350" cap="flat" cmpd="sng" algn="ctr">
-                      <a:solidFill>
-                        <a:srgbClr val="E3DED7"/>
-                      </a:solidFill>
-                      <a:prstDash val="solid"/>
-                      <a:round/>
-                      <a:headEnd type="none" w="med" len="med"/>
-                      <a:tailEnd type="none" w="med" len="med"/>
-                    </a:lnB>
-                    <a:solidFill>
-                      <a:srgbClr val="F7F5F2"/>
-                    </a:solidFill>
-                  </a:tcPr>
-                </a:tc>
-              </a:tr>
-              <a:tr h="0">
-                <a:tc>
-                  <a:txBody>
-                    <a:bodyPr/>
-                    <a:lstStyle/>
-                    <a:p>
-                      <a:pPr indent="0" marL="0">
-                        <a:buNone/>
-                      </a:pPr>
-                      <a:r>
-                        <a:rPr lang="en-US" sz="1200" b="1" dirty="0">
-                          <a:solidFill>
-                            <a:srgbClr val="8A1626"/>
-                          </a:solidFill>
-                        </a:rPr>
-                        <a:t>DRS-4xxx</a:t>
-                      </a:r>
-                      <a:endParaRPr lang="en-US" sz="1200" dirty="0"/>
-                    </a:p>
-                  </a:txBody>
-                  <a:tcPr marL="88900" marR="88900" marT="50800" marB="50800" anchor="ctr">
-                    <a:lnL w="6350" cap="flat" cmpd="sng" algn="ctr">
-                      <a:solidFill>
-                        <a:srgbClr val="E3DED7"/>
-                      </a:solidFill>
-                      <a:prstDash val="solid"/>
-                      <a:round/>
-                      <a:headEnd type="none" w="med" len="med"/>
-                      <a:tailEnd type="none" w="med" len="med"/>
-                    </a:lnL>
-                    <a:lnR w="6350" cap="flat" cmpd="sng" algn="ctr">
-                      <a:solidFill>
-                        <a:srgbClr val="E3DED7"/>
-                      </a:solidFill>
-                      <a:prstDash val="solid"/>
-                      <a:round/>
-                      <a:headEnd type="none" w="med" len="med"/>
-                      <a:tailEnd type="none" w="med" len="med"/>
-                    </a:lnR>
-                    <a:lnT w="6350" cap="flat" cmpd="sng" algn="ctr">
-                      <a:solidFill>
-                        <a:srgbClr val="E3DED7"/>
-                      </a:solidFill>
-                      <a:prstDash val="solid"/>
-                      <a:round/>
-                      <a:headEnd type="none" w="med" len="med"/>
-                      <a:tailEnd type="none" w="med" len="med"/>
-                    </a:lnT>
-                    <a:lnB w="6350" cap="flat" cmpd="sng" algn="ctr">
-                      <a:solidFill>
-                        <a:srgbClr val="E3DED7"/>
-                      </a:solidFill>
-                      <a:prstDash val="solid"/>
-                      <a:round/>
-                      <a:headEnd type="none" w="med" len="med"/>
-                      <a:tailEnd type="none" w="med" len="med"/>
-                    </a:lnB>
-                    <a:solidFill>
-                      <a:srgbClr val="FFFFFF"/>
-                    </a:solidFill>
-                  </a:tcPr>
-                </a:tc>
-                <a:tc>
-                  <a:txBody>
-                    <a:bodyPr/>
-                    <a:lstStyle/>
-                    <a:p>
-                      <a:pPr indent="0" marL="0">
-                        <a:buNone/>
-                      </a:pPr>
-                      <a:r>
-                        <a:rPr lang="en-US" sz="1200" dirty="0">
-                          <a:solidFill>
-                            <a:srgbClr val="1A1A1A"/>
-                          </a:solidFill>
-                        </a:rPr>
-                        <a:t>Commands and search</a:t>
-                      </a:r>
-                      <a:endParaRPr lang="en-US" sz="1200" dirty="0"/>
-                    </a:p>
-                  </a:txBody>
-                  <a:tcPr marL="88900" marR="88900" marT="50800" marB="50800" anchor="ctr">
-                    <a:lnL w="6350" cap="flat" cmpd="sng" algn="ctr">
-                      <a:solidFill>
-                        <a:srgbClr val="E3DED7"/>
-                      </a:solidFill>
-                      <a:prstDash val="solid"/>
-                      <a:round/>
-                      <a:headEnd type="none" w="med" len="med"/>
-                      <a:tailEnd type="none" w="med" len="med"/>
-                    </a:lnL>
-                    <a:lnR w="6350" cap="flat" cmpd="sng" algn="ctr">
-                      <a:solidFill>
-                        <a:srgbClr val="E3DED7"/>
-                      </a:solidFill>
-                      <a:prstDash val="solid"/>
-                      <a:round/>
-                      <a:headEnd type="none" w="med" len="med"/>
-                      <a:tailEnd type="none" w="med" len="med"/>
-                    </a:lnR>
-                    <a:lnT w="6350" cap="flat" cmpd="sng" algn="ctr">
-                      <a:solidFill>
-                        <a:srgbClr val="E3DED7"/>
-                      </a:solidFill>
-                      <a:prstDash val="solid"/>
-                      <a:round/>
-                      <a:headEnd type="none" w="med" len="med"/>
-                      <a:tailEnd type="none" w="med" len="med"/>
-                    </a:lnT>
-                    <a:lnB w="6350" cap="flat" cmpd="sng" algn="ctr">
-                      <a:solidFill>
-                        <a:srgbClr val="E3DED7"/>
-                      </a:solidFill>
-                      <a:prstDash val="solid"/>
-                      <a:round/>
-                      <a:headEnd type="none" w="med" len="med"/>
-                      <a:tailEnd type="none" w="med" len="med"/>
-                    </a:lnB>
-                    <a:solidFill>
-                      <a:srgbClr val="FFFFFF"/>
-                    </a:solidFill>
-                  </a:tcPr>
-                </a:tc>
-                <a:tc>
-                  <a:txBody>
-                    <a:bodyPr/>
-                    <a:lstStyle/>
-                    <a:p>
-                      <a:pPr indent="0" marL="0">
-                        <a:buNone/>
-                      </a:pPr>
-                      <a:r>
-                        <a:rPr lang="en-US" sz="1200" dirty="0">
-                          <a:solidFill>
-                            <a:srgbClr val="1A1A1A"/>
-                          </a:solidFill>
-                        </a:rPr>
-                        <a:t>8</a:t>
-                      </a:r>
-                      <a:endParaRPr lang="en-US" sz="1200" dirty="0"/>
-                    </a:p>
-                  </a:txBody>
-                  <a:tcPr marL="88900" marR="88900" marT="50800" marB="50800" anchor="ctr">
-                    <a:lnL w="6350" cap="flat" cmpd="sng" algn="ctr">
-                      <a:solidFill>
-                        <a:srgbClr val="E3DED7"/>
-                      </a:solidFill>
-                      <a:prstDash val="solid"/>
-                      <a:round/>
-                      <a:headEnd type="none" w="med" len="med"/>
-                      <a:tailEnd type="none" w="med" len="med"/>
-                    </a:lnL>
-                    <a:lnR w="6350" cap="flat" cmpd="sng" algn="ctr">
-                      <a:solidFill>
-                        <a:srgbClr val="E3DED7"/>
-                      </a:solidFill>
-                      <a:prstDash val="solid"/>
-                      <a:round/>
-                      <a:headEnd type="none" w="med" len="med"/>
-                      <a:tailEnd type="none" w="med" len="med"/>
-                    </a:lnR>
-                    <a:lnT w="6350" cap="flat" cmpd="sng" algn="ctr">
-                      <a:solidFill>
-                        <a:srgbClr val="E3DED7"/>
-                      </a:solidFill>
-                      <a:prstDash val="solid"/>
-                      <a:round/>
-                      <a:headEnd type="none" w="med" len="med"/>
-                      <a:tailEnd type="none" w="med" len="med"/>
-                    </a:lnT>
-                    <a:lnB w="6350" cap="flat" cmpd="sng" algn="ctr">
-                      <a:solidFill>
-                        <a:srgbClr val="E3DED7"/>
-                      </a:solidFill>
-                      <a:prstDash val="solid"/>
-                      <a:round/>
-                      <a:headEnd type="none" w="med" len="med"/>
-                      <a:tailEnd type="none" w="med" len="med"/>
-                    </a:lnB>
-                    <a:solidFill>
-                      <a:srgbClr val="FFFFFF"/>
-                    </a:solidFill>
-                  </a:tcPr>
-                </a:tc>
-              </a:tr>
-              <a:tr h="0">
-                <a:tc>
-                  <a:txBody>
-                    <a:bodyPr/>
-                    <a:lstStyle/>
-                    <a:p>
-                      <a:pPr indent="0" marL="0">
-                        <a:buNone/>
-                      </a:pPr>
-                      <a:r>
-                        <a:rPr lang="en-US" sz="1200" b="1" dirty="0">
-                          <a:solidFill>
-                            <a:srgbClr val="8A1626"/>
-                          </a:solidFill>
-                        </a:rPr>
-                        <a:t>DRS-5xxx</a:t>
-                      </a:r>
-                      <a:endParaRPr lang="en-US" sz="1200" dirty="0"/>
-                    </a:p>
-                  </a:txBody>
-                  <a:tcPr marL="88900" marR="88900" marT="50800" marB="50800" anchor="ctr">
-                    <a:lnL w="6350" cap="flat" cmpd="sng" algn="ctr">
-                      <a:solidFill>
-                        <a:srgbClr val="E3DED7"/>
-                      </a:solidFill>
-                      <a:prstDash val="solid"/>
-                      <a:round/>
-                      <a:headEnd type="none" w="med" len="med"/>
-                      <a:tailEnd type="none" w="med" len="med"/>
-                    </a:lnL>
-                    <a:lnR w="6350" cap="flat" cmpd="sng" algn="ctr">
-                      <a:solidFill>
-                        <a:srgbClr val="E3DED7"/>
-                      </a:solidFill>
-                      <a:prstDash val="solid"/>
-                      <a:round/>
-                      <a:headEnd type="none" w="med" len="med"/>
-                      <a:tailEnd type="none" w="med" len="med"/>
-                    </a:lnR>
-                    <a:lnT w="6350" cap="flat" cmpd="sng" algn="ctr">
-                      <a:solidFill>
-                        <a:srgbClr val="E3DED7"/>
-                      </a:solidFill>
-                      <a:prstDash val="solid"/>
-                      <a:round/>
-                      <a:headEnd type="none" w="med" len="med"/>
-                      <a:tailEnd type="none" w="med" len="med"/>
-                    </a:lnT>
-                    <a:lnB w="6350" cap="flat" cmpd="sng" algn="ctr">
-                      <a:solidFill>
-                        <a:srgbClr val="E3DED7"/>
-                      </a:solidFill>
-                      <a:prstDash val="solid"/>
-                      <a:round/>
-                      <a:headEnd type="none" w="med" len="med"/>
-                      <a:tailEnd type="none" w="med" len="med"/>
-                    </a:lnB>
-                    <a:solidFill>
-                      <a:srgbClr val="F7F5F2"/>
-                    </a:solidFill>
-                  </a:tcPr>
-                </a:tc>
-                <a:tc>
-                  <a:txBody>
-                    <a:bodyPr/>
-                    <a:lstStyle/>
-                    <a:p>
-                      <a:pPr indent="0" marL="0">
-                        <a:buNone/>
-                      </a:pPr>
-                      <a:r>
-                        <a:rPr lang="en-US" sz="1200" dirty="0">
-                          <a:solidFill>
-                            <a:srgbClr val="1A1A1A"/>
-                          </a:solidFill>
-                        </a:rPr>
-                        <a:t>Requests and limits</a:t>
-                      </a:r>
-                      <a:endParaRPr lang="en-US" sz="1200" dirty="0"/>
-                    </a:p>
-                  </a:txBody>
-                  <a:tcPr marL="88900" marR="88900" marT="50800" marB="50800" anchor="ctr">
-                    <a:lnL w="6350" cap="flat" cmpd="sng" algn="ctr">
-                      <a:solidFill>
-                        <a:srgbClr val="E3DED7"/>
-                      </a:solidFill>
-                      <a:prstDash val="solid"/>
-                      <a:round/>
-                      <a:headEnd type="none" w="med" len="med"/>
-                      <a:tailEnd type="none" w="med" len="med"/>
-                    </a:lnL>
-                    <a:lnR w="6350" cap="flat" cmpd="sng" algn="ctr">
-                      <a:solidFill>
-                        <a:srgbClr val="E3DED7"/>
-                      </a:solidFill>
-                      <a:prstDash val="solid"/>
-                      <a:round/>
-                      <a:headEnd type="none" w="med" len="med"/>
-                      <a:tailEnd type="none" w="med" len="med"/>
-                    </a:lnR>
-                    <a:lnT w="6350" cap="flat" cmpd="sng" algn="ctr">
-                      <a:solidFill>
-                        <a:srgbClr val="E3DED7"/>
-                      </a:solidFill>
-                      <a:prstDash val="solid"/>
-                      <a:round/>
-                      <a:headEnd type="none" w="med" len="med"/>
-                      <a:tailEnd type="none" w="med" len="med"/>
-                    </a:lnT>
-                    <a:lnB w="6350" cap="flat" cmpd="sng" algn="ctr">
-                      <a:solidFill>
-                        <a:srgbClr val="E3DED7"/>
-                      </a:solidFill>
-                      <a:prstDash val="solid"/>
-                      <a:round/>
-                      <a:headEnd type="none" w="med" len="med"/>
-                      <a:tailEnd type="none" w="med" len="med"/>
-                    </a:lnB>
-                    <a:solidFill>
-                      <a:srgbClr val="F7F5F2"/>
-                    </a:solidFill>
-                  </a:tcPr>
-                </a:tc>
-                <a:tc>
-                  <a:txBody>
-                    <a:bodyPr/>
-                    <a:lstStyle/>
-                    <a:p>
-                      <a:pPr indent="0" marL="0">
-                        <a:buNone/>
-                      </a:pPr>
-                      <a:r>
-                        <a:rPr lang="en-US" sz="1200" dirty="0">
-                          <a:solidFill>
-                            <a:srgbClr val="1A1A1A"/>
-                          </a:solidFill>
-                        </a:rPr>
-                        <a:t>9</a:t>
-                      </a:r>
-                      <a:endParaRPr lang="en-US" sz="1200" dirty="0"/>
-                    </a:p>
-                  </a:txBody>
-                  <a:tcPr marL="88900" marR="88900" marT="50800" marB="50800" anchor="ctr">
-                    <a:lnL w="6350" cap="flat" cmpd="sng" algn="ctr">
-                      <a:solidFill>
-                        <a:srgbClr val="E3DED7"/>
-                      </a:solidFill>
-                      <a:prstDash val="solid"/>
-                      <a:round/>
-                      <a:headEnd type="none" w="med" len="med"/>
-                      <a:tailEnd type="none" w="med" len="med"/>
-                    </a:lnL>
-                    <a:lnR w="6350" cap="flat" cmpd="sng" algn="ctr">
-                      <a:solidFill>
-                        <a:srgbClr val="E3DED7"/>
-                      </a:solidFill>
-                      <a:prstDash val="solid"/>
-                      <a:round/>
-                      <a:headEnd type="none" w="med" len="med"/>
-                      <a:tailEnd type="none" w="med" len="med"/>
-                    </a:lnR>
-                    <a:lnT w="6350" cap="flat" cmpd="sng" algn="ctr">
-                      <a:solidFill>
-                        <a:srgbClr val="E3DED7"/>
-                      </a:solidFill>
-                      <a:prstDash val="solid"/>
-                      <a:round/>
-                      <a:headEnd type="none" w="med" len="med"/>
-                      <a:tailEnd type="none" w="med" len="med"/>
-                    </a:lnT>
-                    <a:lnB w="6350" cap="flat" cmpd="sng" algn="ctr">
-                      <a:solidFill>
-                        <a:srgbClr val="E3DED7"/>
-                      </a:solidFill>
-                      <a:prstDash val="solid"/>
-                      <a:round/>
-                      <a:headEnd type="none" w="med" len="med"/>
-                      <a:tailEnd type="none" w="med" len="med"/>
-                    </a:lnB>
-                    <a:solidFill>
-                      <a:srgbClr val="F7F5F2"/>
-                    </a:solidFill>
-                  </a:tcPr>
-                </a:tc>
-              </a:tr>
-              <a:tr h="0">
-                <a:tc>
-                  <a:txBody>
-                    <a:bodyPr/>
-                    <a:lstStyle/>
-                    <a:p>
-                      <a:pPr indent="0" marL="0">
-                        <a:buNone/>
-                      </a:pPr>
-                      <a:r>
-                        <a:rPr lang="en-US" sz="1200" b="1" dirty="0">
-                          <a:solidFill>
-                            <a:srgbClr val="8A1626"/>
-                          </a:solidFill>
-                        </a:rPr>
-                        <a:t>DRS-6xxx</a:t>
-                      </a:r>
-                      <a:endParaRPr lang="en-US" sz="1200" dirty="0"/>
-                    </a:p>
-                  </a:txBody>
-                  <a:tcPr marL="88900" marR="88900" marT="50800" marB="50800" anchor="ctr">
-                    <a:lnL w="6350" cap="flat" cmpd="sng" algn="ctr">
-                      <a:solidFill>
-                        <a:srgbClr val="E3DED7"/>
-                      </a:solidFill>
-                      <a:prstDash val="solid"/>
-                      <a:round/>
-                      <a:headEnd type="none" w="med" len="med"/>
-                      <a:tailEnd type="none" w="med" len="med"/>
-                    </a:lnL>
-                    <a:lnR w="6350" cap="flat" cmpd="sng" algn="ctr">
-                      <a:solidFill>
-                        <a:srgbClr val="E3DED7"/>
-                      </a:solidFill>
-                      <a:prstDash val="solid"/>
-                      <a:round/>
-                      <a:headEnd type="none" w="med" len="med"/>
-                      <a:tailEnd type="none" w="med" len="med"/>
-                    </a:lnR>
-                    <a:lnT w="6350" cap="flat" cmpd="sng" algn="ctr">
-                      <a:solidFill>
-                        <a:srgbClr val="E3DED7"/>
-                      </a:solidFill>
-                      <a:prstDash val="solid"/>
-                      <a:round/>
-                      <a:headEnd type="none" w="med" len="med"/>
-                      <a:tailEnd type="none" w="med" len="med"/>
-                    </a:lnT>
-                    <a:lnB w="6350" cap="flat" cmpd="sng" algn="ctr">
-                      <a:solidFill>
-                        <a:srgbClr val="E3DED7"/>
-                      </a:solidFill>
-                      <a:prstDash val="solid"/>
-                      <a:round/>
-                      <a:headEnd type="none" w="med" len="med"/>
-                      <a:tailEnd type="none" w="med" len="med"/>
-                    </a:lnB>
-                    <a:solidFill>
-                      <a:srgbClr val="FFFFFF"/>
-                    </a:solidFill>
-                  </a:tcPr>
-                </a:tc>
-                <a:tc>
-                  <a:txBody>
-                    <a:bodyPr/>
-                    <a:lstStyle/>
-                    <a:p>
-                      <a:pPr indent="0" marL="0">
-                        <a:buNone/>
-                      </a:pPr>
-                      <a:r>
-                        <a:rPr lang="en-US" sz="1200" dirty="0">
-                          <a:solidFill>
-                            <a:srgbClr val="1A1A1A"/>
-                          </a:solidFill>
-                        </a:rPr>
-                        <a:t>Users, roles, tokens</a:t>
+                        <a:t>Grammar, Sutras, inference</a:t>
                       </a:r>
                       <a:endParaRPr lang="en-US" sz="1200" dirty="0"/>
                     </a:p>
@@ -27274,7 +26984,7 @@
                             <a:srgbClr val="8A1626"/>
                           </a:solidFill>
                         </a:rPr>
-                        <a:t>DRS-7xxx</a:t>
+                        <a:t>DRS-4xxx</a:t>
                       </a:r>
                       <a:endParaRPr lang="en-US" sz="1200" dirty="0"/>
                     </a:p>
@@ -27335,7 +27045,7 @@
                             <a:srgbClr val="1A1A1A"/>
                           </a:solidFill>
                         </a:rPr>
-                        <a:t>Collaboration</a:t>
+                        <a:t>Commands and search</a:t>
                       </a:r>
                       <a:endParaRPr lang="en-US" sz="1200" dirty="0"/>
                     </a:p>
@@ -27459,6 +27169,561 @@
                             <a:srgbClr val="8A1626"/>
                           </a:solidFill>
                         </a:rPr>
+                        <a:t>DRS-5xxx</a:t>
+                      </a:r>
+                      <a:endParaRPr lang="en-US" sz="1200" dirty="0"/>
+                    </a:p>
+                  </a:txBody>
+                  <a:tcPr marL="88900" marR="88900" marT="50800" marB="50800" anchor="ctr">
+                    <a:lnL w="6350" cap="flat" cmpd="sng" algn="ctr">
+                      <a:solidFill>
+                        <a:srgbClr val="E3DED7"/>
+                      </a:solidFill>
+                      <a:prstDash val="solid"/>
+                      <a:round/>
+                      <a:headEnd type="none" w="med" len="med"/>
+                      <a:tailEnd type="none" w="med" len="med"/>
+                    </a:lnL>
+                    <a:lnR w="6350" cap="flat" cmpd="sng" algn="ctr">
+                      <a:solidFill>
+                        <a:srgbClr val="E3DED7"/>
+                      </a:solidFill>
+                      <a:prstDash val="solid"/>
+                      <a:round/>
+                      <a:headEnd type="none" w="med" len="med"/>
+                      <a:tailEnd type="none" w="med" len="med"/>
+                    </a:lnR>
+                    <a:lnT w="6350" cap="flat" cmpd="sng" algn="ctr">
+                      <a:solidFill>
+                        <a:srgbClr val="E3DED7"/>
+                      </a:solidFill>
+                      <a:prstDash val="solid"/>
+                      <a:round/>
+                      <a:headEnd type="none" w="med" len="med"/>
+                      <a:tailEnd type="none" w="med" len="med"/>
+                    </a:lnT>
+                    <a:lnB w="6350" cap="flat" cmpd="sng" algn="ctr">
+                      <a:solidFill>
+                        <a:srgbClr val="E3DED7"/>
+                      </a:solidFill>
+                      <a:prstDash val="solid"/>
+                      <a:round/>
+                      <a:headEnd type="none" w="med" len="med"/>
+                      <a:tailEnd type="none" w="med" len="med"/>
+                    </a:lnB>
+                    <a:solidFill>
+                      <a:srgbClr val="FFFFFF"/>
+                    </a:solidFill>
+                  </a:tcPr>
+                </a:tc>
+                <a:tc>
+                  <a:txBody>
+                    <a:bodyPr/>
+                    <a:lstStyle/>
+                    <a:p>
+                      <a:pPr indent="0" marL="0">
+                        <a:buNone/>
+                      </a:pPr>
+                      <a:r>
+                        <a:rPr lang="en-US" sz="1200" dirty="0">
+                          <a:solidFill>
+                            <a:srgbClr val="1A1A1A"/>
+                          </a:solidFill>
+                        </a:rPr>
+                        <a:t>Requests, limits, Drishti*net</a:t>
+                      </a:r>
+                      <a:endParaRPr lang="en-US" sz="1200" dirty="0"/>
+                    </a:p>
+                  </a:txBody>
+                  <a:tcPr marL="88900" marR="88900" marT="50800" marB="50800" anchor="ctr">
+                    <a:lnL w="6350" cap="flat" cmpd="sng" algn="ctr">
+                      <a:solidFill>
+                        <a:srgbClr val="E3DED7"/>
+                      </a:solidFill>
+                      <a:prstDash val="solid"/>
+                      <a:round/>
+                      <a:headEnd type="none" w="med" len="med"/>
+                      <a:tailEnd type="none" w="med" len="med"/>
+                    </a:lnL>
+                    <a:lnR w="6350" cap="flat" cmpd="sng" algn="ctr">
+                      <a:solidFill>
+                        <a:srgbClr val="E3DED7"/>
+                      </a:solidFill>
+                      <a:prstDash val="solid"/>
+                      <a:round/>
+                      <a:headEnd type="none" w="med" len="med"/>
+                      <a:tailEnd type="none" w="med" len="med"/>
+                    </a:lnR>
+                    <a:lnT w="6350" cap="flat" cmpd="sng" algn="ctr">
+                      <a:solidFill>
+                        <a:srgbClr val="E3DED7"/>
+                      </a:solidFill>
+                      <a:prstDash val="solid"/>
+                      <a:round/>
+                      <a:headEnd type="none" w="med" len="med"/>
+                      <a:tailEnd type="none" w="med" len="med"/>
+                    </a:lnT>
+                    <a:lnB w="6350" cap="flat" cmpd="sng" algn="ctr">
+                      <a:solidFill>
+                        <a:srgbClr val="E3DED7"/>
+                      </a:solidFill>
+                      <a:prstDash val="solid"/>
+                      <a:round/>
+                      <a:headEnd type="none" w="med" len="med"/>
+                      <a:tailEnd type="none" w="med" len="med"/>
+                    </a:lnB>
+                    <a:solidFill>
+                      <a:srgbClr val="FFFFFF"/>
+                    </a:solidFill>
+                  </a:tcPr>
+                </a:tc>
+                <a:tc>
+                  <a:txBody>
+                    <a:bodyPr/>
+                    <a:lstStyle/>
+                    <a:p>
+                      <a:pPr indent="0" marL="0">
+                        <a:buNone/>
+                      </a:pPr>
+                      <a:r>
+                        <a:rPr lang="en-US" sz="1200" dirty="0">
+                          <a:solidFill>
+                            <a:srgbClr val="1A1A1A"/>
+                          </a:solidFill>
+                        </a:rPr>
+                        <a:t>24</a:t>
+                      </a:r>
+                      <a:endParaRPr lang="en-US" sz="1200" dirty="0"/>
+                    </a:p>
+                  </a:txBody>
+                  <a:tcPr marL="88900" marR="88900" marT="50800" marB="50800" anchor="ctr">
+                    <a:lnL w="6350" cap="flat" cmpd="sng" algn="ctr">
+                      <a:solidFill>
+                        <a:srgbClr val="E3DED7"/>
+                      </a:solidFill>
+                      <a:prstDash val="solid"/>
+                      <a:round/>
+                      <a:headEnd type="none" w="med" len="med"/>
+                      <a:tailEnd type="none" w="med" len="med"/>
+                    </a:lnL>
+                    <a:lnR w="6350" cap="flat" cmpd="sng" algn="ctr">
+                      <a:solidFill>
+                        <a:srgbClr val="E3DED7"/>
+                      </a:solidFill>
+                      <a:prstDash val="solid"/>
+                      <a:round/>
+                      <a:headEnd type="none" w="med" len="med"/>
+                      <a:tailEnd type="none" w="med" len="med"/>
+                    </a:lnR>
+                    <a:lnT w="6350" cap="flat" cmpd="sng" algn="ctr">
+                      <a:solidFill>
+                        <a:srgbClr val="E3DED7"/>
+                      </a:solidFill>
+                      <a:prstDash val="solid"/>
+                      <a:round/>
+                      <a:headEnd type="none" w="med" len="med"/>
+                      <a:tailEnd type="none" w="med" len="med"/>
+                    </a:lnT>
+                    <a:lnB w="6350" cap="flat" cmpd="sng" algn="ctr">
+                      <a:solidFill>
+                        <a:srgbClr val="E3DED7"/>
+                      </a:solidFill>
+                      <a:prstDash val="solid"/>
+                      <a:round/>
+                      <a:headEnd type="none" w="med" len="med"/>
+                      <a:tailEnd type="none" w="med" len="med"/>
+                    </a:lnB>
+                    <a:solidFill>
+                      <a:srgbClr val="FFFFFF"/>
+                    </a:solidFill>
+                  </a:tcPr>
+                </a:tc>
+              </a:tr>
+              <a:tr h="0">
+                <a:tc>
+                  <a:txBody>
+                    <a:bodyPr/>
+                    <a:lstStyle/>
+                    <a:p>
+                      <a:pPr indent="0" marL="0">
+                        <a:buNone/>
+                      </a:pPr>
+                      <a:r>
+                        <a:rPr lang="en-US" sz="1200" b="1" dirty="0">
+                          <a:solidFill>
+                            <a:srgbClr val="8A1626"/>
+                          </a:solidFill>
+                        </a:rPr>
+                        <a:t>DRS-6xxx</a:t>
+                      </a:r>
+                      <a:endParaRPr lang="en-US" sz="1200" dirty="0"/>
+                    </a:p>
+                  </a:txBody>
+                  <a:tcPr marL="88900" marR="88900" marT="50800" marB="50800" anchor="ctr">
+                    <a:lnL w="6350" cap="flat" cmpd="sng" algn="ctr">
+                      <a:solidFill>
+                        <a:srgbClr val="E3DED7"/>
+                      </a:solidFill>
+                      <a:prstDash val="solid"/>
+                      <a:round/>
+                      <a:headEnd type="none" w="med" len="med"/>
+                      <a:tailEnd type="none" w="med" len="med"/>
+                    </a:lnL>
+                    <a:lnR w="6350" cap="flat" cmpd="sng" algn="ctr">
+                      <a:solidFill>
+                        <a:srgbClr val="E3DED7"/>
+                      </a:solidFill>
+                      <a:prstDash val="solid"/>
+                      <a:round/>
+                      <a:headEnd type="none" w="med" len="med"/>
+                      <a:tailEnd type="none" w="med" len="med"/>
+                    </a:lnR>
+                    <a:lnT w="6350" cap="flat" cmpd="sng" algn="ctr">
+                      <a:solidFill>
+                        <a:srgbClr val="E3DED7"/>
+                      </a:solidFill>
+                      <a:prstDash val="solid"/>
+                      <a:round/>
+                      <a:headEnd type="none" w="med" len="med"/>
+                      <a:tailEnd type="none" w="med" len="med"/>
+                    </a:lnT>
+                    <a:lnB w="6350" cap="flat" cmpd="sng" algn="ctr">
+                      <a:solidFill>
+                        <a:srgbClr val="E3DED7"/>
+                      </a:solidFill>
+                      <a:prstDash val="solid"/>
+                      <a:round/>
+                      <a:headEnd type="none" w="med" len="med"/>
+                      <a:tailEnd type="none" w="med" len="med"/>
+                    </a:lnB>
+                    <a:solidFill>
+                      <a:srgbClr val="F7F5F2"/>
+                    </a:solidFill>
+                  </a:tcPr>
+                </a:tc>
+                <a:tc>
+                  <a:txBody>
+                    <a:bodyPr/>
+                    <a:lstStyle/>
+                    <a:p>
+                      <a:pPr indent="0" marL="0">
+                        <a:buNone/>
+                      </a:pPr>
+                      <a:r>
+                        <a:rPr lang="en-US" sz="1200" dirty="0">
+                          <a:solidFill>
+                            <a:srgbClr val="1A1A1A"/>
+                          </a:solidFill>
+                        </a:rPr>
+                        <a:t>Users, roles, tokens</a:t>
+                      </a:r>
+                      <a:endParaRPr lang="en-US" sz="1200" dirty="0"/>
+                    </a:p>
+                  </a:txBody>
+                  <a:tcPr marL="88900" marR="88900" marT="50800" marB="50800" anchor="ctr">
+                    <a:lnL w="6350" cap="flat" cmpd="sng" algn="ctr">
+                      <a:solidFill>
+                        <a:srgbClr val="E3DED7"/>
+                      </a:solidFill>
+                      <a:prstDash val="solid"/>
+                      <a:round/>
+                      <a:headEnd type="none" w="med" len="med"/>
+                      <a:tailEnd type="none" w="med" len="med"/>
+                    </a:lnL>
+                    <a:lnR w="6350" cap="flat" cmpd="sng" algn="ctr">
+                      <a:solidFill>
+                        <a:srgbClr val="E3DED7"/>
+                      </a:solidFill>
+                      <a:prstDash val="solid"/>
+                      <a:round/>
+                      <a:headEnd type="none" w="med" len="med"/>
+                      <a:tailEnd type="none" w="med" len="med"/>
+                    </a:lnR>
+                    <a:lnT w="6350" cap="flat" cmpd="sng" algn="ctr">
+                      <a:solidFill>
+                        <a:srgbClr val="E3DED7"/>
+                      </a:solidFill>
+                      <a:prstDash val="solid"/>
+                      <a:round/>
+                      <a:headEnd type="none" w="med" len="med"/>
+                      <a:tailEnd type="none" w="med" len="med"/>
+                    </a:lnT>
+                    <a:lnB w="6350" cap="flat" cmpd="sng" algn="ctr">
+                      <a:solidFill>
+                        <a:srgbClr val="E3DED7"/>
+                      </a:solidFill>
+                      <a:prstDash val="solid"/>
+                      <a:round/>
+                      <a:headEnd type="none" w="med" len="med"/>
+                      <a:tailEnd type="none" w="med" len="med"/>
+                    </a:lnB>
+                    <a:solidFill>
+                      <a:srgbClr val="F7F5F2"/>
+                    </a:solidFill>
+                  </a:tcPr>
+                </a:tc>
+                <a:tc>
+                  <a:txBody>
+                    <a:bodyPr/>
+                    <a:lstStyle/>
+                    <a:p>
+                      <a:pPr indent="0" marL="0">
+                        <a:buNone/>
+                      </a:pPr>
+                      <a:r>
+                        <a:rPr lang="en-US" sz="1200" dirty="0">
+                          <a:solidFill>
+                            <a:srgbClr val="1A1A1A"/>
+                          </a:solidFill>
+                        </a:rPr>
+                        <a:t>11</a:t>
+                      </a:r>
+                      <a:endParaRPr lang="en-US" sz="1200" dirty="0"/>
+                    </a:p>
+                  </a:txBody>
+                  <a:tcPr marL="88900" marR="88900" marT="50800" marB="50800" anchor="ctr">
+                    <a:lnL w="6350" cap="flat" cmpd="sng" algn="ctr">
+                      <a:solidFill>
+                        <a:srgbClr val="E3DED7"/>
+                      </a:solidFill>
+                      <a:prstDash val="solid"/>
+                      <a:round/>
+                      <a:headEnd type="none" w="med" len="med"/>
+                      <a:tailEnd type="none" w="med" len="med"/>
+                    </a:lnL>
+                    <a:lnR w="6350" cap="flat" cmpd="sng" algn="ctr">
+                      <a:solidFill>
+                        <a:srgbClr val="E3DED7"/>
+                      </a:solidFill>
+                      <a:prstDash val="solid"/>
+                      <a:round/>
+                      <a:headEnd type="none" w="med" len="med"/>
+                      <a:tailEnd type="none" w="med" len="med"/>
+                    </a:lnR>
+                    <a:lnT w="6350" cap="flat" cmpd="sng" algn="ctr">
+                      <a:solidFill>
+                        <a:srgbClr val="E3DED7"/>
+                      </a:solidFill>
+                      <a:prstDash val="solid"/>
+                      <a:round/>
+                      <a:headEnd type="none" w="med" len="med"/>
+                      <a:tailEnd type="none" w="med" len="med"/>
+                    </a:lnT>
+                    <a:lnB w="6350" cap="flat" cmpd="sng" algn="ctr">
+                      <a:solidFill>
+                        <a:srgbClr val="E3DED7"/>
+                      </a:solidFill>
+                      <a:prstDash val="solid"/>
+                      <a:round/>
+                      <a:headEnd type="none" w="med" len="med"/>
+                      <a:tailEnd type="none" w="med" len="med"/>
+                    </a:lnB>
+                    <a:solidFill>
+                      <a:srgbClr val="F7F5F2"/>
+                    </a:solidFill>
+                  </a:tcPr>
+                </a:tc>
+              </a:tr>
+              <a:tr h="0">
+                <a:tc>
+                  <a:txBody>
+                    <a:bodyPr/>
+                    <a:lstStyle/>
+                    <a:p>
+                      <a:pPr indent="0" marL="0">
+                        <a:buNone/>
+                      </a:pPr>
+                      <a:r>
+                        <a:rPr lang="en-US" sz="1200" b="1" dirty="0">
+                          <a:solidFill>
+                            <a:srgbClr val="8A1626"/>
+                          </a:solidFill>
+                        </a:rPr>
+                        <a:t>DRS-7xxx</a:t>
+                      </a:r>
+                      <a:endParaRPr lang="en-US" sz="1200" dirty="0"/>
+                    </a:p>
+                  </a:txBody>
+                  <a:tcPr marL="88900" marR="88900" marT="50800" marB="50800" anchor="ctr">
+                    <a:lnL w="6350" cap="flat" cmpd="sng" algn="ctr">
+                      <a:solidFill>
+                        <a:srgbClr val="E3DED7"/>
+                      </a:solidFill>
+                      <a:prstDash val="solid"/>
+                      <a:round/>
+                      <a:headEnd type="none" w="med" len="med"/>
+                      <a:tailEnd type="none" w="med" len="med"/>
+                    </a:lnL>
+                    <a:lnR w="6350" cap="flat" cmpd="sng" algn="ctr">
+                      <a:solidFill>
+                        <a:srgbClr val="E3DED7"/>
+                      </a:solidFill>
+                      <a:prstDash val="solid"/>
+                      <a:round/>
+                      <a:headEnd type="none" w="med" len="med"/>
+                      <a:tailEnd type="none" w="med" len="med"/>
+                    </a:lnR>
+                    <a:lnT w="6350" cap="flat" cmpd="sng" algn="ctr">
+                      <a:solidFill>
+                        <a:srgbClr val="E3DED7"/>
+                      </a:solidFill>
+                      <a:prstDash val="solid"/>
+                      <a:round/>
+                      <a:headEnd type="none" w="med" len="med"/>
+                      <a:tailEnd type="none" w="med" len="med"/>
+                    </a:lnT>
+                    <a:lnB w="6350" cap="flat" cmpd="sng" algn="ctr">
+                      <a:solidFill>
+                        <a:srgbClr val="E3DED7"/>
+                      </a:solidFill>
+                      <a:prstDash val="solid"/>
+                      <a:round/>
+                      <a:headEnd type="none" w="med" len="med"/>
+                      <a:tailEnd type="none" w="med" len="med"/>
+                    </a:lnB>
+                    <a:solidFill>
+                      <a:srgbClr val="FFFFFF"/>
+                    </a:solidFill>
+                  </a:tcPr>
+                </a:tc>
+                <a:tc>
+                  <a:txBody>
+                    <a:bodyPr/>
+                    <a:lstStyle/>
+                    <a:p>
+                      <a:pPr indent="0" marL="0">
+                        <a:buNone/>
+                      </a:pPr>
+                      <a:r>
+                        <a:rPr lang="en-US" sz="1200" dirty="0">
+                          <a:solidFill>
+                            <a:srgbClr val="1A1A1A"/>
+                          </a:solidFill>
+                        </a:rPr>
+                        <a:t>Collaboration</a:t>
+                      </a:r>
+                      <a:endParaRPr lang="en-US" sz="1200" dirty="0"/>
+                    </a:p>
+                  </a:txBody>
+                  <a:tcPr marL="88900" marR="88900" marT="50800" marB="50800" anchor="ctr">
+                    <a:lnL w="6350" cap="flat" cmpd="sng" algn="ctr">
+                      <a:solidFill>
+                        <a:srgbClr val="E3DED7"/>
+                      </a:solidFill>
+                      <a:prstDash val="solid"/>
+                      <a:round/>
+                      <a:headEnd type="none" w="med" len="med"/>
+                      <a:tailEnd type="none" w="med" len="med"/>
+                    </a:lnL>
+                    <a:lnR w="6350" cap="flat" cmpd="sng" algn="ctr">
+                      <a:solidFill>
+                        <a:srgbClr val="E3DED7"/>
+                      </a:solidFill>
+                      <a:prstDash val="solid"/>
+                      <a:round/>
+                      <a:headEnd type="none" w="med" len="med"/>
+                      <a:tailEnd type="none" w="med" len="med"/>
+                    </a:lnR>
+                    <a:lnT w="6350" cap="flat" cmpd="sng" algn="ctr">
+                      <a:solidFill>
+                        <a:srgbClr val="E3DED7"/>
+                      </a:solidFill>
+                      <a:prstDash val="solid"/>
+                      <a:round/>
+                      <a:headEnd type="none" w="med" len="med"/>
+                      <a:tailEnd type="none" w="med" len="med"/>
+                    </a:lnT>
+                    <a:lnB w="6350" cap="flat" cmpd="sng" algn="ctr">
+                      <a:solidFill>
+                        <a:srgbClr val="E3DED7"/>
+                      </a:solidFill>
+                      <a:prstDash val="solid"/>
+                      <a:round/>
+                      <a:headEnd type="none" w="med" len="med"/>
+                      <a:tailEnd type="none" w="med" len="med"/>
+                    </a:lnB>
+                    <a:solidFill>
+                      <a:srgbClr val="FFFFFF"/>
+                    </a:solidFill>
+                  </a:tcPr>
+                </a:tc>
+                <a:tc>
+                  <a:txBody>
+                    <a:bodyPr/>
+                    <a:lstStyle/>
+                    <a:p>
+                      <a:pPr indent="0" marL="0">
+                        <a:buNone/>
+                      </a:pPr>
+                      <a:r>
+                        <a:rPr lang="en-US" sz="1200" dirty="0">
+                          <a:solidFill>
+                            <a:srgbClr val="1A1A1A"/>
+                          </a:solidFill>
+                        </a:rPr>
+                        <a:t>16</a:t>
+                      </a:r>
+                      <a:endParaRPr lang="en-US" sz="1200" dirty="0"/>
+                    </a:p>
+                  </a:txBody>
+                  <a:tcPr marL="88900" marR="88900" marT="50800" marB="50800" anchor="ctr">
+                    <a:lnL w="6350" cap="flat" cmpd="sng" algn="ctr">
+                      <a:solidFill>
+                        <a:srgbClr val="E3DED7"/>
+                      </a:solidFill>
+                      <a:prstDash val="solid"/>
+                      <a:round/>
+                      <a:headEnd type="none" w="med" len="med"/>
+                      <a:tailEnd type="none" w="med" len="med"/>
+                    </a:lnL>
+                    <a:lnR w="6350" cap="flat" cmpd="sng" algn="ctr">
+                      <a:solidFill>
+                        <a:srgbClr val="E3DED7"/>
+                      </a:solidFill>
+                      <a:prstDash val="solid"/>
+                      <a:round/>
+                      <a:headEnd type="none" w="med" len="med"/>
+                      <a:tailEnd type="none" w="med" len="med"/>
+                    </a:lnR>
+                    <a:lnT w="6350" cap="flat" cmpd="sng" algn="ctr">
+                      <a:solidFill>
+                        <a:srgbClr val="E3DED7"/>
+                      </a:solidFill>
+                      <a:prstDash val="solid"/>
+                      <a:round/>
+                      <a:headEnd type="none" w="med" len="med"/>
+                      <a:tailEnd type="none" w="med" len="med"/>
+                    </a:lnT>
+                    <a:lnB w="6350" cap="flat" cmpd="sng" algn="ctr">
+                      <a:solidFill>
+                        <a:srgbClr val="E3DED7"/>
+                      </a:solidFill>
+                      <a:prstDash val="solid"/>
+                      <a:round/>
+                      <a:headEnd type="none" w="med" len="med"/>
+                      <a:tailEnd type="none" w="med" len="med"/>
+                    </a:lnB>
+                    <a:solidFill>
+                      <a:srgbClr val="FFFFFF"/>
+                    </a:solidFill>
+                  </a:tcPr>
+                </a:tc>
+              </a:tr>
+              <a:tr h="0">
+                <a:tc>
+                  <a:txBody>
+                    <a:bodyPr/>
+                    <a:lstStyle/>
+                    <a:p>
+                      <a:pPr indent="0" marL="0">
+                        <a:buNone/>
+                      </a:pPr>
+                      <a:r>
+                        <a:rPr lang="en-US" sz="1200" b="1" dirty="0">
+                          <a:solidFill>
+                            <a:srgbClr val="8A1626"/>
+                          </a:solidFill>
+                        </a:rPr>
                         <a:t>DRS-8xxx</a:t>
                       </a:r>
                       <a:endParaRPr lang="en-US" sz="1200" dirty="0"/>
@@ -27502,7 +27767,7 @@
                       <a:tailEnd type="none" w="med" len="med"/>
                     </a:lnB>
                     <a:solidFill>
-                      <a:srgbClr val="FFFFFF"/>
+                      <a:srgbClr val="F7F5F2"/>
                     </a:solidFill>
                   </a:tcPr>
                 </a:tc>
@@ -27563,7 +27828,7 @@
                       <a:tailEnd type="none" w="med" len="med"/>
                     </a:lnB>
                     <a:solidFill>
-                      <a:srgbClr val="FFFFFF"/>
+                      <a:srgbClr val="F7F5F2"/>
                     </a:solidFill>
                   </a:tcPr>
                 </a:tc>
@@ -27624,6 +27889,191 @@
                       <a:tailEnd type="none" w="med" len="med"/>
                     </a:lnB>
                     <a:solidFill>
+                      <a:srgbClr val="F7F5F2"/>
+                    </a:solidFill>
+                  </a:tcPr>
+                </a:tc>
+              </a:tr>
+              <a:tr h="0">
+                <a:tc>
+                  <a:txBody>
+                    <a:bodyPr/>
+                    <a:lstStyle/>
+                    <a:p>
+                      <a:pPr indent="0" marL="0">
+                        <a:buNone/>
+                      </a:pPr>
+                      <a:r>
+                        <a:rPr lang="en-US" sz="1200" b="1" dirty="0">
+                          <a:solidFill>
+                            <a:srgbClr val="8A1626"/>
+                          </a:solidFill>
+                        </a:rPr>
+                        <a:t>DRS-9xxx</a:t>
+                      </a:r>
+                      <a:endParaRPr lang="en-US" sz="1200" dirty="0"/>
+                    </a:p>
+                  </a:txBody>
+                  <a:tcPr marL="88900" marR="88900" marT="50800" marB="50800" anchor="ctr">
+                    <a:lnL w="6350" cap="flat" cmpd="sng" algn="ctr">
+                      <a:solidFill>
+                        <a:srgbClr val="E3DED7"/>
+                      </a:solidFill>
+                      <a:prstDash val="solid"/>
+                      <a:round/>
+                      <a:headEnd type="none" w="med" len="med"/>
+                      <a:tailEnd type="none" w="med" len="med"/>
+                    </a:lnL>
+                    <a:lnR w="6350" cap="flat" cmpd="sng" algn="ctr">
+                      <a:solidFill>
+                        <a:srgbClr val="E3DED7"/>
+                      </a:solidFill>
+                      <a:prstDash val="solid"/>
+                      <a:round/>
+                      <a:headEnd type="none" w="med" len="med"/>
+                      <a:tailEnd type="none" w="med" len="med"/>
+                    </a:lnR>
+                    <a:lnT w="6350" cap="flat" cmpd="sng" algn="ctr">
+                      <a:solidFill>
+                        <a:srgbClr val="E3DED7"/>
+                      </a:solidFill>
+                      <a:prstDash val="solid"/>
+                      <a:round/>
+                      <a:headEnd type="none" w="med" len="med"/>
+                      <a:tailEnd type="none" w="med" len="med"/>
+                    </a:lnT>
+                    <a:lnB w="6350" cap="flat" cmpd="sng" algn="ctr">
+                      <a:solidFill>
+                        <a:srgbClr val="E3DED7"/>
+                      </a:solidFill>
+                      <a:prstDash val="solid"/>
+                      <a:round/>
+                      <a:headEnd type="none" w="med" len="med"/>
+                      <a:tailEnd type="none" w="med" len="med"/>
+                    </a:lnB>
+                    <a:solidFill>
+                      <a:srgbClr val="FFFFFF"/>
+                    </a:solidFill>
+                  </a:tcPr>
+                </a:tc>
+                <a:tc>
+                  <a:txBody>
+                    <a:bodyPr/>
+                    <a:lstStyle/>
+                    <a:p>
+                      <a:pPr indent="0" marL="0">
+                        <a:buNone/>
+                      </a:pPr>
+                      <a:r>
+                        <a:rPr lang="en-US" sz="1200" dirty="0">
+                          <a:solidFill>
+                            <a:srgbClr val="1A1A1A"/>
+                          </a:solidFill>
+                        </a:rPr>
+                        <a:t>Business intelligence</a:t>
+                      </a:r>
+                      <a:endParaRPr lang="en-US" sz="1200" dirty="0"/>
+                    </a:p>
+                  </a:txBody>
+                  <a:tcPr marL="88900" marR="88900" marT="50800" marB="50800" anchor="ctr">
+                    <a:lnL w="6350" cap="flat" cmpd="sng" algn="ctr">
+                      <a:solidFill>
+                        <a:srgbClr val="E3DED7"/>
+                      </a:solidFill>
+                      <a:prstDash val="solid"/>
+                      <a:round/>
+                      <a:headEnd type="none" w="med" len="med"/>
+                      <a:tailEnd type="none" w="med" len="med"/>
+                    </a:lnL>
+                    <a:lnR w="6350" cap="flat" cmpd="sng" algn="ctr">
+                      <a:solidFill>
+                        <a:srgbClr val="E3DED7"/>
+                      </a:solidFill>
+                      <a:prstDash val="solid"/>
+                      <a:round/>
+                      <a:headEnd type="none" w="med" len="med"/>
+                      <a:tailEnd type="none" w="med" len="med"/>
+                    </a:lnR>
+                    <a:lnT w="6350" cap="flat" cmpd="sng" algn="ctr">
+                      <a:solidFill>
+                        <a:srgbClr val="E3DED7"/>
+                      </a:solidFill>
+                      <a:prstDash val="solid"/>
+                      <a:round/>
+                      <a:headEnd type="none" w="med" len="med"/>
+                      <a:tailEnd type="none" w="med" len="med"/>
+                    </a:lnT>
+                    <a:lnB w="6350" cap="flat" cmpd="sng" algn="ctr">
+                      <a:solidFill>
+                        <a:srgbClr val="E3DED7"/>
+                      </a:solidFill>
+                      <a:prstDash val="solid"/>
+                      <a:round/>
+                      <a:headEnd type="none" w="med" len="med"/>
+                      <a:tailEnd type="none" w="med" len="med"/>
+                    </a:lnB>
+                    <a:solidFill>
+                      <a:srgbClr val="FFFFFF"/>
+                    </a:solidFill>
+                  </a:tcPr>
+                </a:tc>
+                <a:tc>
+                  <a:txBody>
+                    <a:bodyPr/>
+                    <a:lstStyle/>
+                    <a:p>
+                      <a:pPr indent="0" marL="0">
+                        <a:buNone/>
+                      </a:pPr>
+                      <a:r>
+                        <a:rPr lang="en-US" sz="1200" dirty="0">
+                          <a:solidFill>
+                            <a:srgbClr val="1A1A1A"/>
+                          </a:solidFill>
+                        </a:rPr>
+                        <a:t>96</a:t>
+                      </a:r>
+                      <a:endParaRPr lang="en-US" sz="1200" dirty="0"/>
+                    </a:p>
+                  </a:txBody>
+                  <a:tcPr marL="88900" marR="88900" marT="50800" marB="50800" anchor="ctr">
+                    <a:lnL w="6350" cap="flat" cmpd="sng" algn="ctr">
+                      <a:solidFill>
+                        <a:srgbClr val="E3DED7"/>
+                      </a:solidFill>
+                      <a:prstDash val="solid"/>
+                      <a:round/>
+                      <a:headEnd type="none" w="med" len="med"/>
+                      <a:tailEnd type="none" w="med" len="med"/>
+                    </a:lnL>
+                    <a:lnR w="6350" cap="flat" cmpd="sng" algn="ctr">
+                      <a:solidFill>
+                        <a:srgbClr val="E3DED7"/>
+                      </a:solidFill>
+                      <a:prstDash val="solid"/>
+                      <a:round/>
+                      <a:headEnd type="none" w="med" len="med"/>
+                      <a:tailEnd type="none" w="med" len="med"/>
+                    </a:lnR>
+                    <a:lnT w="6350" cap="flat" cmpd="sng" algn="ctr">
+                      <a:solidFill>
+                        <a:srgbClr val="E3DED7"/>
+                      </a:solidFill>
+                      <a:prstDash val="solid"/>
+                      <a:round/>
+                      <a:headEnd type="none" w="med" len="med"/>
+                      <a:tailEnd type="none" w="med" len="med"/>
+                    </a:lnT>
+                    <a:lnB w="6350" cap="flat" cmpd="sng" algn="ctr">
+                      <a:solidFill>
+                        <a:srgbClr val="E3DED7"/>
+                      </a:solidFill>
+                      <a:prstDash val="solid"/>
+                      <a:round/>
+                      <a:headEnd type="none" w="med" len="med"/>
+                      <a:tailEnd type="none" w="med" len="med"/>
+                    </a:lnB>
+                    <a:solidFill>
                       <a:srgbClr val="FFFFFF"/>
                     </a:solidFill>
                   </a:tcPr>
@@ -27703,7 +28153,7 @@
                   <a:srgbClr val="8A1626"/>
                 </a:solidFill>
               </a:rPr>
-              <a:t>65</a:t>
+              <a:t>187</a:t>
             </a:r>
             <a:endParaRPr lang="en-US" sz="2600" dirty="0"/>
           </a:p>
@@ -27739,7 +28189,7 @@
                   <a:srgbClr val="4A5058"/>
                 </a:solidFill>
               </a:rPr>
-              <a:t>Codes in eight families, one table</a:t>
+              <a:t>Codes in nine families, one table</a:t>
             </a:r>
             <a:endParaRPr lang="en-US" sz="1300" dirty="0"/>
           </a:p>
@@ -27815,7 +28265,7 @@
                   <a:srgbClr val="8A1626"/>
                 </a:solidFill>
               </a:rPr>
-              <a:t>34</a:t>
+              <a:t>42</a:t>
             </a:r>
             <a:endParaRPr lang="en-US" sz="2600" dirty="0"/>
           </a:p>
@@ -28095,7 +28545,7 @@
             <a:pPr algn="r"/>
             <a:fld id="{F7021451-1387-4CA6-816F-3879F97B5CBC}" type="slidenum">
               <a:rPr b="1" lang="en-US"/>
-              <a:t>34</a:t>
+              <a:t>38</a:t>
             </a:fld>
             <a:endParaRPr lang="en-US"/>
           </a:p>
@@ -28196,7 +28646,7 @@
                   <a:srgbClr val="1A1A1A"/>
                 </a:solidFill>
               </a:rPr>
-              <a:t>1,939 tests, three browsers, one gate</a:t>
+              <a:t>4,435 tests, three browsers, one gate</a:t>
             </a:r>
             <a:endParaRPr lang="en-US" sz="2600" dirty="0"/>
           </a:p>
@@ -28292,7 +28742,7 @@
                   <a:srgbClr val="8A1626"/>
                 </a:solidFill>
               </a:rPr>
-              <a:t>1,063</a:t>
+              <a:t>2,396</a:t>
             </a:r>
             <a:endParaRPr lang="en-US" sz="2600" dirty="0"/>
           </a:p>
@@ -28328,7 +28778,7 @@
                   <a:srgbClr val="4A5058"/>
                 </a:solidFill>
               </a:rPr>
-              <a:t>Java tests (plus 19 parameterised)</a:t>
+              <a:t>Java tests (plus 36 parameterised)</a:t>
             </a:r>
             <a:endParaRPr lang="en-US" sz="1150" dirty="0"/>
           </a:p>
@@ -28404,7 +28854,7 @@
                   <a:srgbClr val="8A1626"/>
                 </a:solidFill>
               </a:rPr>
-              <a:t>739</a:t>
+              <a:t>1,759</a:t>
             </a:r>
             <a:endParaRPr lang="en-US" sz="2600" dirty="0"/>
           </a:p>
@@ -28440,7 +28890,7 @@
                   <a:srgbClr val="4A5058"/>
                 </a:solidFill>
               </a:rPr>
-              <a:t>Console tests, browser tests included</a:t>
+              <a:t>Console tests, 520 of them in a browser</a:t>
             </a:r>
             <a:endParaRPr lang="en-US" sz="1150" dirty="0"/>
           </a:p>
@@ -28516,7 +28966,7 @@
                   <a:srgbClr val="8A1626"/>
                 </a:solidFill>
               </a:rPr>
-              <a:t>137</a:t>
+              <a:t>280</a:t>
             </a:r>
             <a:endParaRPr lang="en-US" sz="2600" dirty="0"/>
           </a:p>
@@ -28824,7 +29274,7 @@
             <a:pPr algn="r"/>
             <a:fld id="{F7021451-1387-4CA6-816F-3879F97B5CBC}" type="slidenum">
               <a:rPr b="1" lang="en-US"/>
-              <a:t>35</a:t>
+              <a:t>39</a:t>
             </a:fld>
             <a:endParaRPr lang="en-US"/>
           </a:p>
@@ -29948,7 +30398,7 @@
             <a:pPr algn="r"/>
             <a:fld id="{F7021451-1387-4CA6-816F-3879F97B5CBC}" type="slidenum">
               <a:rPr b="1" lang="en-US"/>
-              <a:t>36</a:t>
+              <a:t>40</a:t>
             </a:fld>
             <a:endParaRPr lang="en-US"/>
           </a:p>
@@ -31911,7 +32361,7 @@
             <a:pPr algn="r"/>
             <a:fld id="{F7021451-1387-4CA6-816F-3879F97B5CBC}" type="slidenum">
               <a:rPr b="1" lang="en-US"/>
-              <a:t>37</a:t>
+              <a:t>42</a:t>
             </a:fld>
             <a:endParaRPr lang="en-US"/>
           </a:p>
@@ -32852,7 +33302,7 @@
                   <a:srgbClr val="8A1626"/>
                 </a:solidFill>
               </a:rPr>
-              <a:t>~11 min</a:t>
+              <a:t>21 · 25</a:t>
             </a:r>
             <a:endParaRPr lang="en-US" sz="2600" dirty="0"/>
           </a:p>
@@ -32888,7 +33338,7 @@
                   <a:srgbClr val="4A5058"/>
                 </a:solidFill>
               </a:rPr>
-              <a:t>A full drill, down from about 22</a:t>
+              <a:t>Every commit verified on Java 21 and on Java 25</a:t>
             </a:r>
             <a:endParaRPr lang="en-US" sz="1300" dirty="0"/>
           </a:p>
@@ -32964,7 +33414,7 @@
                   <a:srgbClr val="8A1626"/>
                 </a:solidFill>
               </a:rPr>
-              <a:t>23</a:t>
+              <a:t>32</a:t>
             </a:r>
             <a:endParaRPr lang="en-US" sz="2600" dirty="0"/>
           </a:p>
@@ -33000,7 +33450,7 @@
                   <a:srgbClr val="4A5058"/>
                 </a:solidFill>
               </a:rPr>
-              <a:t>Releases, 1.0 to 1.18, 30 Sep to 6 Oct 2026</a:t>
+              <a:t>Releases, 1.0 to 2.4, 30 Sep to 19 Oct 2026</a:t>
             </a:r>
             <a:endParaRPr lang="en-US" sz="1300" dirty="0"/>
           </a:p>
@@ -33076,7 +33526,7 @@
                   <a:srgbClr val="8A1626"/>
                 </a:solidFill>
               </a:rPr>
-              <a:t>543</a:t>
+              <a:t>1,421</a:t>
             </a:r>
             <a:endParaRPr lang="en-US" sz="2600" dirty="0"/>
           </a:p>
@@ -33244,7 +33694,7 @@
             <a:pPr algn="r"/>
             <a:fld id="{F7021451-1387-4CA6-816F-3879F97B5CBC}" type="slidenum">
               <a:rPr b="1" lang="en-US"/>
-              <a:t>38</a:t>
+              <a:t>43</a:t>
             </a:fld>
             <a:endParaRPr lang="en-US"/>
           </a:p>
@@ -33417,7 +33867,7 @@
                   <a:srgbClr val="A51C30"/>
                 </a:solidFill>
               </a:rPr>
-              <a:t>▪  99 guides and references</a:t>
+              <a:t>▪  155 guides and references</a:t>
             </a:r>
             <a:endParaRPr lang="en-US" sz="1500" dirty="0"/>
           </a:p>
@@ -33434,7 +33884,7 @@
                   <a:srgbClr val="4A5058"/>
                 </a:solidFill>
               </a:rPr>
-              <a:t>User, admin, CLI, IDE, packs, connectors, architecture and 20 ADRs.</a:t>
+              <a:t>User, admin, CLI, BI, packs, connectors, architecture, 19 tutorials and 21 ADRs.</a:t>
             </a:r>
             <a:endParaRPr lang="en-US" sz="1500" dirty="0"/>
           </a:p>
@@ -33479,7 +33929,7 @@
                   <a:srgbClr val="A51C30"/>
                 </a:solidFill>
               </a:rPr>
-              <a:t>▪  12 core modules</a:t>
+              <a:t>▪  14 core modules</a:t>
             </a:r>
             <a:endParaRPr lang="en-US" sz="1500" dirty="0"/>
           </a:p>
@@ -33496,7 +33946,7 @@
                   <a:srgbClr val="4A5058"/>
                 </a:solidFill>
               </a:rPr>
-              <a:t>Plus 15 source plugins, a server, integration tests and benchmarks.</a:t>
+              <a:t>Plus 17 source plugins, a server, integration tests and benchmarks.</a:t>
             </a:r>
             <a:endParaRPr lang="en-US" sz="1500" dirty="0"/>
           </a:p>
@@ -33541,7 +33991,7 @@
             <a:pPr algn="r"/>
             <a:fld id="{F7021451-1387-4CA6-816F-3879F97B5CBC}" type="slidenum">
               <a:rPr b="1" lang="en-US"/>
-              <a:t>39</a:t>
+              <a:t>44</a:t>
             </a:fld>
             <a:endParaRPr lang="en-US"/>
           </a:p>
@@ -33715,7 +34165,7 @@
                   <a:srgbClr val="4A5058"/>
                 </a:solidFill>
               </a:rPr>
-              <a:t>A swap, an FX trade, a netting set, a ticket or a gene variant, with its headline figures in a strip and its detail in up to twenty-one kinds of panel.</a:t>
+              <a:t>A swap, an FX trade, a netting set, a ticket or a gene variant, with its headline figures in a strip and its detail in up to twenty-two kinds of panel.</a:t>
             </a:r>
             <a:endParaRPr lang="en-US" sz="1900" dirty="0"/>
           </a:p>
@@ -34168,7 +34618,7 @@
                   <a:srgbClr val="F6E6E9"/>
                 </a:solidFill>
               </a:rPr>
-              <a:t>Finish embedding, then price on the server, prove Windows, and run it for real.</a:t>
+              <a:t>Sharing and integration, then AI, then a real-life QA and production readiness, then 3.0.</a:t>
             </a:r>
             <a:endParaRPr lang="en-US" sz="1900" dirty="0"/>
           </a:p>
@@ -34213,7 +34663,7 @@
             <a:pPr algn="r"/>
             <a:fld id="{F7021451-1387-4CA6-816F-3879F97B5CBC}" type="slidenum">
               <a:rPr b="1" lang="en-US"/>
-              <a:t>40</a:t>
+              <a:t>45</a:t>
             </a:fld>
             <a:endParaRPr lang="en-US"/>
           </a:p>
@@ -34314,7 +34764,7 @@
                   <a:srgbClr val="1A1A1A"/>
                 </a:solidFill>
               </a:rPr>
-              <a:t>What is left — and what each item is</a:t>
+              <a:t>What comes next — and what each release is</a:t>
             </a:r>
             <a:endParaRPr lang="en-US" sz="2600" dirty="0"/>
           </a:p>
@@ -34567,7 +35017,7 @@
                             <a:srgbClr val="8A1626"/>
                           </a:solidFill>
                         </a:rPr>
-                        <a:t>Elements: tests</a:t>
+                        <a:t>2.5.0 Drishti*net</a:t>
                       </a:r>
                       <a:endParaRPr lang="en-US" sz="1350" dirty="0"/>
                     </a:p>
@@ -34628,7 +35078,7 @@
                             <a:srgbClr val="1A1A1A"/>
                           </a:solidFill>
                         </a:rPr>
-                        <a:t>A foreign-origin host app, framework smoke tests in three browsers, a small load test</a:t>
+                        <a:t>Several servers as one: gossip, digests, routing, scatter-gather, failover; built, in release testing</a:t>
                       </a:r>
                       <a:endParaRPr lang="en-US" sz="1350" dirty="0"/>
                     </a:p>
@@ -34689,7 +35139,7 @@
                             <a:srgbClr val="1A1A1A"/>
                           </a:solidFill>
                         </a:rPr>
-                        <a:t>All pass in Chromium, Firefox and WebKit</a:t>
+                        <a:t>The browser rehearsal and the drill pass</a:t>
                       </a:r>
                       <a:endParaRPr lang="en-US" sz="1350" dirty="0"/>
                     </a:p>
@@ -34752,7 +35202,7 @@
                             <a:srgbClr val="8A1626"/>
                           </a:solidFill>
                         </a:rPr>
-                        <a:t>Elements: distribution</a:t>
+                        <a:t>2.6.0 Sharing</a:t>
                       </a:r>
                       <a:endParaRPr lang="en-US" sz="1350" dirty="0"/>
                     </a:p>
@@ -34813,7 +35263,7 @@
                             <a:srgbClr val="1A1A1A"/>
                           </a:solidFill>
                         </a:rPr>
-                        <a:t>npm package, TypeScript declarations, version aliases, SRI hashes</a:t>
+                        <a:t>Paginated reports, send and push, SQL and Excel feeds, embed tokens, the Sajha MCP connector, field parameters</a:t>
                       </a:r>
                       <a:endParaRPr lang="en-US" sz="1350" dirty="0"/>
                     </a:p>
@@ -34874,7 +35324,7 @@
                             <a:srgbClr val="1A1A1A"/>
                           </a:solidFill>
                         </a:rPr>
-                        <a:t>A host installs one exact version</a:t>
+                        <a:t>A statement bursts to ten readers, each masked</a:t>
                       </a:r>
                       <a:endParaRPr lang="en-US" sz="1350" dirty="0"/>
                     </a:p>
@@ -34937,7 +35387,7 @@
                             <a:srgbClr val="8A1626"/>
                           </a:solidFill>
                         </a:rPr>
-                        <a:t>Elements: more elements</a:t>
+                        <a:t>2.7.0 AI</a:t>
                       </a:r>
                       <a:endParaRPr lang="en-US" sz="1350" dirty="0"/>
                     </a:p>
@@ -34998,7 +35448,7 @@
                             <a:srgbClr val="1A1A1A"/>
                           </a:solidFill>
                         </a:rPr>
-                        <a:t>&lt;drishti-panel&gt;, &lt;drishti-about&gt;, &lt;drishti-search&gt;</a:t>
+                        <a:t>GenUI (an agent composes a live screen from governed Sutra fragments) and AI management</a:t>
                       </a:r>
                       <a:endParaRPr lang="en-US" sz="1350" dirty="0"/>
                     </a:p>
@@ -35059,7 +35509,7 @@
                             <a:srgbClr val="1A1A1A"/>
                           </a:solidFill>
                         </a:rPr>
-                        <a:t>One panel or search box anywhere</a:t>
+                        <a:t>An AI answer uses only what its user may see</a:t>
                       </a:r>
                       <a:endParaRPr lang="en-US" sz="1350" dirty="0"/>
                     </a:p>
@@ -35122,7 +35572,7 @@
                             <a:srgbClr val="8A1626"/>
                           </a:solidFill>
                         </a:rPr>
-                        <a:t>Server-side pricing</a:t>
+                        <a:t>Real-life QA</a:t>
                       </a:r>
                       <a:endParaRPr lang="en-US" sz="1350" dirty="0"/>
                     </a:p>
@@ -35183,7 +35633,7 @@
                             <a:srgbClr val="1A1A1A"/>
                           </a:solidFill>
                         </a:rPr>
-                        <a:t>A quant service on QuantLib, in five phases</a:t>
+                        <a:t>Real users' tasks on real-shaped data, outside the builders' own tests</a:t>
                       </a:r>
                       <a:endParaRPr lang="en-US" sz="1350" dirty="0"/>
                     </a:p>
@@ -35227,6 +35677,561 @@
                     </a:lnB>
                     <a:solidFill>
                       <a:srgbClr val="FFFFFF"/>
+                    </a:solidFill>
+                  </a:tcPr>
+                </a:tc>
+                <a:tc>
+                  <a:txBody>
+                    <a:bodyPr/>
+                    <a:lstStyle/>
+                    <a:p>
+                      <a:pPr indent="0" marL="0">
+                        <a:buNone/>
+                      </a:pPr>
+                      <a:r>
+                        <a:rPr lang="en-US" sz="1350" dirty="0">
+                          <a:solidFill>
+                            <a:srgbClr val="1A1A1A"/>
+                          </a:solidFill>
+                        </a:rPr>
+                        <a:t>Every finding triaged</a:t>
+                      </a:r>
+                      <a:endParaRPr lang="en-US" sz="1350" dirty="0"/>
+                    </a:p>
+                  </a:txBody>
+                  <a:tcPr marL="88900" marR="88900" marT="50800" marB="50800" anchor="ctr">
+                    <a:lnL w="6350" cap="flat" cmpd="sng" algn="ctr">
+                      <a:solidFill>
+                        <a:srgbClr val="E3DED7"/>
+                      </a:solidFill>
+                      <a:prstDash val="solid"/>
+                      <a:round/>
+                      <a:headEnd type="none" w="med" len="med"/>
+                      <a:tailEnd type="none" w="med" len="med"/>
+                    </a:lnL>
+                    <a:lnR w="6350" cap="flat" cmpd="sng" algn="ctr">
+                      <a:solidFill>
+                        <a:srgbClr val="E3DED7"/>
+                      </a:solidFill>
+                      <a:prstDash val="solid"/>
+                      <a:round/>
+                      <a:headEnd type="none" w="med" len="med"/>
+                      <a:tailEnd type="none" w="med" len="med"/>
+                    </a:lnR>
+                    <a:lnT w="6350" cap="flat" cmpd="sng" algn="ctr">
+                      <a:solidFill>
+                        <a:srgbClr val="E3DED7"/>
+                      </a:solidFill>
+                      <a:prstDash val="solid"/>
+                      <a:round/>
+                      <a:headEnd type="none" w="med" len="med"/>
+                      <a:tailEnd type="none" w="med" len="med"/>
+                    </a:lnT>
+                    <a:lnB w="6350" cap="flat" cmpd="sng" algn="ctr">
+                      <a:solidFill>
+                        <a:srgbClr val="E3DED7"/>
+                      </a:solidFill>
+                      <a:prstDash val="solid"/>
+                      <a:round/>
+                      <a:headEnd type="none" w="med" len="med"/>
+                      <a:tailEnd type="none" w="med" len="med"/>
+                    </a:lnB>
+                    <a:solidFill>
+                      <a:srgbClr val="FFFFFF"/>
+                    </a:solidFill>
+                  </a:tcPr>
+                </a:tc>
+              </a:tr>
+              <a:tr h="585216">
+                <a:tc>
+                  <a:txBody>
+                    <a:bodyPr/>
+                    <a:lstStyle/>
+                    <a:p>
+                      <a:pPr indent="0" marL="0">
+                        <a:buNone/>
+                      </a:pPr>
+                      <a:r>
+                        <a:rPr lang="en-US" sz="1350" b="1" dirty="0">
+                          <a:solidFill>
+                            <a:srgbClr val="8A1626"/>
+                          </a:solidFill>
+                        </a:rPr>
+                        <a:t>2.8.0 Readiness</a:t>
+                      </a:r>
+                      <a:endParaRPr lang="en-US" sz="1350" dirty="0"/>
+                    </a:p>
+                  </a:txBody>
+                  <a:tcPr marL="88900" marR="88900" marT="50800" marB="50800" anchor="ctr">
+                    <a:lnL w="6350" cap="flat" cmpd="sng" algn="ctr">
+                      <a:solidFill>
+                        <a:srgbClr val="E3DED7"/>
+                      </a:solidFill>
+                      <a:prstDash val="solid"/>
+                      <a:round/>
+                      <a:headEnd type="none" w="med" len="med"/>
+                      <a:tailEnd type="none" w="med" len="med"/>
+                    </a:lnL>
+                    <a:lnR w="6350" cap="flat" cmpd="sng" algn="ctr">
+                      <a:solidFill>
+                        <a:srgbClr val="E3DED7"/>
+                      </a:solidFill>
+                      <a:prstDash val="solid"/>
+                      <a:round/>
+                      <a:headEnd type="none" w="med" len="med"/>
+                      <a:tailEnd type="none" w="med" len="med"/>
+                    </a:lnR>
+                    <a:lnT w="6350" cap="flat" cmpd="sng" algn="ctr">
+                      <a:solidFill>
+                        <a:srgbClr val="E3DED7"/>
+                      </a:solidFill>
+                      <a:prstDash val="solid"/>
+                      <a:round/>
+                      <a:headEnd type="none" w="med" len="med"/>
+                      <a:tailEnd type="none" w="med" len="med"/>
+                    </a:lnT>
+                    <a:lnB w="6350" cap="flat" cmpd="sng" algn="ctr">
+                      <a:solidFill>
+                        <a:srgbClr val="E3DED7"/>
+                      </a:solidFill>
+                      <a:prstDash val="solid"/>
+                      <a:round/>
+                      <a:headEnd type="none" w="med" len="med"/>
+                      <a:tailEnd type="none" w="med" len="med"/>
+                    </a:lnB>
+                    <a:solidFill>
+                      <a:srgbClr val="F7F5F2"/>
+                    </a:solidFill>
+                  </a:tcPr>
+                </a:tc>
+                <a:tc>
+                  <a:txBody>
+                    <a:bodyPr/>
+                    <a:lstStyle/>
+                    <a:p>
+                      <a:pPr indent="0" marL="0">
+                        <a:buNone/>
+                      </a:pPr>
+                      <a:r>
+                        <a:rPr lang="en-US" sz="1350" dirty="0">
+                          <a:solidFill>
+                            <a:srgbClr val="1A1A1A"/>
+                          </a:solidFill>
+                        </a:rPr>
+                        <a:t>Wave E: the QA findings, governance across environments, 3.0 groundwork</a:t>
+                      </a:r>
+                      <a:endParaRPr lang="en-US" sz="1350" dirty="0"/>
+                    </a:p>
+                  </a:txBody>
+                  <a:tcPr marL="88900" marR="88900" marT="50800" marB="50800" anchor="ctr">
+                    <a:lnL w="6350" cap="flat" cmpd="sng" algn="ctr">
+                      <a:solidFill>
+                        <a:srgbClr val="E3DED7"/>
+                      </a:solidFill>
+                      <a:prstDash val="solid"/>
+                      <a:round/>
+                      <a:headEnd type="none" w="med" len="med"/>
+                      <a:tailEnd type="none" w="med" len="med"/>
+                    </a:lnL>
+                    <a:lnR w="6350" cap="flat" cmpd="sng" algn="ctr">
+                      <a:solidFill>
+                        <a:srgbClr val="E3DED7"/>
+                      </a:solidFill>
+                      <a:prstDash val="solid"/>
+                      <a:round/>
+                      <a:headEnd type="none" w="med" len="med"/>
+                      <a:tailEnd type="none" w="med" len="med"/>
+                    </a:lnR>
+                    <a:lnT w="6350" cap="flat" cmpd="sng" algn="ctr">
+                      <a:solidFill>
+                        <a:srgbClr val="E3DED7"/>
+                      </a:solidFill>
+                      <a:prstDash val="solid"/>
+                      <a:round/>
+                      <a:headEnd type="none" w="med" len="med"/>
+                      <a:tailEnd type="none" w="med" len="med"/>
+                    </a:lnT>
+                    <a:lnB w="6350" cap="flat" cmpd="sng" algn="ctr">
+                      <a:solidFill>
+                        <a:srgbClr val="E3DED7"/>
+                      </a:solidFill>
+                      <a:prstDash val="solid"/>
+                      <a:round/>
+                      <a:headEnd type="none" w="med" len="med"/>
+                      <a:tailEnd type="none" w="med" len="med"/>
+                    </a:lnB>
+                    <a:solidFill>
+                      <a:srgbClr val="F7F5F2"/>
+                    </a:solidFill>
+                  </a:tcPr>
+                </a:tc>
+                <a:tc>
+                  <a:txBody>
+                    <a:bodyPr/>
+                    <a:lstStyle/>
+                    <a:p>
+                      <a:pPr indent="0" marL="0">
+                        <a:buNone/>
+                      </a:pPr>
+                      <a:r>
+                        <a:rPr lang="en-US" sz="1350" dirty="0">
+                          <a:solidFill>
+                            <a:srgbClr val="1A1A1A"/>
+                          </a:solidFill>
+                        </a:rPr>
+                        <a:t>A bundle moves a model from dev to test</a:t>
+                      </a:r>
+                      <a:endParaRPr lang="en-US" sz="1350" dirty="0"/>
+                    </a:p>
+                  </a:txBody>
+                  <a:tcPr marL="88900" marR="88900" marT="50800" marB="50800" anchor="ctr">
+                    <a:lnL w="6350" cap="flat" cmpd="sng" algn="ctr">
+                      <a:solidFill>
+                        <a:srgbClr val="E3DED7"/>
+                      </a:solidFill>
+                      <a:prstDash val="solid"/>
+                      <a:round/>
+                      <a:headEnd type="none" w="med" len="med"/>
+                      <a:tailEnd type="none" w="med" len="med"/>
+                    </a:lnL>
+                    <a:lnR w="6350" cap="flat" cmpd="sng" algn="ctr">
+                      <a:solidFill>
+                        <a:srgbClr val="E3DED7"/>
+                      </a:solidFill>
+                      <a:prstDash val="solid"/>
+                      <a:round/>
+                      <a:headEnd type="none" w="med" len="med"/>
+                      <a:tailEnd type="none" w="med" len="med"/>
+                    </a:lnR>
+                    <a:lnT w="6350" cap="flat" cmpd="sng" algn="ctr">
+                      <a:solidFill>
+                        <a:srgbClr val="E3DED7"/>
+                      </a:solidFill>
+                      <a:prstDash val="solid"/>
+                      <a:round/>
+                      <a:headEnd type="none" w="med" len="med"/>
+                      <a:tailEnd type="none" w="med" len="med"/>
+                    </a:lnT>
+                    <a:lnB w="6350" cap="flat" cmpd="sng" algn="ctr">
+                      <a:solidFill>
+                        <a:srgbClr val="E3DED7"/>
+                      </a:solidFill>
+                      <a:prstDash val="solid"/>
+                      <a:round/>
+                      <a:headEnd type="none" w="med" len="med"/>
+                      <a:tailEnd type="none" w="med" len="med"/>
+                    </a:lnB>
+                    <a:solidFill>
+                      <a:srgbClr val="F7F5F2"/>
+                    </a:solidFill>
+                  </a:tcPr>
+                </a:tc>
+              </a:tr>
+              <a:tr h="585216">
+                <a:tc>
+                  <a:txBody>
+                    <a:bodyPr/>
+                    <a:lstStyle/>
+                    <a:p>
+                      <a:pPr indent="0" marL="0">
+                        <a:buNone/>
+                      </a:pPr>
+                      <a:r>
+                        <a:rPr lang="en-US" sz="1350" b="1" dirty="0">
+                          <a:solidFill>
+                            <a:srgbClr val="8A1626"/>
+                          </a:solidFill>
+                        </a:rPr>
+                        <a:t>3.0</a:t>
+                      </a:r>
+                      <a:endParaRPr lang="en-US" sz="1350" dirty="0"/>
+                    </a:p>
+                  </a:txBody>
+                  <a:tcPr marL="88900" marR="88900" marT="50800" marB="50800" anchor="ctr">
+                    <a:lnL w="6350" cap="flat" cmpd="sng" algn="ctr">
+                      <a:solidFill>
+                        <a:srgbClr val="E3DED7"/>
+                      </a:solidFill>
+                      <a:prstDash val="solid"/>
+                      <a:round/>
+                      <a:headEnd type="none" w="med" len="med"/>
+                      <a:tailEnd type="none" w="med" len="med"/>
+                    </a:lnL>
+                    <a:lnR w="6350" cap="flat" cmpd="sng" algn="ctr">
+                      <a:solidFill>
+                        <a:srgbClr val="E3DED7"/>
+                      </a:solidFill>
+                      <a:prstDash val="solid"/>
+                      <a:round/>
+                      <a:headEnd type="none" w="med" len="med"/>
+                      <a:tailEnd type="none" w="med" len="med"/>
+                    </a:lnR>
+                    <a:lnT w="6350" cap="flat" cmpd="sng" algn="ctr">
+                      <a:solidFill>
+                        <a:srgbClr val="E3DED7"/>
+                      </a:solidFill>
+                      <a:prstDash val="solid"/>
+                      <a:round/>
+                      <a:headEnd type="none" w="med" len="med"/>
+                      <a:tailEnd type="none" w="med" len="med"/>
+                    </a:lnT>
+                    <a:lnB w="6350" cap="flat" cmpd="sng" algn="ctr">
+                      <a:solidFill>
+                        <a:srgbClr val="E3DED7"/>
+                      </a:solidFill>
+                      <a:prstDash val="solid"/>
+                      <a:round/>
+                      <a:headEnd type="none" w="med" len="med"/>
+                      <a:tailEnd type="none" w="med" len="med"/>
+                    </a:lnB>
+                    <a:solidFill>
+                      <a:srgbClr val="FFFFFF"/>
+                    </a:solidFill>
+                  </a:tcPr>
+                </a:tc>
+                <a:tc>
+                  <a:txBody>
+                    <a:bodyPr/>
+                    <a:lstStyle/>
+                    <a:p>
+                      <a:pPr indent="0" marL="0">
+                        <a:buNone/>
+                      </a:pPr>
+                      <a:r>
+                        <a:rPr lang="en-US" sz="1350" dirty="0">
+                          <a:solidFill>
+                            <a:srgbClr val="1A1A1A"/>
+                          </a:solidFill>
+                        </a:rPr>
+                        <a:t>The Excel add-in, a second query engine in production, scale on real servers</a:t>
+                      </a:r>
+                      <a:endParaRPr lang="en-US" sz="1350" dirty="0"/>
+                    </a:p>
+                  </a:txBody>
+                  <a:tcPr marL="88900" marR="88900" marT="50800" marB="50800" anchor="ctr">
+                    <a:lnL w="6350" cap="flat" cmpd="sng" algn="ctr">
+                      <a:solidFill>
+                        <a:srgbClr val="E3DED7"/>
+                      </a:solidFill>
+                      <a:prstDash val="solid"/>
+                      <a:round/>
+                      <a:headEnd type="none" w="med" len="med"/>
+                      <a:tailEnd type="none" w="med" len="med"/>
+                    </a:lnL>
+                    <a:lnR w="6350" cap="flat" cmpd="sng" algn="ctr">
+                      <a:solidFill>
+                        <a:srgbClr val="E3DED7"/>
+                      </a:solidFill>
+                      <a:prstDash val="solid"/>
+                      <a:round/>
+                      <a:headEnd type="none" w="med" len="med"/>
+                      <a:tailEnd type="none" w="med" len="med"/>
+                    </a:lnR>
+                    <a:lnT w="6350" cap="flat" cmpd="sng" algn="ctr">
+                      <a:solidFill>
+                        <a:srgbClr val="E3DED7"/>
+                      </a:solidFill>
+                      <a:prstDash val="solid"/>
+                      <a:round/>
+                      <a:headEnd type="none" w="med" len="med"/>
+                      <a:tailEnd type="none" w="med" len="med"/>
+                    </a:lnT>
+                    <a:lnB w="6350" cap="flat" cmpd="sng" algn="ctr">
+                      <a:solidFill>
+                        <a:srgbClr val="E3DED7"/>
+                      </a:solidFill>
+                      <a:prstDash val="solid"/>
+                      <a:round/>
+                      <a:headEnd type="none" w="med" len="med"/>
+                      <a:tailEnd type="none" w="med" len="med"/>
+                    </a:lnB>
+                    <a:solidFill>
+                      <a:srgbClr val="FFFFFF"/>
+                    </a:solidFill>
+                  </a:tcPr>
+                </a:tc>
+                <a:tc>
+                  <a:txBody>
+                    <a:bodyPr/>
+                    <a:lstStyle/>
+                    <a:p>
+                      <a:pPr indent="0" marL="0">
+                        <a:buNone/>
+                      </a:pPr>
+                      <a:r>
+                        <a:rPr lang="en-US" sz="1350" dirty="0">
+                          <a:solidFill>
+                            <a:srgbClr val="1A1A1A"/>
+                          </a:solidFill>
+                        </a:rPr>
+                        <a:t>Measured on real servers, not extrapolated</a:t>
+                      </a:r>
+                      <a:endParaRPr lang="en-US" sz="1350" dirty="0"/>
+                    </a:p>
+                  </a:txBody>
+                  <a:tcPr marL="88900" marR="88900" marT="50800" marB="50800" anchor="ctr">
+                    <a:lnL w="6350" cap="flat" cmpd="sng" algn="ctr">
+                      <a:solidFill>
+                        <a:srgbClr val="E3DED7"/>
+                      </a:solidFill>
+                      <a:prstDash val="solid"/>
+                      <a:round/>
+                      <a:headEnd type="none" w="med" len="med"/>
+                      <a:tailEnd type="none" w="med" len="med"/>
+                    </a:lnL>
+                    <a:lnR w="6350" cap="flat" cmpd="sng" algn="ctr">
+                      <a:solidFill>
+                        <a:srgbClr val="E3DED7"/>
+                      </a:solidFill>
+                      <a:prstDash val="solid"/>
+                      <a:round/>
+                      <a:headEnd type="none" w="med" len="med"/>
+                      <a:tailEnd type="none" w="med" len="med"/>
+                    </a:lnR>
+                    <a:lnT w="6350" cap="flat" cmpd="sng" algn="ctr">
+                      <a:solidFill>
+                        <a:srgbClr val="E3DED7"/>
+                      </a:solidFill>
+                      <a:prstDash val="solid"/>
+                      <a:round/>
+                      <a:headEnd type="none" w="med" len="med"/>
+                      <a:tailEnd type="none" w="med" len="med"/>
+                    </a:lnT>
+                    <a:lnB w="6350" cap="flat" cmpd="sng" algn="ctr">
+                      <a:solidFill>
+                        <a:srgbClr val="E3DED7"/>
+                      </a:solidFill>
+                      <a:prstDash val="solid"/>
+                      <a:round/>
+                      <a:headEnd type="none" w="med" len="med"/>
+                      <a:tailEnd type="none" w="med" len="med"/>
+                    </a:lnB>
+                    <a:solidFill>
+                      <a:srgbClr val="FFFFFF"/>
+                    </a:solidFill>
+                  </a:tcPr>
+                </a:tc>
+              </a:tr>
+              <a:tr h="585216">
+                <a:tc>
+                  <a:txBody>
+                    <a:bodyPr/>
+                    <a:lstStyle/>
+                    <a:p>
+                      <a:pPr indent="0" marL="0">
+                        <a:buNone/>
+                      </a:pPr>
+                      <a:r>
+                        <a:rPr lang="en-US" sz="1350" b="1" dirty="0">
+                          <a:solidFill>
+                            <a:srgbClr val="8A1626"/>
+                          </a:solidFill>
+                        </a:rPr>
+                        <a:t>Later candidates</a:t>
+                      </a:r>
+                      <a:endParaRPr lang="en-US" sz="1350" dirty="0"/>
+                    </a:p>
+                  </a:txBody>
+                  <a:tcPr marL="88900" marR="88900" marT="50800" marB="50800" anchor="ctr">
+                    <a:lnL w="6350" cap="flat" cmpd="sng" algn="ctr">
+                      <a:solidFill>
+                        <a:srgbClr val="E3DED7"/>
+                      </a:solidFill>
+                      <a:prstDash val="solid"/>
+                      <a:round/>
+                      <a:headEnd type="none" w="med" len="med"/>
+                      <a:tailEnd type="none" w="med" len="med"/>
+                    </a:lnL>
+                    <a:lnR w="6350" cap="flat" cmpd="sng" algn="ctr">
+                      <a:solidFill>
+                        <a:srgbClr val="E3DED7"/>
+                      </a:solidFill>
+                      <a:prstDash val="solid"/>
+                      <a:round/>
+                      <a:headEnd type="none" w="med" len="med"/>
+                      <a:tailEnd type="none" w="med" len="med"/>
+                    </a:lnR>
+                    <a:lnT w="6350" cap="flat" cmpd="sng" algn="ctr">
+                      <a:solidFill>
+                        <a:srgbClr val="E3DED7"/>
+                      </a:solidFill>
+                      <a:prstDash val="solid"/>
+                      <a:round/>
+                      <a:headEnd type="none" w="med" len="med"/>
+                      <a:tailEnd type="none" w="med" len="med"/>
+                    </a:lnT>
+                    <a:lnB w="6350" cap="flat" cmpd="sng" algn="ctr">
+                      <a:solidFill>
+                        <a:srgbClr val="E3DED7"/>
+                      </a:solidFill>
+                      <a:prstDash val="solid"/>
+                      <a:round/>
+                      <a:headEnd type="none" w="med" len="med"/>
+                      <a:tailEnd type="none" w="med" len="med"/>
+                    </a:lnB>
+                    <a:solidFill>
+                      <a:srgbClr val="F7F5F2"/>
+                    </a:solidFill>
+                  </a:tcPr>
+                </a:tc>
+                <a:tc>
+                  <a:txBody>
+                    <a:bodyPr/>
+                    <a:lstStyle/>
+                    <a:p>
+                      <a:pPr indent="0" marL="0">
+                        <a:buNone/>
+                      </a:pPr>
+                      <a:r>
+                        <a:rPr lang="en-US" sz="1350" dirty="0">
+                          <a:solidFill>
+                            <a:srgbClr val="1A1A1A"/>
+                          </a:solidFill>
+                        </a:rPr>
+                        <a:t>Server-side pricing (QuantLib, ADR-019), Windows proven on a real machine</a:t>
+                      </a:r>
+                      <a:endParaRPr lang="en-US" sz="1350" dirty="0"/>
+                    </a:p>
+                  </a:txBody>
+                  <a:tcPr marL="88900" marR="88900" marT="50800" marB="50800" anchor="ctr">
+                    <a:lnL w="6350" cap="flat" cmpd="sng" algn="ctr">
+                      <a:solidFill>
+                        <a:srgbClr val="E3DED7"/>
+                      </a:solidFill>
+                      <a:prstDash val="solid"/>
+                      <a:round/>
+                      <a:headEnd type="none" w="med" len="med"/>
+                      <a:tailEnd type="none" w="med" len="med"/>
+                    </a:lnL>
+                    <a:lnR w="6350" cap="flat" cmpd="sng" algn="ctr">
+                      <a:solidFill>
+                        <a:srgbClr val="E3DED7"/>
+                      </a:solidFill>
+                      <a:prstDash val="solid"/>
+                      <a:round/>
+                      <a:headEnd type="none" w="med" len="med"/>
+                      <a:tailEnd type="none" w="med" len="med"/>
+                    </a:lnR>
+                    <a:lnT w="6350" cap="flat" cmpd="sng" algn="ctr">
+                      <a:solidFill>
+                        <a:srgbClr val="E3DED7"/>
+                      </a:solidFill>
+                      <a:prstDash val="solid"/>
+                      <a:round/>
+                      <a:headEnd type="none" w="med" len="med"/>
+                      <a:tailEnd type="none" w="med" len="med"/>
+                    </a:lnT>
+                    <a:lnB w="6350" cap="flat" cmpd="sng" algn="ctr">
+                      <a:solidFill>
+                        <a:srgbClr val="E3DED7"/>
+                      </a:solidFill>
+                      <a:prstDash val="solid"/>
+                      <a:round/>
+                      <a:headEnd type="none" w="med" len="med"/>
+                      <a:tailEnd type="none" w="med" len="med"/>
+                    </a:lnB>
+                    <a:solidFill>
+                      <a:srgbClr val="F7F5F2"/>
                     </a:solidFill>
                   </a:tcPr>
                 </a:tc>
@@ -35287,561 +36292,6 @@
                       <a:tailEnd type="none" w="med" len="med"/>
                     </a:lnB>
                     <a:solidFill>
-                      <a:srgbClr val="FFFFFF"/>
-                    </a:solidFill>
-                  </a:tcPr>
-                </a:tc>
-              </a:tr>
-              <a:tr h="585216">
-                <a:tc>
-                  <a:txBody>
-                    <a:bodyPr/>
-                    <a:lstStyle/>
-                    <a:p>
-                      <a:pPr indent="0" marL="0">
-                        <a:buNone/>
-                      </a:pPr>
-                      <a:r>
-                        <a:rPr lang="en-US" sz="1350" b="1" dirty="0">
-                          <a:solidFill>
-                            <a:srgbClr val="8A1626"/>
-                          </a:solidFill>
-                        </a:rPr>
-                        <a:t>Windows, proven</a:t>
-                      </a:r>
-                      <a:endParaRPr lang="en-US" sz="1350" dirty="0"/>
-                    </a:p>
-                  </a:txBody>
-                  <a:tcPr marL="88900" marR="88900" marT="50800" marB="50800" anchor="ctr">
-                    <a:lnL w="6350" cap="flat" cmpd="sng" algn="ctr">
-                      <a:solidFill>
-                        <a:srgbClr val="E3DED7"/>
-                      </a:solidFill>
-                      <a:prstDash val="solid"/>
-                      <a:round/>
-                      <a:headEnd type="none" w="med" len="med"/>
-                      <a:tailEnd type="none" w="med" len="med"/>
-                    </a:lnL>
-                    <a:lnR w="6350" cap="flat" cmpd="sng" algn="ctr">
-                      <a:solidFill>
-                        <a:srgbClr val="E3DED7"/>
-                      </a:solidFill>
-                      <a:prstDash val="solid"/>
-                      <a:round/>
-                      <a:headEnd type="none" w="med" len="med"/>
-                      <a:tailEnd type="none" w="med" len="med"/>
-                    </a:lnR>
-                    <a:lnT w="6350" cap="flat" cmpd="sng" algn="ctr">
-                      <a:solidFill>
-                        <a:srgbClr val="E3DED7"/>
-                      </a:solidFill>
-                      <a:prstDash val="solid"/>
-                      <a:round/>
-                      <a:headEnd type="none" w="med" len="med"/>
-                      <a:tailEnd type="none" w="med" len="med"/>
-                    </a:lnT>
-                    <a:lnB w="6350" cap="flat" cmpd="sng" algn="ctr">
-                      <a:solidFill>
-                        <a:srgbClr val="E3DED7"/>
-                      </a:solidFill>
-                      <a:prstDash val="solid"/>
-                      <a:round/>
-                      <a:headEnd type="none" w="med" len="med"/>
-                      <a:tailEnd type="none" w="med" len="med"/>
-                    </a:lnB>
-                    <a:solidFill>
-                      <a:srgbClr val="F7F5F2"/>
-                    </a:solidFill>
-                  </a:tcPr>
-                </a:tc>
-                <a:tc>
-                  <a:txBody>
-                    <a:bodyPr/>
-                    <a:lstStyle/>
-                    <a:p>
-                      <a:pPr indent="0" marL="0">
-                        <a:buNone/>
-                      </a:pPr>
-                      <a:r>
-                        <a:rPr lang="en-US" sz="1350" dirty="0">
-                          <a:solidFill>
-                            <a:srgbClr val="1A1A1A"/>
-                          </a:solidFill>
-                        </a:rPr>
-                        <a:t>CI green and PowerShell on real Windows</a:t>
-                      </a:r>
-                      <a:endParaRPr lang="en-US" sz="1350" dirty="0"/>
-                    </a:p>
-                  </a:txBody>
-                  <a:tcPr marL="88900" marR="88900" marT="50800" marB="50800" anchor="ctr">
-                    <a:lnL w="6350" cap="flat" cmpd="sng" algn="ctr">
-                      <a:solidFill>
-                        <a:srgbClr val="E3DED7"/>
-                      </a:solidFill>
-                      <a:prstDash val="solid"/>
-                      <a:round/>
-                      <a:headEnd type="none" w="med" len="med"/>
-                      <a:tailEnd type="none" w="med" len="med"/>
-                    </a:lnL>
-                    <a:lnR w="6350" cap="flat" cmpd="sng" algn="ctr">
-                      <a:solidFill>
-                        <a:srgbClr val="E3DED7"/>
-                      </a:solidFill>
-                      <a:prstDash val="solid"/>
-                      <a:round/>
-                      <a:headEnd type="none" w="med" len="med"/>
-                      <a:tailEnd type="none" w="med" len="med"/>
-                    </a:lnR>
-                    <a:lnT w="6350" cap="flat" cmpd="sng" algn="ctr">
-                      <a:solidFill>
-                        <a:srgbClr val="E3DED7"/>
-                      </a:solidFill>
-                      <a:prstDash val="solid"/>
-                      <a:round/>
-                      <a:headEnd type="none" w="med" len="med"/>
-                      <a:tailEnd type="none" w="med" len="med"/>
-                    </a:lnT>
-                    <a:lnB w="6350" cap="flat" cmpd="sng" algn="ctr">
-                      <a:solidFill>
-                        <a:srgbClr val="E3DED7"/>
-                      </a:solidFill>
-                      <a:prstDash val="solid"/>
-                      <a:round/>
-                      <a:headEnd type="none" w="med" len="med"/>
-                      <a:tailEnd type="none" w="med" len="med"/>
-                    </a:lnB>
-                    <a:solidFill>
-                      <a:srgbClr val="F7F5F2"/>
-                    </a:solidFill>
-                  </a:tcPr>
-                </a:tc>
-                <a:tc>
-                  <a:txBody>
-                    <a:bodyPr/>
-                    <a:lstStyle/>
-                    <a:p>
-                      <a:pPr indent="0" marL="0">
-                        <a:buNone/>
-                      </a:pPr>
-                      <a:r>
-                        <a:rPr lang="en-US" sz="1350" dirty="0">
-                          <a:solidFill>
-                            <a:srgbClr val="1A1A1A"/>
-                          </a:solidFill>
-                        </a:rPr>
-                        <a:t>Every guide works there</a:t>
-                      </a:r>
-                      <a:endParaRPr lang="en-US" sz="1350" dirty="0"/>
-                    </a:p>
-                  </a:txBody>
-                  <a:tcPr marL="88900" marR="88900" marT="50800" marB="50800" anchor="ctr">
-                    <a:lnL w="6350" cap="flat" cmpd="sng" algn="ctr">
-                      <a:solidFill>
-                        <a:srgbClr val="E3DED7"/>
-                      </a:solidFill>
-                      <a:prstDash val="solid"/>
-                      <a:round/>
-                      <a:headEnd type="none" w="med" len="med"/>
-                      <a:tailEnd type="none" w="med" len="med"/>
-                    </a:lnL>
-                    <a:lnR w="6350" cap="flat" cmpd="sng" algn="ctr">
-                      <a:solidFill>
-                        <a:srgbClr val="E3DED7"/>
-                      </a:solidFill>
-                      <a:prstDash val="solid"/>
-                      <a:round/>
-                      <a:headEnd type="none" w="med" len="med"/>
-                      <a:tailEnd type="none" w="med" len="med"/>
-                    </a:lnR>
-                    <a:lnT w="6350" cap="flat" cmpd="sng" algn="ctr">
-                      <a:solidFill>
-                        <a:srgbClr val="E3DED7"/>
-                      </a:solidFill>
-                      <a:prstDash val="solid"/>
-                      <a:round/>
-                      <a:headEnd type="none" w="med" len="med"/>
-                      <a:tailEnd type="none" w="med" len="med"/>
-                    </a:lnT>
-                    <a:lnB w="6350" cap="flat" cmpd="sng" algn="ctr">
-                      <a:solidFill>
-                        <a:srgbClr val="E3DED7"/>
-                      </a:solidFill>
-                      <a:prstDash val="solid"/>
-                      <a:round/>
-                      <a:headEnd type="none" w="med" len="med"/>
-                      <a:tailEnd type="none" w="med" len="med"/>
-                    </a:lnB>
-                    <a:solidFill>
-                      <a:srgbClr val="F7F5F2"/>
-                    </a:solidFill>
-                  </a:tcPr>
-                </a:tc>
-              </a:tr>
-              <a:tr h="585216">
-                <a:tc>
-                  <a:txBody>
-                    <a:bodyPr/>
-                    <a:lstStyle/>
-                    <a:p>
-                      <a:pPr indent="0" marL="0">
-                        <a:buNone/>
-                      </a:pPr>
-                      <a:r>
-                        <a:rPr lang="en-US" sz="1350" b="1" dirty="0">
-                          <a:solidFill>
-                            <a:srgbClr val="8A1626"/>
-                          </a:solidFill>
-                        </a:rPr>
-                        <a:t>A real deployment</a:t>
-                      </a:r>
-                      <a:endParaRPr lang="en-US" sz="1350" dirty="0"/>
-                    </a:p>
-                  </a:txBody>
-                  <a:tcPr marL="88900" marR="88900" marT="50800" marB="50800" anchor="ctr">
-                    <a:lnL w="6350" cap="flat" cmpd="sng" algn="ctr">
-                      <a:solidFill>
-                        <a:srgbClr val="E3DED7"/>
-                      </a:solidFill>
-                      <a:prstDash val="solid"/>
-                      <a:round/>
-                      <a:headEnd type="none" w="med" len="med"/>
-                      <a:tailEnd type="none" w="med" len="med"/>
-                    </a:lnL>
-                    <a:lnR w="6350" cap="flat" cmpd="sng" algn="ctr">
-                      <a:solidFill>
-                        <a:srgbClr val="E3DED7"/>
-                      </a:solidFill>
-                      <a:prstDash val="solid"/>
-                      <a:round/>
-                      <a:headEnd type="none" w="med" len="med"/>
-                      <a:tailEnd type="none" w="med" len="med"/>
-                    </a:lnR>
-                    <a:lnT w="6350" cap="flat" cmpd="sng" algn="ctr">
-                      <a:solidFill>
-                        <a:srgbClr val="E3DED7"/>
-                      </a:solidFill>
-                      <a:prstDash val="solid"/>
-                      <a:round/>
-                      <a:headEnd type="none" w="med" len="med"/>
-                      <a:tailEnd type="none" w="med" len="med"/>
-                    </a:lnT>
-                    <a:lnB w="6350" cap="flat" cmpd="sng" algn="ctr">
-                      <a:solidFill>
-                        <a:srgbClr val="E3DED7"/>
-                      </a:solidFill>
-                      <a:prstDash val="solid"/>
-                      <a:round/>
-                      <a:headEnd type="none" w="med" len="med"/>
-                      <a:tailEnd type="none" w="med" len="med"/>
-                    </a:lnB>
-                    <a:solidFill>
-                      <a:srgbClr val="FFFFFF"/>
-                    </a:solidFill>
-                  </a:tcPr>
-                </a:tc>
-                <a:tc>
-                  <a:txBody>
-                    <a:bodyPr/>
-                    <a:lstStyle/>
-                    <a:p>
-                      <a:pPr indent="0" marL="0">
-                        <a:buNone/>
-                      </a:pPr>
-                      <a:r>
-                        <a:rPr lang="en-US" sz="1350" dirty="0">
-                          <a:solidFill>
-                            <a:srgbClr val="1A1A1A"/>
-                          </a:solidFill>
-                        </a:rPr>
-                        <a:t>Security on, SSO, HTTPS, compose with pricing</a:t>
-                      </a:r>
-                      <a:endParaRPr lang="en-US" sz="1350" dirty="0"/>
-                    </a:p>
-                  </a:txBody>
-                  <a:tcPr marL="88900" marR="88900" marT="50800" marB="50800" anchor="ctr">
-                    <a:lnL w="6350" cap="flat" cmpd="sng" algn="ctr">
-                      <a:solidFill>
-                        <a:srgbClr val="E3DED7"/>
-                      </a:solidFill>
-                      <a:prstDash val="solid"/>
-                      <a:round/>
-                      <a:headEnd type="none" w="med" len="med"/>
-                      <a:tailEnd type="none" w="med" len="med"/>
-                    </a:lnL>
-                    <a:lnR w="6350" cap="flat" cmpd="sng" algn="ctr">
-                      <a:solidFill>
-                        <a:srgbClr val="E3DED7"/>
-                      </a:solidFill>
-                      <a:prstDash val="solid"/>
-                      <a:round/>
-                      <a:headEnd type="none" w="med" len="med"/>
-                      <a:tailEnd type="none" w="med" len="med"/>
-                    </a:lnR>
-                    <a:lnT w="6350" cap="flat" cmpd="sng" algn="ctr">
-                      <a:solidFill>
-                        <a:srgbClr val="E3DED7"/>
-                      </a:solidFill>
-                      <a:prstDash val="solid"/>
-                      <a:round/>
-                      <a:headEnd type="none" w="med" len="med"/>
-                      <a:tailEnd type="none" w="med" len="med"/>
-                    </a:lnT>
-                    <a:lnB w="6350" cap="flat" cmpd="sng" algn="ctr">
-                      <a:solidFill>
-                        <a:srgbClr val="E3DED7"/>
-                      </a:solidFill>
-                      <a:prstDash val="solid"/>
-                      <a:round/>
-                      <a:headEnd type="none" w="med" len="med"/>
-                      <a:tailEnd type="none" w="med" len="med"/>
-                    </a:lnB>
-                    <a:solidFill>
-                      <a:srgbClr val="FFFFFF"/>
-                    </a:solidFill>
-                  </a:tcPr>
-                </a:tc>
-                <a:tc>
-                  <a:txBody>
-                    <a:bodyPr/>
-                    <a:lstStyle/>
-                    <a:p>
-                      <a:pPr indent="0" marL="0">
-                        <a:buNone/>
-                      </a:pPr>
-                      <a:r>
-                        <a:rPr lang="en-US" sz="1350" dirty="0">
-                          <a:solidFill>
-                            <a:srgbClr val="1A1A1A"/>
-                          </a:solidFill>
-                        </a:rPr>
-                        <a:t>Runbook followed end to end</a:t>
-                      </a:r>
-                      <a:endParaRPr lang="en-US" sz="1350" dirty="0"/>
-                    </a:p>
-                  </a:txBody>
-                  <a:tcPr marL="88900" marR="88900" marT="50800" marB="50800" anchor="ctr">
-                    <a:lnL w="6350" cap="flat" cmpd="sng" algn="ctr">
-                      <a:solidFill>
-                        <a:srgbClr val="E3DED7"/>
-                      </a:solidFill>
-                      <a:prstDash val="solid"/>
-                      <a:round/>
-                      <a:headEnd type="none" w="med" len="med"/>
-                      <a:tailEnd type="none" w="med" len="med"/>
-                    </a:lnL>
-                    <a:lnR w="6350" cap="flat" cmpd="sng" algn="ctr">
-                      <a:solidFill>
-                        <a:srgbClr val="E3DED7"/>
-                      </a:solidFill>
-                      <a:prstDash val="solid"/>
-                      <a:round/>
-                      <a:headEnd type="none" w="med" len="med"/>
-                      <a:tailEnd type="none" w="med" len="med"/>
-                    </a:lnR>
-                    <a:lnT w="6350" cap="flat" cmpd="sng" algn="ctr">
-                      <a:solidFill>
-                        <a:srgbClr val="E3DED7"/>
-                      </a:solidFill>
-                      <a:prstDash val="solid"/>
-                      <a:round/>
-                      <a:headEnd type="none" w="med" len="med"/>
-                      <a:tailEnd type="none" w="med" len="med"/>
-                    </a:lnT>
-                    <a:lnB w="6350" cap="flat" cmpd="sng" algn="ctr">
-                      <a:solidFill>
-                        <a:srgbClr val="E3DED7"/>
-                      </a:solidFill>
-                      <a:prstDash val="solid"/>
-                      <a:round/>
-                      <a:headEnd type="none" w="med" len="med"/>
-                      <a:tailEnd type="none" w="med" len="med"/>
-                    </a:lnB>
-                    <a:solidFill>
-                      <a:srgbClr val="FFFFFF"/>
-                    </a:solidFill>
-                  </a:tcPr>
-                </a:tc>
-              </a:tr>
-              <a:tr h="585216">
-                <a:tc>
-                  <a:txBody>
-                    <a:bodyPr/>
-                    <a:lstStyle/>
-                    <a:p>
-                      <a:pPr indent="0" marL="0">
-                        <a:buNone/>
-                      </a:pPr>
-                      <a:r>
-                        <a:rPr lang="en-US" sz="1350" b="1" dirty="0">
-                          <a:solidFill>
-                            <a:srgbClr val="8A1626"/>
-                          </a:solidFill>
-                        </a:rPr>
-                        <a:t>Scale and load</a:t>
-                      </a:r>
-                      <a:endParaRPr lang="en-US" sz="1350" dirty="0"/>
-                    </a:p>
-                  </a:txBody>
-                  <a:tcPr marL="88900" marR="88900" marT="50800" marB="50800" anchor="ctr">
-                    <a:lnL w="6350" cap="flat" cmpd="sng" algn="ctr">
-                      <a:solidFill>
-                        <a:srgbClr val="E3DED7"/>
-                      </a:solidFill>
-                      <a:prstDash val="solid"/>
-                      <a:round/>
-                      <a:headEnd type="none" w="med" len="med"/>
-                      <a:tailEnd type="none" w="med" len="med"/>
-                    </a:lnL>
-                    <a:lnR w="6350" cap="flat" cmpd="sng" algn="ctr">
-                      <a:solidFill>
-                        <a:srgbClr val="E3DED7"/>
-                      </a:solidFill>
-                      <a:prstDash val="solid"/>
-                      <a:round/>
-                      <a:headEnd type="none" w="med" len="med"/>
-                      <a:tailEnd type="none" w="med" len="med"/>
-                    </a:lnR>
-                    <a:lnT w="6350" cap="flat" cmpd="sng" algn="ctr">
-                      <a:solidFill>
-                        <a:srgbClr val="E3DED7"/>
-                      </a:solidFill>
-                      <a:prstDash val="solid"/>
-                      <a:round/>
-                      <a:headEnd type="none" w="med" len="med"/>
-                      <a:tailEnd type="none" w="med" len="med"/>
-                    </a:lnT>
-                    <a:lnB w="6350" cap="flat" cmpd="sng" algn="ctr">
-                      <a:solidFill>
-                        <a:srgbClr val="E3DED7"/>
-                      </a:solidFill>
-                      <a:prstDash val="solid"/>
-                      <a:round/>
-                      <a:headEnd type="none" w="med" len="med"/>
-                      <a:tailEnd type="none" w="med" len="med"/>
-                    </a:lnB>
-                    <a:solidFill>
-                      <a:srgbClr val="F7F5F2"/>
-                    </a:solidFill>
-                  </a:tcPr>
-                </a:tc>
-                <a:tc>
-                  <a:txBody>
-                    <a:bodyPr/>
-                    <a:lstStyle/>
-                    <a:p>
-                      <a:pPr indent="0" marL="0">
-                        <a:buNone/>
-                      </a:pPr>
-                      <a:r>
-                        <a:rPr lang="en-US" sz="1350" dirty="0">
-                          <a:solidFill>
-                            <a:srgbClr val="1A1A1A"/>
-                          </a:solidFill>
-                        </a:rPr>
-                        <a:t>1M trades a day per store on a server; many users</a:t>
-                      </a:r>
-                      <a:endParaRPr lang="en-US" sz="1350" dirty="0"/>
-                    </a:p>
-                  </a:txBody>
-                  <a:tcPr marL="88900" marR="88900" marT="50800" marB="50800" anchor="ctr">
-                    <a:lnL w="6350" cap="flat" cmpd="sng" algn="ctr">
-                      <a:solidFill>
-                        <a:srgbClr val="E3DED7"/>
-                      </a:solidFill>
-                      <a:prstDash val="solid"/>
-                      <a:round/>
-                      <a:headEnd type="none" w="med" len="med"/>
-                      <a:tailEnd type="none" w="med" len="med"/>
-                    </a:lnL>
-                    <a:lnR w="6350" cap="flat" cmpd="sng" algn="ctr">
-                      <a:solidFill>
-                        <a:srgbClr val="E3DED7"/>
-                      </a:solidFill>
-                      <a:prstDash val="solid"/>
-                      <a:round/>
-                      <a:headEnd type="none" w="med" len="med"/>
-                      <a:tailEnd type="none" w="med" len="med"/>
-                    </a:lnR>
-                    <a:lnT w="6350" cap="flat" cmpd="sng" algn="ctr">
-                      <a:solidFill>
-                        <a:srgbClr val="E3DED7"/>
-                      </a:solidFill>
-                      <a:prstDash val="solid"/>
-                      <a:round/>
-                      <a:headEnd type="none" w="med" len="med"/>
-                      <a:tailEnd type="none" w="med" len="med"/>
-                    </a:lnT>
-                    <a:lnB w="6350" cap="flat" cmpd="sng" algn="ctr">
-                      <a:solidFill>
-                        <a:srgbClr val="E3DED7"/>
-                      </a:solidFill>
-                      <a:prstDash val="solid"/>
-                      <a:round/>
-                      <a:headEnd type="none" w="med" len="med"/>
-                      <a:tailEnd type="none" w="med" len="med"/>
-                    </a:lnB>
-                    <a:solidFill>
-                      <a:srgbClr val="F7F5F2"/>
-                    </a:solidFill>
-                  </a:tcPr>
-                </a:tc>
-                <a:tc>
-                  <a:txBody>
-                    <a:bodyPr/>
-                    <a:lstStyle/>
-                    <a:p>
-                      <a:pPr indent="0" marL="0">
-                        <a:buNone/>
-                      </a:pPr>
-                      <a:r>
-                        <a:rPr lang="en-US" sz="1350" dirty="0">
-                          <a:solidFill>
-                            <a:srgbClr val="1A1A1A"/>
-                          </a:solidFill>
-                        </a:rPr>
-                        <a:t>Extrapolations replaced by measurements</a:t>
-                      </a:r>
-                      <a:endParaRPr lang="en-US" sz="1350" dirty="0"/>
-                    </a:p>
-                  </a:txBody>
-                  <a:tcPr marL="88900" marR="88900" marT="50800" marB="50800" anchor="ctr">
-                    <a:lnL w="6350" cap="flat" cmpd="sng" algn="ctr">
-                      <a:solidFill>
-                        <a:srgbClr val="E3DED7"/>
-                      </a:solidFill>
-                      <a:prstDash val="solid"/>
-                      <a:round/>
-                      <a:headEnd type="none" w="med" len="med"/>
-                      <a:tailEnd type="none" w="med" len="med"/>
-                    </a:lnL>
-                    <a:lnR w="6350" cap="flat" cmpd="sng" algn="ctr">
-                      <a:solidFill>
-                        <a:srgbClr val="E3DED7"/>
-                      </a:solidFill>
-                      <a:prstDash val="solid"/>
-                      <a:round/>
-                      <a:headEnd type="none" w="med" len="med"/>
-                      <a:tailEnd type="none" w="med" len="med"/>
-                    </a:lnR>
-                    <a:lnT w="6350" cap="flat" cmpd="sng" algn="ctr">
-                      <a:solidFill>
-                        <a:srgbClr val="E3DED7"/>
-                      </a:solidFill>
-                      <a:prstDash val="solid"/>
-                      <a:round/>
-                      <a:headEnd type="none" w="med" len="med"/>
-                      <a:tailEnd type="none" w="med" len="med"/>
-                    </a:lnT>
-                    <a:lnB w="6350" cap="flat" cmpd="sng" algn="ctr">
-                      <a:solidFill>
-                        <a:srgbClr val="E3DED7"/>
-                      </a:solidFill>
-                      <a:prstDash val="solid"/>
-                      <a:round/>
-                      <a:headEnd type="none" w="med" len="med"/>
-                      <a:tailEnd type="none" w="med" len="med"/>
-                    </a:lnB>
-                    <a:solidFill>
                       <a:srgbClr val="F7F5F2"/>
                     </a:solidFill>
                   </a:tcPr>
@@ -35890,7 +36340,7 @@
             <a:pPr algn="r"/>
             <a:fld id="{F7021451-1387-4CA6-816F-3879F97B5CBC}" type="slidenum">
               <a:rPr b="1" lang="en-US"/>
-              <a:t>41</a:t>
+              <a:t>46</a:t>
             </a:fld>
             <a:endParaRPr lang="en-US"/>
           </a:p>
@@ -36087,7 +36537,7 @@
                   <a:srgbClr val="FFFFFF"/>
                 </a:solidFill>
               </a:rPr>
-              <a:t>Five commands</a:t>
+              <a:t>Six commands</a:t>
             </a:r>
             <a:endParaRPr lang="en-US" sz="1300" dirty="0"/>
           </a:p>
@@ -36189,7 +36639,7 @@
                 <a:ea typeface="Courier New" pitchFamily="34" charset="-122"/>
                 <a:cs typeface="Courier New" pitchFamily="34" charset="-120"/>
               </a:rPr>
-              <a:t>java -jar drishti-server/target/*-exec.jar</a:t>
+              <a:t>python tools/drishti.py lake demo</a:t>
             </a:r>
             <a:endParaRPr lang="en-US" sz="1250" dirty="0"/>
           </a:p>
@@ -36209,7 +36659,7 @@
                 <a:ea typeface="Courier New" pitchFamily="34" charset="-122"/>
                 <a:cs typeface="Courier New" pitchFamily="34" charset="-120"/>
               </a:rPr>
-              <a:t>python drishti-console/run_drishti_web.py</a:t>
+              <a:t>java -Djava.io.tmpdir=data/tmp/server -jar &lt;jar&gt;</a:t>
             </a:r>
             <a:endParaRPr lang="en-US" sz="1250" dirty="0"/>
           </a:p>
@@ -36229,7 +36679,7 @@
                 <a:ea typeface="Courier New" pitchFamily="34" charset="-122"/>
                 <a:cs typeface="Courier New" pitchFamily="34" charset="-120"/>
               </a:rPr>
-              <a:t># open http://&lt;host&gt;:17480/t and type:</a:t>
+              <a:t>python drishti-console/run_drishti_web.py</a:t>
             </a:r>
             <a:endParaRPr lang="en-US" sz="1250" dirty="0"/>
           </a:p>
@@ -36249,7 +36699,7 @@
                 <a:ea typeface="Courier New" pitchFamily="34" charset="-122"/>
                 <a:cs typeface="Courier New" pitchFamily="34" charset="-120"/>
               </a:rPr>
-              <a:t>TRD MX-20000001 &lt;GO&gt;</a:t>
+              <a:t># open :17480/t → TRD MX-20000001 &lt;GO&gt;</a:t>
             </a:r>
             <a:endParaRPr lang="en-US" sz="1250" dirty="0"/>
           </a:p>
@@ -36317,7 +36767,7 @@
                   <a:srgbClr val="1A1A1A"/>
                 </a:solidFill>
               </a:rPr>
-              <a:t>QUICKSTART</a:t>
+              <a:t>GETTING_STARTED</a:t>
             </a:r>
             <a:endParaRPr lang="en-US" sz="1500" dirty="0"/>
           </a:p>
@@ -36353,7 +36803,7 @@
                   <a:srgbClr val="4A5058"/>
                 </a:solidFill>
               </a:rPr>
-              <a:t>Ten minutes, fresh clone to first live view</a:t>
+              <a:t>Ten minutes, fresh clone to the demo lakes and a view</a:t>
             </a:r>
             <a:endParaRPr lang="en-US" sz="1250" dirty="0"/>
           </a:p>
@@ -36797,7 +37247,7 @@
             <a:pPr algn="r"/>
             <a:fld id="{F7021451-1387-4CA6-816F-3879F97B5CBC}" type="slidenum">
               <a:rPr b="1" lang="en-US"/>
-              <a:t>42</a:t>
+              <a:t>47</a:t>
             </a:fld>
             <a:endParaRPr lang="en-US"/>
           </a:p>
@@ -37070,7 +37520,4761 @@
             <a:pPr algn="r"/>
             <a:fld id="{F7021451-1387-4CA6-816F-3879F97B5CBC}" type="slidenum">
               <a:rPr b="1" lang="en-US"/>
-              <a:t>43</a:t>
+              <a:t>48</a:t>
+            </a:fld>
+            <a:endParaRPr lang="en-US"/>
+          </a:p>
+        </p:txBody>
+      </p:sp>
+    </p:spTree>
+  </p:cSld>
+  <p:clrMapOvr>
+    <a:masterClrMapping/>
+  </p:clrMapOvr>
+</p:sld>
+</file>
+
+<file path=ppt/slides/slide44.xml><?xml version="1.0" encoding="utf-8"?>
+<p:sld xmlns:a="http://schemas.openxmlformats.org/drawingml/2006/main" xmlns:r="http://schemas.openxmlformats.org/officeDocument/2006/relationships" xmlns:p="http://schemas.openxmlformats.org/presentationml/2006/main">
+  <p:cSld name="Slide 14">
+    <p:spTree>
+      <p:nvGrpSpPr>
+        <p:cNvPr id="1" name=""/>
+        <p:cNvGrpSpPr/>
+        <p:nvPr/>
+      </p:nvGrpSpPr>
+      <p:grpSpPr>
+        <a:xfrm>
+          <a:off x="0" y="0"/>
+          <a:ext cx="0" cy="0"/>
+          <a:chOff x="0" y="0"/>
+          <a:chExt cx="0" cy="0"/>
+        </a:xfrm>
+      </p:grpSpPr>
+      <p:sp>
+        <p:nvSpPr>
+          <p:cNvPr id="2" name="Text 3"/>
+          <p:cNvSpPr/>
+          <p:nvPr>
+            <p:ph idx="103" type="body" hasCustomPrompt="1"/>
+          </p:nvPr>
+        </p:nvSpPr>
+        <p:spPr>
+          <a:xfrm>
+            <a:off x="777240" y="457200"/>
+            <a:ext cx="10634472" cy="237744"/>
+          </a:xfrm>
+          <a:prstGeom prst="rect">
+            <a:avLst/>
+          </a:prstGeom>
+          <a:noFill/>
+          <a:ln/>
+        </p:spPr>
+        <p:txBody>
+          <a:bodyPr wrap="square" lIns="0" tIns="0" rIns="0" bIns="0" rtlCol="0"/>
+          <a:lstStyle/>
+          <a:p>
+            <a:pPr algn="l" indent="0" marL="0">
+              <a:buNone/>
+            </a:pPr>
+            <a:r>
+              <a:rPr lang="en-US" sz="1050" b="1" spc="100" kern="0" dirty="0">
+                <a:solidFill>
+                  <a:srgbClr val="A51C30"/>
+                </a:solidFill>
+              </a:rPr>
+              <a:t>RŪPAKA · BI INSIDE THE TERMINAL</a:t>
+            </a:r>
+            <a:endParaRPr lang="en-US" sz="1050" dirty="0"/>
+          </a:p>
+        </p:txBody>
+      </p:sp>
+      <p:sp>
+        <p:nvSpPr>
+          <p:cNvPr id="3" name="Text 3"/>
+          <p:cNvSpPr/>
+          <p:nvPr>
+            <p:ph idx="104" type="title" hasCustomPrompt="1"/>
+          </p:nvPr>
+        </p:nvSpPr>
+        <p:spPr>
+          <a:xfrm>
+            <a:off x="777240" y="731520"/>
+            <a:ext cx="10634472" cy="502920"/>
+          </a:xfrm>
+          <a:prstGeom prst="rect">
+            <a:avLst/>
+          </a:prstGeom>
+          <a:noFill/>
+          <a:ln/>
+        </p:spPr>
+        <p:txBody>
+          <a:bodyPr wrap="square" lIns="0" tIns="0" rIns="0" bIns="0" rtlCol="0" anchor="t"/>
+          <a:lstStyle/>
+          <a:p>
+            <a:pPr algn="l" indent="0" marL="0">
+              <a:buNone/>
+            </a:pPr>
+            <a:r>
+              <a:rPr lang="en-US" sz="2600" b="1" dirty="0">
+                <a:solidFill>
+                  <a:srgbClr val="1A1A1A"/>
+                </a:solidFill>
+              </a:rPr>
+              <a:t>Business intelligence on the same data, rules and masks</a:t>
+            </a:r>
+            <a:endParaRPr lang="en-US" sz="2600" dirty="0"/>
+          </a:p>
+        </p:txBody>
+      </p:sp>
+      <p:sp>
+        <p:nvSpPr>
+          <p:cNvPr id="4" name="Shape 2"/>
+          <p:cNvSpPr/>
+          <p:nvPr/>
+        </p:nvSpPr>
+        <p:spPr>
+          <a:xfrm>
+            <a:off x="777240" y="1280160"/>
+            <a:ext cx="10634472" cy="9144"/>
+          </a:xfrm>
+          <a:prstGeom prst="rect">
+            <a:avLst/>
+          </a:prstGeom>
+          <a:solidFill>
+            <a:srgbClr val="E3DED7"/>
+          </a:solidFill>
+          <a:ln/>
+        </p:spPr>
+      </p:sp>
+      <p:sp>
+        <p:nvSpPr>
+          <p:cNvPr id="6" name="Shape 3"/>
+          <p:cNvSpPr/>
+          <p:nvPr/>
+        </p:nvSpPr>
+        <p:spPr>
+          <a:xfrm>
+            <a:off x="777240" y="1463040"/>
+            <a:ext cx="10634472" cy="676656"/>
+          </a:xfrm>
+          <a:prstGeom prst="rect">
+            <a:avLst/>
+          </a:prstGeom>
+          <a:solidFill>
+            <a:srgbClr val="F7F5F2"/>
+          </a:solidFill>
+          <a:ln w="9525">
+            <a:solidFill>
+              <a:srgbClr val="E3DED7"/>
+            </a:solidFill>
+            <a:prstDash val="solid"/>
+          </a:ln>
+        </p:spPr>
+      </p:sp>
+      <p:sp>
+        <p:nvSpPr>
+          <p:cNvPr id="7" name="Text 4"/>
+          <p:cNvSpPr txBox="1"/>
+          <p:nvPr/>
+        </p:nvSpPr>
+        <p:spPr>
+          <a:xfrm>
+            <a:off x="1005840" y="1463040"/>
+            <a:ext cx="3291840" cy="676656"/>
+          </a:xfrm>
+          <a:prstGeom prst="rect">
+            <a:avLst/>
+          </a:prstGeom>
+          <a:noFill/>
+          <a:ln/>
+        </p:spPr>
+        <p:txBody>
+          <a:bodyPr wrap="square" lIns="0" tIns="0" rIns="0" bIns="0" rtlCol="0" anchor="ctr"/>
+          <a:lstStyle/>
+          <a:p>
+            <a:pPr indent="0" marL="0">
+              <a:buNone/>
+            </a:pPr>
+            <a:r>
+              <a:rPr lang="en-US" sz="1500" b="1" dirty="0">
+                <a:solidFill>
+                  <a:srgbClr val="8A1626"/>
+                </a:solidFill>
+              </a:rPr>
+              <a:t>Models rooted in packs</a:t>
+            </a:r>
+            <a:endParaRPr lang="en-US" sz="1500" dirty="0"/>
+          </a:p>
+        </p:txBody>
+      </p:sp>
+      <p:sp>
+        <p:nvSpPr>
+          <p:cNvPr id="8" name="Text 5"/>
+          <p:cNvSpPr txBox="1"/>
+          <p:nvPr/>
+        </p:nvSpPr>
+        <p:spPr>
+          <a:xfrm>
+            <a:off x="4434840" y="1463040"/>
+            <a:ext cx="6766560" cy="676656"/>
+          </a:xfrm>
+          <a:prstGeom prst="rect">
+            <a:avLst/>
+          </a:prstGeom>
+          <a:noFill/>
+          <a:ln/>
+        </p:spPr>
+        <p:txBody>
+          <a:bodyPr wrap="square" lIns="0" tIns="0" rIns="0" bIns="0" rtlCol="0" anchor="ctr"/>
+          <a:lstStyle/>
+          <a:p>
+            <a:pPr indent="0" marL="0">
+              <a:buNone/>
+            </a:pPr>
+            <a:r>
+              <a:rPr lang="en-US" sz="1350" dirty="0">
+                <a:solidFill>
+                  <a:srgbClr val="1A1A1A"/>
+                </a:solidFill>
+              </a:rPr>
+              <a:t>Datasets and data models built from the packs' kinds, with the relationships the packs suggest.</a:t>
+            </a:r>
+            <a:endParaRPr lang="en-US" sz="1350" dirty="0"/>
+          </a:p>
+        </p:txBody>
+      </p:sp>
+      <p:sp>
+        <p:nvSpPr>
+          <p:cNvPr id="9" name="Shape 6"/>
+          <p:cNvSpPr/>
+          <p:nvPr/>
+        </p:nvSpPr>
+        <p:spPr>
+          <a:xfrm>
+            <a:off x="777240" y="2249424"/>
+            <a:ext cx="10634472" cy="676656"/>
+          </a:xfrm>
+          <a:prstGeom prst="rect">
+            <a:avLst/>
+          </a:prstGeom>
+          <a:solidFill>
+            <a:srgbClr val="FFFFFF"/>
+          </a:solidFill>
+          <a:ln w="9525">
+            <a:solidFill>
+              <a:srgbClr val="E3DED7"/>
+            </a:solidFill>
+            <a:prstDash val="solid"/>
+          </a:ln>
+        </p:spPr>
+      </p:sp>
+      <p:sp>
+        <p:nvSpPr>
+          <p:cNvPr id="10" name="Text 7"/>
+          <p:cNvSpPr txBox="1"/>
+          <p:nvPr/>
+        </p:nvSpPr>
+        <p:spPr>
+          <a:xfrm>
+            <a:off x="1005840" y="2249424"/>
+            <a:ext cx="3291840" cy="676656"/>
+          </a:xfrm>
+          <a:prstGeom prst="rect">
+            <a:avLst/>
+          </a:prstGeom>
+          <a:noFill/>
+          <a:ln/>
+        </p:spPr>
+        <p:txBody>
+          <a:bodyPr wrap="square" lIns="0" tIns="0" rIns="0" bIns="0" rtlCol="0" anchor="ctr"/>
+          <a:lstStyle/>
+          <a:p>
+            <a:pPr indent="0" marL="0">
+              <a:buNone/>
+            </a:pPr>
+            <a:r>
+              <a:rPr lang="en-US" sz="1500" b="1" dirty="0">
+                <a:solidFill>
+                  <a:srgbClr val="8A1626"/>
+                </a:solidFill>
+              </a:rPr>
+              <a:t>Three languages, one plan</a:t>
+            </a:r>
+            <a:endParaRPr lang="en-US" sz="1500" dirty="0"/>
+          </a:p>
+        </p:txBody>
+      </p:sp>
+      <p:sp>
+        <p:nvSpPr>
+          <p:cNvPr id="11" name="Text 8"/>
+          <p:cNvSpPr txBox="1"/>
+          <p:nvPr/>
+        </p:nvSpPr>
+        <p:spPr>
+          <a:xfrm>
+            <a:off x="4434840" y="2249424"/>
+            <a:ext cx="6766560" cy="676656"/>
+          </a:xfrm>
+          <a:prstGeom prst="rect">
+            <a:avLst/>
+          </a:prstGeom>
+          <a:noFill/>
+          <a:ln/>
+        </p:spPr>
+        <p:txBody>
+          <a:bodyPr wrap="square" lIns="0" tIns="0" rIns="0" bIns="0" rtlCol="0" anchor="ctr"/>
+          <a:lstStyle/>
+          <a:p>
+            <a:pPr indent="0" marL="0">
+              <a:buNone/>
+            </a:pPr>
+            <a:r>
+              <a:rPr lang="en-US" sz="1350" dirty="0">
+                <a:solidFill>
+                  <a:srgbClr val="1A1A1A"/>
+                </a:solidFill>
+              </a:rPr>
+              <a:t>A Python-like expression language, read-only SQL and Python meet in one plan, your row rules and masks applied.</a:t>
+            </a:r>
+            <a:endParaRPr lang="en-US" sz="1350" dirty="0"/>
+          </a:p>
+        </p:txBody>
+      </p:sp>
+      <p:sp>
+        <p:nvSpPr>
+          <p:cNvPr id="12" name="Shape 9"/>
+          <p:cNvSpPr/>
+          <p:nvPr/>
+        </p:nvSpPr>
+        <p:spPr>
+          <a:xfrm>
+            <a:off x="777240" y="3035808"/>
+            <a:ext cx="10634472" cy="676656"/>
+          </a:xfrm>
+          <a:prstGeom prst="rect">
+            <a:avLst/>
+          </a:prstGeom>
+          <a:solidFill>
+            <a:srgbClr val="F7F5F2"/>
+          </a:solidFill>
+          <a:ln w="9525">
+            <a:solidFill>
+              <a:srgbClr val="E3DED7"/>
+            </a:solidFill>
+            <a:prstDash val="solid"/>
+          </a:ln>
+        </p:spPr>
+      </p:sp>
+      <p:sp>
+        <p:nvSpPr>
+          <p:cNvPr id="13" name="Text 10"/>
+          <p:cNvSpPr txBox="1"/>
+          <p:nvPr/>
+        </p:nvSpPr>
+        <p:spPr>
+          <a:xfrm>
+            <a:off x="1005840" y="3035808"/>
+            <a:ext cx="3291840" cy="676656"/>
+          </a:xfrm>
+          <a:prstGeom prst="rect">
+            <a:avLst/>
+          </a:prstGeom>
+          <a:noFill/>
+          <a:ln/>
+        </p:spPr>
+        <p:txBody>
+          <a:bodyPr wrap="square" lIns="0" tIns="0" rIns="0" bIns="0" rtlCol="0" anchor="ctr"/>
+          <a:lstStyle/>
+          <a:p>
+            <a:pPr indent="0" marL="0">
+              <a:buNone/>
+            </a:pPr>
+            <a:r>
+              <a:rPr lang="en-US" sz="1500" b="1" dirty="0">
+                <a:solidFill>
+                  <a:srgbClr val="8A1626"/>
+                </a:solidFill>
+              </a:rPr>
+              <a:t>Servers compute</a:t>
+            </a:r>
+            <a:endParaRPr lang="en-US" sz="1500" dirty="0"/>
+          </a:p>
+        </p:txBody>
+      </p:sp>
+      <p:sp>
+        <p:nvSpPr>
+          <p:cNvPr id="14" name="Text 11"/>
+          <p:cNvSpPr txBox="1"/>
+          <p:nvPr/>
+        </p:nvSpPr>
+        <p:spPr>
+          <a:xfrm>
+            <a:off x="4434840" y="3035808"/>
+            <a:ext cx="6766560" cy="676656"/>
+          </a:xfrm>
+          <a:prstGeom prst="rect">
+            <a:avLst/>
+          </a:prstGeom>
+          <a:noFill/>
+          <a:ln/>
+        </p:spPr>
+        <p:txBody>
+          <a:bodyPr wrap="square" lIns="0" tIns="0" rIns="0" bIns="0" rtlCol="0" anchor="ctr"/>
+          <a:lstStyle/>
+          <a:p>
+            <a:pPr indent="0" marL="0">
+              <a:buNone/>
+            </a:pPr>
+            <a:r>
+              <a:rPr lang="en-US" sz="1350" dirty="0">
+                <a:solidFill>
+                  <a:srgbClr val="1A1A1A"/>
+                </a:solidFill>
+              </a:rPr>
+              <a:t>The Java server and the console's sandbox answer every number; the browser draws; standing queries push live.</a:t>
+            </a:r>
+            <a:endParaRPr lang="en-US" sz="1350" dirty="0"/>
+          </a:p>
+        </p:txBody>
+      </p:sp>
+      <p:sp>
+        <p:nvSpPr>
+          <p:cNvPr id="15" name="Shape 12"/>
+          <p:cNvSpPr/>
+          <p:nvPr/>
+        </p:nvSpPr>
+        <p:spPr>
+          <a:xfrm>
+            <a:off x="777240" y="3822192"/>
+            <a:ext cx="10634472" cy="676656"/>
+          </a:xfrm>
+          <a:prstGeom prst="rect">
+            <a:avLst/>
+          </a:prstGeom>
+          <a:solidFill>
+            <a:srgbClr val="FFFFFF"/>
+          </a:solidFill>
+          <a:ln w="9525">
+            <a:solidFill>
+              <a:srgbClr val="E3DED7"/>
+            </a:solidFill>
+            <a:prstDash val="solid"/>
+          </a:ln>
+        </p:spPr>
+      </p:sp>
+      <p:sp>
+        <p:nvSpPr>
+          <p:cNvPr id="16" name="Text 13"/>
+          <p:cNvSpPr txBox="1"/>
+          <p:nvPr/>
+        </p:nvSpPr>
+        <p:spPr>
+          <a:xfrm>
+            <a:off x="1005840" y="3822192"/>
+            <a:ext cx="3291840" cy="676656"/>
+          </a:xfrm>
+          <a:prstGeom prst="rect">
+            <a:avLst/>
+          </a:prstGeom>
+          <a:noFill/>
+          <a:ln/>
+        </p:spPr>
+        <p:txBody>
+          <a:bodyPr wrap="square" lIns="0" tIns="0" rIns="0" bIns="0" rtlCol="0" anchor="ctr"/>
+          <a:lstStyle/>
+          <a:p>
+            <a:pPr indent="0" marL="0">
+              <a:buNone/>
+            </a:pPr>
+            <a:r>
+              <a:rPr lang="en-US" sz="1500" b="1" dirty="0">
+                <a:solidFill>
+                  <a:srgbClr val="8A1626"/>
+                </a:solidFill>
+              </a:rPr>
+              <a:t>Governed</a:t>
+            </a:r>
+            <a:endParaRPr lang="en-US" sz="1500" dirty="0"/>
+          </a:p>
+        </p:txBody>
+      </p:sp>
+      <p:sp>
+        <p:nvSpPr>
+          <p:cNvPr id="17" name="Text 14"/>
+          <p:cNvSpPr txBox="1"/>
+          <p:nvPr/>
+        </p:nvSpPr>
+        <p:spPr>
+          <a:xfrm>
+            <a:off x="4434840" y="3822192"/>
+            <a:ext cx="6766560" cy="676656"/>
+          </a:xfrm>
+          <a:prstGeom prst="rect">
+            <a:avLst/>
+          </a:prstGeom>
+          <a:noFill/>
+          <a:ln/>
+        </p:spPr>
+        <p:txBody>
+          <a:bodyPr wrap="square" lIns="0" tIns="0" rIns="0" bIns="0" rtlCol="0" anchor="ctr"/>
+          <a:lstStyle/>
+          <a:p>
+            <a:pPr indent="0" marL="0">
+              <a:buNone/>
+            </a:pPr>
+            <a:r>
+              <a:rPr lang="en-US" sz="1350" dirty="0">
+                <a:solidFill>
+                  <a:srgbClr val="1A1A1A"/>
+                </a:solidFill>
+              </a:rPr>
+              <a:t>Versions and diffs, four-eyes review, certification, lineage past the connector, bundles with rollback.</a:t>
+            </a:r>
+            <a:endParaRPr lang="en-US" sz="1350" dirty="0"/>
+          </a:p>
+        </p:txBody>
+      </p:sp>
+      <p:sp>
+        <p:nvSpPr>
+          <p:cNvPr id="18" name="Shape 15"/>
+          <p:cNvSpPr/>
+          <p:nvPr/>
+        </p:nvSpPr>
+        <p:spPr>
+          <a:xfrm>
+            <a:off x="777240" y="4608576"/>
+            <a:ext cx="10634472" cy="676656"/>
+          </a:xfrm>
+          <a:prstGeom prst="rect">
+            <a:avLst/>
+          </a:prstGeom>
+          <a:solidFill>
+            <a:srgbClr val="F7F5F2"/>
+          </a:solidFill>
+          <a:ln w="9525">
+            <a:solidFill>
+              <a:srgbClr val="E3DED7"/>
+            </a:solidFill>
+            <a:prstDash val="solid"/>
+          </a:ln>
+        </p:spPr>
+      </p:sp>
+      <p:sp>
+        <p:nvSpPr>
+          <p:cNvPr id="19" name="Text 16"/>
+          <p:cNvSpPr txBox="1"/>
+          <p:nvPr/>
+        </p:nvSpPr>
+        <p:spPr>
+          <a:xfrm>
+            <a:off x="1005840" y="4608576"/>
+            <a:ext cx="3291840" cy="676656"/>
+          </a:xfrm>
+          <a:prstGeom prst="rect">
+            <a:avLst/>
+          </a:prstGeom>
+          <a:noFill/>
+          <a:ln/>
+        </p:spPr>
+        <p:txBody>
+          <a:bodyPr wrap="square" lIns="0" tIns="0" rIns="0" bIns="0" rtlCol="0" anchor="ctr"/>
+          <a:lstStyle/>
+          <a:p>
+            <a:pPr indent="0" marL="0">
+              <a:buNone/>
+            </a:pPr>
+            <a:r>
+              <a:rPr lang="en-US" sz="1500" b="1" dirty="0">
+                <a:solidFill>
+                  <a:srgbClr val="8A1626"/>
+                </a:solidFill>
+              </a:rPr>
+              <a:t>Everywhere it is needed</a:t>
+            </a:r>
+            <a:endParaRPr lang="en-US" sz="1500" dirty="0"/>
+          </a:p>
+        </p:txBody>
+      </p:sp>
+      <p:sp>
+        <p:nvSpPr>
+          <p:cNvPr id="20" name="Text 17"/>
+          <p:cNvSpPr txBox="1"/>
+          <p:nvPr/>
+        </p:nvSpPr>
+        <p:spPr>
+          <a:xfrm>
+            <a:off x="4434840" y="4608576"/>
+            <a:ext cx="6766560" cy="676656"/>
+          </a:xfrm>
+          <a:prstGeom prst="rect">
+            <a:avLst/>
+          </a:prstGeom>
+          <a:noFill/>
+          <a:ln/>
+        </p:spPr>
+        <p:txBody>
+          <a:bodyPr wrap="square" lIns="0" tIns="0" rIns="0" bIns="0" rtlCol="0" anchor="ctr"/>
+          <a:lstStyle/>
+          <a:p>
+            <a:pPr indent="0" marL="0">
+              <a:buNone/>
+            </a:pPr>
+            <a:r>
+              <a:rPr lang="en-US" sz="1350" dirty="0">
+                <a:solidFill>
+                  <a:srgbClr val="1A1A1A"/>
+                </a:solidFill>
+              </a:rPr>
+              <a:t>Subscriptions and alerts per reader, PDF, PNG, Excel and CSV, and &lt;drishti-report&gt; in other apps.</a:t>
+            </a:r>
+            <a:endParaRPr lang="en-US" sz="1350" dirty="0"/>
+          </a:p>
+        </p:txBody>
+      </p:sp>
+      <p:sp>
+        <p:nvSpPr>
+          <p:cNvPr id="21" name="Shape 18"/>
+          <p:cNvSpPr/>
+          <p:nvPr/>
+        </p:nvSpPr>
+        <p:spPr>
+          <a:xfrm>
+            <a:off x="777240" y="5550408"/>
+            <a:ext cx="10634472" cy="694944"/>
+          </a:xfrm>
+          <a:prstGeom prst="rect">
+            <a:avLst/>
+          </a:prstGeom>
+          <a:solidFill>
+            <a:srgbClr val="F6E6E9"/>
+          </a:solidFill>
+          <a:ln/>
+        </p:spPr>
+      </p:sp>
+      <p:sp>
+        <p:nvSpPr>
+          <p:cNvPr id="22" name="Shape 19"/>
+          <p:cNvSpPr/>
+          <p:nvPr/>
+        </p:nvSpPr>
+        <p:spPr>
+          <a:xfrm>
+            <a:off x="777240" y="5550408"/>
+            <a:ext cx="54864" cy="694944"/>
+          </a:xfrm>
+          <a:prstGeom prst="rect">
+            <a:avLst/>
+          </a:prstGeom>
+          <a:solidFill>
+            <a:srgbClr val="A51C30"/>
+          </a:solidFill>
+          <a:ln/>
+        </p:spPr>
+      </p:sp>
+      <p:sp>
+        <p:nvSpPr>
+          <p:cNvPr id="23" name="Text 20"/>
+          <p:cNvSpPr txBox="1"/>
+          <p:nvPr/>
+        </p:nvSpPr>
+        <p:spPr>
+          <a:xfrm>
+            <a:off x="1033272" y="5623560"/>
+            <a:ext cx="10177272" cy="548640"/>
+          </a:xfrm>
+          <a:prstGeom prst="rect">
+            <a:avLst/>
+          </a:prstGeom>
+          <a:noFill/>
+          <a:ln/>
+        </p:spPr>
+        <p:txBody>
+          <a:bodyPr wrap="square" lIns="0" tIns="0" rIns="0" bIns="0" rtlCol="0" anchor="ctr"/>
+          <a:lstStyle/>
+          <a:p>
+            <a:pPr indent="0" marL="0">
+              <a:buNone/>
+            </a:pPr>
+            <a:r>
+              <a:rPr lang="en-US" sz="1400" b="1" dirty="0">
+                <a:solidFill>
+                  <a:srgbClr val="A51C30"/>
+                </a:solidFill>
+              </a:rPr>
+              <a:t>Key insight  </a:t>
+            </a:r>
+            <a:pPr indent="0" marL="0">
+              <a:buNone/>
+            </a:pPr>
+            <a:r>
+              <a:rPr lang="en-US" sz="1400" b="1" dirty="0">
+                <a:solidFill>
+                  <a:srgbClr val="8A1626"/>
+                </a:solidFill>
+              </a:rPr>
+              <a:t>A report reader sees exactly the rows and masks they see on the terminal — BI cannot leak around them.</a:t>
+            </a:r>
+            <a:endParaRPr lang="en-US" sz="1400" dirty="0"/>
+          </a:p>
+        </p:txBody>
+      </p:sp>
+      <p:sp>
+        <p:nvSpPr>
+          <p:cNvPr id="25" name="Slide Number Placeholder 0"/>
+          <p:cNvSpPr>
+            <a:spLocks noGrp="1"/>
+          </p:cNvSpPr>
+          <p:nvPr>
+            <p:ph type="sldNum" sz="quarter" idx="4294967295"/>
+          </p:nvPr>
+        </p:nvSpPr>
+        <p:spPr>
+          <a:xfrm>
+            <a:off x="8220456" y="6437376"/>
+            <a:ext cx="3191256" cy="219456"/>
+          </a:xfrm>
+          <a:prstGeom prst="rect">
+            <a:avLst/>
+          </a:prstGeom>
+          <a:extLst>
+            <a:ext uri="{C572A759-6A51-4108-AA02-DFA0A04FC94B}">
+              <ma14:wrappingTextBoxFlag xmlns:ma14="http://schemas.microsoft.com/office/mac/drawingml/2011/main" val="0"/>
+            </a:ext>
+          </a:extLst>
+        </p:spPr>
+        <p:txBody>
+          <a:bodyPr/>
+          <a:lstStyle>
+            <a:lvl1pPr>
+              <a:defRPr sz="850">
+                <a:solidFill>
+                  <a:srgbClr val="61666E"/>
+                </a:solidFill>
+              </a:defRPr>
+            </a:lvl1pPr>
+          </a:lstStyle>
+          <a:p>
+            <a:pPr algn="r"/>
+            <a:fld id="{F7021451-1387-4CA6-816F-3879F97B5CBC}" type="slidenum">
+              <a:rPr b="1" lang="en-US"/>
+              <a:t>20</a:t>
+            </a:fld>
+            <a:endParaRPr lang="en-US"/>
+          </a:p>
+        </p:txBody>
+      </p:sp>
+    </p:spTree>
+  </p:cSld>
+  <p:clrMapOvr>
+    <a:masterClrMapping/>
+  </p:clrMapOvr>
+</p:sld>
+</file>
+
+<file path=ppt/slides/slide45.xml><?xml version="1.0" encoding="utf-8"?>
+<p:sld xmlns:a="http://schemas.openxmlformats.org/drawingml/2006/main" xmlns:r="http://schemas.openxmlformats.org/officeDocument/2006/relationships" xmlns:p="http://schemas.openxmlformats.org/presentationml/2006/main">
+  <p:cSld name="Slide 19">
+    <p:spTree>
+      <p:nvGrpSpPr>
+        <p:cNvPr id="1" name=""/>
+        <p:cNvGrpSpPr/>
+        <p:nvPr/>
+      </p:nvGrpSpPr>
+      <p:grpSpPr>
+        <a:xfrm>
+          <a:off x="0" y="0"/>
+          <a:ext cx="0" cy="0"/>
+          <a:chOff x="0" y="0"/>
+          <a:chExt cx="0" cy="0"/>
+        </a:xfrm>
+      </p:grpSpPr>
+      <p:sp>
+        <p:nvSpPr>
+          <p:cNvPr id="2" name="Text 3"/>
+          <p:cNvSpPr/>
+          <p:nvPr>
+            <p:ph idx="103" type="body" hasCustomPrompt="1"/>
+          </p:nvPr>
+        </p:nvSpPr>
+        <p:spPr>
+          <a:xfrm>
+            <a:off x="777240" y="457200"/>
+            <a:ext cx="10634472" cy="237744"/>
+          </a:xfrm>
+          <a:prstGeom prst="rect">
+            <a:avLst/>
+          </a:prstGeom>
+          <a:noFill/>
+          <a:ln/>
+        </p:spPr>
+        <p:txBody>
+          <a:bodyPr wrap="square" lIns="0" tIns="0" rIns="0" bIns="0" rtlCol="0"/>
+          <a:lstStyle/>
+          <a:p>
+            <a:pPr algn="l" indent="0" marL="0">
+              <a:buNone/>
+            </a:pPr>
+            <a:r>
+              <a:rPr lang="en-US" sz="1050" b="1" spc="100" kern="0" dirty="0">
+                <a:solidFill>
+                  <a:srgbClr val="A51C30"/>
+                </a:solidFill>
+              </a:rPr>
+              <a:t>BI STUDIO · 2.4</a:t>
+            </a:r>
+            <a:endParaRPr lang="en-US" sz="1050" dirty="0"/>
+          </a:p>
+        </p:txBody>
+      </p:sp>
+      <p:sp>
+        <p:nvSpPr>
+          <p:cNvPr id="3" name="Text 3"/>
+          <p:cNvSpPr/>
+          <p:nvPr>
+            <p:ph idx="104" type="title" hasCustomPrompt="1"/>
+          </p:nvPr>
+        </p:nvSpPr>
+        <p:spPr>
+          <a:xfrm>
+            <a:off x="777240" y="731520"/>
+            <a:ext cx="10634472" cy="502920"/>
+          </a:xfrm>
+          <a:prstGeom prst="rect">
+            <a:avLst/>
+          </a:prstGeom>
+          <a:noFill/>
+          <a:ln/>
+        </p:spPr>
+        <p:txBody>
+          <a:bodyPr wrap="square" lIns="0" tIns="0" rIns="0" bIns="0" rtlCol="0" anchor="t"/>
+          <a:lstStyle/>
+          <a:p>
+            <a:pPr algn="l" indent="0" marL="0">
+              <a:buNone/>
+            </a:pPr>
+            <a:r>
+              <a:rPr lang="en-US" sz="2600" b="1" dirty="0">
+                <a:solidFill>
+                  <a:srgbClr val="1A1A1A"/>
+                </a:solidFill>
+              </a:rPr>
+              <a:t>Reports, models, boards and themes in one studio</a:t>
+            </a:r>
+            <a:endParaRPr lang="en-US" sz="2600" dirty="0"/>
+          </a:p>
+        </p:txBody>
+      </p:sp>
+      <p:sp>
+        <p:nvSpPr>
+          <p:cNvPr id="4" name="Shape 2"/>
+          <p:cNvSpPr/>
+          <p:nvPr/>
+        </p:nvSpPr>
+        <p:spPr>
+          <a:xfrm>
+            <a:off x="777240" y="1280160"/>
+            <a:ext cx="10634472" cy="9144"/>
+          </a:xfrm>
+          <a:prstGeom prst="rect">
+            <a:avLst/>
+          </a:prstGeom>
+          <a:solidFill>
+            <a:srgbClr val="E3DED7"/>
+          </a:solidFill>
+          <a:ln/>
+        </p:spPr>
+      </p:sp>
+      <p:sp>
+        <p:nvSpPr>
+          <p:cNvPr id="6" name="Shape 3"/>
+          <p:cNvSpPr/>
+          <p:nvPr/>
+        </p:nvSpPr>
+        <p:spPr>
+          <a:xfrm>
+            <a:off x="740664" y="1386459"/>
+            <a:ext cx="6931152" cy="4359402"/>
+          </a:xfrm>
+          <a:prstGeom prst="rect">
+            <a:avLst/>
+          </a:prstGeom>
+          <a:solidFill>
+            <a:srgbClr val="FFFFFF"/>
+          </a:solidFill>
+          <a:ln w="12700">
+            <a:solidFill>
+              <a:srgbClr val="E3DED7"/>
+            </a:solidFill>
+            <a:prstDash val="solid"/>
+          </a:ln>
+          <a:effectLst>
+            <a:outerShdw sx="100000" sy="100000" kx="0" ky="0" algn="bl" rotWithShape="0" blurRad="76200" dist="25400" dir="5400000">
+              <a:srgbClr val="000000">
+                <a:alpha val="18000"/>
+              </a:srgbClr>
+            </a:outerShdw>
+          </a:effectLst>
+        </p:spPr>
+      </p:sp>
+      <p:pic>
+        <p:nvPicPr>
+          <p:cNvPr id="7" name="Image 0" descr="/home/ashutosh/IdeaProjects/drishti/docs/guides/img/designer/02-workbench.jpg">    </p:cNvPr>
+          <p:cNvPicPr>
+            <a:picLocks noChangeAspect="1"/>
+          </p:cNvPicPr>
+          <p:nvPr/>
+        </p:nvPicPr>
+        <p:blipFill>
+          <a:blip r:embed="rId1"/>
+          <a:stretch>
+            <a:fillRect/>
+          </a:stretch>
+        </p:blipFill>
+        <p:spPr>
+          <a:xfrm>
+            <a:off x="777240" y="1423035"/>
+            <a:ext cx="6858000" cy="4286250"/>
+          </a:xfrm>
+          <a:prstGeom prst="rect">
+            <a:avLst/>
+          </a:prstGeom>
+        </p:spPr>
+      </p:pic>
+      <p:sp>
+        <p:nvSpPr>
+          <p:cNvPr id="8" name="Text 4"/>
+          <p:cNvSpPr txBox="1"/>
+          <p:nvPr/>
+        </p:nvSpPr>
+        <p:spPr>
+          <a:xfrm>
+            <a:off x="7909560" y="1417320"/>
+            <a:ext cx="3502152" cy="4297680"/>
+          </a:xfrm>
+          <a:prstGeom prst="rect">
+            <a:avLst/>
+          </a:prstGeom>
+          <a:noFill/>
+          <a:ln/>
+        </p:spPr>
+        <p:txBody>
+          <a:bodyPr wrap="square" lIns="0" tIns="0" rIns="0" bIns="0" rtlCol="0" anchor="t"/>
+          <a:lstStyle/>
+          <a:p>
+            <a:pPr indent="0" marL="0">
+              <a:buNone/>
+            </a:pPr>
+            <a:r>
+              <a:rPr lang="en-US" sz="1500" b="1" dirty="0">
+                <a:solidFill>
+                  <a:srgbClr val="A51C30"/>
+                </a:solidFill>
+              </a:rPr>
+              <a:t>▪  Explorer and tabs</a:t>
+            </a:r>
+            <a:endParaRPr lang="en-US" sz="1500" dirty="0"/>
+          </a:p>
+          <a:p>
+            <a:pPr indent="0" marL="0">
+              <a:spcAft>
+                <a:spcPts val="800"/>
+              </a:spcAft>
+              <a:buNone/>
+            </a:pPr>
+            <a:r>
+              <a:rPr lang="en-US" sz="1300" dirty="0">
+                <a:solidFill>
+                  <a:srgbClr val="4A5058"/>
+                </a:solidFill>
+              </a:rPr>
+              <a:t>Every item you may edit, by kind, with New; open items as tabs.</a:t>
+            </a:r>
+            <a:endParaRPr lang="en-US" sz="1500" dirty="0"/>
+          </a:p>
+          <a:p>
+            <a:pPr indent="0" marL="0">
+              <a:buNone/>
+            </a:pPr>
+            <a:r>
+              <a:rPr lang="en-US" sz="1500" b="1" dirty="0">
+                <a:solidFill>
+                  <a:srgbClr val="A51C30"/>
+                </a:solidFill>
+              </a:rPr>
+              <a:t>▪  Problems and Query</a:t>
+            </a:r>
+            <a:endParaRPr lang="en-US" sz="1500" dirty="0"/>
+          </a:p>
+          <a:p>
+            <a:pPr indent="0" marL="0">
+              <a:spcAft>
+                <a:spcPts val="800"/>
+              </a:spcAft>
+              <a:buNone/>
+            </a:pPr>
+            <a:r>
+              <a:rPr lang="en-US" sz="1300" dirty="0">
+                <a:solidFill>
+                  <a:srgbClr val="4A5058"/>
+                </a:solidFill>
+              </a:rPr>
+              <a:t>The server checks the draft a second after each change; each visual's query and SQL.</a:t>
+            </a:r>
+            <a:endParaRPr lang="en-US" sz="1500" dirty="0"/>
+          </a:p>
+          <a:p>
+            <a:pPr indent="0" marL="0">
+              <a:buNone/>
+            </a:pPr>
+            <a:r>
+              <a:rPr lang="en-US" sz="1500" b="1" dirty="0">
+                <a:solidFill>
+                  <a:srgbClr val="A51C30"/>
+                </a:solidFill>
+              </a:rPr>
+              <a:t>▪  A generated Format pane</a:t>
+            </a:r>
+            <a:endParaRPr lang="en-US" sz="1500" dirty="0"/>
+          </a:p>
+          <a:p>
+            <a:pPr indent="0" marL="0">
+              <a:spcAft>
+                <a:spcPts val="800"/>
+              </a:spcAft>
+              <a:buNone/>
+            </a:pPr>
+            <a:r>
+              <a:rPr lang="en-US" sz="1300" dirty="0">
+                <a:solidFill>
+                  <a:srgbClr val="4A5058"/>
+                </a:solidFill>
+              </a:rPr>
+              <a:t>Typed formats, conditional formatting, themes, tooltip pages, small multiples, the matrix.</a:t>
+            </a:r>
+            <a:endParaRPr lang="en-US" sz="1500" dirty="0"/>
+          </a:p>
+          <a:p>
+            <a:pPr indent="0" marL="0">
+              <a:buNone/>
+            </a:pPr>
+            <a:r>
+              <a:rPr lang="en-US" sz="1500" b="1" dirty="0">
+                <a:solidFill>
+                  <a:srgbClr val="A51C30"/>
+                </a:solidFill>
+              </a:rPr>
+              <a:t>▪  Boards are reports</a:t>
+            </a:r>
+            <a:endParaRPr lang="en-US" sz="1500" dirty="0"/>
+          </a:p>
+          <a:p>
+            <a:pPr indent="0" marL="0">
+              <a:spcAft>
+                <a:spcPts val="800"/>
+              </a:spcAft>
+              <a:buNone/>
+            </a:pPr>
+            <a:r>
+              <a:rPr lang="en-US" sz="1300" dirty="0">
+                <a:solidFill>
+                  <a:srgbClr val="4A5058"/>
+                </a:solidFill>
+              </a:rPr>
+              <a:t>Board pages of live tiles beside the report's own visuals, with kiosk mode and alerts.</a:t>
+            </a:r>
+            <a:endParaRPr lang="en-US" sz="1500" dirty="0"/>
+          </a:p>
+        </p:txBody>
+      </p:sp>
+      <p:sp>
+        <p:nvSpPr>
+          <p:cNvPr id="25" name="Slide Number Placeholder 0"/>
+          <p:cNvSpPr>
+            <a:spLocks noGrp="1"/>
+          </p:cNvSpPr>
+          <p:nvPr>
+            <p:ph type="sldNum" sz="quarter" idx="4294967295"/>
+          </p:nvPr>
+        </p:nvSpPr>
+        <p:spPr>
+          <a:xfrm>
+            <a:off x="8220456" y="6437376"/>
+            <a:ext cx="3191256" cy="219456"/>
+          </a:xfrm>
+          <a:prstGeom prst="rect">
+            <a:avLst/>
+          </a:prstGeom>
+          <a:extLst>
+            <a:ext uri="{C572A759-6A51-4108-AA02-DFA0A04FC94B}">
+              <ma14:wrappingTextBoxFlag xmlns:ma14="http://schemas.microsoft.com/office/mac/drawingml/2011/main" val="0"/>
+            </a:ext>
+          </a:extLst>
+        </p:spPr>
+        <p:txBody>
+          <a:bodyPr/>
+          <a:lstStyle>
+            <a:lvl1pPr>
+              <a:defRPr sz="850">
+                <a:solidFill>
+                  <a:srgbClr val="61666E"/>
+                </a:solidFill>
+              </a:defRPr>
+            </a:lvl1pPr>
+          </a:lstStyle>
+          <a:p>
+            <a:pPr algn="r"/>
+            <a:fld id="{F7021451-1387-4CA6-816F-3879F97B5CBC}" type="slidenum">
+              <a:rPr b="1" lang="en-US"/>
+              <a:t>21</a:t>
+            </a:fld>
+            <a:endParaRPr lang="en-US"/>
+          </a:p>
+        </p:txBody>
+      </p:sp>
+    </p:spTree>
+  </p:cSld>
+  <p:clrMapOvr>
+    <a:masterClrMapping/>
+  </p:clrMapOvr>
+</p:sld>
+</file>
+
+<file path=ppt/slides/slide46.xml><?xml version="1.0" encoding="utf-8"?>
+<p:sld xmlns:a="http://schemas.openxmlformats.org/drawingml/2006/main" xmlns:r="http://schemas.openxmlformats.org/officeDocument/2006/relationships" xmlns:p="http://schemas.openxmlformats.org/presentationml/2006/main">
+  <p:cSld name="Slide 18">
+    <p:spTree>
+      <p:nvGrpSpPr>
+        <p:cNvPr id="1" name=""/>
+        <p:cNvGrpSpPr/>
+        <p:nvPr/>
+      </p:nvGrpSpPr>
+      <p:grpSpPr>
+        <a:xfrm>
+          <a:off x="0" y="0"/>
+          <a:ext cx="0" cy="0"/>
+          <a:chOff x="0" y="0"/>
+          <a:chExt cx="0" cy="0"/>
+        </a:xfrm>
+      </p:grpSpPr>
+      <p:sp>
+        <p:nvSpPr>
+          <p:cNvPr id="2" name="Text 3"/>
+          <p:cNvSpPr/>
+          <p:nvPr>
+            <p:ph idx="103" type="body" hasCustomPrompt="1"/>
+          </p:nvPr>
+        </p:nvSpPr>
+        <p:spPr>
+          <a:xfrm>
+            <a:off x="777240" y="457200"/>
+            <a:ext cx="10634472" cy="237744"/>
+          </a:xfrm>
+          <a:prstGeom prst="rect">
+            <a:avLst/>
+          </a:prstGeom>
+          <a:noFill/>
+          <a:ln/>
+        </p:spPr>
+        <p:txBody>
+          <a:bodyPr wrap="square" lIns="0" tIns="0" rIns="0" bIns="0" rtlCol="0"/>
+          <a:lstStyle/>
+          <a:p>
+            <a:pPr algn="l" indent="0" marL="0">
+              <a:buNone/>
+            </a:pPr>
+            <a:r>
+              <a:rPr lang="en-US" sz="1050" b="1" spc="100" kern="0" dirty="0">
+                <a:solidFill>
+                  <a:srgbClr val="A51C30"/>
+                </a:solidFill>
+              </a:rPr>
+              <a:t>PYTHON · DATA PREP AND THE CONSOLE</a:t>
+            </a:r>
+            <a:endParaRPr lang="en-US" sz="1050" dirty="0"/>
+          </a:p>
+        </p:txBody>
+      </p:sp>
+      <p:sp>
+        <p:nvSpPr>
+          <p:cNvPr id="3" name="Text 3"/>
+          <p:cNvSpPr/>
+          <p:nvPr>
+            <p:ph idx="104" type="title" hasCustomPrompt="1"/>
+          </p:nvPr>
+        </p:nvSpPr>
+        <p:spPr>
+          <a:xfrm>
+            <a:off x="777240" y="731520"/>
+            <a:ext cx="10634472" cy="502920"/>
+          </a:xfrm>
+          <a:prstGeom prst="rect">
+            <a:avLst/>
+          </a:prstGeom>
+          <a:noFill/>
+          <a:ln/>
+        </p:spPr>
+        <p:txBody>
+          <a:bodyPr wrap="square" lIns="0" tIns="0" rIns="0" bIns="0" rtlCol="0" anchor="t"/>
+          <a:lstStyle/>
+          <a:p>
+            <a:pPr algn="l" indent="0" marL="0">
+              <a:buNone/>
+            </a:pPr>
+            <a:r>
+              <a:rPr lang="en-US" sz="2600" b="1" dirty="0">
+                <a:solidFill>
+                  <a:srgbClr val="1A1A1A"/>
+                </a:solidFill>
+              </a:rPr>
+              <a:t>Python where it belongs: on the server, or on your own rows</a:t>
+            </a:r>
+            <a:endParaRPr lang="en-US" sz="2600" dirty="0"/>
+          </a:p>
+        </p:txBody>
+      </p:sp>
+      <p:sp>
+        <p:nvSpPr>
+          <p:cNvPr id="4" name="Shape 2"/>
+          <p:cNvSpPr/>
+          <p:nvPr/>
+        </p:nvSpPr>
+        <p:spPr>
+          <a:xfrm>
+            <a:off x="777240" y="1280160"/>
+            <a:ext cx="10634472" cy="9144"/>
+          </a:xfrm>
+          <a:prstGeom prst="rect">
+            <a:avLst/>
+          </a:prstGeom>
+          <a:solidFill>
+            <a:srgbClr val="E3DED7"/>
+          </a:solidFill>
+          <a:ln/>
+        </p:spPr>
+      </p:sp>
+      <p:sp>
+        <p:nvSpPr>
+          <p:cNvPr id="6" name="Shape 3"/>
+          <p:cNvSpPr/>
+          <p:nvPr/>
+        </p:nvSpPr>
+        <p:spPr>
+          <a:xfrm>
+            <a:off x="740664" y="1386459"/>
+            <a:ext cx="6931152" cy="4359402"/>
+          </a:xfrm>
+          <a:prstGeom prst="rect">
+            <a:avLst/>
+          </a:prstGeom>
+          <a:solidFill>
+            <a:srgbClr val="FFFFFF"/>
+          </a:solidFill>
+          <a:ln w="12700">
+            <a:solidFill>
+              <a:srgbClr val="E3DED7"/>
+            </a:solidFill>
+            <a:prstDash val="solid"/>
+          </a:ln>
+          <a:effectLst>
+            <a:outerShdw sx="100000" sy="100000" kx="0" ky="0" algn="bl" rotWithShape="0" blurRad="76200" dist="25400" dir="5400000">
+              <a:srgbClr val="000000">
+                <a:alpha val="18000"/>
+              </a:srgbClr>
+            </a:outerShdw>
+          </a:effectLst>
+        </p:spPr>
+      </p:sp>
+      <p:pic>
+        <p:nvPicPr>
+          <p:cNvPr id="7" name="Image 0" descr="/home/ashutosh/IdeaProjects/drishti/docs/guides/img/about/01-var-drawer.jpg">    </p:cNvPr>
+          <p:cNvPicPr>
+            <a:picLocks noChangeAspect="1"/>
+          </p:cNvPicPr>
+          <p:nvPr/>
+        </p:nvPicPr>
+        <p:blipFill>
+          <a:blip r:embed="rId1"/>
+          <a:stretch>
+            <a:fillRect/>
+          </a:stretch>
+        </p:blipFill>
+        <p:spPr>
+          <a:xfrm>
+            <a:off x="777240" y="1423035"/>
+            <a:ext cx="6858000" cy="4286250"/>
+          </a:xfrm>
+          <a:prstGeom prst="rect">
+            <a:avLst/>
+          </a:prstGeom>
+        </p:spPr>
+      </p:pic>
+      <p:sp>
+        <p:nvSpPr>
+          <p:cNvPr id="8" name="Text 4"/>
+          <p:cNvSpPr txBox="1"/>
+          <p:nvPr/>
+        </p:nvSpPr>
+        <p:spPr>
+          <a:xfrm>
+            <a:off x="7909560" y="1417320"/>
+            <a:ext cx="3502152" cy="4297680"/>
+          </a:xfrm>
+          <a:prstGeom prst="rect">
+            <a:avLst/>
+          </a:prstGeom>
+          <a:noFill/>
+          <a:ln/>
+        </p:spPr>
+        <p:txBody>
+          <a:bodyPr wrap="square" lIns="0" tIns="0" rIns="0" bIns="0" rtlCol="0" anchor="t"/>
+          <a:lstStyle/>
+          <a:p>
+            <a:pPr indent="0" marL="0">
+              <a:buNone/>
+            </a:pPr>
+            <a:r>
+              <a:rPr lang="en-US" sz="1500" b="1" dirty="0">
+                <a:solidFill>
+                  <a:srgbClr val="A51C30"/>
+                </a:solidFill>
+              </a:rPr>
+              <a:t>▪  Transforms, step by step</a:t>
+            </a:r>
+            <a:endParaRPr lang="en-US" sz="1500" dirty="0"/>
+          </a:p>
+          <a:p>
+            <a:pPr indent="0" marL="0">
+              <a:spcAft>
+                <a:spcPts val="800"/>
+              </a:spcAft>
+              <a:buNone/>
+            </a:pPr>
+            <a:r>
+              <a:rPr lang="en-US" sz="1300" dirty="0">
+                <a:solidFill>
+                  <a:srgbClr val="4A5058"/>
+                </a:solidFill>
+              </a:rPr>
+              <a:t>Inputs read through a pack's connector as you; 21 tested snippets; a profile after each step.</a:t>
+            </a:r>
+            <a:endParaRPr lang="en-US" sz="1500" dirty="0"/>
+          </a:p>
+          <a:p>
+            <a:pPr indent="0" marL="0">
+              <a:buNone/>
+            </a:pPr>
+            <a:r>
+              <a:rPr lang="en-US" sz="1500" b="1" dirty="0">
+                <a:solidFill>
+                  <a:srgbClr val="A51C30"/>
+                </a:solidFill>
+              </a:rPr>
+              <a:t>▪  Sandboxed, warm</a:t>
+            </a:r>
+            <a:endParaRPr lang="en-US" sz="1500" dirty="0"/>
+          </a:p>
+          <a:p>
+            <a:pPr indent="0" marL="0">
+              <a:spcAft>
+                <a:spcPts val="800"/>
+              </a:spcAft>
+              <a:buNone/>
+            </a:pPr>
+            <a:r>
+              <a:rPr lang="en-US" sz="1300" dirty="0">
+                <a:solidFill>
+                  <a:srgbClr val="4A5058"/>
+                </a:solidFill>
+              </a:rPr>
+              <a:t>Measures, visuals and Transforms run in a fork-server child with limits.</a:t>
+            </a:r>
+            <a:endParaRPr lang="en-US" sz="1500" dirty="0"/>
+          </a:p>
+          <a:p>
+            <a:pPr indent="0" marL="0">
+              <a:buNone/>
+            </a:pPr>
+            <a:r>
+              <a:rPr lang="en-US" sz="1500" b="1" dirty="0">
+                <a:solidFill>
+                  <a:srgbClr val="A51C30"/>
+                </a:solidFill>
+              </a:rPr>
+              <a:t>▪  Your own Python</a:t>
+            </a:r>
+            <a:endParaRPr lang="en-US" sz="1500" dirty="0"/>
+          </a:p>
+          <a:p>
+            <a:pPr indent="0" marL="0">
+              <a:spcAft>
+                <a:spcPts val="800"/>
+              </a:spcAft>
+              <a:buNone/>
+            </a:pPr>
+            <a:r>
+              <a:rPr lang="en-US" sz="1300" dirty="0">
+                <a:solidFill>
+                  <a:srgbClr val="4A5058"/>
+                </a:solidFill>
+              </a:rPr>
+              <a:t>BI → Python console: pandas on a masked extract, in your browser.</a:t>
+            </a:r>
+            <a:endParaRPr lang="en-US" sz="1500" dirty="0"/>
+          </a:p>
+          <a:p>
+            <a:pPr indent="0" marL="0">
+              <a:buNone/>
+            </a:pPr>
+            <a:r>
+              <a:rPr lang="en-US" sz="1500" b="1" dirty="0">
+                <a:solidFill>
+                  <a:srgbClr val="A51C30"/>
+                </a:solidFill>
+              </a:rPr>
+              <a:t>▪  Promote to the server</a:t>
+            </a:r>
+            <a:endParaRPr lang="en-US" sz="1500" dirty="0"/>
+          </a:p>
+          <a:p>
+            <a:pPr indent="0" marL="0">
+              <a:spcAft>
+                <a:spcPts val="800"/>
+              </a:spcAft>
+              <a:buNone/>
+            </a:pPr>
+            <a:r>
+              <a:rPr lang="en-US" sz="1300" dirty="0">
+                <a:solidFill>
+                  <a:srgbClr val="4A5058"/>
+                </a:solidFill>
+              </a:rPr>
+              <a:t>The same code run again on the backend, compared, kept as a notebook draft.</a:t>
+            </a:r>
+            <a:endParaRPr lang="en-US" sz="1500" dirty="0"/>
+          </a:p>
+        </p:txBody>
+      </p:sp>
+      <p:sp>
+        <p:nvSpPr>
+          <p:cNvPr id="25" name="Slide Number Placeholder 0"/>
+          <p:cNvSpPr>
+            <a:spLocks noGrp="1"/>
+          </p:cNvSpPr>
+          <p:nvPr>
+            <p:ph type="sldNum" sz="quarter" idx="4294967295"/>
+          </p:nvPr>
+        </p:nvSpPr>
+        <p:spPr>
+          <a:xfrm>
+            <a:off x="8220456" y="6437376"/>
+            <a:ext cx="3191256" cy="219456"/>
+          </a:xfrm>
+          <a:prstGeom prst="rect">
+            <a:avLst/>
+          </a:prstGeom>
+          <a:extLst>
+            <a:ext uri="{C572A759-6A51-4108-AA02-DFA0A04FC94B}">
+              <ma14:wrappingTextBoxFlag xmlns:ma14="http://schemas.microsoft.com/office/mac/drawingml/2011/main" val="0"/>
+            </a:ext>
+          </a:extLst>
+        </p:spPr>
+        <p:txBody>
+          <a:bodyPr/>
+          <a:lstStyle>
+            <a:lvl1pPr>
+              <a:defRPr sz="850">
+                <a:solidFill>
+                  <a:srgbClr val="61666E"/>
+                </a:solidFill>
+              </a:defRPr>
+            </a:lvl1pPr>
+          </a:lstStyle>
+          <a:p>
+            <a:pPr algn="r"/>
+            <a:fld id="{F7021451-1387-4CA6-816F-3879F97B5CBC}" type="slidenum">
+              <a:rPr b="1" lang="en-US"/>
+              <a:t>22</a:t>
+            </a:fld>
+            <a:endParaRPr lang="en-US"/>
+          </a:p>
+        </p:txBody>
+      </p:sp>
+    </p:spTree>
+  </p:cSld>
+  <p:clrMapOvr>
+    <a:masterClrMapping/>
+  </p:clrMapOvr>
+</p:sld>
+</file>
+
+<file path=ppt/slides/slide47.xml><?xml version="1.0" encoding="utf-8"?>
+<p:sld xmlns:a="http://schemas.openxmlformats.org/drawingml/2006/main" xmlns:r="http://schemas.openxmlformats.org/officeDocument/2006/relationships" xmlns:p="http://schemas.openxmlformats.org/presentationml/2006/main">
+  <p:cSld name="Slide 13">
+    <p:spTree>
+      <p:nvGrpSpPr>
+        <p:cNvPr id="1" name=""/>
+        <p:cNvGrpSpPr/>
+        <p:nvPr/>
+      </p:nvGrpSpPr>
+      <p:grpSpPr>
+        <a:xfrm>
+          <a:off x="0" y="0"/>
+          <a:ext cx="0" cy="0"/>
+          <a:chOff x="0" y="0"/>
+          <a:chExt cx="0" cy="0"/>
+        </a:xfrm>
+      </p:grpSpPr>
+      <p:sp>
+        <p:nvSpPr>
+          <p:cNvPr id="2" name="Text 3"/>
+          <p:cNvSpPr/>
+          <p:nvPr>
+            <p:ph idx="103" type="body" hasCustomPrompt="1"/>
+          </p:nvPr>
+        </p:nvSpPr>
+        <p:spPr>
+          <a:xfrm>
+            <a:off x="777240" y="457200"/>
+            <a:ext cx="10634472" cy="237744"/>
+          </a:xfrm>
+          <a:prstGeom prst="rect">
+            <a:avLst/>
+          </a:prstGeom>
+          <a:noFill/>
+          <a:ln/>
+        </p:spPr>
+        <p:txBody>
+          <a:bodyPr wrap="square" lIns="0" tIns="0" rIns="0" bIns="0" rtlCol="0"/>
+          <a:lstStyle/>
+          <a:p>
+            <a:pPr algn="l" indent="0" marL="0">
+              <a:buNone/>
+            </a:pPr>
+            <a:r>
+              <a:rPr lang="en-US" sz="1050" b="1" spc="100" kern="0" dirty="0">
+                <a:solidFill>
+                  <a:srgbClr val="A51C30"/>
+                </a:solidFill>
+              </a:rPr>
+              <a:t>DRISHTI*NET · 2.5</a:t>
+            </a:r>
+            <a:endParaRPr lang="en-US" sz="1050" dirty="0"/>
+          </a:p>
+        </p:txBody>
+      </p:sp>
+      <p:sp>
+        <p:nvSpPr>
+          <p:cNvPr id="3" name="Text 3"/>
+          <p:cNvSpPr/>
+          <p:nvPr>
+            <p:ph idx="104" type="title" hasCustomPrompt="1"/>
+          </p:nvPr>
+        </p:nvSpPr>
+        <p:spPr>
+          <a:xfrm>
+            <a:off x="777240" y="731520"/>
+            <a:ext cx="10634472" cy="502920"/>
+          </a:xfrm>
+          <a:prstGeom prst="rect">
+            <a:avLst/>
+          </a:prstGeom>
+          <a:noFill/>
+          <a:ln/>
+        </p:spPr>
+        <p:txBody>
+          <a:bodyPr wrap="square" lIns="0" tIns="0" rIns="0" bIns="0" rtlCol="0" anchor="t"/>
+          <a:lstStyle/>
+          <a:p>
+            <a:pPr algn="l" indent="0" marL="0">
+              <a:buNone/>
+            </a:pPr>
+            <a:r>
+              <a:rPr lang="en-US" sz="2600" b="1" dirty="0">
+                <a:solidFill>
+                  <a:srgbClr val="1A1A1A"/>
+                </a:solidFill>
+              </a:rPr>
+              <a:t>Several servers, one Drishti</a:t>
+            </a:r>
+            <a:endParaRPr lang="en-US" sz="2600" dirty="0"/>
+          </a:p>
+        </p:txBody>
+      </p:sp>
+      <p:sp>
+        <p:nvSpPr>
+          <p:cNvPr id="4" name="Shape 2"/>
+          <p:cNvSpPr/>
+          <p:nvPr/>
+        </p:nvSpPr>
+        <p:spPr>
+          <a:xfrm>
+            <a:off x="777240" y="1280160"/>
+            <a:ext cx="10634472" cy="9144"/>
+          </a:xfrm>
+          <a:prstGeom prst="rect">
+            <a:avLst/>
+          </a:prstGeom>
+          <a:solidFill>
+            <a:srgbClr val="E3DED7"/>
+          </a:solidFill>
+          <a:ln/>
+        </p:spPr>
+      </p:sp>
+      <p:sp>
+        <p:nvSpPr>
+          <p:cNvPr id="6" name="Shape 3"/>
+          <p:cNvSpPr/>
+          <p:nvPr/>
+        </p:nvSpPr>
+        <p:spPr>
+          <a:xfrm>
+            <a:off x="777240" y="1600200"/>
+            <a:ext cx="1874520" cy="1463040"/>
+          </a:xfrm>
+          <a:prstGeom prst="rect">
+            <a:avLst/>
+          </a:prstGeom>
+          <a:solidFill>
+            <a:srgbClr val="FFFFFF"/>
+          </a:solidFill>
+          <a:ln w="12700">
+            <a:solidFill>
+              <a:srgbClr val="E3DED7"/>
+            </a:solidFill>
+            <a:prstDash val="solid"/>
+          </a:ln>
+          <a:effectLst>
+            <a:outerShdw sx="100000" sy="100000" kx="0" ky="0" algn="bl" rotWithShape="0" blurRad="50800" dist="19050" dir="5400000">
+              <a:srgbClr val="000000">
+                <a:alpha val="10000"/>
+              </a:srgbClr>
+            </a:outerShdw>
+          </a:effectLst>
+        </p:spPr>
+      </p:sp>
+      <p:sp>
+        <p:nvSpPr>
+          <p:cNvPr id="7" name="Text 4"/>
+          <p:cNvSpPr txBox="1"/>
+          <p:nvPr/>
+        </p:nvSpPr>
+        <p:spPr>
+          <a:xfrm>
+            <a:off x="914400" y="1709928"/>
+            <a:ext cx="1600200" cy="329184"/>
+          </a:xfrm>
+          <a:prstGeom prst="rect">
+            <a:avLst/>
+          </a:prstGeom>
+          <a:noFill/>
+          <a:ln/>
+        </p:spPr>
+        <p:txBody>
+          <a:bodyPr wrap="square" lIns="0" tIns="0" rIns="0" bIns="0" rtlCol="0" anchor="t"/>
+          <a:lstStyle/>
+          <a:p>
+            <a:pPr indent="0" marL="0">
+              <a:buNone/>
+            </a:pPr>
+            <a:r>
+              <a:rPr lang="en-US" sz="1600" b="1" dirty="0">
+                <a:solidFill>
+                  <a:srgbClr val="1A1A1A"/>
+                </a:solidFill>
+              </a:rPr>
+              <a:t>Console</a:t>
+            </a:r>
+            <a:endParaRPr lang="en-US" sz="1600" dirty="0"/>
+          </a:p>
+        </p:txBody>
+      </p:sp>
+      <p:sp>
+        <p:nvSpPr>
+          <p:cNvPr id="8" name="Text 5"/>
+          <p:cNvSpPr txBox="1"/>
+          <p:nvPr/>
+        </p:nvSpPr>
+        <p:spPr>
+          <a:xfrm>
+            <a:off x="914400" y="2057400"/>
+            <a:ext cx="1600200" cy="941832"/>
+          </a:xfrm>
+          <a:prstGeom prst="rect">
+            <a:avLst/>
+          </a:prstGeom>
+          <a:noFill/>
+          <a:ln/>
+        </p:spPr>
+        <p:txBody>
+          <a:bodyPr wrap="square" lIns="0" tIns="0" rIns="0" bIns="0" rtlCol="0" anchor="t"/>
+          <a:lstStyle/>
+          <a:p>
+            <a:pPr indent="0" marL="0">
+              <a:buNone/>
+            </a:pPr>
+            <a:r>
+              <a:rPr lang="en-US" sz="1300" dirty="0">
+                <a:solidFill>
+                  <a:srgbClr val="4A5058"/>
+                </a:solidFill>
+              </a:rPr>
+              <a:t>Given one server; learns the rest; fails over</a:t>
+            </a:r>
+            <a:endParaRPr lang="en-US" sz="1300" dirty="0"/>
+          </a:p>
+        </p:txBody>
+      </p:sp>
+      <p:sp>
+        <p:nvSpPr>
+          <p:cNvPr id="9" name="Shape 6"/>
+          <p:cNvSpPr/>
+          <p:nvPr/>
+        </p:nvSpPr>
+        <p:spPr>
+          <a:xfrm>
+            <a:off x="2953512" y="1600200"/>
+            <a:ext cx="1874520" cy="1463040"/>
+          </a:xfrm>
+          <a:prstGeom prst="rect">
+            <a:avLst/>
+          </a:prstGeom>
+          <a:solidFill>
+            <a:srgbClr val="FFFFFF"/>
+          </a:solidFill>
+          <a:ln w="12700">
+            <a:solidFill>
+              <a:srgbClr val="E3DED7"/>
+            </a:solidFill>
+            <a:prstDash val="solid"/>
+          </a:ln>
+          <a:effectLst>
+            <a:outerShdw sx="100000" sy="100000" kx="0" ky="0" algn="bl" rotWithShape="0" blurRad="50800" dist="19050" dir="5400000">
+              <a:srgbClr val="000000">
+                <a:alpha val="10000"/>
+              </a:srgbClr>
+            </a:outerShdw>
+          </a:effectLst>
+        </p:spPr>
+      </p:sp>
+      <p:sp>
+        <p:nvSpPr>
+          <p:cNvPr id="10" name="Text 7"/>
+          <p:cNvSpPr txBox="1"/>
+          <p:nvPr/>
+        </p:nvSpPr>
+        <p:spPr>
+          <a:xfrm>
+            <a:off x="3090672" y="1709928"/>
+            <a:ext cx="1600200" cy="329184"/>
+          </a:xfrm>
+          <a:prstGeom prst="rect">
+            <a:avLst/>
+          </a:prstGeom>
+          <a:noFill/>
+          <a:ln/>
+        </p:spPr>
+        <p:txBody>
+          <a:bodyPr wrap="square" lIns="0" tIns="0" rIns="0" bIns="0" rtlCol="0" anchor="t"/>
+          <a:lstStyle/>
+          <a:p>
+            <a:pPr indent="0" marL="0">
+              <a:buNone/>
+            </a:pPr>
+            <a:r>
+              <a:rPr lang="en-US" sz="1600" b="1" dirty="0">
+                <a:solidFill>
+                  <a:srgbClr val="1A1A1A"/>
+                </a:solidFill>
+              </a:rPr>
+              <a:t>Any node</a:t>
+            </a:r>
+            <a:endParaRPr lang="en-US" sz="1600" dirty="0"/>
+          </a:p>
+        </p:txBody>
+      </p:sp>
+      <p:sp>
+        <p:nvSpPr>
+          <p:cNvPr id="11" name="Text 8"/>
+          <p:cNvSpPr txBox="1"/>
+          <p:nvPr/>
+        </p:nvSpPr>
+        <p:spPr>
+          <a:xfrm>
+            <a:off x="3090672" y="2057400"/>
+            <a:ext cx="1600200" cy="941832"/>
+          </a:xfrm>
+          <a:prstGeom prst="rect">
+            <a:avLst/>
+          </a:prstGeom>
+          <a:noFill/>
+          <a:ln/>
+        </p:spPr>
+        <p:txBody>
+          <a:bodyPr wrap="square" lIns="0" tIns="0" rIns="0" bIns="0" rtlCol="0" anchor="t"/>
+          <a:lstStyle/>
+          <a:p>
+            <a:pPr indent="0" marL="0">
+              <a:buNone/>
+            </a:pPr>
+            <a:r>
+              <a:rPr lang="en-US" sz="1300" dirty="0">
+                <a:solidFill>
+                  <a:srgbClr val="4A5058"/>
+                </a:solidFill>
+              </a:rPr>
+              <a:t>Signed calls; your roles checked</a:t>
+            </a:r>
+            <a:endParaRPr lang="en-US" sz="1300" dirty="0"/>
+          </a:p>
+        </p:txBody>
+      </p:sp>
+      <p:sp>
+        <p:nvSpPr>
+          <p:cNvPr id="12" name="Shape 9"/>
+          <p:cNvSpPr/>
+          <p:nvPr/>
+        </p:nvSpPr>
+        <p:spPr>
+          <a:xfrm>
+            <a:off x="2651760" y="2331720"/>
+            <a:ext cx="301752" cy="914"/>
+          </a:xfrm>
+          <a:prstGeom prst="line">
+            <a:avLst/>
+          </a:prstGeom>
+          <a:noFill/>
+          <a:ln w="22225">
+            <a:solidFill>
+              <a:srgbClr val="A51C30"/>
+            </a:solidFill>
+            <a:prstDash val="solid"/>
+            <a:tailEnd type="triangle"/>
+          </a:ln>
+        </p:spPr>
+      </p:sp>
+      <p:sp>
+        <p:nvSpPr>
+          <p:cNvPr id="13" name="Shape 10"/>
+          <p:cNvSpPr/>
+          <p:nvPr/>
+        </p:nvSpPr>
+        <p:spPr>
+          <a:xfrm>
+            <a:off x="5129784" y="1600200"/>
+            <a:ext cx="1874520" cy="1463040"/>
+          </a:xfrm>
+          <a:prstGeom prst="rect">
+            <a:avLst/>
+          </a:prstGeom>
+          <a:solidFill>
+            <a:srgbClr val="FFFFFF"/>
+          </a:solidFill>
+          <a:ln w="12700">
+            <a:solidFill>
+              <a:srgbClr val="E3DED7"/>
+            </a:solidFill>
+            <a:prstDash val="solid"/>
+          </a:ln>
+          <a:effectLst>
+            <a:outerShdw sx="100000" sy="100000" kx="0" ky="0" algn="bl" rotWithShape="0" blurRad="50800" dist="19050" dir="5400000">
+              <a:srgbClr val="000000">
+                <a:alpha val="10000"/>
+              </a:srgbClr>
+            </a:outerShdw>
+          </a:effectLst>
+        </p:spPr>
+      </p:sp>
+      <p:sp>
+        <p:nvSpPr>
+          <p:cNvPr id="14" name="Text 11"/>
+          <p:cNvSpPr txBox="1"/>
+          <p:nvPr/>
+        </p:nvSpPr>
+        <p:spPr>
+          <a:xfrm>
+            <a:off x="5266944" y="1709928"/>
+            <a:ext cx="1600200" cy="329184"/>
+          </a:xfrm>
+          <a:prstGeom prst="rect">
+            <a:avLst/>
+          </a:prstGeom>
+          <a:noFill/>
+          <a:ln/>
+        </p:spPr>
+        <p:txBody>
+          <a:bodyPr wrap="square" lIns="0" tIns="0" rIns="0" bIns="0" rtlCol="0" anchor="t"/>
+          <a:lstStyle/>
+          <a:p>
+            <a:pPr indent="0" marL="0">
+              <a:buNone/>
+            </a:pPr>
+            <a:r>
+              <a:rPr lang="en-US" sz="1600" b="1" dirty="0">
+                <a:solidFill>
+                  <a:srgbClr val="1A1A1A"/>
+                </a:solidFill>
+              </a:rPr>
+              <a:t>Capability table</a:t>
+            </a:r>
+            <a:endParaRPr lang="en-US" sz="1600" dirty="0"/>
+          </a:p>
+        </p:txBody>
+      </p:sp>
+      <p:sp>
+        <p:nvSpPr>
+          <p:cNvPr id="15" name="Text 12"/>
+          <p:cNvSpPr txBox="1"/>
+          <p:nvPr/>
+        </p:nvSpPr>
+        <p:spPr>
+          <a:xfrm>
+            <a:off x="5266944" y="2057400"/>
+            <a:ext cx="1600200" cy="941832"/>
+          </a:xfrm>
+          <a:prstGeom prst="rect">
+            <a:avLst/>
+          </a:prstGeom>
+          <a:noFill/>
+          <a:ln/>
+        </p:spPr>
+        <p:txBody>
+          <a:bodyPr wrap="square" lIns="0" tIns="0" rIns="0" bIns="0" rtlCol="0" anchor="t"/>
+          <a:lstStyle/>
+          <a:p>
+            <a:pPr indent="0" marL="0">
+              <a:buNone/>
+            </a:pPr>
+            <a:r>
+              <a:rPr lang="en-US" sz="1300" dirty="0">
+                <a:solidFill>
+                  <a:srgbClr val="4A5058"/>
+                </a:solidFill>
+              </a:rPr>
+              <a:t>Who renders each kind, who holds its data</a:t>
+            </a:r>
+            <a:endParaRPr lang="en-US" sz="1300" dirty="0"/>
+          </a:p>
+        </p:txBody>
+      </p:sp>
+      <p:sp>
+        <p:nvSpPr>
+          <p:cNvPr id="16" name="Shape 13"/>
+          <p:cNvSpPr/>
+          <p:nvPr/>
+        </p:nvSpPr>
+        <p:spPr>
+          <a:xfrm>
+            <a:off x="4828032" y="2331720"/>
+            <a:ext cx="301752" cy="914"/>
+          </a:xfrm>
+          <a:prstGeom prst="line">
+            <a:avLst/>
+          </a:prstGeom>
+          <a:noFill/>
+          <a:ln w="22225">
+            <a:solidFill>
+              <a:srgbClr val="A51C30"/>
+            </a:solidFill>
+            <a:prstDash val="solid"/>
+            <a:tailEnd type="triangle"/>
+          </a:ln>
+        </p:spPr>
+      </p:sp>
+      <p:sp>
+        <p:nvSpPr>
+          <p:cNvPr id="17" name="Shape 14"/>
+          <p:cNvSpPr/>
+          <p:nvPr/>
+        </p:nvSpPr>
+        <p:spPr>
+          <a:xfrm>
+            <a:off x="7306056" y="1600200"/>
+            <a:ext cx="1874520" cy="1463040"/>
+          </a:xfrm>
+          <a:prstGeom prst="rect">
+            <a:avLst/>
+          </a:prstGeom>
+          <a:solidFill>
+            <a:srgbClr val="FFFFFF"/>
+          </a:solidFill>
+          <a:ln w="12700">
+            <a:solidFill>
+              <a:srgbClr val="E3DED7"/>
+            </a:solidFill>
+            <a:prstDash val="solid"/>
+          </a:ln>
+          <a:effectLst>
+            <a:outerShdw sx="100000" sy="100000" kx="0" ky="0" algn="bl" rotWithShape="0" blurRad="50800" dist="19050" dir="5400000">
+              <a:srgbClr val="000000">
+                <a:alpha val="10000"/>
+              </a:srgbClr>
+            </a:outerShdw>
+          </a:effectLst>
+        </p:spPr>
+      </p:sp>
+      <p:sp>
+        <p:nvSpPr>
+          <p:cNvPr id="18" name="Text 15"/>
+          <p:cNvSpPr txBox="1"/>
+          <p:nvPr/>
+        </p:nvSpPr>
+        <p:spPr>
+          <a:xfrm>
+            <a:off x="7443216" y="1709928"/>
+            <a:ext cx="1600200" cy="329184"/>
+          </a:xfrm>
+          <a:prstGeom prst="rect">
+            <a:avLst/>
+          </a:prstGeom>
+          <a:noFill/>
+          <a:ln/>
+        </p:spPr>
+        <p:txBody>
+          <a:bodyPr wrap="square" lIns="0" tIns="0" rIns="0" bIns="0" rtlCol="0" anchor="t"/>
+          <a:lstStyle/>
+          <a:p>
+            <a:pPr indent="0" marL="0">
+              <a:buNone/>
+            </a:pPr>
+            <a:r>
+              <a:rPr lang="en-US" sz="1600" b="1" dirty="0">
+                <a:solidFill>
+                  <a:srgbClr val="1A1A1A"/>
+                </a:solidFill>
+              </a:rPr>
+              <a:t>Forward or fetch</a:t>
+            </a:r>
+            <a:endParaRPr lang="en-US" sz="1600" dirty="0"/>
+          </a:p>
+        </p:txBody>
+      </p:sp>
+      <p:sp>
+        <p:nvSpPr>
+          <p:cNvPr id="19" name="Text 16"/>
+          <p:cNvSpPr txBox="1"/>
+          <p:nvPr/>
+        </p:nvSpPr>
+        <p:spPr>
+          <a:xfrm>
+            <a:off x="7443216" y="2057400"/>
+            <a:ext cx="1600200" cy="941832"/>
+          </a:xfrm>
+          <a:prstGeom prst="rect">
+            <a:avLst/>
+          </a:prstGeom>
+          <a:noFill/>
+          <a:ln/>
+        </p:spPr>
+        <p:txBody>
+          <a:bodyPr wrap="square" lIns="0" tIns="0" rIns="0" bIns="0" rtlCol="0" anchor="t"/>
+          <a:lstStyle/>
+          <a:p>
+            <a:pPr indent="0" marL="0">
+              <a:buNone/>
+            </a:pPr>
+            <a:r>
+              <a:rPr lang="en-US" sz="1300" dirty="0">
+                <a:solidFill>
+                  <a:srgbClr val="4A5058"/>
+                </a:solidFill>
+              </a:rPr>
+              <a:t>Newest pack served; masked on both nodes</a:t>
+            </a:r>
+            <a:endParaRPr lang="en-US" sz="1300" dirty="0"/>
+          </a:p>
+        </p:txBody>
+      </p:sp>
+      <p:sp>
+        <p:nvSpPr>
+          <p:cNvPr id="20" name="Shape 17"/>
+          <p:cNvSpPr/>
+          <p:nvPr/>
+        </p:nvSpPr>
+        <p:spPr>
+          <a:xfrm>
+            <a:off x="7004304" y="2331720"/>
+            <a:ext cx="301752" cy="914"/>
+          </a:xfrm>
+          <a:prstGeom prst="line">
+            <a:avLst/>
+          </a:prstGeom>
+          <a:noFill/>
+          <a:ln w="22225">
+            <a:solidFill>
+              <a:srgbClr val="A51C30"/>
+            </a:solidFill>
+            <a:prstDash val="solid"/>
+            <a:tailEnd type="triangle"/>
+          </a:ln>
+        </p:spPr>
+      </p:sp>
+      <p:sp>
+        <p:nvSpPr>
+          <p:cNvPr id="21" name="Shape 18"/>
+          <p:cNvSpPr/>
+          <p:nvPr/>
+        </p:nvSpPr>
+        <p:spPr>
+          <a:xfrm>
+            <a:off x="9482328" y="1600200"/>
+            <a:ext cx="1874520" cy="1463040"/>
+          </a:xfrm>
+          <a:prstGeom prst="rect">
+            <a:avLst/>
+          </a:prstGeom>
+          <a:solidFill>
+            <a:srgbClr val="FFFFFF"/>
+          </a:solidFill>
+          <a:ln w="12700">
+            <a:solidFill>
+              <a:srgbClr val="E3DED7"/>
+            </a:solidFill>
+            <a:prstDash val="solid"/>
+          </a:ln>
+          <a:effectLst>
+            <a:outerShdw sx="100000" sy="100000" kx="0" ky="0" algn="bl" rotWithShape="0" blurRad="50800" dist="19050" dir="5400000">
+              <a:srgbClr val="000000">
+                <a:alpha val="10000"/>
+              </a:srgbClr>
+            </a:outerShdw>
+          </a:effectLst>
+        </p:spPr>
+      </p:sp>
+      <p:sp>
+        <p:nvSpPr>
+          <p:cNvPr id="22" name="Text 19"/>
+          <p:cNvSpPr txBox="1"/>
+          <p:nvPr/>
+        </p:nvSpPr>
+        <p:spPr>
+          <a:xfrm>
+            <a:off x="9619488" y="1709928"/>
+            <a:ext cx="1600200" cy="329184"/>
+          </a:xfrm>
+          <a:prstGeom prst="rect">
+            <a:avLst/>
+          </a:prstGeom>
+          <a:noFill/>
+          <a:ln/>
+        </p:spPr>
+        <p:txBody>
+          <a:bodyPr wrap="square" lIns="0" tIns="0" rIns="0" bIns="0" rtlCol="0" anchor="t"/>
+          <a:lstStyle/>
+          <a:p>
+            <a:pPr indent="0" marL="0">
+              <a:buNone/>
+            </a:pPr>
+            <a:r>
+              <a:rPr lang="en-US" sz="1600" b="1" dirty="0">
+                <a:solidFill>
+                  <a:srgbClr val="1A1A1A"/>
+                </a:solidFill>
+              </a:rPr>
+              <a:t>Scatter-gather</a:t>
+            </a:r>
+            <a:endParaRPr lang="en-US" sz="1600" dirty="0"/>
+          </a:p>
+        </p:txBody>
+      </p:sp>
+      <p:sp>
+        <p:nvSpPr>
+          <p:cNvPr id="23" name="Text 20"/>
+          <p:cNvSpPr txBox="1"/>
+          <p:nvPr/>
+        </p:nvSpPr>
+        <p:spPr>
+          <a:xfrm>
+            <a:off x="9619488" y="2057400"/>
+            <a:ext cx="1600200" cy="941832"/>
+          </a:xfrm>
+          <a:prstGeom prst="rect">
+            <a:avLst/>
+          </a:prstGeom>
+          <a:noFill/>
+          <a:ln/>
+        </p:spPr>
+        <p:txBody>
+          <a:bodyPr wrap="square" lIns="0" tIns="0" rIns="0" bIns="0" rtlCol="0" anchor="t"/>
+          <a:lstStyle/>
+          <a:p>
+            <a:pPr indent="0" marL="0">
+              <a:buNone/>
+            </a:pPr>
+            <a:r>
+              <a:rPr lang="en-US" sz="1300" dirty="0">
+                <a:solidFill>
+                  <a:srgbClr val="4A5058"/>
+                </a:solidFill>
+              </a:rPr>
+              <a:t>A search asks every shard, once</a:t>
+            </a:r>
+            <a:endParaRPr lang="en-US" sz="1300" dirty="0"/>
+          </a:p>
+        </p:txBody>
+      </p:sp>
+      <p:sp>
+        <p:nvSpPr>
+          <p:cNvPr id="24" name="Shape 21"/>
+          <p:cNvSpPr/>
+          <p:nvPr/>
+        </p:nvSpPr>
+        <p:spPr>
+          <a:xfrm>
+            <a:off x="9180576" y="2331720"/>
+            <a:ext cx="301752" cy="914"/>
+          </a:xfrm>
+          <a:prstGeom prst="line">
+            <a:avLst/>
+          </a:prstGeom>
+          <a:noFill/>
+          <a:ln w="22225">
+            <a:solidFill>
+              <a:srgbClr val="A51C30"/>
+            </a:solidFill>
+            <a:prstDash val="solid"/>
+            <a:tailEnd type="triangle"/>
+          </a:ln>
+        </p:spPr>
+      </p:sp>
+      <p:sp>
+        <p:nvSpPr>
+          <p:cNvPr id="25" name="Shape 22"/>
+          <p:cNvSpPr/>
+          <p:nvPr/>
+        </p:nvSpPr>
+        <p:spPr>
+          <a:xfrm>
+            <a:off x="777240" y="3474720"/>
+            <a:ext cx="2507742" cy="1737360"/>
+          </a:xfrm>
+          <a:prstGeom prst="rect">
+            <a:avLst/>
+          </a:prstGeom>
+          <a:solidFill>
+            <a:srgbClr val="F7F5F2"/>
+          </a:solidFill>
+          <a:ln/>
+        </p:spPr>
+      </p:sp>
+      <p:sp>
+        <p:nvSpPr>
+          <p:cNvPr id="26" name="Shape 23"/>
+          <p:cNvSpPr/>
+          <p:nvPr/>
+        </p:nvSpPr>
+        <p:spPr>
+          <a:xfrm>
+            <a:off x="777240" y="3474720"/>
+            <a:ext cx="45720" cy="1737360"/>
+          </a:xfrm>
+          <a:prstGeom prst="rect">
+            <a:avLst/>
+          </a:prstGeom>
+          <a:solidFill>
+            <a:srgbClr val="A51C30"/>
+          </a:solidFill>
+          <a:ln/>
+        </p:spPr>
+      </p:sp>
+      <p:sp>
+        <p:nvSpPr>
+          <p:cNvPr id="27" name="Text 24"/>
+          <p:cNvSpPr txBox="1"/>
+          <p:nvPr/>
+        </p:nvSpPr>
+        <p:spPr>
+          <a:xfrm>
+            <a:off x="978408" y="3584448"/>
+            <a:ext cx="2187702" cy="502920"/>
+          </a:xfrm>
+          <a:prstGeom prst="rect">
+            <a:avLst/>
+          </a:prstGeom>
+          <a:noFill/>
+          <a:ln/>
+        </p:spPr>
+        <p:txBody>
+          <a:bodyPr wrap="square" lIns="0" tIns="0" rIns="0" bIns="0" rtlCol="0" anchor="ctr"/>
+          <a:lstStyle/>
+          <a:p>
+            <a:pPr indent="0" marL="0">
+              <a:buNone/>
+            </a:pPr>
+            <a:r>
+              <a:rPr lang="en-US" sz="2600" b="1" dirty="0">
+                <a:solidFill>
+                  <a:srgbClr val="8A1626"/>
+                </a:solidFill>
+              </a:rPr>
+              <a:t>52 ms</a:t>
+            </a:r>
+            <a:endParaRPr lang="en-US" sz="2600" dirty="0"/>
+          </a:p>
+        </p:txBody>
+      </p:sp>
+      <p:sp>
+        <p:nvSpPr>
+          <p:cNvPr id="28" name="Text 25"/>
+          <p:cNvSpPr txBox="1"/>
+          <p:nvPr/>
+        </p:nvSpPr>
+        <p:spPr>
+          <a:xfrm>
+            <a:off x="978408" y="4078224"/>
+            <a:ext cx="2187702" cy="1060704"/>
+          </a:xfrm>
+          <a:prstGeom prst="rect">
+            <a:avLst/>
+          </a:prstGeom>
+          <a:noFill/>
+          <a:ln/>
+        </p:spPr>
+        <p:txBody>
+          <a:bodyPr wrap="square" lIns="0" tIns="0" rIns="0" bIns="0" rtlCol="0" anchor="t"/>
+          <a:lstStyle/>
+          <a:p>
+            <a:pPr indent="0" marL="0">
+              <a:buNone/>
+            </a:pPr>
+            <a:r>
+              <a:rPr lang="en-US" sz="1300" dirty="0">
+                <a:solidFill>
+                  <a:srgbClr val="4A5058"/>
+                </a:solidFill>
+              </a:rPr>
+              <a:t>Three servers converge after the third starts</a:t>
+            </a:r>
+            <a:endParaRPr lang="en-US" sz="1300" dirty="0"/>
+          </a:p>
+        </p:txBody>
+      </p:sp>
+      <p:sp>
+        <p:nvSpPr>
+          <p:cNvPr id="29" name="Shape 26"/>
+          <p:cNvSpPr/>
+          <p:nvPr/>
+        </p:nvSpPr>
+        <p:spPr>
+          <a:xfrm>
+            <a:off x="3486150" y="3474720"/>
+            <a:ext cx="2507742" cy="1737360"/>
+          </a:xfrm>
+          <a:prstGeom prst="rect">
+            <a:avLst/>
+          </a:prstGeom>
+          <a:solidFill>
+            <a:srgbClr val="F7F5F2"/>
+          </a:solidFill>
+          <a:ln/>
+        </p:spPr>
+      </p:sp>
+      <p:sp>
+        <p:nvSpPr>
+          <p:cNvPr id="30" name="Shape 27"/>
+          <p:cNvSpPr/>
+          <p:nvPr/>
+        </p:nvSpPr>
+        <p:spPr>
+          <a:xfrm>
+            <a:off x="3486150" y="3474720"/>
+            <a:ext cx="45720" cy="1737360"/>
+          </a:xfrm>
+          <a:prstGeom prst="rect">
+            <a:avLst/>
+          </a:prstGeom>
+          <a:solidFill>
+            <a:srgbClr val="A51C30"/>
+          </a:solidFill>
+          <a:ln/>
+        </p:spPr>
+      </p:sp>
+      <p:sp>
+        <p:nvSpPr>
+          <p:cNvPr id="31" name="Text 28"/>
+          <p:cNvSpPr txBox="1"/>
+          <p:nvPr/>
+        </p:nvSpPr>
+        <p:spPr>
+          <a:xfrm>
+            <a:off x="3687318" y="3584448"/>
+            <a:ext cx="2187702" cy="502920"/>
+          </a:xfrm>
+          <a:prstGeom prst="rect">
+            <a:avLst/>
+          </a:prstGeom>
+          <a:noFill/>
+          <a:ln/>
+        </p:spPr>
+        <p:txBody>
+          <a:bodyPr wrap="square" lIns="0" tIns="0" rIns="0" bIns="0" rtlCol="0" anchor="ctr"/>
+          <a:lstStyle/>
+          <a:p>
+            <a:pPr indent="0" marL="0">
+              <a:buNone/>
+            </a:pPr>
+            <a:r>
+              <a:rPr lang="en-US" sz="2600" b="1" dirty="0">
+                <a:solidFill>
+                  <a:srgbClr val="8A1626"/>
+                </a:solidFill>
+              </a:rPr>
+              <a:t>40 s</a:t>
+            </a:r>
+            <a:endParaRPr lang="en-US" sz="2600" dirty="0"/>
+          </a:p>
+        </p:txBody>
+      </p:sp>
+      <p:sp>
+        <p:nvSpPr>
+          <p:cNvPr id="32" name="Text 29"/>
+          <p:cNvSpPr txBox="1"/>
+          <p:nvPr/>
+        </p:nvSpPr>
+        <p:spPr>
+          <a:xfrm>
+            <a:off x="3687318" y="4078224"/>
+            <a:ext cx="2187702" cy="1060704"/>
+          </a:xfrm>
+          <a:prstGeom prst="rect">
+            <a:avLst/>
+          </a:prstGeom>
+          <a:noFill/>
+          <a:ln/>
+        </p:spPr>
+        <p:txBody>
+          <a:bodyPr wrap="square" lIns="0" tIns="0" rIns="0" bIns="0" rtlCol="0" anchor="t"/>
+          <a:lstStyle/>
+          <a:p>
+            <a:pPr indent="0" marL="0">
+              <a:buNone/>
+            </a:pPr>
+            <a:r>
+              <a:rPr lang="en-US" sz="1300" dirty="0">
+                <a:solidFill>
+                  <a:srgbClr val="4A5058"/>
+                </a:solidFill>
+              </a:rPr>
+              <a:t>A killed node is dead everywhere (five nodes)</a:t>
+            </a:r>
+            <a:endParaRPr lang="en-US" sz="1300" dirty="0"/>
+          </a:p>
+        </p:txBody>
+      </p:sp>
+      <p:sp>
+        <p:nvSpPr>
+          <p:cNvPr id="33" name="Shape 30"/>
+          <p:cNvSpPr/>
+          <p:nvPr/>
+        </p:nvSpPr>
+        <p:spPr>
+          <a:xfrm>
+            <a:off x="6195060" y="3474720"/>
+            <a:ext cx="2507742" cy="1737360"/>
+          </a:xfrm>
+          <a:prstGeom prst="rect">
+            <a:avLst/>
+          </a:prstGeom>
+          <a:solidFill>
+            <a:srgbClr val="F7F5F2"/>
+          </a:solidFill>
+          <a:ln/>
+        </p:spPr>
+      </p:sp>
+      <p:sp>
+        <p:nvSpPr>
+          <p:cNvPr id="34" name="Shape 31"/>
+          <p:cNvSpPr/>
+          <p:nvPr/>
+        </p:nvSpPr>
+        <p:spPr>
+          <a:xfrm>
+            <a:off x="6195060" y="3474720"/>
+            <a:ext cx="45720" cy="1737360"/>
+          </a:xfrm>
+          <a:prstGeom prst="rect">
+            <a:avLst/>
+          </a:prstGeom>
+          <a:solidFill>
+            <a:srgbClr val="A51C30"/>
+          </a:solidFill>
+          <a:ln/>
+        </p:spPr>
+      </p:sp>
+      <p:sp>
+        <p:nvSpPr>
+          <p:cNvPr id="35" name="Text 32"/>
+          <p:cNvSpPr txBox="1"/>
+          <p:nvPr/>
+        </p:nvSpPr>
+        <p:spPr>
+          <a:xfrm>
+            <a:off x="6396228" y="3584448"/>
+            <a:ext cx="2187702" cy="502920"/>
+          </a:xfrm>
+          <a:prstGeom prst="rect">
+            <a:avLst/>
+          </a:prstGeom>
+          <a:noFill/>
+          <a:ln/>
+        </p:spPr>
+        <p:txBody>
+          <a:bodyPr wrap="square" lIns="0" tIns="0" rIns="0" bIns="0" rtlCol="0" anchor="ctr"/>
+          <a:lstStyle/>
+          <a:p>
+            <a:pPr indent="0" marL="0">
+              <a:buNone/>
+            </a:pPr>
+            <a:r>
+              <a:rPr lang="en-US" sz="2600" b="1" dirty="0">
+                <a:solidFill>
+                  <a:srgbClr val="8A1626"/>
+                </a:solidFill>
+              </a:rPr>
+              <a:t>1.0 s</a:t>
+            </a:r>
+            <a:endParaRPr lang="en-US" sz="2600" dirty="0"/>
+          </a:p>
+        </p:txBody>
+      </p:sp>
+      <p:sp>
+        <p:nvSpPr>
+          <p:cNvPr id="36" name="Text 33"/>
+          <p:cNvSpPr txBox="1"/>
+          <p:nvPr/>
+        </p:nvSpPr>
+        <p:spPr>
+          <a:xfrm>
+            <a:off x="6396228" y="4078224"/>
+            <a:ext cx="2187702" cy="1060704"/>
+          </a:xfrm>
+          <a:prstGeom prst="rect">
+            <a:avLst/>
+          </a:prstGeom>
+          <a:noFill/>
+          <a:ln/>
+        </p:spPr>
+        <p:txBody>
+          <a:bodyPr wrap="square" lIns="0" tIns="0" rIns="0" bIns="0" rtlCol="0" anchor="t"/>
+          <a:lstStyle/>
+          <a:p>
+            <a:pPr indent="0" marL="0">
+              <a:buNone/>
+            </a:pPr>
+            <a:r>
+              <a:rPr lang="en-US" sz="1300" dirty="0">
+                <a:solidFill>
+                  <a:srgbClr val="4A5058"/>
+                </a:solidFill>
+              </a:rPr>
+              <a:t>A pack switched on reaches the others' tables</a:t>
+            </a:r>
+            <a:endParaRPr lang="en-US" sz="1300" dirty="0"/>
+          </a:p>
+        </p:txBody>
+      </p:sp>
+      <p:sp>
+        <p:nvSpPr>
+          <p:cNvPr id="37" name="Shape 34"/>
+          <p:cNvSpPr/>
+          <p:nvPr/>
+        </p:nvSpPr>
+        <p:spPr>
+          <a:xfrm>
+            <a:off x="8903970" y="3474720"/>
+            <a:ext cx="2507742" cy="1737360"/>
+          </a:xfrm>
+          <a:prstGeom prst="rect">
+            <a:avLst/>
+          </a:prstGeom>
+          <a:solidFill>
+            <a:srgbClr val="F7F5F2"/>
+          </a:solidFill>
+          <a:ln/>
+        </p:spPr>
+      </p:sp>
+      <p:sp>
+        <p:nvSpPr>
+          <p:cNvPr id="38" name="Shape 35"/>
+          <p:cNvSpPr/>
+          <p:nvPr/>
+        </p:nvSpPr>
+        <p:spPr>
+          <a:xfrm>
+            <a:off x="8903970" y="3474720"/>
+            <a:ext cx="45720" cy="1737360"/>
+          </a:xfrm>
+          <a:prstGeom prst="rect">
+            <a:avLst/>
+          </a:prstGeom>
+          <a:solidFill>
+            <a:srgbClr val="A51C30"/>
+          </a:solidFill>
+          <a:ln/>
+        </p:spPr>
+      </p:sp>
+      <p:sp>
+        <p:nvSpPr>
+          <p:cNvPr id="39" name="Text 36"/>
+          <p:cNvSpPr txBox="1"/>
+          <p:nvPr/>
+        </p:nvSpPr>
+        <p:spPr>
+          <a:xfrm>
+            <a:off x="9105138" y="3584448"/>
+            <a:ext cx="2187702" cy="502920"/>
+          </a:xfrm>
+          <a:prstGeom prst="rect">
+            <a:avLst/>
+          </a:prstGeom>
+          <a:noFill/>
+          <a:ln/>
+        </p:spPr>
+        <p:txBody>
+          <a:bodyPr wrap="square" lIns="0" tIns="0" rIns="0" bIns="0" rtlCol="0" anchor="ctr"/>
+          <a:lstStyle/>
+          <a:p>
+            <a:pPr indent="0" marL="0">
+              <a:buNone/>
+            </a:pPr>
+            <a:r>
+              <a:rPr lang="en-US" sz="2600" b="1" dirty="0">
+                <a:solidFill>
+                  <a:srgbClr val="8A1626"/>
+                </a:solidFill>
+              </a:rPr>
+              <a:t>13,542</a:t>
+            </a:r>
+            <a:endParaRPr lang="en-US" sz="2600" dirty="0"/>
+          </a:p>
+        </p:txBody>
+      </p:sp>
+      <p:sp>
+        <p:nvSpPr>
+          <p:cNvPr id="40" name="Text 37"/>
+          <p:cNvSpPr txBox="1"/>
+          <p:nvPr/>
+        </p:nvSpPr>
+        <p:spPr>
+          <a:xfrm>
+            <a:off x="9105138" y="4078224"/>
+            <a:ext cx="2187702" cy="1060704"/>
+          </a:xfrm>
+          <a:prstGeom prst="rect">
+            <a:avLst/>
+          </a:prstGeom>
+          <a:noFill/>
+          <a:ln/>
+        </p:spPr>
+        <p:txBody>
+          <a:bodyPr wrap="square" lIns="0" tIns="0" rIns="0" bIns="0" rtlCol="0" anchor="t"/>
+          <a:lstStyle/>
+          <a:p>
+            <a:pPr indent="0" marL="0">
+              <a:buNone/>
+            </a:pPr>
+            <a:r>
+              <a:rPr lang="en-US" sz="1300" dirty="0">
+                <a:solidFill>
+                  <a:srgbClr val="4A5058"/>
+                </a:solidFill>
+              </a:rPr>
+              <a:t>Signed calls through a key rotation, none refused</a:t>
+            </a:r>
+            <a:endParaRPr lang="en-US" sz="1300" dirty="0"/>
+          </a:p>
+        </p:txBody>
+      </p:sp>
+      <p:sp>
+        <p:nvSpPr>
+          <p:cNvPr id="41" name="Shape 38"/>
+          <p:cNvSpPr/>
+          <p:nvPr/>
+        </p:nvSpPr>
+        <p:spPr>
+          <a:xfrm>
+            <a:off x="777240" y="5550408"/>
+            <a:ext cx="10634472" cy="694944"/>
+          </a:xfrm>
+          <a:prstGeom prst="rect">
+            <a:avLst/>
+          </a:prstGeom>
+          <a:solidFill>
+            <a:srgbClr val="F6E6E9"/>
+          </a:solidFill>
+          <a:ln/>
+        </p:spPr>
+      </p:sp>
+      <p:sp>
+        <p:nvSpPr>
+          <p:cNvPr id="42" name="Shape 39"/>
+          <p:cNvSpPr/>
+          <p:nvPr/>
+        </p:nvSpPr>
+        <p:spPr>
+          <a:xfrm>
+            <a:off x="777240" y="5550408"/>
+            <a:ext cx="54864" cy="694944"/>
+          </a:xfrm>
+          <a:prstGeom prst="rect">
+            <a:avLst/>
+          </a:prstGeom>
+          <a:solidFill>
+            <a:srgbClr val="A51C30"/>
+          </a:solidFill>
+          <a:ln/>
+        </p:spPr>
+      </p:sp>
+      <p:sp>
+        <p:nvSpPr>
+          <p:cNvPr id="43" name="Text 40"/>
+          <p:cNvSpPr txBox="1"/>
+          <p:nvPr/>
+        </p:nvSpPr>
+        <p:spPr>
+          <a:xfrm>
+            <a:off x="1033272" y="5623560"/>
+            <a:ext cx="10177272" cy="548640"/>
+          </a:xfrm>
+          <a:prstGeom prst="rect">
+            <a:avLst/>
+          </a:prstGeom>
+          <a:noFill/>
+          <a:ln/>
+        </p:spPr>
+        <p:txBody>
+          <a:bodyPr wrap="square" lIns="0" tIns="0" rIns="0" bIns="0" rtlCol="0" anchor="ctr"/>
+          <a:lstStyle/>
+          <a:p>
+            <a:pPr indent="0" marL="0">
+              <a:buNone/>
+            </a:pPr>
+            <a:r>
+              <a:rPr lang="en-US" sz="1400" b="1" dirty="0">
+                <a:solidFill>
+                  <a:srgbClr val="A51C30"/>
+                </a:solidFill>
+              </a:rPr>
+              <a:t>Key insight  </a:t>
+            </a:r>
+            <a:pPr indent="0" marL="0">
+              <a:buNone/>
+            </a:pPr>
+            <a:r>
+              <a:rPr lang="en-US" sz="1400" b="1" dirty="0">
+                <a:solidFill>
+                  <a:srgbClr val="8A1626"/>
+                </a:solidFill>
+              </a:rPr>
+              <a:t>Each node keeps its own packs, connectors and data — the user cannot tell which one answered; an administrator can.</a:t>
+            </a:r>
+            <a:endParaRPr lang="en-US" sz="1400" dirty="0"/>
+          </a:p>
+        </p:txBody>
+      </p:sp>
+      <p:sp>
+        <p:nvSpPr>
+          <p:cNvPr id="25" name="Slide Number Placeholder 0"/>
+          <p:cNvSpPr>
+            <a:spLocks noGrp="1"/>
+          </p:cNvSpPr>
+          <p:nvPr>
+            <p:ph type="sldNum" sz="quarter" idx="4294967295"/>
+          </p:nvPr>
+        </p:nvSpPr>
+        <p:spPr>
+          <a:xfrm>
+            <a:off x="8220456" y="6437376"/>
+            <a:ext cx="3191256" cy="219456"/>
+          </a:xfrm>
+          <a:prstGeom prst="rect">
+            <a:avLst/>
+          </a:prstGeom>
+          <a:extLst>
+            <a:ext uri="{C572A759-6A51-4108-AA02-DFA0A04FC94B}">
+              <ma14:wrappingTextBoxFlag xmlns:ma14="http://schemas.microsoft.com/office/mac/drawingml/2011/main" val="0"/>
+            </a:ext>
+          </a:extLst>
+        </p:spPr>
+        <p:txBody>
+          <a:bodyPr/>
+          <a:lstStyle>
+            <a:lvl1pPr>
+              <a:defRPr sz="850">
+                <a:solidFill>
+                  <a:srgbClr val="61666E"/>
+                </a:solidFill>
+              </a:defRPr>
+            </a:lvl1pPr>
+          </a:lstStyle>
+          <a:p>
+            <a:pPr algn="r"/>
+            <a:fld id="{F7021451-1387-4CA6-816F-3879F97B5CBC}" type="slidenum">
+              <a:rPr b="1" lang="en-US"/>
+              <a:t>29</a:t>
+            </a:fld>
+            <a:endParaRPr lang="en-US"/>
+          </a:p>
+        </p:txBody>
+      </p:sp>
+    </p:spTree>
+  </p:cSld>
+  <p:clrMapOvr>
+    <a:masterClrMapping/>
+  </p:clrMapOvr>
+</p:sld>
+</file>
+
+<file path=ppt/slides/slide48.xml><?xml version="1.0" encoding="utf-8"?>
+<p:sld xmlns:a="http://schemas.openxmlformats.org/drawingml/2006/main" xmlns:r="http://schemas.openxmlformats.org/officeDocument/2006/relationships" xmlns:p="http://schemas.openxmlformats.org/presentationml/2006/main">
+  <p:cSld name="Slide 37">
+    <p:spTree>
+      <p:nvGrpSpPr>
+        <p:cNvPr id="1" name=""/>
+        <p:cNvGrpSpPr/>
+        <p:nvPr/>
+      </p:nvGrpSpPr>
+      <p:grpSpPr>
+        <a:xfrm>
+          <a:off x="0" y="0"/>
+          <a:ext cx="0" cy="0"/>
+          <a:chOff x="0" y="0"/>
+          <a:chExt cx="0" cy="0"/>
+        </a:xfrm>
+      </p:grpSpPr>
+      <p:sp>
+        <p:nvSpPr>
+          <p:cNvPr id="2" name="Text 3"/>
+          <p:cNvSpPr/>
+          <p:nvPr>
+            <p:ph idx="103" type="body" hasCustomPrompt="1"/>
+          </p:nvPr>
+        </p:nvSpPr>
+        <p:spPr>
+          <a:xfrm>
+            <a:off x="777240" y="457200"/>
+            <a:ext cx="10634472" cy="237744"/>
+          </a:xfrm>
+          <a:prstGeom prst="rect">
+            <a:avLst/>
+          </a:prstGeom>
+          <a:noFill/>
+          <a:ln/>
+        </p:spPr>
+        <p:txBody>
+          <a:bodyPr wrap="square" lIns="0" tIns="0" rIns="0" bIns="0" rtlCol="0"/>
+          <a:lstStyle/>
+          <a:p>
+            <a:pPr algn="l" indent="0" marL="0">
+              <a:buNone/>
+            </a:pPr>
+            <a:r>
+              <a:rPr lang="en-US" sz="1050" b="1" spc="100" kern="0" dirty="0">
+                <a:solidFill>
+                  <a:srgbClr val="A51C30"/>
+                </a:solidFill>
+              </a:rPr>
+              <a:t>SCALE · 35.7 MILLION TRADES</a:t>
+            </a:r>
+            <a:endParaRPr lang="en-US" sz="1050" dirty="0"/>
+          </a:p>
+        </p:txBody>
+      </p:sp>
+      <p:sp>
+        <p:nvSpPr>
+          <p:cNvPr id="3" name="Text 3"/>
+          <p:cNvSpPr/>
+          <p:nvPr>
+            <p:ph idx="104" type="title" hasCustomPrompt="1"/>
+          </p:nvPr>
+        </p:nvSpPr>
+        <p:spPr>
+          <a:xfrm>
+            <a:off x="777240" y="731520"/>
+            <a:ext cx="10634472" cy="502920"/>
+          </a:xfrm>
+          <a:prstGeom prst="rect">
+            <a:avLst/>
+          </a:prstGeom>
+          <a:noFill/>
+          <a:ln/>
+        </p:spPr>
+        <p:txBody>
+          <a:bodyPr wrap="square" lIns="0" tIns="0" rIns="0" bIns="0" rtlCol="0" anchor="t"/>
+          <a:lstStyle/>
+          <a:p>
+            <a:pPr algn="l" indent="0" marL="0">
+              <a:buNone/>
+            </a:pPr>
+            <a:r>
+              <a:rPr lang="en-US" sz="2600" b="1" dirty="0">
+                <a:solidFill>
+                  <a:srgbClr val="1A1A1A"/>
+                </a:solidFill>
+              </a:rPr>
+              <a:t>Tens of millions of trades, fifty users, no failures</a:t>
+            </a:r>
+            <a:endParaRPr lang="en-US" sz="2600" dirty="0"/>
+          </a:p>
+        </p:txBody>
+      </p:sp>
+      <p:sp>
+        <p:nvSpPr>
+          <p:cNvPr id="4" name="Shape 2"/>
+          <p:cNvSpPr/>
+          <p:nvPr/>
+        </p:nvSpPr>
+        <p:spPr>
+          <a:xfrm>
+            <a:off x="777240" y="1280160"/>
+            <a:ext cx="10634472" cy="9144"/>
+          </a:xfrm>
+          <a:prstGeom prst="rect">
+            <a:avLst/>
+          </a:prstGeom>
+          <a:solidFill>
+            <a:srgbClr val="E3DED7"/>
+          </a:solidFill>
+          <a:ln/>
+        </p:spPr>
+      </p:sp>
+      <p:sp>
+        <p:nvSpPr>
+          <p:cNvPr id="6" name="Shape 3"/>
+          <p:cNvSpPr/>
+          <p:nvPr/>
+        </p:nvSpPr>
+        <p:spPr>
+          <a:xfrm>
+            <a:off x="777240" y="1417320"/>
+            <a:ext cx="2507742" cy="1188720"/>
+          </a:xfrm>
+          <a:prstGeom prst="rect">
+            <a:avLst/>
+          </a:prstGeom>
+          <a:solidFill>
+            <a:srgbClr val="F7F5F2"/>
+          </a:solidFill>
+          <a:ln/>
+        </p:spPr>
+      </p:sp>
+      <p:sp>
+        <p:nvSpPr>
+          <p:cNvPr id="7" name="Shape 4"/>
+          <p:cNvSpPr/>
+          <p:nvPr/>
+        </p:nvSpPr>
+        <p:spPr>
+          <a:xfrm>
+            <a:off x="777240" y="1417320"/>
+            <a:ext cx="45720" cy="1188720"/>
+          </a:xfrm>
+          <a:prstGeom prst="rect">
+            <a:avLst/>
+          </a:prstGeom>
+          <a:solidFill>
+            <a:srgbClr val="A51C30"/>
+          </a:solidFill>
+          <a:ln/>
+        </p:spPr>
+      </p:sp>
+      <p:sp>
+        <p:nvSpPr>
+          <p:cNvPr id="8" name="Text 5"/>
+          <p:cNvSpPr txBox="1"/>
+          <p:nvPr/>
+        </p:nvSpPr>
+        <p:spPr>
+          <a:xfrm>
+            <a:off x="978408" y="1527048"/>
+            <a:ext cx="2187702" cy="502920"/>
+          </a:xfrm>
+          <a:prstGeom prst="rect">
+            <a:avLst/>
+          </a:prstGeom>
+          <a:noFill/>
+          <a:ln/>
+        </p:spPr>
+        <p:txBody>
+          <a:bodyPr wrap="square" lIns="0" tIns="0" rIns="0" bIns="0" rtlCol="0" anchor="ctr"/>
+          <a:lstStyle/>
+          <a:p>
+            <a:pPr indent="0" marL="0">
+              <a:buNone/>
+            </a:pPr>
+            <a:r>
+              <a:rPr lang="en-US" sz="2600" b="1" dirty="0">
+                <a:solidFill>
+                  <a:srgbClr val="8A1626"/>
+                </a:solidFill>
+              </a:rPr>
+              <a:t>35.7M</a:t>
+            </a:r>
+            <a:endParaRPr lang="en-US" sz="2600" dirty="0"/>
+          </a:p>
+        </p:txBody>
+      </p:sp>
+      <p:sp>
+        <p:nvSpPr>
+          <p:cNvPr id="9" name="Text 6"/>
+          <p:cNvSpPr txBox="1"/>
+          <p:nvPr/>
+        </p:nvSpPr>
+        <p:spPr>
+          <a:xfrm>
+            <a:off x="978408" y="2020824"/>
+            <a:ext cx="2187702" cy="512064"/>
+          </a:xfrm>
+          <a:prstGeom prst="rect">
+            <a:avLst/>
+          </a:prstGeom>
+          <a:noFill/>
+          <a:ln/>
+        </p:spPr>
+        <p:txBody>
+          <a:bodyPr wrap="square" lIns="0" tIns="0" rIns="0" bIns="0" rtlCol="0" anchor="t"/>
+          <a:lstStyle/>
+          <a:p>
+            <a:pPr indent="0" marL="0">
+              <a:buNone/>
+            </a:pPr>
+            <a:r>
+              <a:rPr lang="en-US" sz="1150" dirty="0">
+                <a:solidFill>
+                  <a:srgbClr val="4A5058"/>
+                </a:solidFill>
+              </a:rPr>
+              <a:t>Trades: ENDUR, CALYPSO, MUREX, 30 days, loaded while serving</a:t>
+            </a:r>
+            <a:endParaRPr lang="en-US" sz="1150" dirty="0"/>
+          </a:p>
+        </p:txBody>
+      </p:sp>
+      <p:sp>
+        <p:nvSpPr>
+          <p:cNvPr id="10" name="Shape 7"/>
+          <p:cNvSpPr/>
+          <p:nvPr/>
+        </p:nvSpPr>
+        <p:spPr>
+          <a:xfrm>
+            <a:off x="3486150" y="1417320"/>
+            <a:ext cx="2507742" cy="1188720"/>
+          </a:xfrm>
+          <a:prstGeom prst="rect">
+            <a:avLst/>
+          </a:prstGeom>
+          <a:solidFill>
+            <a:srgbClr val="F7F5F2"/>
+          </a:solidFill>
+          <a:ln/>
+        </p:spPr>
+      </p:sp>
+      <p:sp>
+        <p:nvSpPr>
+          <p:cNvPr id="11" name="Shape 8"/>
+          <p:cNvSpPr/>
+          <p:nvPr/>
+        </p:nvSpPr>
+        <p:spPr>
+          <a:xfrm>
+            <a:off x="3486150" y="1417320"/>
+            <a:ext cx="45720" cy="1188720"/>
+          </a:xfrm>
+          <a:prstGeom prst="rect">
+            <a:avLst/>
+          </a:prstGeom>
+          <a:solidFill>
+            <a:srgbClr val="A51C30"/>
+          </a:solidFill>
+          <a:ln/>
+        </p:spPr>
+      </p:sp>
+      <p:sp>
+        <p:nvSpPr>
+          <p:cNvPr id="12" name="Text 9"/>
+          <p:cNvSpPr txBox="1"/>
+          <p:nvPr/>
+        </p:nvSpPr>
+        <p:spPr>
+          <a:xfrm>
+            <a:off x="3687318" y="1527048"/>
+            <a:ext cx="2187702" cy="502920"/>
+          </a:xfrm>
+          <a:prstGeom prst="rect">
+            <a:avLst/>
+          </a:prstGeom>
+          <a:noFill/>
+          <a:ln/>
+        </p:spPr>
+        <p:txBody>
+          <a:bodyPr wrap="square" lIns="0" tIns="0" rIns="0" bIns="0" rtlCol="0" anchor="ctr"/>
+          <a:lstStyle/>
+          <a:p>
+            <a:pPr indent="0" marL="0">
+              <a:buNone/>
+            </a:pPr>
+            <a:r>
+              <a:rPr lang="en-US" sz="2600" b="1" dirty="0">
+                <a:solidFill>
+                  <a:srgbClr val="8A1626"/>
+                </a:solidFill>
+              </a:rPr>
+              <a:t>179/s</a:t>
+            </a:r>
+            <a:endParaRPr lang="en-US" sz="2600" dirty="0"/>
+          </a:p>
+        </p:txBody>
+      </p:sp>
+      <p:sp>
+        <p:nvSpPr>
+          <p:cNvPr id="13" name="Text 10"/>
+          <p:cNvSpPr txBox="1"/>
+          <p:nvPr/>
+        </p:nvSpPr>
+        <p:spPr>
+          <a:xfrm>
+            <a:off x="3687318" y="2020824"/>
+            <a:ext cx="2187702" cy="512064"/>
+          </a:xfrm>
+          <a:prstGeom prst="rect">
+            <a:avLst/>
+          </a:prstGeom>
+          <a:noFill/>
+          <a:ln/>
+        </p:spPr>
+        <p:txBody>
+          <a:bodyPr wrap="square" lIns="0" tIns="0" rIns="0" bIns="0" rtlCol="0" anchor="t"/>
+          <a:lstStyle/>
+          <a:p>
+            <a:pPr indent="0" marL="0">
+              <a:buNone/>
+            </a:pPr>
+            <a:r>
+              <a:rPr lang="en-US" sz="1150" dirty="0">
+                <a:solidFill>
+                  <a:srgbClr val="4A5058"/>
+                </a:solidFill>
+              </a:rPr>
+              <a:t>Requests a second, 50 users against the server, 0 failures</a:t>
+            </a:r>
+            <a:endParaRPr lang="en-US" sz="1150" dirty="0"/>
+          </a:p>
+        </p:txBody>
+      </p:sp>
+      <p:sp>
+        <p:nvSpPr>
+          <p:cNvPr id="14" name="Shape 11"/>
+          <p:cNvSpPr/>
+          <p:nvPr/>
+        </p:nvSpPr>
+        <p:spPr>
+          <a:xfrm>
+            <a:off x="6195060" y="1417320"/>
+            <a:ext cx="2507742" cy="1188720"/>
+          </a:xfrm>
+          <a:prstGeom prst="rect">
+            <a:avLst/>
+          </a:prstGeom>
+          <a:solidFill>
+            <a:srgbClr val="F7F5F2"/>
+          </a:solidFill>
+          <a:ln/>
+        </p:spPr>
+      </p:sp>
+      <p:sp>
+        <p:nvSpPr>
+          <p:cNvPr id="15" name="Shape 12"/>
+          <p:cNvSpPr/>
+          <p:nvPr/>
+        </p:nvSpPr>
+        <p:spPr>
+          <a:xfrm>
+            <a:off x="6195060" y="1417320"/>
+            <a:ext cx="45720" cy="1188720"/>
+          </a:xfrm>
+          <a:prstGeom prst="rect">
+            <a:avLst/>
+          </a:prstGeom>
+          <a:solidFill>
+            <a:srgbClr val="A51C30"/>
+          </a:solidFill>
+          <a:ln/>
+        </p:spPr>
+      </p:sp>
+      <p:sp>
+        <p:nvSpPr>
+          <p:cNvPr id="16" name="Text 13"/>
+          <p:cNvSpPr txBox="1"/>
+          <p:nvPr/>
+        </p:nvSpPr>
+        <p:spPr>
+          <a:xfrm>
+            <a:off x="6396228" y="1527048"/>
+            <a:ext cx="2187702" cy="502920"/>
+          </a:xfrm>
+          <a:prstGeom prst="rect">
+            <a:avLst/>
+          </a:prstGeom>
+          <a:noFill/>
+          <a:ln/>
+        </p:spPr>
+        <p:txBody>
+          <a:bodyPr wrap="square" lIns="0" tIns="0" rIns="0" bIns="0" rtlCol="0" anchor="ctr"/>
+          <a:lstStyle/>
+          <a:p>
+            <a:pPr indent="0" marL="0">
+              <a:buNone/>
+            </a:pPr>
+            <a:r>
+              <a:rPr lang="en-US" sz="2600" b="1" dirty="0">
+                <a:solidFill>
+                  <a:srgbClr val="8A1626"/>
+                </a:solidFill>
+              </a:rPr>
+              <a:t>0.21 s</a:t>
+            </a:r>
+            <a:endParaRPr lang="en-US" sz="2600" dirty="0"/>
+          </a:p>
+        </p:txBody>
+      </p:sp>
+      <p:sp>
+        <p:nvSpPr>
+          <p:cNvPr id="17" name="Text 14"/>
+          <p:cNvSpPr txBox="1"/>
+          <p:nvPr/>
+        </p:nvSpPr>
+        <p:spPr>
+          <a:xfrm>
+            <a:off x="6396228" y="2020824"/>
+            <a:ext cx="2187702" cy="512064"/>
+          </a:xfrm>
+          <a:prstGeom prst="rect">
+            <a:avLst/>
+          </a:prstGeom>
+          <a:noFill/>
+          <a:ln/>
+        </p:spPr>
+        <p:txBody>
+          <a:bodyPr wrap="square" lIns="0" tIns="0" rIns="0" bIns="0" rtlCol="0" anchor="t"/>
+          <a:lstStyle/>
+          <a:p>
+            <a:pPr indent="0" marL="0">
+              <a:buNone/>
+            </a:pPr>
+            <a:r>
+              <a:rPr lang="en-US" sz="1150" dirty="0">
+                <a:solidFill>
+                  <a:srgbClr val="4A5058"/>
+                </a:solidFill>
+              </a:rPr>
+              <a:t>Form search p50, from 5.8 s before the form was kept per data version</a:t>
+            </a:r>
+            <a:endParaRPr lang="en-US" sz="1150" dirty="0"/>
+          </a:p>
+        </p:txBody>
+      </p:sp>
+      <p:sp>
+        <p:nvSpPr>
+          <p:cNvPr id="18" name="Shape 15"/>
+          <p:cNvSpPr/>
+          <p:nvPr/>
+        </p:nvSpPr>
+        <p:spPr>
+          <a:xfrm>
+            <a:off x="8903970" y="1417320"/>
+            <a:ext cx="2507742" cy="1188720"/>
+          </a:xfrm>
+          <a:prstGeom prst="rect">
+            <a:avLst/>
+          </a:prstGeom>
+          <a:solidFill>
+            <a:srgbClr val="F7F5F2"/>
+          </a:solidFill>
+          <a:ln/>
+        </p:spPr>
+      </p:sp>
+      <p:sp>
+        <p:nvSpPr>
+          <p:cNvPr id="19" name="Shape 16"/>
+          <p:cNvSpPr/>
+          <p:nvPr/>
+        </p:nvSpPr>
+        <p:spPr>
+          <a:xfrm>
+            <a:off x="8903970" y="1417320"/>
+            <a:ext cx="45720" cy="1188720"/>
+          </a:xfrm>
+          <a:prstGeom prst="rect">
+            <a:avLst/>
+          </a:prstGeom>
+          <a:solidFill>
+            <a:srgbClr val="A51C30"/>
+          </a:solidFill>
+          <a:ln/>
+        </p:spPr>
+      </p:sp>
+      <p:sp>
+        <p:nvSpPr>
+          <p:cNvPr id="20" name="Text 17"/>
+          <p:cNvSpPr txBox="1"/>
+          <p:nvPr/>
+        </p:nvSpPr>
+        <p:spPr>
+          <a:xfrm>
+            <a:off x="9105138" y="1527048"/>
+            <a:ext cx="2187702" cy="502920"/>
+          </a:xfrm>
+          <a:prstGeom prst="rect">
+            <a:avLst/>
+          </a:prstGeom>
+          <a:noFill/>
+          <a:ln/>
+        </p:spPr>
+        <p:txBody>
+          <a:bodyPr wrap="square" lIns="0" tIns="0" rIns="0" bIns="0" rtlCol="0" anchor="ctr"/>
+          <a:lstStyle/>
+          <a:p>
+            <a:pPr indent="0" marL="0">
+              <a:buNone/>
+            </a:pPr>
+            <a:r>
+              <a:rPr lang="en-US" sz="2600" b="1" dirty="0">
+                <a:solidFill>
+                  <a:srgbClr val="8A1626"/>
+                </a:solidFill>
+              </a:rPr>
+              <a:t>182/s</a:t>
+            </a:r>
+            <a:endParaRPr lang="en-US" sz="2600" dirty="0"/>
+          </a:p>
+        </p:txBody>
+      </p:sp>
+      <p:sp>
+        <p:nvSpPr>
+          <p:cNvPr id="21" name="Text 18"/>
+          <p:cNvSpPr txBox="1"/>
+          <p:nvPr/>
+        </p:nvSpPr>
+        <p:spPr>
+          <a:xfrm>
+            <a:off x="9105138" y="2020824"/>
+            <a:ext cx="2187702" cy="512064"/>
+          </a:xfrm>
+          <a:prstGeom prst="rect">
+            <a:avLst/>
+          </a:prstGeom>
+          <a:noFill/>
+          <a:ln/>
+        </p:spPr>
+        <p:txBody>
+          <a:bodyPr wrap="square" lIns="0" tIns="0" rIns="0" bIns="0" rtlCol="0" anchor="t"/>
+          <a:lstStyle/>
+          <a:p>
+            <a:pPr indent="0" marL="0">
+              <a:buNone/>
+            </a:pPr>
+            <a:r>
+              <a:rPr lang="en-US" sz="1150" dirty="0">
+                <a:solidFill>
+                  <a:srgbClr val="4A5058"/>
+                </a:solidFill>
+              </a:rPr>
+              <a:t>Console pages a second, 50 users, 0 failures</a:t>
+            </a:r>
+            <a:endParaRPr lang="en-US" sz="1150" dirty="0"/>
+          </a:p>
+        </p:txBody>
+      </p:sp>
+      <p:graphicFrame>
+        <p:nvGraphicFramePr>
+          <p:cNvPr id="38" name="Table 0"/>
+          <p:cNvGraphicFramePr>
+            <a:graphicFrameLocks noGrp="1"/>
+          </p:cNvGraphicFramePr>
+          <p:nvPr>
+            <p:extLst>
+              <p:ext uri="{D42A27DB-BD31-4B8C-83A1-F6EECF244321}">
+                <p14:modId xmlns:p14="http://schemas.microsoft.com/office/powerpoint/2010/main" val="1579011935"/>
+              </p:ext>
+            </p:extLst>
+          </p:nvPr>
+        </p:nvGraphicFramePr>
+        <p:xfrm>
+          <a:off x="777240" y="2880360"/>
+          <a:ext cx="10634472" cy="914400"/>
+        </p:xfrm>
+        <a:graphic>
+          <a:graphicData uri="http://schemas.openxmlformats.org/drawingml/2006/table">
+            <a:tbl>
+              <a:tblPr/>
+              <a:tblGrid>
+                <a:gridCol w="1463040"/>
+                <a:gridCol w="4754880"/>
+                <a:gridCol w="822960"/>
+                <a:gridCol w="3593592"/>
+              </a:tblGrid>
+              <a:tr h="475488">
+                <a:tc>
+                  <a:txBody>
+                    <a:bodyPr/>
+                    <a:lstStyle/>
+                    <a:p>
+                      <a:pPr indent="0" marL="0">
+                        <a:buNone/>
+                      </a:pPr>
+                      <a:r>
+                        <a:rPr lang="en-US" sz="1400" b="1" dirty="0">
+                          <a:solidFill>
+                            <a:srgbClr val="FFFFFF"/>
+                          </a:solidFill>
+                        </a:rPr>
+                        <a:t>Data</a:t>
+                      </a:r>
+                      <a:endParaRPr lang="en-US" sz="1400" dirty="0"/>
+                    </a:p>
+                  </a:txBody>
+                  <a:tcPr marL="88900" marR="88900" marT="50800" marB="50800" anchor="ctr">
+                    <a:lnL w="6350" cap="flat" cmpd="sng" algn="ctr">
+                      <a:solidFill>
+                        <a:srgbClr val="E3DED7"/>
+                      </a:solidFill>
+                      <a:prstDash val="solid"/>
+                      <a:round/>
+                      <a:headEnd type="none" w="med" len="med"/>
+                      <a:tailEnd type="none" w="med" len="med"/>
+                    </a:lnL>
+                    <a:lnR w="6350" cap="flat" cmpd="sng" algn="ctr">
+                      <a:solidFill>
+                        <a:srgbClr val="E3DED7"/>
+                      </a:solidFill>
+                      <a:prstDash val="solid"/>
+                      <a:round/>
+                      <a:headEnd type="none" w="med" len="med"/>
+                      <a:tailEnd type="none" w="med" len="med"/>
+                    </a:lnR>
+                    <a:lnT w="6350" cap="flat" cmpd="sng" algn="ctr">
+                      <a:solidFill>
+                        <a:srgbClr val="E3DED7"/>
+                      </a:solidFill>
+                      <a:prstDash val="solid"/>
+                      <a:round/>
+                      <a:headEnd type="none" w="med" len="med"/>
+                      <a:tailEnd type="none" w="med" len="med"/>
+                    </a:lnT>
+                    <a:lnB w="6350" cap="flat" cmpd="sng" algn="ctr">
+                      <a:solidFill>
+                        <a:srgbClr val="E3DED7"/>
+                      </a:solidFill>
+                      <a:prstDash val="solid"/>
+                      <a:round/>
+                      <a:headEnd type="none" w="med" len="med"/>
+                      <a:tailEnd type="none" w="med" len="med"/>
+                    </a:lnB>
+                    <a:solidFill>
+                      <a:srgbClr val="8A1626"/>
+                    </a:solidFill>
+                  </a:tcPr>
+                </a:tc>
+                <a:tc>
+                  <a:txBody>
+                    <a:bodyPr/>
+                    <a:lstStyle/>
+                    <a:p>
+                      <a:pPr indent="0" marL="0">
+                        <a:buNone/>
+                      </a:pPr>
+                      <a:r>
+                        <a:rPr lang="en-US" sz="1400" b="1" dirty="0">
+                          <a:solidFill>
+                            <a:srgbClr val="FFFFFF"/>
+                          </a:solidFill>
+                        </a:rPr>
+                        <a:t>Measure</a:t>
+                      </a:r>
+                      <a:endParaRPr lang="en-US" sz="1400" dirty="0"/>
+                    </a:p>
+                  </a:txBody>
+                  <a:tcPr marL="88900" marR="88900" marT="50800" marB="50800" anchor="ctr">
+                    <a:lnL w="6350" cap="flat" cmpd="sng" algn="ctr">
+                      <a:solidFill>
+                        <a:srgbClr val="E3DED7"/>
+                      </a:solidFill>
+                      <a:prstDash val="solid"/>
+                      <a:round/>
+                      <a:headEnd type="none" w="med" len="med"/>
+                      <a:tailEnd type="none" w="med" len="med"/>
+                    </a:lnL>
+                    <a:lnR w="6350" cap="flat" cmpd="sng" algn="ctr">
+                      <a:solidFill>
+                        <a:srgbClr val="E3DED7"/>
+                      </a:solidFill>
+                      <a:prstDash val="solid"/>
+                      <a:round/>
+                      <a:headEnd type="none" w="med" len="med"/>
+                      <a:tailEnd type="none" w="med" len="med"/>
+                    </a:lnR>
+                    <a:lnT w="6350" cap="flat" cmpd="sng" algn="ctr">
+                      <a:solidFill>
+                        <a:srgbClr val="E3DED7"/>
+                      </a:solidFill>
+                      <a:prstDash val="solid"/>
+                      <a:round/>
+                      <a:headEnd type="none" w="med" len="med"/>
+                      <a:tailEnd type="none" w="med" len="med"/>
+                    </a:lnT>
+                    <a:lnB w="6350" cap="flat" cmpd="sng" algn="ctr">
+                      <a:solidFill>
+                        <a:srgbClr val="E3DED7"/>
+                      </a:solidFill>
+                      <a:prstDash val="solid"/>
+                      <a:round/>
+                      <a:headEnd type="none" w="med" len="med"/>
+                      <a:tailEnd type="none" w="med" len="med"/>
+                    </a:lnB>
+                    <a:solidFill>
+                      <a:srgbClr val="8A1626"/>
+                    </a:solidFill>
+                  </a:tcPr>
+                </a:tc>
+                <a:tc>
+                  <a:txBody>
+                    <a:bodyPr/>
+                    <a:lstStyle/>
+                    <a:p>
+                      <a:pPr indent="0" marL="0">
+                        <a:buNone/>
+                      </a:pPr>
+                      <a:r>
+                        <a:rPr lang="en-US" sz="1400" b="1" dirty="0">
+                          <a:solidFill>
+                            <a:srgbClr val="FFFFFF"/>
+                          </a:solidFill>
+                        </a:rPr>
+                        <a:t>Users</a:t>
+                      </a:r>
+                      <a:endParaRPr lang="en-US" sz="1400" dirty="0"/>
+                    </a:p>
+                  </a:txBody>
+                  <a:tcPr marL="88900" marR="88900" marT="50800" marB="50800" anchor="ctr">
+                    <a:lnL w="6350" cap="flat" cmpd="sng" algn="ctr">
+                      <a:solidFill>
+                        <a:srgbClr val="E3DED7"/>
+                      </a:solidFill>
+                      <a:prstDash val="solid"/>
+                      <a:round/>
+                      <a:headEnd type="none" w="med" len="med"/>
+                      <a:tailEnd type="none" w="med" len="med"/>
+                    </a:lnL>
+                    <a:lnR w="6350" cap="flat" cmpd="sng" algn="ctr">
+                      <a:solidFill>
+                        <a:srgbClr val="E3DED7"/>
+                      </a:solidFill>
+                      <a:prstDash val="solid"/>
+                      <a:round/>
+                      <a:headEnd type="none" w="med" len="med"/>
+                      <a:tailEnd type="none" w="med" len="med"/>
+                    </a:lnR>
+                    <a:lnT w="6350" cap="flat" cmpd="sng" algn="ctr">
+                      <a:solidFill>
+                        <a:srgbClr val="E3DED7"/>
+                      </a:solidFill>
+                      <a:prstDash val="solid"/>
+                      <a:round/>
+                      <a:headEnd type="none" w="med" len="med"/>
+                      <a:tailEnd type="none" w="med" len="med"/>
+                    </a:lnT>
+                    <a:lnB w="6350" cap="flat" cmpd="sng" algn="ctr">
+                      <a:solidFill>
+                        <a:srgbClr val="E3DED7"/>
+                      </a:solidFill>
+                      <a:prstDash val="solid"/>
+                      <a:round/>
+                      <a:headEnd type="none" w="med" len="med"/>
+                      <a:tailEnd type="none" w="med" len="med"/>
+                    </a:lnB>
+                    <a:solidFill>
+                      <a:srgbClr val="8A1626"/>
+                    </a:solidFill>
+                  </a:tcPr>
+                </a:tc>
+                <a:tc>
+                  <a:txBody>
+                    <a:bodyPr/>
+                    <a:lstStyle/>
+                    <a:p>
+                      <a:pPr indent="0" marL="0">
+                        <a:buNone/>
+                      </a:pPr>
+                      <a:r>
+                        <a:rPr lang="en-US" sz="1400" b="1" dirty="0">
+                          <a:solidFill>
+                            <a:srgbClr val="FFFFFF"/>
+                          </a:solidFill>
+                        </a:rPr>
+                        <a:t>Result</a:t>
+                      </a:r>
+                      <a:endParaRPr lang="en-US" sz="1400" dirty="0"/>
+                    </a:p>
+                  </a:txBody>
+                  <a:tcPr marL="88900" marR="88900" marT="50800" marB="50800" anchor="ctr">
+                    <a:lnL w="6350" cap="flat" cmpd="sng" algn="ctr">
+                      <a:solidFill>
+                        <a:srgbClr val="E3DED7"/>
+                      </a:solidFill>
+                      <a:prstDash val="solid"/>
+                      <a:round/>
+                      <a:headEnd type="none" w="med" len="med"/>
+                      <a:tailEnd type="none" w="med" len="med"/>
+                    </a:lnL>
+                    <a:lnR w="6350" cap="flat" cmpd="sng" algn="ctr">
+                      <a:solidFill>
+                        <a:srgbClr val="E3DED7"/>
+                      </a:solidFill>
+                      <a:prstDash val="solid"/>
+                      <a:round/>
+                      <a:headEnd type="none" w="med" len="med"/>
+                      <a:tailEnd type="none" w="med" len="med"/>
+                    </a:lnR>
+                    <a:lnT w="6350" cap="flat" cmpd="sng" algn="ctr">
+                      <a:solidFill>
+                        <a:srgbClr val="E3DED7"/>
+                      </a:solidFill>
+                      <a:prstDash val="solid"/>
+                      <a:round/>
+                      <a:headEnd type="none" w="med" len="med"/>
+                      <a:tailEnd type="none" w="med" len="med"/>
+                    </a:lnT>
+                    <a:lnB w="6350" cap="flat" cmpd="sng" algn="ctr">
+                      <a:solidFill>
+                        <a:srgbClr val="E3DED7"/>
+                      </a:solidFill>
+                      <a:prstDash val="solid"/>
+                      <a:round/>
+                      <a:headEnd type="none" w="med" len="med"/>
+                      <a:tailEnd type="none" w="med" len="med"/>
+                    </a:lnB>
+                    <a:solidFill>
+                      <a:srgbClr val="8A1626"/>
+                    </a:solidFill>
+                  </a:tcPr>
+                </a:tc>
+              </a:tr>
+              <a:tr h="475488">
+                <a:tc>
+                  <a:txBody>
+                    <a:bodyPr/>
+                    <a:lstStyle/>
+                    <a:p>
+                      <a:pPr indent="0" marL="0">
+                        <a:buNone/>
+                      </a:pPr>
+                      <a:r>
+                        <a:rPr lang="en-US" sz="1400" b="1" dirty="0">
+                          <a:solidFill>
+                            <a:srgbClr val="8A1626"/>
+                          </a:solidFill>
+                        </a:rPr>
+                        <a:t>35.7M trades</a:t>
+                      </a:r>
+                      <a:endParaRPr lang="en-US" sz="1400" dirty="0"/>
+                    </a:p>
+                  </a:txBody>
+                  <a:tcPr marL="88900" marR="88900" marT="50800" marB="50800" anchor="ctr">
+                    <a:lnL w="6350" cap="flat" cmpd="sng" algn="ctr">
+                      <a:solidFill>
+                        <a:srgbClr val="E3DED7"/>
+                      </a:solidFill>
+                      <a:prstDash val="solid"/>
+                      <a:round/>
+                      <a:headEnd type="none" w="med" len="med"/>
+                      <a:tailEnd type="none" w="med" len="med"/>
+                    </a:lnL>
+                    <a:lnR w="6350" cap="flat" cmpd="sng" algn="ctr">
+                      <a:solidFill>
+                        <a:srgbClr val="E3DED7"/>
+                      </a:solidFill>
+                      <a:prstDash val="solid"/>
+                      <a:round/>
+                      <a:headEnd type="none" w="med" len="med"/>
+                      <a:tailEnd type="none" w="med" len="med"/>
+                    </a:lnR>
+                    <a:lnT w="6350" cap="flat" cmpd="sng" algn="ctr">
+                      <a:solidFill>
+                        <a:srgbClr val="E3DED7"/>
+                      </a:solidFill>
+                      <a:prstDash val="solid"/>
+                      <a:round/>
+                      <a:headEnd type="none" w="med" len="med"/>
+                      <a:tailEnd type="none" w="med" len="med"/>
+                    </a:lnT>
+                    <a:lnB w="6350" cap="flat" cmpd="sng" algn="ctr">
+                      <a:solidFill>
+                        <a:srgbClr val="E3DED7"/>
+                      </a:solidFill>
+                      <a:prstDash val="solid"/>
+                      <a:round/>
+                      <a:headEnd type="none" w="med" len="med"/>
+                      <a:tailEnd type="none" w="med" len="med"/>
+                    </a:lnB>
+                    <a:solidFill>
+                      <a:srgbClr val="F7F5F2"/>
+                    </a:solidFill>
+                  </a:tcPr>
+                </a:tc>
+                <a:tc>
+                  <a:txBody>
+                    <a:bodyPr/>
+                    <a:lstStyle/>
+                    <a:p>
+                      <a:pPr indent="0" marL="0">
+                        <a:buNone/>
+                      </a:pPr>
+                      <a:r>
+                        <a:rPr lang="en-US" sz="1400" dirty="0">
+                          <a:solidFill>
+                            <a:srgbClr val="1A1A1A"/>
+                          </a:solidFill>
+                        </a:rPr>
+                        <a:t>Single trade / grouped page, p50 / p95</a:t>
+                      </a:r>
+                      <a:endParaRPr lang="en-US" sz="1400" dirty="0"/>
+                    </a:p>
+                  </a:txBody>
+                  <a:tcPr marL="88900" marR="88900" marT="50800" marB="50800" anchor="ctr">
+                    <a:lnL w="6350" cap="flat" cmpd="sng" algn="ctr">
+                      <a:solidFill>
+                        <a:srgbClr val="E3DED7"/>
+                      </a:solidFill>
+                      <a:prstDash val="solid"/>
+                      <a:round/>
+                      <a:headEnd type="none" w="med" len="med"/>
+                      <a:tailEnd type="none" w="med" len="med"/>
+                    </a:lnL>
+                    <a:lnR w="6350" cap="flat" cmpd="sng" algn="ctr">
+                      <a:solidFill>
+                        <a:srgbClr val="E3DED7"/>
+                      </a:solidFill>
+                      <a:prstDash val="solid"/>
+                      <a:round/>
+                      <a:headEnd type="none" w="med" len="med"/>
+                      <a:tailEnd type="none" w="med" len="med"/>
+                    </a:lnR>
+                    <a:lnT w="6350" cap="flat" cmpd="sng" algn="ctr">
+                      <a:solidFill>
+                        <a:srgbClr val="E3DED7"/>
+                      </a:solidFill>
+                      <a:prstDash val="solid"/>
+                      <a:round/>
+                      <a:headEnd type="none" w="med" len="med"/>
+                      <a:tailEnd type="none" w="med" len="med"/>
+                    </a:lnT>
+                    <a:lnB w="6350" cap="flat" cmpd="sng" algn="ctr">
+                      <a:solidFill>
+                        <a:srgbClr val="E3DED7"/>
+                      </a:solidFill>
+                      <a:prstDash val="solid"/>
+                      <a:round/>
+                      <a:headEnd type="none" w="med" len="med"/>
+                      <a:tailEnd type="none" w="med" len="med"/>
+                    </a:lnB>
+                    <a:solidFill>
+                      <a:srgbClr val="F7F5F2"/>
+                    </a:solidFill>
+                  </a:tcPr>
+                </a:tc>
+                <a:tc>
+                  <a:txBody>
+                    <a:bodyPr/>
+                    <a:lstStyle/>
+                    <a:p>
+                      <a:pPr indent="0" marL="0">
+                        <a:buNone/>
+                      </a:pPr>
+                      <a:r>
+                        <a:rPr lang="en-US" sz="1400" dirty="0">
+                          <a:solidFill>
+                            <a:srgbClr val="1A1A1A"/>
+                          </a:solidFill>
+                        </a:rPr>
+                        <a:t>50</a:t>
+                      </a:r>
+                      <a:endParaRPr lang="en-US" sz="1400" dirty="0"/>
+                    </a:p>
+                  </a:txBody>
+                  <a:tcPr marL="88900" marR="88900" marT="50800" marB="50800" anchor="ctr">
+                    <a:lnL w="6350" cap="flat" cmpd="sng" algn="ctr">
+                      <a:solidFill>
+                        <a:srgbClr val="E3DED7"/>
+                      </a:solidFill>
+                      <a:prstDash val="solid"/>
+                      <a:round/>
+                      <a:headEnd type="none" w="med" len="med"/>
+                      <a:tailEnd type="none" w="med" len="med"/>
+                    </a:lnL>
+                    <a:lnR w="6350" cap="flat" cmpd="sng" algn="ctr">
+                      <a:solidFill>
+                        <a:srgbClr val="E3DED7"/>
+                      </a:solidFill>
+                      <a:prstDash val="solid"/>
+                      <a:round/>
+                      <a:headEnd type="none" w="med" len="med"/>
+                      <a:tailEnd type="none" w="med" len="med"/>
+                    </a:lnR>
+                    <a:lnT w="6350" cap="flat" cmpd="sng" algn="ctr">
+                      <a:solidFill>
+                        <a:srgbClr val="E3DED7"/>
+                      </a:solidFill>
+                      <a:prstDash val="solid"/>
+                      <a:round/>
+                      <a:headEnd type="none" w="med" len="med"/>
+                      <a:tailEnd type="none" w="med" len="med"/>
+                    </a:lnT>
+                    <a:lnB w="6350" cap="flat" cmpd="sng" algn="ctr">
+                      <a:solidFill>
+                        <a:srgbClr val="E3DED7"/>
+                      </a:solidFill>
+                      <a:prstDash val="solid"/>
+                      <a:round/>
+                      <a:headEnd type="none" w="med" len="med"/>
+                      <a:tailEnd type="none" w="med" len="med"/>
+                    </a:lnB>
+                    <a:solidFill>
+                      <a:srgbClr val="F7F5F2"/>
+                    </a:solidFill>
+                  </a:tcPr>
+                </a:tc>
+                <a:tc>
+                  <a:txBody>
+                    <a:bodyPr/>
+                    <a:lstStyle/>
+                    <a:p>
+                      <a:pPr indent="0" marL="0">
+                        <a:buNone/>
+                      </a:pPr>
+                      <a:r>
+                        <a:rPr lang="en-US" sz="1400" dirty="0">
+                          <a:solidFill>
+                            <a:srgbClr val="1A1A1A"/>
+                          </a:solidFill>
+                        </a:rPr>
+                        <a:t>0.16 / 0.73 s, 0.17 / 0.73 s</a:t>
+                      </a:r>
+                      <a:endParaRPr lang="en-US" sz="1400" dirty="0"/>
+                    </a:p>
+                  </a:txBody>
+                  <a:tcPr marL="88900" marR="88900" marT="50800" marB="50800" anchor="ctr">
+                    <a:lnL w="6350" cap="flat" cmpd="sng" algn="ctr">
+                      <a:solidFill>
+                        <a:srgbClr val="E3DED7"/>
+                      </a:solidFill>
+                      <a:prstDash val="solid"/>
+                      <a:round/>
+                      <a:headEnd type="none" w="med" len="med"/>
+                      <a:tailEnd type="none" w="med" len="med"/>
+                    </a:lnL>
+                    <a:lnR w="6350" cap="flat" cmpd="sng" algn="ctr">
+                      <a:solidFill>
+                        <a:srgbClr val="E3DED7"/>
+                      </a:solidFill>
+                      <a:prstDash val="solid"/>
+                      <a:round/>
+                      <a:headEnd type="none" w="med" len="med"/>
+                      <a:tailEnd type="none" w="med" len="med"/>
+                    </a:lnR>
+                    <a:lnT w="6350" cap="flat" cmpd="sng" algn="ctr">
+                      <a:solidFill>
+                        <a:srgbClr val="E3DED7"/>
+                      </a:solidFill>
+                      <a:prstDash val="solid"/>
+                      <a:round/>
+                      <a:headEnd type="none" w="med" len="med"/>
+                      <a:tailEnd type="none" w="med" len="med"/>
+                    </a:lnT>
+                    <a:lnB w="6350" cap="flat" cmpd="sng" algn="ctr">
+                      <a:solidFill>
+                        <a:srgbClr val="E3DED7"/>
+                      </a:solidFill>
+                      <a:prstDash val="solid"/>
+                      <a:round/>
+                      <a:headEnd type="none" w="med" len="med"/>
+                      <a:tailEnd type="none" w="med" len="med"/>
+                    </a:lnB>
+                    <a:solidFill>
+                      <a:srgbClr val="F7F5F2"/>
+                    </a:solidFill>
+                  </a:tcPr>
+                </a:tc>
+              </a:tr>
+              <a:tr h="475488">
+                <a:tc>
+                  <a:txBody>
+                    <a:bodyPr/>
+                    <a:lstStyle/>
+                    <a:p>
+                      <a:pPr indent="0" marL="0">
+                        <a:buNone/>
+                      </a:pPr>
+                      <a:r>
+                        <a:rPr lang="en-US" sz="1400" b="1" dirty="0">
+                          <a:solidFill>
+                            <a:srgbClr val="8A1626"/>
+                          </a:solidFill>
+                        </a:rPr>
+                        <a:t>35.7M trades</a:t>
+                      </a:r>
+                      <a:endParaRPr lang="en-US" sz="1400" dirty="0"/>
+                    </a:p>
+                  </a:txBody>
+                  <a:tcPr marL="88900" marR="88900" marT="50800" marB="50800" anchor="ctr">
+                    <a:lnL w="6350" cap="flat" cmpd="sng" algn="ctr">
+                      <a:solidFill>
+                        <a:srgbClr val="E3DED7"/>
+                      </a:solidFill>
+                      <a:prstDash val="solid"/>
+                      <a:round/>
+                      <a:headEnd type="none" w="med" len="med"/>
+                      <a:tailEnd type="none" w="med" len="med"/>
+                    </a:lnL>
+                    <a:lnR w="6350" cap="flat" cmpd="sng" algn="ctr">
+                      <a:solidFill>
+                        <a:srgbClr val="E3DED7"/>
+                      </a:solidFill>
+                      <a:prstDash val="solid"/>
+                      <a:round/>
+                      <a:headEnd type="none" w="med" len="med"/>
+                      <a:tailEnd type="none" w="med" len="med"/>
+                    </a:lnR>
+                    <a:lnT w="6350" cap="flat" cmpd="sng" algn="ctr">
+                      <a:solidFill>
+                        <a:srgbClr val="E3DED7"/>
+                      </a:solidFill>
+                      <a:prstDash val="solid"/>
+                      <a:round/>
+                      <a:headEnd type="none" w="med" len="med"/>
+                      <a:tailEnd type="none" w="med" len="med"/>
+                    </a:lnT>
+                    <a:lnB w="6350" cap="flat" cmpd="sng" algn="ctr">
+                      <a:solidFill>
+                        <a:srgbClr val="E3DED7"/>
+                      </a:solidFill>
+                      <a:prstDash val="solid"/>
+                      <a:round/>
+                      <a:headEnd type="none" w="med" len="med"/>
+                      <a:tailEnd type="none" w="med" len="med"/>
+                    </a:lnB>
+                    <a:solidFill>
+                      <a:srgbClr val="FFFFFF"/>
+                    </a:solidFill>
+                  </a:tcPr>
+                </a:tc>
+                <a:tc>
+                  <a:txBody>
+                    <a:bodyPr/>
+                    <a:lstStyle/>
+                    <a:p>
+                      <a:pPr indent="0" marL="0">
+                        <a:buNone/>
+                      </a:pPr>
+                      <a:r>
+                        <a:rPr lang="en-US" sz="1400" dirty="0">
+                          <a:solidFill>
+                            <a:srgbClr val="1A1A1A"/>
+                          </a:solidFill>
+                        </a:rPr>
+                        <a:t>Server heap while serving</a:t>
+                      </a:r>
+                      <a:endParaRPr lang="en-US" sz="1400" dirty="0"/>
+                    </a:p>
+                  </a:txBody>
+                  <a:tcPr marL="88900" marR="88900" marT="50800" marB="50800" anchor="ctr">
+                    <a:lnL w="6350" cap="flat" cmpd="sng" algn="ctr">
+                      <a:solidFill>
+                        <a:srgbClr val="E3DED7"/>
+                      </a:solidFill>
+                      <a:prstDash val="solid"/>
+                      <a:round/>
+                      <a:headEnd type="none" w="med" len="med"/>
+                      <a:tailEnd type="none" w="med" len="med"/>
+                    </a:lnL>
+                    <a:lnR w="6350" cap="flat" cmpd="sng" algn="ctr">
+                      <a:solidFill>
+                        <a:srgbClr val="E3DED7"/>
+                      </a:solidFill>
+                      <a:prstDash val="solid"/>
+                      <a:round/>
+                      <a:headEnd type="none" w="med" len="med"/>
+                      <a:tailEnd type="none" w="med" len="med"/>
+                    </a:lnR>
+                    <a:lnT w="6350" cap="flat" cmpd="sng" algn="ctr">
+                      <a:solidFill>
+                        <a:srgbClr val="E3DED7"/>
+                      </a:solidFill>
+                      <a:prstDash val="solid"/>
+                      <a:round/>
+                      <a:headEnd type="none" w="med" len="med"/>
+                      <a:tailEnd type="none" w="med" len="med"/>
+                    </a:lnT>
+                    <a:lnB w="6350" cap="flat" cmpd="sng" algn="ctr">
+                      <a:solidFill>
+                        <a:srgbClr val="E3DED7"/>
+                      </a:solidFill>
+                      <a:prstDash val="solid"/>
+                      <a:round/>
+                      <a:headEnd type="none" w="med" len="med"/>
+                      <a:tailEnd type="none" w="med" len="med"/>
+                    </a:lnB>
+                    <a:solidFill>
+                      <a:srgbClr val="FFFFFF"/>
+                    </a:solidFill>
+                  </a:tcPr>
+                </a:tc>
+                <a:tc>
+                  <a:txBody>
+                    <a:bodyPr/>
+                    <a:lstStyle/>
+                    <a:p>
+                      <a:pPr indent="0" marL="0">
+                        <a:buNone/>
+                      </a:pPr>
+                      <a:r>
+                        <a:rPr lang="en-US" sz="1400" dirty="0">
+                          <a:solidFill>
+                            <a:srgbClr val="1A1A1A"/>
+                          </a:solidFill>
+                        </a:rPr>
+                        <a:t>50</a:t>
+                      </a:r>
+                      <a:endParaRPr lang="en-US" sz="1400" dirty="0"/>
+                    </a:p>
+                  </a:txBody>
+                  <a:tcPr marL="88900" marR="88900" marT="50800" marB="50800" anchor="ctr">
+                    <a:lnL w="6350" cap="flat" cmpd="sng" algn="ctr">
+                      <a:solidFill>
+                        <a:srgbClr val="E3DED7"/>
+                      </a:solidFill>
+                      <a:prstDash val="solid"/>
+                      <a:round/>
+                      <a:headEnd type="none" w="med" len="med"/>
+                      <a:tailEnd type="none" w="med" len="med"/>
+                    </a:lnL>
+                    <a:lnR w="6350" cap="flat" cmpd="sng" algn="ctr">
+                      <a:solidFill>
+                        <a:srgbClr val="E3DED7"/>
+                      </a:solidFill>
+                      <a:prstDash val="solid"/>
+                      <a:round/>
+                      <a:headEnd type="none" w="med" len="med"/>
+                      <a:tailEnd type="none" w="med" len="med"/>
+                    </a:lnR>
+                    <a:lnT w="6350" cap="flat" cmpd="sng" algn="ctr">
+                      <a:solidFill>
+                        <a:srgbClr val="E3DED7"/>
+                      </a:solidFill>
+                      <a:prstDash val="solid"/>
+                      <a:round/>
+                      <a:headEnd type="none" w="med" len="med"/>
+                      <a:tailEnd type="none" w="med" len="med"/>
+                    </a:lnT>
+                    <a:lnB w="6350" cap="flat" cmpd="sng" algn="ctr">
+                      <a:solidFill>
+                        <a:srgbClr val="E3DED7"/>
+                      </a:solidFill>
+                      <a:prstDash val="solid"/>
+                      <a:round/>
+                      <a:headEnd type="none" w="med" len="med"/>
+                      <a:tailEnd type="none" w="med" len="med"/>
+                    </a:lnB>
+                    <a:solidFill>
+                      <a:srgbClr val="FFFFFF"/>
+                    </a:solidFill>
+                  </a:tcPr>
+                </a:tc>
+                <a:tc>
+                  <a:txBody>
+                    <a:bodyPr/>
+                    <a:lstStyle/>
+                    <a:p>
+                      <a:pPr indent="0" marL="0">
+                        <a:buNone/>
+                      </a:pPr>
+                      <a:r>
+                        <a:rPr lang="en-US" sz="1400" dirty="0">
+                          <a:solidFill>
+                            <a:srgbClr val="1A1A1A"/>
+                          </a:solidFill>
+                        </a:rPr>
+                        <a:t>3.7 GB of 8 GB</a:t>
+                      </a:r>
+                      <a:endParaRPr lang="en-US" sz="1400" dirty="0"/>
+                    </a:p>
+                  </a:txBody>
+                  <a:tcPr marL="88900" marR="88900" marT="50800" marB="50800" anchor="ctr">
+                    <a:lnL w="6350" cap="flat" cmpd="sng" algn="ctr">
+                      <a:solidFill>
+                        <a:srgbClr val="E3DED7"/>
+                      </a:solidFill>
+                      <a:prstDash val="solid"/>
+                      <a:round/>
+                      <a:headEnd type="none" w="med" len="med"/>
+                      <a:tailEnd type="none" w="med" len="med"/>
+                    </a:lnL>
+                    <a:lnR w="6350" cap="flat" cmpd="sng" algn="ctr">
+                      <a:solidFill>
+                        <a:srgbClr val="E3DED7"/>
+                      </a:solidFill>
+                      <a:prstDash val="solid"/>
+                      <a:round/>
+                      <a:headEnd type="none" w="med" len="med"/>
+                      <a:tailEnd type="none" w="med" len="med"/>
+                    </a:lnR>
+                    <a:lnT w="6350" cap="flat" cmpd="sng" algn="ctr">
+                      <a:solidFill>
+                        <a:srgbClr val="E3DED7"/>
+                      </a:solidFill>
+                      <a:prstDash val="solid"/>
+                      <a:round/>
+                      <a:headEnd type="none" w="med" len="med"/>
+                      <a:tailEnd type="none" w="med" len="med"/>
+                    </a:lnT>
+                    <a:lnB w="6350" cap="flat" cmpd="sng" algn="ctr">
+                      <a:solidFill>
+                        <a:srgbClr val="E3DED7"/>
+                      </a:solidFill>
+                      <a:prstDash val="solid"/>
+                      <a:round/>
+                      <a:headEnd type="none" w="med" len="med"/>
+                      <a:tailEnd type="none" w="med" len="med"/>
+                    </a:lnB>
+                    <a:solidFill>
+                      <a:srgbClr val="FFFFFF"/>
+                    </a:solidFill>
+                  </a:tcPr>
+                </a:tc>
+              </a:tr>
+              <a:tr h="475488">
+                <a:tc>
+                  <a:txBody>
+                    <a:bodyPr/>
+                    <a:lstStyle/>
+                    <a:p>
+                      <a:pPr indent="0" marL="0">
+                        <a:buNone/>
+                      </a:pPr>
+                      <a:r>
+                        <a:rPr lang="en-US" sz="1400" b="1" dirty="0">
+                          <a:solidFill>
+                            <a:srgbClr val="8A1626"/>
+                          </a:solidFill>
+                        </a:rPr>
+                        <a:t>400,000 restated</a:t>
+                      </a:r>
+                      <a:endParaRPr lang="en-US" sz="1400" dirty="0"/>
+                    </a:p>
+                  </a:txBody>
+                  <a:tcPr marL="88900" marR="88900" marT="50800" marB="50800" anchor="ctr">
+                    <a:lnL w="6350" cap="flat" cmpd="sng" algn="ctr">
+                      <a:solidFill>
+                        <a:srgbClr val="E3DED7"/>
+                      </a:solidFill>
+                      <a:prstDash val="solid"/>
+                      <a:round/>
+                      <a:headEnd type="none" w="med" len="med"/>
+                      <a:tailEnd type="none" w="med" len="med"/>
+                    </a:lnL>
+                    <a:lnR w="6350" cap="flat" cmpd="sng" algn="ctr">
+                      <a:solidFill>
+                        <a:srgbClr val="E3DED7"/>
+                      </a:solidFill>
+                      <a:prstDash val="solid"/>
+                      <a:round/>
+                      <a:headEnd type="none" w="med" len="med"/>
+                      <a:tailEnd type="none" w="med" len="med"/>
+                    </a:lnR>
+                    <a:lnT w="6350" cap="flat" cmpd="sng" algn="ctr">
+                      <a:solidFill>
+                        <a:srgbClr val="E3DED7"/>
+                      </a:solidFill>
+                      <a:prstDash val="solid"/>
+                      <a:round/>
+                      <a:headEnd type="none" w="med" len="med"/>
+                      <a:tailEnd type="none" w="med" len="med"/>
+                    </a:lnT>
+                    <a:lnB w="6350" cap="flat" cmpd="sng" algn="ctr">
+                      <a:solidFill>
+                        <a:srgbClr val="E3DED7"/>
+                      </a:solidFill>
+                      <a:prstDash val="solid"/>
+                      <a:round/>
+                      <a:headEnd type="none" w="med" len="med"/>
+                      <a:tailEnd type="none" w="med" len="med"/>
+                    </a:lnB>
+                    <a:solidFill>
+                      <a:srgbClr val="F7F5F2"/>
+                    </a:solidFill>
+                  </a:tcPr>
+                </a:tc>
+                <a:tc>
+                  <a:txBody>
+                    <a:bodyPr/>
+                    <a:lstStyle/>
+                    <a:p>
+                      <a:pPr indent="0" marL="0">
+                        <a:buNone/>
+                      </a:pPr>
+                      <a:r>
+                        <a:rPr lang="en-US" sz="1400" dirty="0">
+                          <a:solidFill>
+                            <a:srgbClr val="1A1A1A"/>
+                          </a:solidFill>
+                        </a:rPr>
+                        <a:t>A day reloaded, 10 % amended, while serving</a:t>
+                      </a:r>
+                      <a:endParaRPr lang="en-US" sz="1400" dirty="0"/>
+                    </a:p>
+                  </a:txBody>
+                  <a:tcPr marL="88900" marR="88900" marT="50800" marB="50800" anchor="ctr">
+                    <a:lnL w="6350" cap="flat" cmpd="sng" algn="ctr">
+                      <a:solidFill>
+                        <a:srgbClr val="E3DED7"/>
+                      </a:solidFill>
+                      <a:prstDash val="solid"/>
+                      <a:round/>
+                      <a:headEnd type="none" w="med" len="med"/>
+                      <a:tailEnd type="none" w="med" len="med"/>
+                    </a:lnL>
+                    <a:lnR w="6350" cap="flat" cmpd="sng" algn="ctr">
+                      <a:solidFill>
+                        <a:srgbClr val="E3DED7"/>
+                      </a:solidFill>
+                      <a:prstDash val="solid"/>
+                      <a:round/>
+                      <a:headEnd type="none" w="med" len="med"/>
+                      <a:tailEnd type="none" w="med" len="med"/>
+                    </a:lnR>
+                    <a:lnT w="6350" cap="flat" cmpd="sng" algn="ctr">
+                      <a:solidFill>
+                        <a:srgbClr val="E3DED7"/>
+                      </a:solidFill>
+                      <a:prstDash val="solid"/>
+                      <a:round/>
+                      <a:headEnd type="none" w="med" len="med"/>
+                      <a:tailEnd type="none" w="med" len="med"/>
+                    </a:lnT>
+                    <a:lnB w="6350" cap="flat" cmpd="sng" algn="ctr">
+                      <a:solidFill>
+                        <a:srgbClr val="E3DED7"/>
+                      </a:solidFill>
+                      <a:prstDash val="solid"/>
+                      <a:round/>
+                      <a:headEnd type="none" w="med" len="med"/>
+                      <a:tailEnd type="none" w="med" len="med"/>
+                    </a:lnB>
+                    <a:solidFill>
+                      <a:srgbClr val="F7F5F2"/>
+                    </a:solidFill>
+                  </a:tcPr>
+                </a:tc>
+                <a:tc>
+                  <a:txBody>
+                    <a:bodyPr/>
+                    <a:lstStyle/>
+                    <a:p>
+                      <a:pPr indent="0" marL="0">
+                        <a:buNone/>
+                      </a:pPr>
+                      <a:r>
+                        <a:rPr lang="en-US" sz="1400" dirty="0">
+                          <a:solidFill>
+                            <a:srgbClr val="1A1A1A"/>
+                          </a:solidFill>
+                        </a:rPr>
+                        <a:t>30</a:t>
+                      </a:r>
+                      <a:endParaRPr lang="en-US" sz="1400" dirty="0"/>
+                    </a:p>
+                  </a:txBody>
+                  <a:tcPr marL="88900" marR="88900" marT="50800" marB="50800" anchor="ctr">
+                    <a:lnL w="6350" cap="flat" cmpd="sng" algn="ctr">
+                      <a:solidFill>
+                        <a:srgbClr val="E3DED7"/>
+                      </a:solidFill>
+                      <a:prstDash val="solid"/>
+                      <a:round/>
+                      <a:headEnd type="none" w="med" len="med"/>
+                      <a:tailEnd type="none" w="med" len="med"/>
+                    </a:lnL>
+                    <a:lnR w="6350" cap="flat" cmpd="sng" algn="ctr">
+                      <a:solidFill>
+                        <a:srgbClr val="E3DED7"/>
+                      </a:solidFill>
+                      <a:prstDash val="solid"/>
+                      <a:round/>
+                      <a:headEnd type="none" w="med" len="med"/>
+                      <a:tailEnd type="none" w="med" len="med"/>
+                    </a:lnR>
+                    <a:lnT w="6350" cap="flat" cmpd="sng" algn="ctr">
+                      <a:solidFill>
+                        <a:srgbClr val="E3DED7"/>
+                      </a:solidFill>
+                      <a:prstDash val="solid"/>
+                      <a:round/>
+                      <a:headEnd type="none" w="med" len="med"/>
+                      <a:tailEnd type="none" w="med" len="med"/>
+                    </a:lnT>
+                    <a:lnB w="6350" cap="flat" cmpd="sng" algn="ctr">
+                      <a:solidFill>
+                        <a:srgbClr val="E3DED7"/>
+                      </a:solidFill>
+                      <a:prstDash val="solid"/>
+                      <a:round/>
+                      <a:headEnd type="none" w="med" len="med"/>
+                      <a:tailEnd type="none" w="med" len="med"/>
+                    </a:lnB>
+                    <a:solidFill>
+                      <a:srgbClr val="F7F5F2"/>
+                    </a:solidFill>
+                  </a:tcPr>
+                </a:tc>
+                <a:tc>
+                  <a:txBody>
+                    <a:bodyPr/>
+                    <a:lstStyle/>
+                    <a:p>
+                      <a:pPr indent="0" marL="0">
+                        <a:buNone/>
+                      </a:pPr>
+                      <a:r>
+                        <a:rPr lang="en-US" sz="1400" dirty="0">
+                          <a:solidFill>
+                            <a:srgbClr val="1A1A1A"/>
+                          </a:solidFill>
+                        </a:rPr>
+                        <a:t>2 min 54 s, 202 requests/s, 0 failures</a:t>
+                      </a:r>
+                      <a:endParaRPr lang="en-US" sz="1400" dirty="0"/>
+                    </a:p>
+                  </a:txBody>
+                  <a:tcPr marL="88900" marR="88900" marT="50800" marB="50800" anchor="ctr">
+                    <a:lnL w="6350" cap="flat" cmpd="sng" algn="ctr">
+                      <a:solidFill>
+                        <a:srgbClr val="E3DED7"/>
+                      </a:solidFill>
+                      <a:prstDash val="solid"/>
+                      <a:round/>
+                      <a:headEnd type="none" w="med" len="med"/>
+                      <a:tailEnd type="none" w="med" len="med"/>
+                    </a:lnL>
+                    <a:lnR w="6350" cap="flat" cmpd="sng" algn="ctr">
+                      <a:solidFill>
+                        <a:srgbClr val="E3DED7"/>
+                      </a:solidFill>
+                      <a:prstDash val="solid"/>
+                      <a:round/>
+                      <a:headEnd type="none" w="med" len="med"/>
+                      <a:tailEnd type="none" w="med" len="med"/>
+                    </a:lnR>
+                    <a:lnT w="6350" cap="flat" cmpd="sng" algn="ctr">
+                      <a:solidFill>
+                        <a:srgbClr val="E3DED7"/>
+                      </a:solidFill>
+                      <a:prstDash val="solid"/>
+                      <a:round/>
+                      <a:headEnd type="none" w="med" len="med"/>
+                      <a:tailEnd type="none" w="med" len="med"/>
+                    </a:lnT>
+                    <a:lnB w="6350" cap="flat" cmpd="sng" algn="ctr">
+                      <a:solidFill>
+                        <a:srgbClr val="E3DED7"/>
+                      </a:solidFill>
+                      <a:prstDash val="solid"/>
+                      <a:round/>
+                      <a:headEnd type="none" w="med" len="med"/>
+                      <a:tailEnd type="none" w="med" len="med"/>
+                    </a:lnB>
+                    <a:solidFill>
+                      <a:srgbClr val="F7F5F2"/>
+                    </a:solidFill>
+                  </a:tcPr>
+                </a:tc>
+              </a:tr>
+              <a:tr h="475488">
+                <a:tc>
+                  <a:txBody>
+                    <a:bodyPr/>
+                    <a:lstStyle/>
+                    <a:p>
+                      <a:pPr indent="0" marL="0">
+                        <a:buNone/>
+                      </a:pPr>
+                      <a:r>
+                        <a:rPr lang="en-US" sz="1400" b="1" dirty="0">
+                          <a:solidFill>
+                            <a:srgbClr val="8A1626"/>
+                          </a:solidFill>
+                        </a:rPr>
+                        <a:t>8.2M trades</a:t>
+                      </a:r>
+                      <a:endParaRPr lang="en-US" sz="1400" dirty="0"/>
+                    </a:p>
+                  </a:txBody>
+                  <a:tcPr marL="88900" marR="88900" marT="50800" marB="50800" anchor="ctr">
+                    <a:lnL w="6350" cap="flat" cmpd="sng" algn="ctr">
+                      <a:solidFill>
+                        <a:srgbClr val="E3DED7"/>
+                      </a:solidFill>
+                      <a:prstDash val="solid"/>
+                      <a:round/>
+                      <a:headEnd type="none" w="med" len="med"/>
+                      <a:tailEnd type="none" w="med" len="med"/>
+                    </a:lnL>
+                    <a:lnR w="6350" cap="flat" cmpd="sng" algn="ctr">
+                      <a:solidFill>
+                        <a:srgbClr val="E3DED7"/>
+                      </a:solidFill>
+                      <a:prstDash val="solid"/>
+                      <a:round/>
+                      <a:headEnd type="none" w="med" len="med"/>
+                      <a:tailEnd type="none" w="med" len="med"/>
+                    </a:lnR>
+                    <a:lnT w="6350" cap="flat" cmpd="sng" algn="ctr">
+                      <a:solidFill>
+                        <a:srgbClr val="E3DED7"/>
+                      </a:solidFill>
+                      <a:prstDash val="solid"/>
+                      <a:round/>
+                      <a:headEnd type="none" w="med" len="med"/>
+                      <a:tailEnd type="none" w="med" len="med"/>
+                    </a:lnT>
+                    <a:lnB w="6350" cap="flat" cmpd="sng" algn="ctr">
+                      <a:solidFill>
+                        <a:srgbClr val="E3DED7"/>
+                      </a:solidFill>
+                      <a:prstDash val="solid"/>
+                      <a:round/>
+                      <a:headEnd type="none" w="med" len="med"/>
+                      <a:tailEnd type="none" w="med" len="med"/>
+                    </a:lnB>
+                    <a:solidFill>
+                      <a:srgbClr val="FFFFFF"/>
+                    </a:solidFill>
+                  </a:tcPr>
+                </a:tc>
+                <a:tc>
+                  <a:txBody>
+                    <a:bodyPr/>
+                    <a:lstStyle/>
+                    <a:p>
+                      <a:pPr indent="0" marL="0">
+                        <a:buNone/>
+                      </a:pPr>
+                      <a:r>
+                        <a:rPr lang="en-US" sz="1400" dirty="0">
+                          <a:solidFill>
+                            <a:srgbClr val="1A1A1A"/>
+                          </a:solidFill>
+                        </a:rPr>
+                        <a:t>Single trade / grouped page from disk, p50</a:t>
+                      </a:r>
+                      <a:endParaRPr lang="en-US" sz="1400" dirty="0"/>
+                    </a:p>
+                  </a:txBody>
+                  <a:tcPr marL="88900" marR="88900" marT="50800" marB="50800" anchor="ctr">
+                    <a:lnL w="6350" cap="flat" cmpd="sng" algn="ctr">
+                      <a:solidFill>
+                        <a:srgbClr val="E3DED7"/>
+                      </a:solidFill>
+                      <a:prstDash val="solid"/>
+                      <a:round/>
+                      <a:headEnd type="none" w="med" len="med"/>
+                      <a:tailEnd type="none" w="med" len="med"/>
+                    </a:lnL>
+                    <a:lnR w="6350" cap="flat" cmpd="sng" algn="ctr">
+                      <a:solidFill>
+                        <a:srgbClr val="E3DED7"/>
+                      </a:solidFill>
+                      <a:prstDash val="solid"/>
+                      <a:round/>
+                      <a:headEnd type="none" w="med" len="med"/>
+                      <a:tailEnd type="none" w="med" len="med"/>
+                    </a:lnR>
+                    <a:lnT w="6350" cap="flat" cmpd="sng" algn="ctr">
+                      <a:solidFill>
+                        <a:srgbClr val="E3DED7"/>
+                      </a:solidFill>
+                      <a:prstDash val="solid"/>
+                      <a:round/>
+                      <a:headEnd type="none" w="med" len="med"/>
+                      <a:tailEnd type="none" w="med" len="med"/>
+                    </a:lnT>
+                    <a:lnB w="6350" cap="flat" cmpd="sng" algn="ctr">
+                      <a:solidFill>
+                        <a:srgbClr val="E3DED7"/>
+                      </a:solidFill>
+                      <a:prstDash val="solid"/>
+                      <a:round/>
+                      <a:headEnd type="none" w="med" len="med"/>
+                      <a:tailEnd type="none" w="med" len="med"/>
+                    </a:lnB>
+                    <a:solidFill>
+                      <a:srgbClr val="FFFFFF"/>
+                    </a:solidFill>
+                  </a:tcPr>
+                </a:tc>
+                <a:tc>
+                  <a:txBody>
+                    <a:bodyPr/>
+                    <a:lstStyle/>
+                    <a:p>
+                      <a:pPr indent="0" marL="0">
+                        <a:buNone/>
+                      </a:pPr>
+                      <a:r>
+                        <a:rPr lang="en-US" sz="1400" dirty="0">
+                          <a:solidFill>
+                            <a:srgbClr val="1A1A1A"/>
+                          </a:solidFill>
+                        </a:rPr>
+                        <a:t>50</a:t>
+                      </a:r>
+                      <a:endParaRPr lang="en-US" sz="1400" dirty="0"/>
+                    </a:p>
+                  </a:txBody>
+                  <a:tcPr marL="88900" marR="88900" marT="50800" marB="50800" anchor="ctr">
+                    <a:lnL w="6350" cap="flat" cmpd="sng" algn="ctr">
+                      <a:solidFill>
+                        <a:srgbClr val="E3DED7"/>
+                      </a:solidFill>
+                      <a:prstDash val="solid"/>
+                      <a:round/>
+                      <a:headEnd type="none" w="med" len="med"/>
+                      <a:tailEnd type="none" w="med" len="med"/>
+                    </a:lnL>
+                    <a:lnR w="6350" cap="flat" cmpd="sng" algn="ctr">
+                      <a:solidFill>
+                        <a:srgbClr val="E3DED7"/>
+                      </a:solidFill>
+                      <a:prstDash val="solid"/>
+                      <a:round/>
+                      <a:headEnd type="none" w="med" len="med"/>
+                      <a:tailEnd type="none" w="med" len="med"/>
+                    </a:lnR>
+                    <a:lnT w="6350" cap="flat" cmpd="sng" algn="ctr">
+                      <a:solidFill>
+                        <a:srgbClr val="E3DED7"/>
+                      </a:solidFill>
+                      <a:prstDash val="solid"/>
+                      <a:round/>
+                      <a:headEnd type="none" w="med" len="med"/>
+                      <a:tailEnd type="none" w="med" len="med"/>
+                    </a:lnT>
+                    <a:lnB w="6350" cap="flat" cmpd="sng" algn="ctr">
+                      <a:solidFill>
+                        <a:srgbClr val="E3DED7"/>
+                      </a:solidFill>
+                      <a:prstDash val="solid"/>
+                      <a:round/>
+                      <a:headEnd type="none" w="med" len="med"/>
+                      <a:tailEnd type="none" w="med" len="med"/>
+                    </a:lnB>
+                    <a:solidFill>
+                      <a:srgbClr val="FFFFFF"/>
+                    </a:solidFill>
+                  </a:tcPr>
+                </a:tc>
+                <a:tc>
+                  <a:txBody>
+                    <a:bodyPr/>
+                    <a:lstStyle/>
+                    <a:p>
+                      <a:pPr indent="0" marL="0">
+                        <a:buNone/>
+                      </a:pPr>
+                      <a:r>
+                        <a:rPr lang="en-US" sz="1400" dirty="0">
+                          <a:solidFill>
+                            <a:srgbClr val="1A1A1A"/>
+                          </a:solidFill>
+                        </a:rPr>
+                        <a:t>18 ms / 70 ms</a:t>
+                      </a:r>
+                      <a:endParaRPr lang="en-US" sz="1400" dirty="0"/>
+                    </a:p>
+                  </a:txBody>
+                  <a:tcPr marL="88900" marR="88900" marT="50800" marB="50800" anchor="ctr">
+                    <a:lnL w="6350" cap="flat" cmpd="sng" algn="ctr">
+                      <a:solidFill>
+                        <a:srgbClr val="E3DED7"/>
+                      </a:solidFill>
+                      <a:prstDash val="solid"/>
+                      <a:round/>
+                      <a:headEnd type="none" w="med" len="med"/>
+                      <a:tailEnd type="none" w="med" len="med"/>
+                    </a:lnL>
+                    <a:lnR w="6350" cap="flat" cmpd="sng" algn="ctr">
+                      <a:solidFill>
+                        <a:srgbClr val="E3DED7"/>
+                      </a:solidFill>
+                      <a:prstDash val="solid"/>
+                      <a:round/>
+                      <a:headEnd type="none" w="med" len="med"/>
+                      <a:tailEnd type="none" w="med" len="med"/>
+                    </a:lnR>
+                    <a:lnT w="6350" cap="flat" cmpd="sng" algn="ctr">
+                      <a:solidFill>
+                        <a:srgbClr val="E3DED7"/>
+                      </a:solidFill>
+                      <a:prstDash val="solid"/>
+                      <a:round/>
+                      <a:headEnd type="none" w="med" len="med"/>
+                      <a:tailEnd type="none" w="med" len="med"/>
+                    </a:lnT>
+                    <a:lnB w="6350" cap="flat" cmpd="sng" algn="ctr">
+                      <a:solidFill>
+                        <a:srgbClr val="E3DED7"/>
+                      </a:solidFill>
+                      <a:prstDash val="solid"/>
+                      <a:round/>
+                      <a:headEnd type="none" w="med" len="med"/>
+                      <a:tailEnd type="none" w="med" len="med"/>
+                    </a:lnB>
+                    <a:solidFill>
+                      <a:srgbClr val="FFFFFF"/>
+                    </a:solidFill>
+                  </a:tcPr>
+                </a:tc>
+              </a:tr>
+            </a:tbl>
+          </a:graphicData>
+        </a:graphic>
+      </p:graphicFrame>
+      <p:sp>
+        <p:nvSpPr>
+          <p:cNvPr id="23" name="Shape 19"/>
+          <p:cNvSpPr/>
+          <p:nvPr/>
+        </p:nvSpPr>
+        <p:spPr>
+          <a:xfrm>
+            <a:off x="777240" y="5550408"/>
+            <a:ext cx="10634472" cy="694944"/>
+          </a:xfrm>
+          <a:prstGeom prst="rect">
+            <a:avLst/>
+          </a:prstGeom>
+          <a:solidFill>
+            <a:srgbClr val="F6E6E9"/>
+          </a:solidFill>
+          <a:ln/>
+        </p:spPr>
+      </p:sp>
+      <p:sp>
+        <p:nvSpPr>
+          <p:cNvPr id="24" name="Shape 20"/>
+          <p:cNvSpPr/>
+          <p:nvPr/>
+        </p:nvSpPr>
+        <p:spPr>
+          <a:xfrm>
+            <a:off x="777240" y="5550408"/>
+            <a:ext cx="54864" cy="694944"/>
+          </a:xfrm>
+          <a:prstGeom prst="rect">
+            <a:avLst/>
+          </a:prstGeom>
+          <a:solidFill>
+            <a:srgbClr val="A51C30"/>
+          </a:solidFill>
+          <a:ln/>
+        </p:spPr>
+      </p:sp>
+      <p:sp>
+        <p:nvSpPr>
+          <p:cNvPr id="25" name="Text 21"/>
+          <p:cNvSpPr txBox="1"/>
+          <p:nvPr/>
+        </p:nvSpPr>
+        <p:spPr>
+          <a:xfrm>
+            <a:off x="1033272" y="5623560"/>
+            <a:ext cx="10177272" cy="548640"/>
+          </a:xfrm>
+          <a:prstGeom prst="rect">
+            <a:avLst/>
+          </a:prstGeom>
+          <a:noFill/>
+          <a:ln/>
+        </p:spPr>
+        <p:txBody>
+          <a:bodyPr wrap="square" lIns="0" tIns="0" rIns="0" bIns="0" rtlCol="0" anchor="ctr"/>
+          <a:lstStyle/>
+          <a:p>
+            <a:pPr indent="0" marL="0">
+              <a:buNone/>
+            </a:pPr>
+            <a:r>
+              <a:rPr lang="en-US" sz="1400" b="1" dirty="0">
+                <a:solidFill>
+                  <a:srgbClr val="A51C30"/>
+                </a:solidFill>
+              </a:rPr>
+              <a:t>Key insight  </a:t>
+            </a:r>
+            <a:pPr indent="0" marL="0">
+              <a:buNone/>
+            </a:pPr>
+            <a:r>
+              <a:rPr lang="en-US" sz="1400" b="1" dirty="0">
+                <a:solidFill>
+                  <a:srgbClr val="8A1626"/>
+                </a:solidFill>
+              </a:rPr>
+              <a:t>One workstation, an 8 GB heap: the figures and their method are in PERFORMANCE.md and SCALE_STRATEGY.md.</a:t>
+            </a:r>
+            <a:endParaRPr lang="en-US" sz="1400" dirty="0"/>
+          </a:p>
+        </p:txBody>
+      </p:sp>
+      <p:sp>
+        <p:nvSpPr>
+          <p:cNvPr id="25" name="Slide Number Placeholder 0"/>
+          <p:cNvSpPr>
+            <a:spLocks noGrp="1"/>
+          </p:cNvSpPr>
+          <p:nvPr>
+            <p:ph type="sldNum" sz="quarter" idx="4294967295"/>
+          </p:nvPr>
+        </p:nvSpPr>
+        <p:spPr>
+          <a:xfrm>
+            <a:off x="8220456" y="6437376"/>
+            <a:ext cx="3191256" cy="219456"/>
+          </a:xfrm>
+          <a:prstGeom prst="rect">
+            <a:avLst/>
+          </a:prstGeom>
+          <a:extLst>
+            <a:ext uri="{C572A759-6A51-4108-AA02-DFA0A04FC94B}">
+              <ma14:wrappingTextBoxFlag xmlns:ma14="http://schemas.microsoft.com/office/mac/drawingml/2011/main" val="0"/>
+            </a:ext>
+          </a:extLst>
+        </p:spPr>
+        <p:txBody>
+          <a:bodyPr/>
+          <a:lstStyle>
+            <a:lvl1pPr>
+              <a:defRPr sz="850">
+                <a:solidFill>
+                  <a:srgbClr val="61666E"/>
+                </a:solidFill>
+              </a:defRPr>
+            </a:lvl1pPr>
+          </a:lstStyle>
+          <a:p>
+            <a:pPr algn="r"/>
+            <a:fld id="{F7021451-1387-4CA6-816F-3879F97B5CBC}" type="slidenum">
+              <a:rPr b="1" lang="en-US"/>
+              <a:t>41</a:t>
             </a:fld>
             <a:endParaRPr lang="en-US"/>
           </a:p>
@@ -41814,7 +47018,7 @@
                             <a:srgbClr val="1A1A1A"/>
                           </a:solidFill>
                         </a:rPr>
-                        <a:t>packs/ — 14 shipped, e.g. trading, genomics</a:t>
+                        <a:t>config/packs/ — 7 shipped, e.g. trading, world-economy</a:t>
                       </a:r>
                       <a:endParaRPr lang="en-US" sz="1300" dirty="0"/>
                     </a:p>
@@ -41999,7 +47203,7 @@
                             <a:srgbClr val="1A1A1A"/>
                           </a:solidFill>
                         </a:rPr>
-                        <a:t>230 Sutras in the shipped packs</a:t>
+                        <a:t>197 Sutras in the shipped packs</a:t>
                       </a:r>
                       <a:endParaRPr lang="en-US" sz="1300" dirty="0"/>
                     </a:p>
@@ -42369,7 +47573,7 @@
                             <a:srgbClr val="1A1A1A"/>
                           </a:solidFill>
                         </a:rPr>
-                        <a:t>Notional, MTM, DV01 …</a:t>
+                        <a:t>Source, side, notional, status …</a:t>
                       </a:r>
                       <a:endParaRPr lang="en-US" sz="1300" dirty="0"/>
                     </a:p>
@@ -42493,7 +47697,7 @@
                             <a:srgbClr val="1A1A1A"/>
                           </a:solidFill>
                         </a:rPr>
-                        <a:t>One of 21 kinds on a 12-column grid, each with an F-key</a:t>
+                        <a:t>One of 22 kinds on a 12-column grid, each with an F-key</a:t>
                       </a:r>
                       <a:endParaRPr lang="en-US" sz="1300" dirty="0"/>
                     </a:p>
@@ -42554,7 +47758,7 @@
                             <a:srgbClr val="1A1A1A"/>
                           </a:solidFill>
                         </a:rPr>
-                        <a:t>table, ladder, pivot, surface, graph …</a:t>
+                        <a:t>table, ladder, pivot, surface, map …</a:t>
                       </a:r>
                       <a:endParaRPr lang="en-US" sz="1300" dirty="0"/>
                     </a:p>

--- a/docs/publications/Drishti-Design-and-Evidence.pptx
+++ b/docs/publications/Drishti-Design-and-Evidence.pptx
@@ -39745,8 +39745,8 @@
         </p:nvSpPr>
         <p:spPr>
           <a:xfrm>
-            <a:off x="777240" y="3474720"/>
-            <a:ext cx="2507742" cy="1737360"/>
+            <a:off x="777240" y="3337560"/>
+            <a:ext cx="2560320" cy="960120"/>
           </a:xfrm>
           <a:prstGeom prst="rect">
             <a:avLst/>
@@ -39765,8 +39765,8 @@
         </p:nvSpPr>
         <p:spPr>
           <a:xfrm>
-            <a:off x="777240" y="3474720"/>
-            <a:ext cx="45720" cy="1737360"/>
+            <a:off x="777240" y="3337560"/>
+            <a:ext cx="45720" cy="960120"/>
           </a:xfrm>
           <a:prstGeom prst="rect">
             <a:avLst/>
@@ -39785,8 +39785,8 @@
         </p:nvSpPr>
         <p:spPr>
           <a:xfrm>
-            <a:off x="978408" y="3584448"/>
-            <a:ext cx="2187702" cy="502920"/>
+            <a:off x="978408" y="3410712"/>
+            <a:ext cx="2240279" cy="384048"/>
           </a:xfrm>
           <a:prstGeom prst="rect">
             <a:avLst/>
@@ -39821,8 +39821,8 @@
         </p:nvSpPr>
         <p:spPr>
           <a:xfrm>
-            <a:off x="978408" y="4078224"/>
-            <a:ext cx="2187702" cy="1060704"/>
+            <a:off x="978408" y="3813048"/>
+            <a:ext cx="2240279" cy="438912"/>
           </a:xfrm>
           <a:prstGeom prst="rect">
             <a:avLst/>
@@ -39857,8 +39857,8 @@
         </p:nvSpPr>
         <p:spPr>
           <a:xfrm>
-            <a:off x="3486150" y="3474720"/>
-            <a:ext cx="2507742" cy="1737360"/>
+            <a:off x="3474720" y="3337560"/>
+            <a:ext cx="2560320" cy="960120"/>
           </a:xfrm>
           <a:prstGeom prst="rect">
             <a:avLst/>
@@ -39877,8 +39877,8 @@
         </p:nvSpPr>
         <p:spPr>
           <a:xfrm>
-            <a:off x="3486150" y="3474720"/>
-            <a:ext cx="45720" cy="1737360"/>
+            <a:off x="3474720" y="3337560"/>
+            <a:ext cx="45720" cy="960120"/>
           </a:xfrm>
           <a:prstGeom prst="rect">
             <a:avLst/>
@@ -39897,8 +39897,8 @@
         </p:nvSpPr>
         <p:spPr>
           <a:xfrm>
-            <a:off x="3687318" y="3584448"/>
-            <a:ext cx="2187702" cy="502920"/>
+            <a:off x="3675888" y="3410712"/>
+            <a:ext cx="2240279" cy="384048"/>
           </a:xfrm>
           <a:prstGeom prst="rect">
             <a:avLst/>
@@ -39933,8 +39933,8 @@
         </p:nvSpPr>
         <p:spPr>
           <a:xfrm>
-            <a:off x="3687318" y="4078224"/>
-            <a:ext cx="2187702" cy="1060704"/>
+            <a:off x="3675888" y="3813048"/>
+            <a:ext cx="2240279" cy="438912"/>
           </a:xfrm>
           <a:prstGeom prst="rect">
             <a:avLst/>
@@ -39969,8 +39969,8 @@
         </p:nvSpPr>
         <p:spPr>
           <a:xfrm>
-            <a:off x="6195060" y="3474720"/>
-            <a:ext cx="2507742" cy="1737360"/>
+            <a:off x="777240" y="4407408"/>
+            <a:ext cx="2560320" cy="960120"/>
           </a:xfrm>
           <a:prstGeom prst="rect">
             <a:avLst/>
@@ -39989,8 +39989,8 @@
         </p:nvSpPr>
         <p:spPr>
           <a:xfrm>
-            <a:off x="6195060" y="3474720"/>
-            <a:ext cx="45720" cy="1737360"/>
+            <a:off x="777240" y="4407408"/>
+            <a:ext cx="45720" cy="960120"/>
           </a:xfrm>
           <a:prstGeom prst="rect">
             <a:avLst/>
@@ -40009,8 +40009,8 @@
         </p:nvSpPr>
         <p:spPr>
           <a:xfrm>
-            <a:off x="6396228" y="3584448"/>
-            <a:ext cx="2187702" cy="502920"/>
+            <a:off x="978408" y="4480560"/>
+            <a:ext cx="2240279" cy="384048"/>
           </a:xfrm>
           <a:prstGeom prst="rect">
             <a:avLst/>
@@ -40045,8 +40045,8 @@
         </p:nvSpPr>
         <p:spPr>
           <a:xfrm>
-            <a:off x="6396228" y="4078224"/>
-            <a:ext cx="2187702" cy="1060704"/>
+            <a:off x="978408" y="4882896"/>
+            <a:ext cx="2240279" cy="438912"/>
           </a:xfrm>
           <a:prstGeom prst="rect">
             <a:avLst/>
@@ -40081,8 +40081,8 @@
         </p:nvSpPr>
         <p:spPr>
           <a:xfrm>
-            <a:off x="8903970" y="3474720"/>
-            <a:ext cx="2507742" cy="1737360"/>
+            <a:off x="3474720" y="4407408"/>
+            <a:ext cx="2560320" cy="960120"/>
           </a:xfrm>
           <a:prstGeom prst="rect">
             <a:avLst/>
@@ -40101,8 +40101,8 @@
         </p:nvSpPr>
         <p:spPr>
           <a:xfrm>
-            <a:off x="8903970" y="3474720"/>
-            <a:ext cx="45720" cy="1737360"/>
+            <a:off x="3474720" y="4407408"/>
+            <a:ext cx="45720" cy="960120"/>
           </a:xfrm>
           <a:prstGeom prst="rect">
             <a:avLst/>
@@ -40121,8 +40121,8 @@
         </p:nvSpPr>
         <p:spPr>
           <a:xfrm>
-            <a:off x="9105138" y="3584448"/>
-            <a:ext cx="2187702" cy="502920"/>
+            <a:off x="3675888" y="4480560"/>
+            <a:ext cx="2240279" cy="384048"/>
           </a:xfrm>
           <a:prstGeom prst="rect">
             <a:avLst/>
@@ -40157,8 +40157,8 @@
         </p:nvSpPr>
         <p:spPr>
           <a:xfrm>
-            <a:off x="9105138" y="4078224"/>
-            <a:ext cx="2187702" cy="1060704"/>
+            <a:off x="3675888" y="4882896"/>
+            <a:ext cx="2240279" cy="438912"/>
           </a:xfrm>
           <a:prstGeom prst="rect">
             <a:avLst/>
@@ -40185,6 +40185,35 @@
           </a:p>
         </p:txBody>
       </p:sp>
+      <p:pic>
+        <p:nvPicPr>
+          <p:cNvPr id="90" name="Admin Net members" descr="Admin → Net on node c after node a stopped: a left, b and c alive; the console's servers: the configured one set aside, a discovered one in use"/>
+          <p:cNvPicPr>
+            <a:picLocks noChangeAspect="1"/>
+          </p:cNvPicPr>
+          <p:nvPr/>
+        </p:nvPicPr>
+        <p:blipFill>
+          <a:blip r:embed="rId90"/>
+          <a:stretch>
+            <a:fillRect/>
+          </a:stretch>
+        </p:blipFill>
+        <p:spPr>
+          <a:xfrm>
+            <a:off x="6549322" y="3337560"/>
+            <a:ext cx="4862389" cy="2029968"/>
+          </a:xfrm>
+          <a:prstGeom prst="rect">
+            <a:avLst/>
+          </a:prstGeom>
+          <a:ln w="9525">
+            <a:solidFill>
+              <a:srgbClr val="D9D9D9"/>
+            </a:solidFill>
+          </a:ln>
+        </p:spPr>
+      </p:pic>
       <p:sp>
         <p:nvSpPr>
           <p:cNvPr id="41" name="Shape 38"/>

--- a/docs/publications/Drishti-Design-and-Evidence.pptx
+++ b/docs/publications/Drishti-Design-and-Evidence.pptx
@@ -1183,7 +1183,7 @@
           <a:p>
             <a:r>
               <a:rPr lang="en-US" dirty="0"/>
-              <a:t>Source: README.md (name, 'sight', the tagline 'Any data. Any domain. One grammar.'); CHANGELOG.md 2.5.0 (unreleased) and RELEASE_NOTES.md 2.4.0; pom.xml (Java 21 bytecode).
+              <a:t>Source: README.md (name, 'sight', the tagline 'Any data. Any domain. One grammar.'); CHANGELOG.md 2.5.0 and Unreleased (2.6.0); RELEASE_NOTES.md 2.5.0; pom.xml (Java 21 bytecode).
 Talk track: Drishti is Sanskrit for sight. The promise is in the tagline: any record from any system, in any domain, shown through one grammar instead of a screen written per product. The deck runs idea, product, security, evidence and roadmap; every number in it is measured or counted from the repository.</a:t>
             </a:r>
             <a:endParaRPr lang="en-US" dirty="0"/>
@@ -1272,7 +1272,7 @@
           <a:p>
             <a:r>
               <a:rPr lang="en-US" dirty="0"/>
-              <a:t>Source: README.md 'How it is built'; pom.xml modules (drishti-net, drishti-deltalake); ARCHITECTURE.md §2, §13 and §13a; NET.md.
+              <a:t>Source: README.md 'How it is built'; pom.xml modules (drishti-net, drishti-deltalake); ARCHITECTURE.md §2, §13 and §13a; NET.md; CASSANDRA_CONNECTOR.md (the Cassandra plugin, 2.6.0).
 Talk track: Modules depend one way only, and an architecture test enforces it. The plugin interface is Spring-free so connectors stay small. With Drishti*net on, several such servers act as one: each keeps its own sources, and any of them answers.</a:t>
             </a:r>
             <a:endParaRPr lang="en-US" dirty="0"/>
@@ -1806,7 +1806,7 @@
           <a:p>
             <a:r>
               <a:rPr lang="en-US" dirty="0"/>
-              <a:t>Source: README.md; config/packs (7 packs, 197 Sutra files); PANELS.md (22 kinds); pom.xml plugins (17); CHANGELOG 2.3.0 to 2.5.0.
+              <a:t>Source: README.md; config/packs (7 packs, 197 Sutra files); PANELS.md (22 kinds); plugins/ (18, with Cassandra in 2.6.0); CHANGELOG 2.3.0 to 2.5.0.
 Talk track: The numbers are counted from the repository on 19 October 2026.</a:t>
             </a:r>
             <a:endParaRPr lang="en-US" dirty="0"/>
@@ -2162,7 +2162,7 @@
           <a:p>
             <a:r>
               <a:rPr lang="en-US" dirty="0"/>
-              <a:t>Source: README.md; ARCHITECTURE.md §1; CHANGELOG.md 2.4.0 and 2.5.0; docs/admin/PERFORMANCE.md (35.7 million trades, 50 users, 179 requests/s); BI_DESIGN.md §12.2 (release order); counts from git ls-files on 19 October 2026.
+              <a:t>Source: README.md; ARCHITECTURE.md §1; CHANGELOG.md 2.4.0 and 2.5.0; docs/admin/PERFORMANCE.md (35.7 million trades, 50 users, 179 requests/s); BI_DESIGN.md §12.2 (release order); counts from git ls-files on 20 October 2026 (plugins/: 18 source plugins with Cassandra).
 Talk track: If you remember one slide, make it this one. Five questions and five short answers; the rest of the deck earns each answer.</a:t>
             </a:r>
             <a:endParaRPr lang="en-US" dirty="0"/>
@@ -3052,7 +3052,7 @@
           <a:p>
             <a:r>
               <a:rPr lang="en-US" dirty="0"/>
-              <a:t>Source: USER_MANAGEMENT.md §5–6; OPERATIONS.md §8.4 (CSRF, cookies); ADR-014.
+              <a:t>Source: USER_MANAGEMENT.md §5–6; OPERATIONS.md §8.4 (CSRF, cookies); ADR-014; NET.md section 7 and NetLastAdminTest (the last-administrator rule repaired across nodes, audited last-admin-kept).
 Talk track: The console holds no credential of its own; the server decides, and re-checks every ten seconds.</a:t>
             </a:r>
             <a:endParaRPr lang="en-US" dirty="0"/>
@@ -4031,7 +4031,7 @@
           <a:p>
             <a:r>
               <a:rPr lang="en-US" dirty="0"/>
-              <a:t>Source: git ls-files | wc -l by language, 19 October 2026 (vendored and built assets left out); docs/ (155 Markdown documents outside qa/).
+              <a:t>Source: git ls-files | wc -l by language, 20 October 2026 (vendored and built assets left out); docs/ (162 Markdown documents outside qa/).
 Talk track: Packs are mostly sample data and Sutras. The Java is split into small modules that depend one way.</a:t>
             </a:r>
             <a:endParaRPr lang="en-US" dirty="0"/>
@@ -4209,7 +4209,7 @@
           <a:p>
             <a:r>
               <a:rPr lang="en-US" dirty="0"/>
-              <a:t>Source: docs/architecture/BI_DESIGN.md §12.2 (the release order agreed on 2026-10-19); IMPLEMENTATION_PLAN.md 'Roadmap'.
+              <a:t>Source: docs/architecture/BI_DESIGN.md §12.2 (the release order agreed on 2026-10-19 and changed on 2026-10-20); IMPLEMENTATION_PLAN.md 'Roadmap'.
 Talk track: What is left, in order.</a:t>
             </a:r>
             <a:endParaRPr lang="en-US" dirty="0"/>
@@ -4298,7 +4298,7 @@
           <a:p>
             <a:r>
               <a:rPr lang="en-US" dirty="0"/>
-              <a:t>Source: docs/architecture/BI_DESIGN.md §12.2 (waves N, D, I, E; after E, 3.0); IMPLEMENTATION_PLAN.md 'Roadmap'; GENUI.md; AI_MANAGEMENT.md; QUANT_SERVICE.md.
+              <a:t>Source: docs/architecture/BI_DESIGN.md §12.2 (waves D, W, I, E; after E, 3.0; send and push and integration after 3.0.0, product owner 2026-10-20); WRITE_BACK.md; IMPLEMENTATION_PLAN.md 'Roadmap'; GENUI.md; AI_MANAGEMENT.md; QUANT_SERVICE.md.
 Talk track: 2.5.0 is built and in its release testing. Then sharing and integration, then AI, then the product owner's real-life QA, whose findings lead 2.8.0, then 3.0.</a:t>
             </a:r>
             <a:endParaRPr lang="en-US" dirty="0"/>
@@ -4833,7 +4833,7 @@
             <a:r>
               <a:rPr lang="en-US" dirty="0"/>
               <a:t>Source: CHANGELOG.md 2.5.0 (N1 to N7: three servers in one JVM converge 52 ms after the third starts; five nodes, fake clock: dead everywhere within 40 s; a pack in the others' tables 1.0 s later; 13,542 signed calls through the rotation); docs/admin/NET.md; DRISHTI_NET.md §19.
-Talk track: Off by default. Switched on, servers gossip over HTTP with calls signed by a rotating cluster key. A request goes whole to a node that renders the kind, or the document is fetched from the node that holds it; a search is scattered and merged; the console fails over with no new sign-in.</a:t>
+Talk track: Off by default. Switched on, servers gossip over HTTP with calls signed by a rotating cluster key. A request goes whole to a node that renders the kind, or the document is fetched from the node that holds it; a search is scattered and merged; the console fails over with no new sign-in. Since 2.6.0 a member advertises only a real address (localhost, 127.x, ::1, 0.0.0.0 and :: are refused in node.yaml, peers and gossip), and a peer's change that would leave no enabled administrator is repaired where it is applied, audited last-admin-kept (NET.md sections 2 and 7; NetLastAdminTest).</a:t>
             </a:r>
             <a:endParaRPr lang="en-US" dirty="0"/>
           </a:p>
@@ -6160,6 +6160,10 @@
           </a:solidFill>
           <a:ln/>
         </p:spPr>
+        <p:txBody>
+          <a:bodyPr/>
+          <a:p/>
+        </p:txBody>
       </p:sp>
       <p:sp>
         <p:nvSpPr>
@@ -6180,6 +6184,10 @@
           </a:solidFill>
           <a:ln/>
         </p:spPr>
+        <p:txBody>
+          <a:bodyPr/>
+          <a:p/>
+        </p:txBody>
       </p:sp>
       <p:sp>
         <p:nvSpPr>
@@ -6200,6 +6208,10 @@
           </a:solidFill>
           <a:ln/>
         </p:spPr>
+        <p:txBody>
+          <a:bodyPr/>
+          <a:p/>
+        </p:txBody>
       </p:sp>
       <p:sp>
         <p:nvSpPr>
@@ -6225,6 +6237,10 @@
             <a:prstDash val="solid"/>
           </a:ln>
         </p:spPr>
+        <p:txBody>
+          <a:bodyPr/>
+          <a:p/>
+        </p:txBody>
       </p:sp>
       <p:sp>
         <p:nvSpPr>
@@ -6250,6 +6266,10 @@
             <a:prstDash val="solid"/>
           </a:ln>
         </p:spPr>
+        <p:txBody>
+          <a:bodyPr/>
+          <a:p/>
+        </p:txBody>
       </p:sp>
       <p:sp>
         <p:nvSpPr>
@@ -6275,6 +6295,10 @@
             <a:prstDash val="solid"/>
           </a:ln>
         </p:spPr>
+        <p:txBody>
+          <a:bodyPr/>
+          <a:p/>
+        </p:txBody>
       </p:sp>
       <p:sp>
         <p:nvSpPr>
@@ -6381,6 +6405,10 @@
           </a:solidFill>
           <a:ln/>
         </p:spPr>
+        <p:txBody>
+          <a:bodyPr/>
+          <a:p/>
+        </p:txBody>
       </p:sp>
       <p:sp>
         <p:nvSpPr>
@@ -6476,7 +6504,7 @@
                   <a:srgbClr val="61666E"/>
                 </a:solidFill>
               </a:rPr>
-              <a:t>Release 2.5.0 · Java 21 or later · console on any device</a:t>
+              <a:t>Release 2.5.0, 2.6.0 under way · Java 21 or later · console on any device</a:t>
             </a:r>
             <a:endParaRPr lang="en-US" sz="2000" dirty="0"/>
           </a:p>
@@ -6823,6 +6851,10 @@
           </a:solidFill>
           <a:ln/>
         </p:spPr>
+        <p:txBody>
+          <a:bodyPr/>
+          <a:p/>
+        </p:txBody>
       </p:sp>
       <p:sp>
         <p:nvSpPr>
@@ -6855,6 +6887,10 @@
             </a:outerShdw>
           </a:effectLst>
         </p:spPr>
+        <p:txBody>
+          <a:bodyPr/>
+          <a:p/>
+        </p:txBody>
       </p:sp>
       <p:sp>
         <p:nvSpPr>
@@ -6922,7 +6958,7 @@
                   <a:srgbClr val="4A5058"/>
                 </a:solidFill>
               </a:rPr>
-              <a:t>Delta Lake, JDBC, Aerospike, MongoDB, Redis, Iceberg, DuckDB</a:t>
+              <a:t>Delta, JDBC, Aerospike, Cassandra, MongoDB, Redis, Iceberg, DuckDB</a:t>
             </a:r>
             <a:endParaRPr lang="en-US" sz="1100" dirty="0"/>
           </a:p>
@@ -6959,6 +6995,10 @@
             </a:outerShdw>
           </a:effectLst>
         </p:spPr>
+        <p:txBody>
+          <a:bodyPr/>
+          <a:p/>
+        </p:txBody>
       </p:sp>
       <p:sp>
         <p:nvSpPr>
@@ -7063,6 +7103,10 @@
             </a:outerShdw>
           </a:effectLst>
         </p:spPr>
+        <p:txBody>
+          <a:bodyPr/>
+          <a:p/>
+        </p:txBody>
       </p:sp>
       <p:sp>
         <p:nvSpPr>
@@ -7167,6 +7211,10 @@
             </a:outerShdw>
           </a:effectLst>
         </p:spPr>
+        <p:txBody>
+          <a:bodyPr/>
+          <a:p/>
+        </p:txBody>
       </p:sp>
       <p:sp>
         <p:nvSpPr>
@@ -7271,6 +7319,10 @@
             </a:outerShdw>
           </a:effectLst>
         </p:spPr>
+        <p:txBody>
+          <a:bodyPr/>
+          <a:p/>
+        </p:txBody>
       </p:sp>
       <p:sp>
         <p:nvSpPr>
@@ -7374,7 +7426,7 @@
                   <a:srgbClr val="4A5058"/>
                 </a:solidFill>
               </a:rPr>
-              <a:t>Virtual threads fetch in parallel; the engine matches a Sutra, merges inference, links ids and binds values; BI models answer on DuckDB — 17 source plugins</a:t>
+              <a:t>Virtual threads fetch in parallel; the engine matches a Sutra, merges inference, links ids and binds values; BI models answer on DuckDB — 18 source plugins</a:t>
             </a:r>
             <a:endParaRPr lang="en-US" sz="1200" dirty="0"/>
           </a:p>
@@ -12773,7 +12825,7 @@
                   <a:srgbClr val="A51C30"/>
                 </a:solidFill>
               </a:rPr>
-              <a:t>RELEASE 2.5 · JAVA 21 OR LATER</a:t>
+              <a:t>RELEASE 2.5, 2.6 UNDER WAY · JAVA 21 OR LATER</a:t>
             </a:r>
             <a:endParaRPr lang="en-US" sz="1050" dirty="0"/>
           </a:p>
@@ -12836,6 +12888,10 @@
           </a:solidFill>
           <a:ln/>
         </p:spPr>
+        <p:txBody>
+          <a:bodyPr/>
+          <a:p/>
+        </p:txBody>
       </p:sp>
       <p:sp>
         <p:nvSpPr>
@@ -12856,6 +12912,10 @@
           </a:solidFill>
           <a:ln/>
         </p:spPr>
+        <p:txBody>
+          <a:bodyPr/>
+          <a:p/>
+        </p:txBody>
       </p:sp>
       <p:sp>
         <p:nvSpPr>
@@ -12876,6 +12936,10 @@
           </a:solidFill>
           <a:ln/>
         </p:spPr>
+        <p:txBody>
+          <a:bodyPr/>
+          <a:p/>
+        </p:txBody>
       </p:sp>
       <p:sp>
         <p:nvSpPr>
@@ -12968,6 +13032,10 @@
           </a:solidFill>
           <a:ln/>
         </p:spPr>
+        <p:txBody>
+          <a:bodyPr/>
+          <a:p/>
+        </p:txBody>
       </p:sp>
       <p:sp>
         <p:nvSpPr>
@@ -12988,6 +13056,10 @@
           </a:solidFill>
           <a:ln/>
         </p:spPr>
+        <p:txBody>
+          <a:bodyPr/>
+          <a:p/>
+        </p:txBody>
       </p:sp>
       <p:sp>
         <p:nvSpPr>
@@ -13080,6 +13152,10 @@
           </a:solidFill>
           <a:ln/>
         </p:spPr>
+        <p:txBody>
+          <a:bodyPr/>
+          <a:p/>
+        </p:txBody>
       </p:sp>
       <p:sp>
         <p:nvSpPr>
@@ -13100,6 +13176,10 @@
           </a:solidFill>
           <a:ln/>
         </p:spPr>
+        <p:txBody>
+          <a:bodyPr/>
+          <a:p/>
+        </p:txBody>
       </p:sp>
       <p:sp>
         <p:nvSpPr>
@@ -13192,6 +13272,10 @@
           </a:solidFill>
           <a:ln/>
         </p:spPr>
+        <p:txBody>
+          <a:bodyPr/>
+          <a:p/>
+        </p:txBody>
       </p:sp>
       <p:sp>
         <p:nvSpPr>
@@ -13212,6 +13296,10 @@
           </a:solidFill>
           <a:ln/>
         </p:spPr>
+        <p:txBody>
+          <a:bodyPr/>
+          <a:p/>
+        </p:txBody>
       </p:sp>
       <p:sp>
         <p:nvSpPr>
@@ -13243,7 +13331,7 @@
                   <a:srgbClr val="8A1626"/>
                 </a:solidFill>
               </a:rPr>
-              <a:t>17</a:t>
+              <a:t>18</a:t>
             </a:r>
             <a:endParaRPr lang="en-US" sz="2600" dirty="0"/>
           </a:p>
@@ -13363,7 +13451,7 @@
                   <a:srgbClr val="4A5058"/>
                 </a:solidFill>
               </a:rPr>
-              <a:t>The Build workbench for screens; BI Studio for reports, models, boards and themes; Python data prep step by step.</a:t>
+              <a:t>The Build workbench for screens; BI Studio for reports, statements, models, boards and themes; Python data prep step by step.</a:t>
             </a:r>
             <a:endParaRPr lang="en-US" sz="1500" dirty="0"/>
           </a:p>
@@ -15259,7 +15347,7 @@
                   <a:srgbClr val="1A1A1A"/>
                 </a:solidFill>
               </a:rPr>
-              <a:t>Release 2.5: 7 packs, 197 Sutras, 22 panel kinds, 17 source plugins, BI Studio, Python data prep, several servers as one (Drishti*net); 35.7 million trades served to 50 users at 179 requests/s.</a:t>
+              <a:t>Release 2.5 and 2.6 so far: 7 packs, 197 Sutras, 22 panel kinds, 18 source plugins, BI Studio with statements, Python data prep, several servers as one (Drishti*net); 35.7 million trades served to 50 users at 179 requests/s.</a:t>
             </a:r>
             <a:endParaRPr lang="en-US" sz="1300" dirty="0"/>
           </a:p>
@@ -15391,7 +15479,7 @@
                   <a:srgbClr val="1A1A1A"/>
                 </a:solidFill>
               </a:rPr>
-              <a:t>2.6.0 sharing and integration; 2.7.0 AI (GenUI, AI management); a real-life QA; 2.8.0 production readiness; then 3.0.</a:t>
+              <a:t>2.6.0 statements, field parameters, Cassandra, Iceberg without Hadoop; 2.7.0 write-back; 2.8.0 AI and GenUI; a real-life QA; 2.9.0 production readiness; then 3.0.</a:t>
             </a:r>
             <a:endParaRPr lang="en-US" sz="1300" dirty="0"/>
           </a:p>
@@ -25058,6 +25146,10 @@
           </a:solidFill>
           <a:ln/>
         </p:spPr>
+        <p:txBody>
+          <a:bodyPr/>
+          <a:p/>
+        </p:txBody>
       </p:sp>
       <p:sp>
         <p:nvSpPr>
@@ -25078,6 +25170,10 @@
           </a:solidFill>
           <a:ln/>
         </p:spPr>
+        <p:txBody>
+          <a:bodyPr/>
+          <a:p/>
+        </p:txBody>
       </p:sp>
       <p:sp>
         <p:nvSpPr>
@@ -25098,6 +25194,10 @@
           </a:solidFill>
           <a:ln/>
         </p:spPr>
+        <p:txBody>
+          <a:bodyPr/>
+          <a:p/>
+        </p:txBody>
       </p:sp>
       <p:sp>
         <p:nvSpPr>
@@ -25435,7 +25535,7 @@
                   <a:srgbClr val="4A5058"/>
                 </a:solidFill>
               </a:rPr>
-              <a:t>You cannot remove the last administrator.</a:t>
+              <a:t>You cannot remove the last administrator, on any node of a cluster.</a:t>
             </a:r>
             <a:endParaRPr lang="en-US" sz="1500" dirty="0"/>
           </a:p>
@@ -38997,6 +39097,10 @@
           </a:solidFill>
           <a:ln/>
         </p:spPr>
+        <p:txBody>
+          <a:bodyPr/>
+          <a:p/>
+        </p:txBody>
       </p:sp>
       <p:graphicFrame>
         <p:nvGraphicFramePr>
@@ -39044,7 +39148,7 @@
                   <a:srgbClr val="A51C30"/>
                 </a:solidFill>
               </a:rPr>
-              <a:t>▪  155 guides and references</a:t>
+              <a:t>▪  162 guides and references</a:t>
             </a:r>
             <a:endParaRPr lang="en-US" sz="1500" dirty="0"/>
           </a:p>
@@ -39061,7 +39165,7 @@
                   <a:srgbClr val="4A5058"/>
                 </a:solidFill>
               </a:rPr>
-              <a:t>User, admin, CLI, BI, packs, connectors, architecture, 19 tutorials and 21 ADRs.</a:t>
+              <a:t>User, admin, CLI, BI, packs, connectors, architecture, 20 tutorials and 21 ADRs.</a:t>
             </a:r>
             <a:endParaRPr lang="en-US" sz="1500" dirty="0"/>
           </a:p>
@@ -39123,7 +39227,7 @@
                   <a:srgbClr val="4A5058"/>
                 </a:solidFill>
               </a:rPr>
-              <a:t>Plus 17 source plugins, a server, integration tests and benchmarks.</a:t>
+              <a:t>Plus 18 source plugins, a server, integration tests and benchmarks.</a:t>
             </a:r>
             <a:endParaRPr lang="en-US" sz="1500" dirty="0"/>
           </a:p>
@@ -39396,7 +39500,7 @@
                   <a:srgbClr val="F6E6E9"/>
                 </a:solidFill>
               </a:rPr>
-              <a:t>Sharing and integration, then AI, then a real-life QA and production readiness, then 3.0.</a:t>
+              <a:t>Statements and connectors, then write-back, then AI, then a real-life QA and production readiness, then 3.0.</a:t>
             </a:r>
             <a:endParaRPr lang="en-US" sz="1900" dirty="0"/>
           </a:p>
@@ -39795,7 +39899,7 @@
                             <a:srgbClr val="8A1626"/>
                           </a:solidFill>
                         </a:rPr>
-                        <a:t>2.5.0 Drishti*net</a:t>
+                        <a:t>2.6.0 Statements</a:t>
                       </a:r>
                       <a:endParaRPr lang="en-US" sz="1350" dirty="0"/>
                     </a:p>
@@ -39856,7 +39960,7 @@
                             <a:srgbClr val="1A1A1A"/>
                           </a:solidFill>
                         </a:rPr>
-                        <a:t>Several servers as one: gossip, digests, routing, scatter-gather, failover; built, in release testing</a:t>
+                        <a:t>The known-bug pass; paginated reports and statements; field parameters in wells; the Cassandra connector; Iceberg without Hadoop</a:t>
                       </a:r>
                       <a:endParaRPr lang="en-US" sz="1350" dirty="0"/>
                     </a:p>
@@ -39900,191 +40004,6 @@
                     </a:lnB>
                     <a:solidFill>
                       <a:srgbClr val="F7F5F2"/>
-                    </a:solidFill>
-                  </a:tcPr>
-                </a:tc>
-                <a:tc>
-                  <a:txBody>
-                    <a:bodyPr/>
-                    <a:lstStyle/>
-                    <a:p>
-                      <a:pPr indent="0" marL="0">
-                        <a:buNone/>
-                      </a:pPr>
-                      <a:r>
-                        <a:rPr lang="en-US" sz="1350" dirty="0">
-                          <a:solidFill>
-                            <a:srgbClr val="1A1A1A"/>
-                          </a:solidFill>
-                        </a:rPr>
-                        <a:t>The browser rehearsal and the drill pass</a:t>
-                      </a:r>
-                      <a:endParaRPr lang="en-US" sz="1350" dirty="0"/>
-                    </a:p>
-                  </a:txBody>
-                  <a:tcPr marL="88900" marR="88900" marT="50800" marB="50800" anchor="ctr">
-                    <a:lnL w="6350" cap="flat" cmpd="sng" algn="ctr">
-                      <a:solidFill>
-                        <a:srgbClr val="E3DED7"/>
-                      </a:solidFill>
-                      <a:prstDash val="solid"/>
-                      <a:round/>
-                      <a:headEnd type="none" w="med" len="med"/>
-                      <a:tailEnd type="none" w="med" len="med"/>
-                    </a:lnL>
-                    <a:lnR w="6350" cap="flat" cmpd="sng" algn="ctr">
-                      <a:solidFill>
-                        <a:srgbClr val="E3DED7"/>
-                      </a:solidFill>
-                      <a:prstDash val="solid"/>
-                      <a:round/>
-                      <a:headEnd type="none" w="med" len="med"/>
-                      <a:tailEnd type="none" w="med" len="med"/>
-                    </a:lnR>
-                    <a:lnT w="6350" cap="flat" cmpd="sng" algn="ctr">
-                      <a:solidFill>
-                        <a:srgbClr val="E3DED7"/>
-                      </a:solidFill>
-                      <a:prstDash val="solid"/>
-                      <a:round/>
-                      <a:headEnd type="none" w="med" len="med"/>
-                      <a:tailEnd type="none" w="med" len="med"/>
-                    </a:lnT>
-                    <a:lnB w="6350" cap="flat" cmpd="sng" algn="ctr">
-                      <a:solidFill>
-                        <a:srgbClr val="E3DED7"/>
-                      </a:solidFill>
-                      <a:prstDash val="solid"/>
-                      <a:round/>
-                      <a:headEnd type="none" w="med" len="med"/>
-                      <a:tailEnd type="none" w="med" len="med"/>
-                    </a:lnB>
-                    <a:solidFill>
-                      <a:srgbClr val="F7F5F2"/>
-                    </a:solidFill>
-                  </a:tcPr>
-                </a:tc>
-              </a:tr>
-              <a:tr h="585216">
-                <a:tc>
-                  <a:txBody>
-                    <a:bodyPr/>
-                    <a:lstStyle/>
-                    <a:p>
-                      <a:pPr indent="0" marL="0">
-                        <a:buNone/>
-                      </a:pPr>
-                      <a:r>
-                        <a:rPr lang="en-US" sz="1350" b="1" dirty="0">
-                          <a:solidFill>
-                            <a:srgbClr val="8A1626"/>
-                          </a:solidFill>
-                        </a:rPr>
-                        <a:t>2.6.0 Sharing</a:t>
-                      </a:r>
-                      <a:endParaRPr lang="en-US" sz="1350" dirty="0"/>
-                    </a:p>
-                  </a:txBody>
-                  <a:tcPr marL="88900" marR="88900" marT="50800" marB="50800" anchor="ctr">
-                    <a:lnL w="6350" cap="flat" cmpd="sng" algn="ctr">
-                      <a:solidFill>
-                        <a:srgbClr val="E3DED7"/>
-                      </a:solidFill>
-                      <a:prstDash val="solid"/>
-                      <a:round/>
-                      <a:headEnd type="none" w="med" len="med"/>
-                      <a:tailEnd type="none" w="med" len="med"/>
-                    </a:lnL>
-                    <a:lnR w="6350" cap="flat" cmpd="sng" algn="ctr">
-                      <a:solidFill>
-                        <a:srgbClr val="E3DED7"/>
-                      </a:solidFill>
-                      <a:prstDash val="solid"/>
-                      <a:round/>
-                      <a:headEnd type="none" w="med" len="med"/>
-                      <a:tailEnd type="none" w="med" len="med"/>
-                    </a:lnR>
-                    <a:lnT w="6350" cap="flat" cmpd="sng" algn="ctr">
-                      <a:solidFill>
-                        <a:srgbClr val="E3DED7"/>
-                      </a:solidFill>
-                      <a:prstDash val="solid"/>
-                      <a:round/>
-                      <a:headEnd type="none" w="med" len="med"/>
-                      <a:tailEnd type="none" w="med" len="med"/>
-                    </a:lnT>
-                    <a:lnB w="6350" cap="flat" cmpd="sng" algn="ctr">
-                      <a:solidFill>
-                        <a:srgbClr val="E3DED7"/>
-                      </a:solidFill>
-                      <a:prstDash val="solid"/>
-                      <a:round/>
-                      <a:headEnd type="none" w="med" len="med"/>
-                      <a:tailEnd type="none" w="med" len="med"/>
-                    </a:lnB>
-                    <a:solidFill>
-                      <a:srgbClr val="FFFFFF"/>
-                    </a:solidFill>
-                  </a:tcPr>
-                </a:tc>
-                <a:tc>
-                  <a:txBody>
-                    <a:bodyPr/>
-                    <a:lstStyle/>
-                    <a:p>
-                      <a:pPr indent="0" marL="0">
-                        <a:buNone/>
-                      </a:pPr>
-                      <a:r>
-                        <a:rPr lang="en-US" sz="1350" dirty="0">
-                          <a:solidFill>
-                            <a:srgbClr val="1A1A1A"/>
-                          </a:solidFill>
-                        </a:rPr>
-                        <a:t>Paginated reports, send and push, SQL and Excel feeds, embed tokens, the Sajha MCP connector, field parameters</a:t>
-                      </a:r>
-                      <a:endParaRPr lang="en-US" sz="1350" dirty="0"/>
-                    </a:p>
-                  </a:txBody>
-                  <a:tcPr marL="88900" marR="88900" marT="50800" marB="50800" anchor="ctr">
-                    <a:lnL w="6350" cap="flat" cmpd="sng" algn="ctr">
-                      <a:solidFill>
-                        <a:srgbClr val="E3DED7"/>
-                      </a:solidFill>
-                      <a:prstDash val="solid"/>
-                      <a:round/>
-                      <a:headEnd type="none" w="med" len="med"/>
-                      <a:tailEnd type="none" w="med" len="med"/>
-                    </a:lnL>
-                    <a:lnR w="6350" cap="flat" cmpd="sng" algn="ctr">
-                      <a:solidFill>
-                        <a:srgbClr val="E3DED7"/>
-                      </a:solidFill>
-                      <a:prstDash val="solid"/>
-                      <a:round/>
-                      <a:headEnd type="none" w="med" len="med"/>
-                      <a:tailEnd type="none" w="med" len="med"/>
-                    </a:lnR>
-                    <a:lnT w="6350" cap="flat" cmpd="sng" algn="ctr">
-                      <a:solidFill>
-                        <a:srgbClr val="E3DED7"/>
-                      </a:solidFill>
-                      <a:prstDash val="solid"/>
-                      <a:round/>
-                      <a:headEnd type="none" w="med" len="med"/>
-                      <a:tailEnd type="none" w="med" len="med"/>
-                    </a:lnT>
-                    <a:lnB w="6350" cap="flat" cmpd="sng" algn="ctr">
-                      <a:solidFill>
-                        <a:srgbClr val="E3DED7"/>
-                      </a:solidFill>
-                      <a:prstDash val="solid"/>
-                      <a:round/>
-                      <a:headEnd type="none" w="med" len="med"/>
-                      <a:tailEnd type="none" w="med" len="med"/>
-                    </a:lnB>
-                    <a:solidFill>
-                      <a:srgbClr val="FFFFFF"/>
                     </a:solidFill>
                   </a:tcPr>
                 </a:tc>
@@ -40145,6 +40064,191 @@
                       <a:tailEnd type="none" w="med" len="med"/>
                     </a:lnB>
                     <a:solidFill>
+                      <a:srgbClr val="F7F5F2"/>
+                    </a:solidFill>
+                  </a:tcPr>
+                </a:tc>
+              </a:tr>
+              <a:tr h="585216">
+                <a:tc>
+                  <a:txBody>
+                    <a:bodyPr/>
+                    <a:lstStyle/>
+                    <a:p>
+                      <a:pPr indent="0" marL="0">
+                        <a:buNone/>
+                      </a:pPr>
+                      <a:r>
+                        <a:rPr lang="en-US" sz="1350" b="1" dirty="0">
+                          <a:solidFill>
+                            <a:srgbClr val="8A1626"/>
+                          </a:solidFill>
+                        </a:rPr>
+                        <a:t>2.7.0 Write-back</a:t>
+                      </a:r>
+                      <a:endParaRPr lang="en-US" sz="1350" dirty="0"/>
+                    </a:p>
+                  </a:txBody>
+                  <a:tcPr marL="88900" marR="88900" marT="50800" marB="50800" anchor="ctr">
+                    <a:lnL w="6350" cap="flat" cmpd="sng" algn="ctr">
+                      <a:solidFill>
+                        <a:srgbClr val="E3DED7"/>
+                      </a:solidFill>
+                      <a:prstDash val="solid"/>
+                      <a:round/>
+                      <a:headEnd type="none" w="med" len="med"/>
+                      <a:tailEnd type="none" w="med" len="med"/>
+                    </a:lnL>
+                    <a:lnR w="6350" cap="flat" cmpd="sng" algn="ctr">
+                      <a:solidFill>
+                        <a:srgbClr val="E3DED7"/>
+                      </a:solidFill>
+                      <a:prstDash val="solid"/>
+                      <a:round/>
+                      <a:headEnd type="none" w="med" len="med"/>
+                      <a:tailEnd type="none" w="med" len="med"/>
+                    </a:lnR>
+                    <a:lnT w="6350" cap="flat" cmpd="sng" algn="ctr">
+                      <a:solidFill>
+                        <a:srgbClr val="E3DED7"/>
+                      </a:solidFill>
+                      <a:prstDash val="solid"/>
+                      <a:round/>
+                      <a:headEnd type="none" w="med" len="med"/>
+                      <a:tailEnd type="none" w="med" len="med"/>
+                    </a:lnT>
+                    <a:lnB w="6350" cap="flat" cmpd="sng" algn="ctr">
+                      <a:solidFill>
+                        <a:srgbClr val="E3DED7"/>
+                      </a:solidFill>
+                      <a:prstDash val="solid"/>
+                      <a:round/>
+                      <a:headEnd type="none" w="med" len="med"/>
+                      <a:tailEnd type="none" w="med" len="med"/>
+                    </a:lnB>
+                    <a:solidFill>
+                      <a:srgbClr val="FFFFFF"/>
+                    </a:solidFill>
+                  </a:tcPr>
+                </a:tc>
+                <a:tc>
+                  <a:txBody>
+                    <a:bodyPr/>
+                    <a:lstStyle/>
+                    <a:p>
+                      <a:pPr indent="0" marL="0">
+                        <a:buNone/>
+                      </a:pPr>
+                      <a:r>
+                        <a:rPr lang="en-US" sz="1350" dirty="0">
+                          <a:solidFill>
+                            <a:srgbClr val="1A1A1A"/>
+                          </a:solidFill>
+                        </a:rPr>
+                        <a:t>Edit and save fields on a Sutra page: ordered lanes, version checks, four eyes, overlays into the lake</a:t>
+                      </a:r>
+                      <a:endParaRPr lang="en-US" sz="1350" dirty="0"/>
+                    </a:p>
+                  </a:txBody>
+                  <a:tcPr marL="88900" marR="88900" marT="50800" marB="50800" anchor="ctr">
+                    <a:lnL w="6350" cap="flat" cmpd="sng" algn="ctr">
+                      <a:solidFill>
+                        <a:srgbClr val="E3DED7"/>
+                      </a:solidFill>
+                      <a:prstDash val="solid"/>
+                      <a:round/>
+                      <a:headEnd type="none" w="med" len="med"/>
+                      <a:tailEnd type="none" w="med" len="med"/>
+                    </a:lnL>
+                    <a:lnR w="6350" cap="flat" cmpd="sng" algn="ctr">
+                      <a:solidFill>
+                        <a:srgbClr val="E3DED7"/>
+                      </a:solidFill>
+                      <a:prstDash val="solid"/>
+                      <a:round/>
+                      <a:headEnd type="none" w="med" len="med"/>
+                      <a:tailEnd type="none" w="med" len="med"/>
+                    </a:lnR>
+                    <a:lnT w="6350" cap="flat" cmpd="sng" algn="ctr">
+                      <a:solidFill>
+                        <a:srgbClr val="E3DED7"/>
+                      </a:solidFill>
+                      <a:prstDash val="solid"/>
+                      <a:round/>
+                      <a:headEnd type="none" w="med" len="med"/>
+                      <a:tailEnd type="none" w="med" len="med"/>
+                    </a:lnT>
+                    <a:lnB w="6350" cap="flat" cmpd="sng" algn="ctr">
+                      <a:solidFill>
+                        <a:srgbClr val="E3DED7"/>
+                      </a:solidFill>
+                      <a:prstDash val="solid"/>
+                      <a:round/>
+                      <a:headEnd type="none" w="med" len="med"/>
+                      <a:tailEnd type="none" w="med" len="med"/>
+                    </a:lnB>
+                    <a:solidFill>
+                      <a:srgbClr val="FFFFFF"/>
+                    </a:solidFill>
+                  </a:tcPr>
+                </a:tc>
+                <a:tc>
+                  <a:txBody>
+                    <a:bodyPr/>
+                    <a:lstStyle/>
+                    <a:p>
+                      <a:pPr indent="0" marL="0">
+                        <a:buNone/>
+                      </a:pPr>
+                      <a:r>
+                        <a:rPr lang="en-US" sz="1350" dirty="0">
+                          <a:solidFill>
+                            <a:srgbClr val="1A1A1A"/>
+                          </a:solidFill>
+                        </a:rPr>
+                        <a:t>Two users editing one field never overwrite each other silently</a:t>
+                      </a:r>
+                      <a:endParaRPr lang="en-US" sz="1350" dirty="0"/>
+                    </a:p>
+                  </a:txBody>
+                  <a:tcPr marL="88900" marR="88900" marT="50800" marB="50800" anchor="ctr">
+                    <a:lnL w="6350" cap="flat" cmpd="sng" algn="ctr">
+                      <a:solidFill>
+                        <a:srgbClr val="E3DED7"/>
+                      </a:solidFill>
+                      <a:prstDash val="solid"/>
+                      <a:round/>
+                      <a:headEnd type="none" w="med" len="med"/>
+                      <a:tailEnd type="none" w="med" len="med"/>
+                    </a:lnL>
+                    <a:lnR w="6350" cap="flat" cmpd="sng" algn="ctr">
+                      <a:solidFill>
+                        <a:srgbClr val="E3DED7"/>
+                      </a:solidFill>
+                      <a:prstDash val="solid"/>
+                      <a:round/>
+                      <a:headEnd type="none" w="med" len="med"/>
+                      <a:tailEnd type="none" w="med" len="med"/>
+                    </a:lnR>
+                    <a:lnT w="6350" cap="flat" cmpd="sng" algn="ctr">
+                      <a:solidFill>
+                        <a:srgbClr val="E3DED7"/>
+                      </a:solidFill>
+                      <a:prstDash val="solid"/>
+                      <a:round/>
+                      <a:headEnd type="none" w="med" len="med"/>
+                      <a:tailEnd type="none" w="med" len="med"/>
+                    </a:lnT>
+                    <a:lnB w="6350" cap="flat" cmpd="sng" algn="ctr">
+                      <a:solidFill>
+                        <a:srgbClr val="E3DED7"/>
+                      </a:solidFill>
+                      <a:prstDash val="solid"/>
+                      <a:round/>
+                      <a:headEnd type="none" w="med" len="med"/>
+                      <a:tailEnd type="none" w="med" len="med"/>
+                    </a:lnB>
+                    <a:solidFill>
                       <a:srgbClr val="FFFFFF"/>
                     </a:solidFill>
                   </a:tcPr>
@@ -40165,7 +40269,7 @@
                             <a:srgbClr val="8A1626"/>
                           </a:solidFill>
                         </a:rPr>
-                        <a:t>2.7.0 AI</a:t>
+                        <a:t>2.8.0 AI</a:t>
                       </a:r>
                       <a:endParaRPr lang="en-US" sz="1350" dirty="0"/>
                     </a:p>
@@ -40226,7 +40330,7 @@
                             <a:srgbClr val="1A1A1A"/>
                           </a:solidFill>
                         </a:rPr>
-                        <a:t>GenUI (an agent composes a live screen from governed Sutra fragments) and AI management</a:t>
+                        <a:t>GenUI (an agent composes a live screen from governed Sutra fragments), AI management, the Sajha MCP connector</a:t>
                       </a:r>
                       <a:endParaRPr lang="en-US" sz="1350" dirty="0"/>
                     </a:p>
@@ -40535,7 +40639,7 @@
                             <a:srgbClr val="8A1626"/>
                           </a:solidFill>
                         </a:rPr>
-                        <a:t>2.8.0 Readiness</a:t>
+                        <a:t>2.9.0 Readiness</a:t>
                       </a:r>
                       <a:endParaRPr lang="en-US" sz="1350" dirty="0"/>
                     </a:p>
@@ -40905,7 +41009,7 @@
                             <a:srgbClr val="8A1626"/>
                           </a:solidFill>
                         </a:rPr>
-                        <a:t>Later candidates</a:t>
+                        <a:t>After 3.0</a:t>
                       </a:r>
                       <a:endParaRPr lang="en-US" sz="1350" dirty="0"/>
                     </a:p>
@@ -40966,7 +41070,7 @@
                             <a:srgbClr val="1A1A1A"/>
                           </a:solidFill>
                         </a:rPr>
-                        <a:t>Server-side pricing (QuantLib, ADR-019), Windows proven on a real machine</a:t>
+                        <a:t>Send and push (Outlook, Teams, SharePoint); integration (PG-wire, Excel feed, embed tokens, SDK events); pricing (ADR-019)</a:t>
                       </a:r>
                       <a:endParaRPr lang="en-US" sz="1350" dirty="0"/>
                     </a:p>
@@ -41027,7 +41131,7 @@
                             <a:srgbClr val="1A1A1A"/>
                           </a:solidFill>
                         </a:rPr>
-                        <a:t>Prices beside the data, explained</a:t>
+                        <a:t>Designed, not scheduled</a:t>
                       </a:r>
                       <a:endParaRPr lang="en-US" sz="1350" dirty="0"/>
                     </a:p>

--- a/docs/publications/Drishti-Design-and-Evidence.pptx
+++ b/docs/publications/Drishti-Design-and-Evidence.pptx
@@ -6694,6 +6694,10 @@
           </a:solidFill>
           <a:ln/>
         </p:spPr>
+        <p:txBody>
+          <a:bodyPr/>
+          <a:p/>
+        </p:txBody>
       </p:sp>
       <p:sp>
         <p:nvSpPr>
@@ -7426,7 +7430,7 @@
                   <a:srgbClr val="4A5058"/>
                 </a:solidFill>
               </a:rPr>
-              <a:t>Virtual threads fetch in parallel; the engine matches a Sutra, merges inference, links ids and binds values; BI models answer on DuckDB — 18 source plugins</a:t>
+              <a:t>Virtual threads fetch in parallel; the engine matches a Sutra, merges inference, links ids and binds values; BI models answer on DuckDB — 19 source plugins</a:t>
             </a:r>
             <a:endParaRPr lang="en-US" sz="1200" dirty="0"/>
           </a:p>
@@ -7463,6 +7467,10 @@
             </a:outerShdw>
           </a:effectLst>
         </p:spPr>
+        <p:txBody>
+          <a:bodyPr/>
+          <a:p/>
+        </p:txBody>
       </p:sp>
       <p:sp>
         <p:nvSpPr>
@@ -7603,6 +7611,10 @@
             </a:outerShdw>
           </a:effectLst>
         </p:spPr>
+        <p:txBody>
+          <a:bodyPr/>
+          <a:p/>
+        </p:txBody>
       </p:sp>
       <p:sp>
         <p:nvSpPr>
@@ -7707,6 +7719,10 @@
             </a:outerShdw>
           </a:effectLst>
         </p:spPr>
+        <p:txBody>
+          <a:bodyPr/>
+          <a:p/>
+        </p:txBody>
       </p:sp>
       <p:sp>
         <p:nvSpPr>
@@ -7811,6 +7827,10 @@
             </a:outerShdw>
           </a:effectLst>
         </p:spPr>
+        <p:txBody>
+          <a:bodyPr/>
+          <a:p/>
+        </p:txBody>
       </p:sp>
       <p:sp>
         <p:nvSpPr>
@@ -7915,6 +7935,10 @@
             </a:outerShdw>
           </a:effectLst>
         </p:spPr>
+        <p:txBody>
+          <a:bodyPr/>
+          <a:p/>
+        </p:txBody>
       </p:sp>
       <p:sp>
         <p:nvSpPr>
@@ -8011,6 +8035,10 @@
             <a:tailEnd type="triangle"/>
           </a:ln>
         </p:spPr>
+        <p:txBody>
+          <a:bodyPr/>
+          <a:p/>
+        </p:txBody>
       </p:sp>
       <p:sp>
         <p:nvSpPr>
@@ -8035,6 +8063,10 @@
             <a:tailEnd type="triangle"/>
           </a:ln>
         </p:spPr>
+        <p:txBody>
+          <a:bodyPr/>
+          <a:p/>
+        </p:txBody>
       </p:sp>
       <p:sp>
         <p:nvSpPr>
@@ -8059,6 +8091,10 @@
             <a:tailEnd type="triangle"/>
           </a:ln>
         </p:spPr>
+        <p:txBody>
+          <a:bodyPr/>
+          <a:p/>
+        </p:txBody>
       </p:sp>
       <p:sp>
         <p:nvSpPr>
@@ -8225,6 +8261,10 @@
           </a:solidFill>
           <a:ln/>
         </p:spPr>
+        <p:txBody>
+          <a:bodyPr/>
+          <a:p/>
+        </p:txBody>
       </p:sp>
       <p:sp>
         <p:nvSpPr>
@@ -8245,6 +8285,10 @@
           </a:solidFill>
           <a:ln/>
         </p:spPr>
+        <p:txBody>
+          <a:bodyPr/>
+          <a:p/>
+        </p:txBody>
       </p:sp>
       <p:sp>
         <p:nvSpPr>
@@ -8301,6 +8345,10 @@
           </a:solidFill>
           <a:ln/>
         </p:spPr>
+        <p:txBody>
+          <a:bodyPr/>
+          <a:p/>
+        </p:txBody>
       </p:sp>
       <p:sp>
         <p:nvSpPr>
@@ -8393,6 +8441,10 @@
           </a:solidFill>
           <a:ln/>
         </p:spPr>
+        <p:txBody>
+          <a:bodyPr/>
+          <a:p/>
+        </p:txBody>
       </p:sp>
       <p:sp>
         <p:nvSpPr>
@@ -8449,6 +8501,10 @@
           </a:solidFill>
           <a:ln/>
         </p:spPr>
+        <p:txBody>
+          <a:bodyPr/>
+          <a:p/>
+        </p:txBody>
       </p:sp>
       <p:sp>
         <p:nvSpPr>
@@ -8541,6 +8597,10 @@
           </a:solidFill>
           <a:ln/>
         </p:spPr>
+        <p:txBody>
+          <a:bodyPr/>
+          <a:p/>
+        </p:txBody>
       </p:sp>
       <p:sp>
         <p:nvSpPr>
@@ -8597,6 +8657,10 @@
           </a:solidFill>
           <a:ln/>
         </p:spPr>
+        <p:txBody>
+          <a:bodyPr/>
+          <a:p/>
+        </p:txBody>
       </p:sp>
       <p:sp>
         <p:nvSpPr>
@@ -8689,6 +8753,10 @@
           </a:solidFill>
           <a:ln/>
         </p:spPr>
+        <p:txBody>
+          <a:bodyPr/>
+          <a:p/>
+        </p:txBody>
       </p:sp>
       <p:sp>
         <p:nvSpPr>
@@ -8745,6 +8813,10 @@
           </a:solidFill>
           <a:ln/>
         </p:spPr>
+        <p:txBody>
+          <a:bodyPr/>
+          <a:p/>
+        </p:txBody>
       </p:sp>
       <p:sp>
         <p:nvSpPr>
@@ -8837,6 +8909,10 @@
           </a:solidFill>
           <a:ln/>
         </p:spPr>
+        <p:txBody>
+          <a:bodyPr/>
+          <a:p/>
+        </p:txBody>
       </p:sp>
       <p:sp>
         <p:nvSpPr>
@@ -8893,6 +8969,10 @@
           </a:solidFill>
           <a:ln/>
         </p:spPr>
+        <p:txBody>
+          <a:bodyPr/>
+          <a:p/>
+        </p:txBody>
       </p:sp>
       <p:sp>
         <p:nvSpPr>
@@ -8985,6 +9065,10 @@
           </a:solidFill>
           <a:ln/>
         </p:spPr>
+        <p:txBody>
+          <a:bodyPr/>
+          <a:p/>
+        </p:txBody>
       </p:sp>
       <p:sp>
         <p:nvSpPr>
@@ -9041,6 +9125,10 @@
           </a:solidFill>
           <a:ln/>
         </p:spPr>
+        <p:txBody>
+          <a:bodyPr/>
+          <a:p/>
+        </p:txBody>
       </p:sp>
       <p:sp>
         <p:nvSpPr>
@@ -9133,6 +9221,10 @@
           </a:solidFill>
           <a:ln/>
         </p:spPr>
+        <p:txBody>
+          <a:bodyPr/>
+          <a:p/>
+        </p:txBody>
       </p:sp>
       <p:sp>
         <p:nvSpPr>
@@ -9189,6 +9281,10 @@
           </a:solidFill>
           <a:ln/>
         </p:spPr>
+        <p:txBody>
+          <a:bodyPr/>
+          <a:p/>
+        </p:txBody>
       </p:sp>
       <p:sp>
         <p:nvSpPr>
@@ -9281,6 +9377,10 @@
           </a:solidFill>
           <a:ln/>
         </p:spPr>
+        <p:txBody>
+          <a:bodyPr/>
+          <a:p/>
+        </p:txBody>
       </p:sp>
       <p:sp>
         <p:nvSpPr>
@@ -9301,6 +9401,10 @@
           </a:solidFill>
           <a:ln/>
         </p:spPr>
+        <p:txBody>
+          <a:bodyPr/>
+          <a:p/>
+        </p:txBody>
       </p:sp>
       <p:sp>
         <p:nvSpPr>
@@ -9393,6 +9497,10 @@
           </a:solidFill>
           <a:ln/>
         </p:spPr>
+        <p:txBody>
+          <a:bodyPr/>
+          <a:p/>
+        </p:txBody>
       </p:sp>
       <p:sp>
         <p:nvSpPr>
@@ -9413,6 +9521,10 @@
           </a:solidFill>
           <a:ln/>
         </p:spPr>
+        <p:txBody>
+          <a:bodyPr/>
+          <a:p/>
+        </p:txBody>
       </p:sp>
       <p:sp>
         <p:nvSpPr>
@@ -9505,6 +9617,10 @@
           </a:solidFill>
           <a:ln/>
         </p:spPr>
+        <p:txBody>
+          <a:bodyPr/>
+          <a:p/>
+        </p:txBody>
       </p:sp>
       <p:sp>
         <p:nvSpPr>
@@ -9525,6 +9641,10 @@
           </a:solidFill>
           <a:ln/>
         </p:spPr>
+        <p:txBody>
+          <a:bodyPr/>
+          <a:p/>
+        </p:txBody>
       </p:sp>
       <p:sp>
         <p:nvSpPr>
@@ -9617,6 +9737,10 @@
           </a:solidFill>
           <a:ln/>
         </p:spPr>
+        <p:txBody>
+          <a:bodyPr/>
+          <a:p/>
+        </p:txBody>
       </p:sp>
       <p:sp>
         <p:nvSpPr>
@@ -9637,6 +9761,10 @@
           </a:solidFill>
           <a:ln/>
         </p:spPr>
+        <p:txBody>
+          <a:bodyPr/>
+          <a:p/>
+        </p:txBody>
       </p:sp>
       <p:sp>
         <p:nvSpPr>
@@ -9850,6 +9978,10 @@
           </a:solidFill>
           <a:ln/>
         </p:spPr>
+        <p:txBody>
+          <a:bodyPr/>
+          <a:p/>
+        </p:txBody>
       </p:sp>
       <p:sp>
         <p:nvSpPr>
@@ -9870,6 +10002,10 @@
           </a:solidFill>
           <a:ln/>
         </p:spPr>
+        <p:txBody>
+          <a:bodyPr/>
+          <a:p/>
+        </p:txBody>
       </p:sp>
       <p:sp>
         <p:nvSpPr>
@@ -9890,6 +10026,10 @@
           </a:solidFill>
           <a:ln/>
         </p:spPr>
+        <p:txBody>
+          <a:bodyPr/>
+          <a:p/>
+        </p:txBody>
       </p:sp>
       <p:sp>
         <p:nvSpPr>
@@ -10560,6 +10700,10 @@
           </a:solidFill>
           <a:ln/>
         </p:spPr>
+        <p:txBody>
+          <a:bodyPr/>
+          <a:p/>
+        </p:txBody>
       </p:sp>
       <p:sp>
         <p:nvSpPr>
@@ -10592,6 +10736,10 @@
             </a:outerShdw>
           </a:effectLst>
         </p:spPr>
+        <p:txBody>
+          <a:bodyPr/>
+          <a:p/>
+        </p:txBody>
       </p:sp>
       <p:sp>
         <p:nvSpPr>
@@ -10696,6 +10844,10 @@
             </a:outerShdw>
           </a:effectLst>
         </p:spPr>
+        <p:txBody>
+          <a:bodyPr/>
+          <a:p/>
+        </p:txBody>
       </p:sp>
       <p:sp>
         <p:nvSpPr>
@@ -10792,6 +10944,10 @@
             <a:tailEnd type="triangle"/>
           </a:ln>
         </p:spPr>
+        <p:txBody>
+          <a:bodyPr/>
+          <a:p/>
+        </p:txBody>
       </p:sp>
       <p:sp>
         <p:nvSpPr>
@@ -10824,6 +10980,10 @@
             </a:outerShdw>
           </a:effectLst>
         </p:spPr>
+        <p:txBody>
+          <a:bodyPr/>
+          <a:p/>
+        </p:txBody>
       </p:sp>
       <p:sp>
         <p:nvSpPr>
@@ -10920,6 +11080,10 @@
             <a:tailEnd type="triangle"/>
           </a:ln>
         </p:spPr>
+        <p:txBody>
+          <a:bodyPr/>
+          <a:p/>
+        </p:txBody>
       </p:sp>
       <p:sp>
         <p:nvSpPr>
@@ -10952,6 +11116,10 @@
             </a:outerShdw>
           </a:effectLst>
         </p:spPr>
+        <p:txBody>
+          <a:bodyPr/>
+          <a:p/>
+        </p:txBody>
       </p:sp>
       <p:sp>
         <p:nvSpPr>
@@ -11048,6 +11216,10 @@
             <a:tailEnd type="triangle"/>
           </a:ln>
         </p:spPr>
+        <p:txBody>
+          <a:bodyPr/>
+          <a:p/>
+        </p:txBody>
       </p:sp>
       <p:sp>
         <p:nvSpPr>
@@ -11080,6 +11252,10 @@
             </a:outerShdw>
           </a:effectLst>
         </p:spPr>
+        <p:txBody>
+          <a:bodyPr/>
+          <a:p/>
+        </p:txBody>
       </p:sp>
       <p:sp>
         <p:nvSpPr>
@@ -11176,6 +11352,10 @@
             <a:tailEnd type="triangle"/>
           </a:ln>
         </p:spPr>
+        <p:txBody>
+          <a:bodyPr/>
+          <a:p/>
+        </p:txBody>
       </p:sp>
       <p:sp>
         <p:nvSpPr>
@@ -11196,6 +11376,10 @@
           </a:solidFill>
           <a:ln/>
         </p:spPr>
+        <p:txBody>
+          <a:bodyPr/>
+          <a:p/>
+        </p:txBody>
       </p:sp>
       <p:sp>
         <p:nvSpPr>
@@ -11216,6 +11400,10 @@
           </a:solidFill>
           <a:ln/>
         </p:spPr>
+        <p:txBody>
+          <a:bodyPr/>
+          <a:p/>
+        </p:txBody>
       </p:sp>
       <p:sp>
         <p:nvSpPr>
@@ -11308,6 +11496,10 @@
           </a:solidFill>
           <a:ln/>
         </p:spPr>
+        <p:txBody>
+          <a:bodyPr/>
+          <a:p/>
+        </p:txBody>
       </p:sp>
       <p:sp>
         <p:nvSpPr>
@@ -11328,6 +11520,10 @@
           </a:solidFill>
           <a:ln/>
         </p:spPr>
+        <p:txBody>
+          <a:bodyPr/>
+          <a:p/>
+        </p:txBody>
       </p:sp>
       <p:sp>
         <p:nvSpPr>
@@ -11420,6 +11616,10 @@
           </a:solidFill>
           <a:ln/>
         </p:spPr>
+        <p:txBody>
+          <a:bodyPr/>
+          <a:p/>
+        </p:txBody>
       </p:sp>
       <p:sp>
         <p:nvSpPr>
@@ -11440,6 +11640,10 @@
           </a:solidFill>
           <a:ln/>
         </p:spPr>
+        <p:txBody>
+          <a:bodyPr/>
+          <a:p/>
+        </p:txBody>
       </p:sp>
       <p:sp>
         <p:nvSpPr>
@@ -11532,6 +11736,10 @@
           </a:solidFill>
           <a:ln/>
         </p:spPr>
+        <p:txBody>
+          <a:bodyPr/>
+          <a:p/>
+        </p:txBody>
       </p:sp>
       <p:sp>
         <p:nvSpPr>
@@ -11552,6 +11760,10 @@
           </a:solidFill>
           <a:ln/>
         </p:spPr>
+        <p:txBody>
+          <a:bodyPr/>
+          <a:p/>
+        </p:txBody>
       </p:sp>
       <p:sp>
         <p:nvSpPr>
@@ -11644,6 +11856,10 @@
           </a:solidFill>
           <a:ln/>
         </p:spPr>
+        <p:txBody>
+          <a:bodyPr/>
+          <a:p/>
+        </p:txBody>
       </p:sp>
       <p:sp>
         <p:nvSpPr>
@@ -11664,6 +11880,10 @@
           </a:solidFill>
           <a:ln/>
         </p:spPr>
+        <p:txBody>
+          <a:bodyPr/>
+          <a:p/>
+        </p:txBody>
       </p:sp>
       <p:sp>
         <p:nvSpPr>
@@ -11877,6 +12097,10 @@
           </a:solidFill>
           <a:ln/>
         </p:spPr>
+        <p:txBody>
+          <a:bodyPr/>
+          <a:p/>
+        </p:txBody>
       </p:sp>
       <p:sp>
         <p:nvSpPr>
@@ -11902,6 +12126,10 @@
             <a:prstDash val="solid"/>
           </a:ln>
         </p:spPr>
+        <p:txBody>
+          <a:bodyPr/>
+          <a:p/>
+        </p:txBody>
       </p:sp>
       <p:sp>
         <p:nvSpPr>
@@ -11999,6 +12227,10 @@
             <a:prstDash val="solid"/>
           </a:ln>
         </p:spPr>
+        <p:txBody>
+          <a:bodyPr/>
+          <a:p/>
+        </p:txBody>
       </p:sp>
       <p:sp>
         <p:nvSpPr>
@@ -12096,6 +12328,10 @@
             <a:prstDash val="solid"/>
           </a:ln>
         </p:spPr>
+        <p:txBody>
+          <a:bodyPr/>
+          <a:p/>
+        </p:txBody>
       </p:sp>
       <p:sp>
         <p:nvSpPr>
@@ -12193,6 +12429,10 @@
             <a:prstDash val="solid"/>
           </a:ln>
         </p:spPr>
+        <p:txBody>
+          <a:bodyPr/>
+          <a:p/>
+        </p:txBody>
       </p:sp>
       <p:sp>
         <p:nvSpPr>
@@ -12290,6 +12530,10 @@
             <a:prstDash val="solid"/>
           </a:ln>
         </p:spPr>
+        <p:txBody>
+          <a:bodyPr/>
+          <a:p/>
+        </p:txBody>
       </p:sp>
       <p:sp>
         <p:nvSpPr>
@@ -12382,6 +12626,10 @@
           </a:solidFill>
           <a:ln/>
         </p:spPr>
+        <p:txBody>
+          <a:bodyPr/>
+          <a:p/>
+        </p:txBody>
       </p:sp>
       <p:sp>
         <p:nvSpPr>
@@ -12402,6 +12650,10 @@
           </a:solidFill>
           <a:ln/>
         </p:spPr>
+        <p:txBody>
+          <a:bodyPr/>
+          <a:p/>
+        </p:txBody>
       </p:sp>
       <p:sp>
         <p:nvSpPr>
@@ -12580,6 +12832,10 @@
             <a:prstDash val="solid"/>
           </a:ln>
         </p:spPr>
+        <p:txBody>
+          <a:bodyPr/>
+          <a:p/>
+        </p:txBody>
       </p:sp>
       <p:sp>
         <p:nvSpPr>
@@ -12605,6 +12861,10 @@
             <a:prstDash val="solid"/>
           </a:ln>
         </p:spPr>
+        <p:txBody>
+          <a:bodyPr/>
+          <a:p/>
+        </p:txBody>
       </p:sp>
       <p:sp>
         <p:nvSpPr>
@@ -12630,6 +12890,10 @@
             <a:prstDash val="solid"/>
           </a:ln>
         </p:spPr>
+        <p:txBody>
+          <a:bodyPr/>
+          <a:p/>
+        </p:txBody>
       </p:sp>
       <p:sp>
         <p:nvSpPr>
@@ -12650,6 +12914,10 @@
           </a:solidFill>
           <a:ln/>
         </p:spPr>
+        <p:txBody>
+          <a:bodyPr/>
+          <a:p/>
+        </p:txBody>
       </p:sp>
       <p:sp>
         <p:nvSpPr>
@@ -13684,6 +13952,10 @@
           </a:solidFill>
           <a:ln/>
         </p:spPr>
+        <p:txBody>
+          <a:bodyPr/>
+          <a:p/>
+        </p:txBody>
       </p:sp>
       <p:sp>
         <p:nvSpPr>
@@ -13716,6 +13988,10 @@
             </a:outerShdw>
           </a:effectLst>
         </p:spPr>
+        <p:txBody>
+          <a:bodyPr/>
+          <a:p/>
+        </p:txBody>
       </p:sp>
       <p:pic>
         <p:nvPicPr>
@@ -14088,6 +14364,10 @@
           </a:solidFill>
           <a:ln/>
         </p:spPr>
+        <p:txBody>
+          <a:bodyPr/>
+          <a:p/>
+        </p:txBody>
       </p:sp>
       <p:sp>
         <p:nvSpPr>
@@ -14120,6 +14400,10 @@
             </a:outerShdw>
           </a:effectLst>
         </p:spPr>
+        <p:txBody>
+          <a:bodyPr/>
+          <a:p/>
+        </p:txBody>
       </p:sp>
       <p:pic>
         <p:nvPicPr>
@@ -14456,6 +14740,10 @@
           </a:solidFill>
           <a:ln/>
         </p:spPr>
+        <p:txBody>
+          <a:bodyPr/>
+          <a:p/>
+        </p:txBody>
       </p:sp>
       <p:sp>
         <p:nvSpPr>
@@ -14488,6 +14776,10 @@
             </a:outerShdw>
           </a:effectLst>
         </p:spPr>
+        <p:txBody>
+          <a:bodyPr/>
+          <a:p/>
+        </p:txBody>
       </p:sp>
       <p:pic>
         <p:nvPicPr>
@@ -14824,6 +15116,10 @@
           </a:solidFill>
           <a:ln/>
         </p:spPr>
+        <p:txBody>
+          <a:bodyPr/>
+          <a:p/>
+        </p:txBody>
       </p:sp>
       <p:sp>
         <p:nvSpPr>
@@ -14844,6 +15140,10 @@
           </a:solidFill>
           <a:ln/>
         </p:spPr>
+        <p:txBody>
+          <a:bodyPr/>
+          <a:p/>
+        </p:txBody>
       </p:sp>
       <p:sp>
         <p:nvSpPr>
@@ -14864,6 +15164,10 @@
           </a:solidFill>
           <a:ln/>
         </p:spPr>
+        <p:txBody>
+          <a:bodyPr/>
+          <a:p/>
+        </p:txBody>
       </p:sp>
       <p:sp>
         <p:nvSpPr>
@@ -14884,6 +15188,10 @@
           </a:solidFill>
           <a:ln/>
         </p:spPr>
+        <p:txBody>
+          <a:bodyPr/>
+          <a:p/>
+        </p:txBody>
       </p:sp>
       <p:sp>
         <p:nvSpPr>
@@ -14976,6 +15284,10 @@
           </a:solidFill>
           <a:ln/>
         </p:spPr>
+        <p:txBody>
+          <a:bodyPr/>
+          <a:p/>
+        </p:txBody>
       </p:sp>
       <p:sp>
         <p:nvSpPr>
@@ -14996,6 +15308,10 @@
           </a:solidFill>
           <a:ln/>
         </p:spPr>
+        <p:txBody>
+          <a:bodyPr/>
+          <a:p/>
+        </p:txBody>
       </p:sp>
       <p:sp>
         <p:nvSpPr>
@@ -15016,6 +15332,10 @@
           </a:solidFill>
           <a:ln/>
         </p:spPr>
+        <p:txBody>
+          <a:bodyPr/>
+          <a:p/>
+        </p:txBody>
       </p:sp>
       <p:sp>
         <p:nvSpPr>
@@ -15108,6 +15428,10 @@
           </a:solidFill>
           <a:ln/>
         </p:spPr>
+        <p:txBody>
+          <a:bodyPr/>
+          <a:p/>
+        </p:txBody>
       </p:sp>
       <p:sp>
         <p:nvSpPr>
@@ -15128,6 +15452,10 @@
           </a:solidFill>
           <a:ln/>
         </p:spPr>
+        <p:txBody>
+          <a:bodyPr/>
+          <a:p/>
+        </p:txBody>
       </p:sp>
       <p:sp>
         <p:nvSpPr>
@@ -15148,6 +15476,10 @@
           </a:solidFill>
           <a:ln/>
         </p:spPr>
+        <p:txBody>
+          <a:bodyPr/>
+          <a:p/>
+        </p:txBody>
       </p:sp>
       <p:sp>
         <p:nvSpPr>
@@ -15240,6 +15572,10 @@
           </a:solidFill>
           <a:ln/>
         </p:spPr>
+        <p:txBody>
+          <a:bodyPr/>
+          <a:p/>
+        </p:txBody>
       </p:sp>
       <p:sp>
         <p:nvSpPr>
@@ -15260,6 +15596,10 @@
           </a:solidFill>
           <a:ln/>
         </p:spPr>
+        <p:txBody>
+          <a:bodyPr/>
+          <a:p/>
+        </p:txBody>
       </p:sp>
       <p:sp>
         <p:nvSpPr>
@@ -15280,6 +15620,10 @@
           </a:solidFill>
           <a:ln/>
         </p:spPr>
+        <p:txBody>
+          <a:bodyPr/>
+          <a:p/>
+        </p:txBody>
       </p:sp>
       <p:sp>
         <p:nvSpPr>
@@ -15347,7 +15691,7 @@
                   <a:srgbClr val="1A1A1A"/>
                 </a:solidFill>
               </a:rPr>
-              <a:t>Release 2.5 and 2.6 so far: 7 packs, 197 Sutras, 22 panel kinds, 18 source plugins, BI Studio with statements, Python data prep, several servers as one (Drishti*net); 35.7 million trades served to 50 users at 179 requests/s.</a:t>
+              <a:t>Release 2.5 and 2.6 so far: 7 packs, 197 Sutras, 22 panel kinds, 19 source plugins, BI Studio with statements, Python data prep, several servers as one (Drishti*net); 35.7 million trades served to 50 users at 179 requests/s.</a:t>
             </a:r>
             <a:endParaRPr lang="en-US" sz="1300" dirty="0"/>
           </a:p>
@@ -15372,6 +15716,10 @@
           </a:solidFill>
           <a:ln/>
         </p:spPr>
+        <p:txBody>
+          <a:bodyPr/>
+          <a:p/>
+        </p:txBody>
       </p:sp>
       <p:sp>
         <p:nvSpPr>
@@ -15392,6 +15740,10 @@
           </a:solidFill>
           <a:ln/>
         </p:spPr>
+        <p:txBody>
+          <a:bodyPr/>
+          <a:p/>
+        </p:txBody>
       </p:sp>
       <p:sp>
         <p:nvSpPr>
@@ -15412,6 +15764,10 @@
           </a:solidFill>
           <a:ln/>
         </p:spPr>
+        <p:txBody>
+          <a:bodyPr/>
+          <a:p/>
+        </p:txBody>
       </p:sp>
       <p:sp>
         <p:nvSpPr>
@@ -15650,6 +16006,10 @@
           </a:solidFill>
           <a:ln/>
         </p:spPr>
+        <p:txBody>
+          <a:bodyPr/>
+          <a:p/>
+        </p:txBody>
       </p:sp>
       <p:sp>
         <p:nvSpPr>
@@ -15675,6 +16035,10 @@
             <a:prstDash val="solid"/>
           </a:ln>
         </p:spPr>
+        <p:txBody>
+          <a:bodyPr/>
+          <a:p/>
+        </p:txBody>
       </p:sp>
       <p:sp>
         <p:nvSpPr>
@@ -15772,6 +16136,10 @@
             <a:prstDash val="solid"/>
           </a:ln>
         </p:spPr>
+        <p:txBody>
+          <a:bodyPr/>
+          <a:p/>
+        </p:txBody>
       </p:sp>
       <p:sp>
         <p:nvSpPr>
@@ -15869,6 +16237,10 @@
             <a:prstDash val="solid"/>
           </a:ln>
         </p:spPr>
+        <p:txBody>
+          <a:bodyPr/>
+          <a:p/>
+        </p:txBody>
       </p:sp>
       <p:sp>
         <p:nvSpPr>
@@ -15966,6 +16338,10 @@
             <a:prstDash val="solid"/>
           </a:ln>
         </p:spPr>
+        <p:txBody>
+          <a:bodyPr/>
+          <a:p/>
+        </p:txBody>
       </p:sp>
       <p:sp>
         <p:nvSpPr>
@@ -16063,6 +16439,10 @@
             <a:prstDash val="solid"/>
           </a:ln>
         </p:spPr>
+        <p:txBody>
+          <a:bodyPr/>
+          <a:p/>
+        </p:txBody>
       </p:sp>
       <p:sp>
         <p:nvSpPr>
@@ -16155,6 +16535,10 @@
           </a:solidFill>
           <a:ln/>
         </p:spPr>
+        <p:txBody>
+          <a:bodyPr/>
+          <a:p/>
+        </p:txBody>
       </p:sp>
       <p:sp>
         <p:nvSpPr>
@@ -16175,6 +16559,10 @@
           </a:solidFill>
           <a:ln/>
         </p:spPr>
+        <p:txBody>
+          <a:bodyPr/>
+          <a:p/>
+        </p:txBody>
       </p:sp>
       <p:sp>
         <p:nvSpPr>
@@ -16388,6 +16776,10 @@
           </a:solidFill>
           <a:ln/>
         </p:spPr>
+        <p:txBody>
+          <a:bodyPr/>
+          <a:p/>
+        </p:txBody>
       </p:sp>
       <p:sp>
         <p:nvSpPr>
@@ -16420,6 +16812,10 @@
             </a:outerShdw>
           </a:effectLst>
         </p:spPr>
+        <p:txBody>
+          <a:bodyPr/>
+          <a:p/>
+        </p:txBody>
       </p:sp>
       <p:pic>
         <p:nvPicPr>
@@ -16756,6 +17152,10 @@
           </a:solidFill>
           <a:ln/>
         </p:spPr>
+        <p:txBody>
+          <a:bodyPr/>
+          <a:p/>
+        </p:txBody>
       </p:sp>
       <p:sp>
         <p:nvSpPr>
@@ -16788,6 +17188,10 @@
             </a:outerShdw>
           </a:effectLst>
         </p:spPr>
+        <p:txBody>
+          <a:bodyPr/>
+          <a:p/>
+        </p:txBody>
       </p:sp>
       <p:pic>
         <p:nvPicPr>
@@ -17124,6 +17528,10 @@
           </a:solidFill>
           <a:ln/>
         </p:spPr>
+        <p:txBody>
+          <a:bodyPr/>
+          <a:p/>
+        </p:txBody>
       </p:sp>
       <p:sp>
         <p:nvSpPr>
@@ -17156,6 +17564,10 @@
             </a:outerShdw>
           </a:effectLst>
         </p:spPr>
+        <p:txBody>
+          <a:bodyPr/>
+          <a:p/>
+        </p:txBody>
       </p:sp>
       <p:pic>
         <p:nvPicPr>
@@ -17200,6 +17612,10 @@
           </a:solidFill>
           <a:ln/>
         </p:spPr>
+        <p:txBody>
+          <a:bodyPr/>
+          <a:p/>
+        </p:txBody>
       </p:sp>
       <p:sp>
         <p:nvSpPr>
@@ -17302,6 +17718,10 @@
           </a:solidFill>
           <a:ln/>
         </p:spPr>
+        <p:txBody>
+          <a:bodyPr/>
+          <a:p/>
+        </p:txBody>
       </p:sp>
       <p:sp>
         <p:nvSpPr>
@@ -17322,6 +17742,10 @@
           </a:solidFill>
           <a:ln/>
         </p:spPr>
+        <p:txBody>
+          <a:bodyPr/>
+          <a:p/>
+        </p:txBody>
       </p:sp>
       <p:sp>
         <p:nvSpPr>
@@ -17414,6 +17838,10 @@
           </a:solidFill>
           <a:ln/>
         </p:spPr>
+        <p:txBody>
+          <a:bodyPr/>
+          <a:p/>
+        </p:txBody>
       </p:sp>
       <p:sp>
         <p:nvSpPr>
@@ -17434,6 +17862,10 @@
           </a:solidFill>
           <a:ln/>
         </p:spPr>
+        <p:txBody>
+          <a:bodyPr/>
+          <a:p/>
+        </p:txBody>
       </p:sp>
       <p:sp>
         <p:nvSpPr>
@@ -17562,6 +17994,10 @@
           </a:solidFill>
           <a:ln/>
         </p:spPr>
+        <p:txBody>
+          <a:bodyPr/>
+          <a:p/>
+        </p:txBody>
       </p:sp>
       <p:sp>
         <p:nvSpPr>
@@ -17582,6 +18018,10 @@
           </a:solidFill>
           <a:ln/>
         </p:spPr>
+        <p:txBody>
+          <a:bodyPr/>
+          <a:p/>
+        </p:txBody>
       </p:sp>
       <p:sp>
         <p:nvSpPr>
@@ -17795,6 +18235,10 @@
           </a:solidFill>
           <a:ln/>
         </p:spPr>
+        <p:txBody>
+          <a:bodyPr/>
+          <a:p/>
+        </p:txBody>
       </p:sp>
       <p:sp>
         <p:nvSpPr>
@@ -17827,6 +18271,10 @@
             </a:outerShdw>
           </a:effectLst>
         </p:spPr>
+        <p:txBody>
+          <a:bodyPr/>
+          <a:p/>
+        </p:txBody>
       </p:sp>
       <p:pic>
         <p:nvPicPr>
@@ -17883,6 +18331,10 @@
             </a:outerShdw>
           </a:effectLst>
         </p:spPr>
+        <p:txBody>
+          <a:bodyPr/>
+          <a:p/>
+        </p:txBody>
       </p:sp>
       <p:pic>
         <p:nvPicPr>
@@ -17999,6 +18451,10 @@
           </a:solidFill>
           <a:ln/>
         </p:spPr>
+        <p:txBody>
+          <a:bodyPr/>
+          <a:p/>
+        </p:txBody>
       </p:sp>
       <p:sp>
         <p:nvSpPr>
@@ -18019,6 +18475,10 @@
           </a:solidFill>
           <a:ln/>
         </p:spPr>
+        <p:txBody>
+          <a:bodyPr/>
+          <a:p/>
+        </p:txBody>
       </p:sp>
       <p:sp>
         <p:nvSpPr>
@@ -18232,6 +18692,10 @@
           </a:solidFill>
           <a:ln/>
         </p:spPr>
+        <p:txBody>
+          <a:bodyPr/>
+          <a:p/>
+        </p:txBody>
       </p:sp>
       <p:sp>
         <p:nvSpPr>
@@ -18264,6 +18728,10 @@
             </a:outerShdw>
           </a:effectLst>
         </p:spPr>
+        <p:txBody>
+          <a:bodyPr/>
+          <a:p/>
+        </p:txBody>
       </p:sp>
       <p:pic>
         <p:nvPicPr>
@@ -18308,6 +18776,10 @@
           </a:solidFill>
           <a:ln/>
         </p:spPr>
+        <p:txBody>
+          <a:bodyPr/>
+          <a:p/>
+        </p:txBody>
       </p:sp>
       <p:sp>
         <p:nvSpPr>
@@ -18671,6 +19143,10 @@
           </a:solidFill>
           <a:ln/>
         </p:spPr>
+        <p:txBody>
+          <a:bodyPr/>
+          <a:p/>
+        </p:txBody>
       </p:sp>
       <p:sp>
         <p:nvSpPr>
@@ -18691,6 +19167,10 @@
           </a:solidFill>
           <a:ln/>
         </p:spPr>
+        <p:txBody>
+          <a:bodyPr/>
+          <a:p/>
+        </p:txBody>
       </p:sp>
       <p:sp>
         <p:nvSpPr>
@@ -18711,6 +19191,10 @@
           </a:solidFill>
           <a:ln/>
         </p:spPr>
+        <p:txBody>
+          <a:bodyPr/>
+          <a:p/>
+        </p:txBody>
       </p:sp>
       <p:sp>
         <p:nvSpPr>
@@ -18921,6 +19405,10 @@
             </a:outerShdw>
           </a:effectLst>
         </p:spPr>
+        <p:txBody>
+          <a:bodyPr/>
+          <a:p/>
+        </p:txBody>
       </p:sp>
       <p:pic>
         <p:nvPicPr>
@@ -19049,6 +19537,10 @@
           </a:solidFill>
           <a:ln/>
         </p:spPr>
+        <p:txBody>
+          <a:bodyPr/>
+          <a:p/>
+        </p:txBody>
       </p:sp>
       <p:sp>
         <p:nvSpPr>
@@ -19069,6 +19561,10 @@
           </a:solidFill>
           <a:ln/>
         </p:spPr>
+        <p:txBody>
+          <a:bodyPr/>
+          <a:p/>
+        </p:txBody>
       </p:sp>
       <p:sp>
         <p:nvSpPr>
@@ -19282,6 +19778,10 @@
           </a:solidFill>
           <a:ln/>
         </p:spPr>
+        <p:txBody>
+          <a:bodyPr/>
+          <a:p/>
+        </p:txBody>
       </p:sp>
       <p:graphicFrame>
         <p:nvGraphicFramePr>
@@ -20628,6 +21128,10 @@
           </a:solidFill>
           <a:ln/>
         </p:spPr>
+        <p:txBody>
+          <a:bodyPr/>
+          <a:p/>
+        </p:txBody>
       </p:sp>
       <p:sp>
         <p:nvSpPr>
@@ -20648,6 +21152,10 @@
           </a:solidFill>
           <a:ln/>
         </p:spPr>
+        <p:txBody>
+          <a:bodyPr/>
+          <a:p/>
+        </p:txBody>
       </p:sp>
       <p:sp>
         <p:nvSpPr>
@@ -20861,6 +21369,10 @@
           </a:solidFill>
           <a:ln/>
         </p:spPr>
+        <p:txBody>
+          <a:bodyPr/>
+          <a:p/>
+        </p:txBody>
       </p:sp>
       <p:sp>
         <p:nvSpPr>
@@ -20881,6 +21393,10 @@
           </a:solidFill>
           <a:ln/>
         </p:spPr>
+        <p:txBody>
+          <a:bodyPr/>
+          <a:p/>
+        </p:txBody>
       </p:sp>
       <p:sp>
         <p:nvSpPr>
@@ -21044,6 +21560,10 @@
             </a:outerShdw>
           </a:effectLst>
         </p:spPr>
+        <p:txBody>
+          <a:bodyPr/>
+          <a:p/>
+        </p:txBody>
       </p:sp>
       <p:pic>
         <p:nvPicPr>
@@ -21124,6 +21644,10 @@
           </a:solidFill>
           <a:ln/>
         </p:spPr>
+        <p:txBody>
+          <a:bodyPr/>
+          <a:p/>
+        </p:txBody>
       </p:sp>
       <p:sp>
         <p:nvSpPr>
@@ -21144,6 +21668,10 @@
           </a:solidFill>
           <a:ln/>
         </p:spPr>
+        <p:txBody>
+          <a:bodyPr/>
+          <a:p/>
+        </p:txBody>
       </p:sp>
       <p:sp>
         <p:nvSpPr>
@@ -21236,6 +21764,10 @@
           </a:solidFill>
           <a:ln/>
         </p:spPr>
+        <p:txBody>
+          <a:bodyPr/>
+          <a:p/>
+        </p:txBody>
       </p:sp>
       <p:sp>
         <p:nvSpPr>
@@ -21256,6 +21788,10 @@
           </a:solidFill>
           <a:ln/>
         </p:spPr>
+        <p:txBody>
+          <a:bodyPr/>
+          <a:p/>
+        </p:txBody>
       </p:sp>
       <p:sp>
         <p:nvSpPr>
@@ -21348,6 +21884,10 @@
           </a:solidFill>
           <a:ln/>
         </p:spPr>
+        <p:txBody>
+          <a:bodyPr/>
+          <a:p/>
+        </p:txBody>
       </p:sp>
       <p:sp>
         <p:nvSpPr>
@@ -21368,6 +21908,10 @@
           </a:solidFill>
           <a:ln/>
         </p:spPr>
+        <p:txBody>
+          <a:bodyPr/>
+          <a:p/>
+        </p:txBody>
       </p:sp>
       <p:sp>
         <p:nvSpPr>
@@ -21460,6 +22004,10 @@
           </a:solidFill>
           <a:ln/>
         </p:spPr>
+        <p:txBody>
+          <a:bodyPr/>
+          <a:p/>
+        </p:txBody>
       </p:sp>
       <p:sp>
         <p:nvSpPr>
@@ -21480,6 +22028,10 @@
           </a:solidFill>
           <a:ln/>
         </p:spPr>
+        <p:txBody>
+          <a:bodyPr/>
+          <a:p/>
+        </p:txBody>
       </p:sp>
       <p:sp>
         <p:nvSpPr>
@@ -21572,6 +22124,10 @@
           </a:solidFill>
           <a:ln/>
         </p:spPr>
+        <p:txBody>
+          <a:bodyPr/>
+          <a:p/>
+        </p:txBody>
       </p:sp>
       <p:sp>
         <p:nvSpPr>
@@ -21592,6 +22148,10 @@
           </a:solidFill>
           <a:ln/>
         </p:spPr>
+        <p:txBody>
+          <a:bodyPr/>
+          <a:p/>
+        </p:txBody>
       </p:sp>
       <p:sp>
         <p:nvSpPr>
@@ -21805,6 +22365,10 @@
           </a:solidFill>
           <a:ln/>
         </p:spPr>
+        <p:txBody>
+          <a:bodyPr/>
+          <a:p/>
+        </p:txBody>
       </p:sp>
       <p:sp>
         <p:nvSpPr>
@@ -21837,6 +22401,10 @@
             </a:outerShdw>
           </a:effectLst>
         </p:spPr>
+        <p:txBody>
+          <a:bodyPr/>
+          <a:p/>
+        </p:txBody>
       </p:sp>
       <p:sp>
         <p:nvSpPr>
@@ -21941,6 +22509,10 @@
             </a:outerShdw>
           </a:effectLst>
         </p:spPr>
+        <p:txBody>
+          <a:bodyPr/>
+          <a:p/>
+        </p:txBody>
       </p:sp>
       <p:sp>
         <p:nvSpPr>
@@ -22037,6 +22609,10 @@
             <a:tailEnd type="triangle"/>
           </a:ln>
         </p:spPr>
+        <p:txBody>
+          <a:bodyPr/>
+          <a:p/>
+        </p:txBody>
       </p:sp>
       <p:sp>
         <p:nvSpPr>
@@ -22069,6 +22645,10 @@
             </a:outerShdw>
           </a:effectLst>
         </p:spPr>
+        <p:txBody>
+          <a:bodyPr/>
+          <a:p/>
+        </p:txBody>
       </p:sp>
       <p:sp>
         <p:nvSpPr>
@@ -22165,6 +22745,10 @@
             <a:tailEnd type="triangle"/>
           </a:ln>
         </p:spPr>
+        <p:txBody>
+          <a:bodyPr/>
+          <a:p/>
+        </p:txBody>
       </p:sp>
       <p:sp>
         <p:nvSpPr>
@@ -22197,6 +22781,10 @@
             </a:outerShdw>
           </a:effectLst>
         </p:spPr>
+        <p:txBody>
+          <a:bodyPr/>
+          <a:p/>
+        </p:txBody>
       </p:sp>
       <p:sp>
         <p:nvSpPr>
@@ -22293,6 +22881,10 @@
             <a:tailEnd type="triangle"/>
           </a:ln>
         </p:spPr>
+        <p:txBody>
+          <a:bodyPr/>
+          <a:p/>
+        </p:txBody>
       </p:sp>
       <p:sp>
         <p:nvSpPr>
@@ -22325,6 +22917,10 @@
             </a:outerShdw>
           </a:effectLst>
         </p:spPr>
+        <p:txBody>
+          <a:bodyPr/>
+          <a:p/>
+        </p:txBody>
       </p:sp>
       <p:sp>
         <p:nvSpPr>
@@ -22421,6 +23017,10 @@
             <a:tailEnd type="triangle"/>
           </a:ln>
         </p:spPr>
+        <p:txBody>
+          <a:bodyPr/>
+          <a:p/>
+        </p:txBody>
       </p:sp>
       <p:sp>
         <p:nvSpPr>
@@ -22441,6 +23041,10 @@
           </a:solidFill>
           <a:ln/>
         </p:spPr>
+        <p:txBody>
+          <a:bodyPr/>
+          <a:p/>
+        </p:txBody>
       </p:sp>
       <p:sp>
         <p:nvSpPr>
@@ -22461,6 +23065,10 @@
           </a:solidFill>
           <a:ln/>
         </p:spPr>
+        <p:txBody>
+          <a:bodyPr/>
+          <a:p/>
+        </p:txBody>
       </p:sp>
       <p:sp>
         <p:nvSpPr>
@@ -22553,6 +23161,10 @@
           </a:solidFill>
           <a:ln/>
         </p:spPr>
+        <p:txBody>
+          <a:bodyPr/>
+          <a:p/>
+        </p:txBody>
       </p:sp>
       <p:sp>
         <p:nvSpPr>
@@ -22573,6 +23185,10 @@
           </a:solidFill>
           <a:ln/>
         </p:spPr>
+        <p:txBody>
+          <a:bodyPr/>
+          <a:p/>
+        </p:txBody>
       </p:sp>
       <p:sp>
         <p:nvSpPr>
@@ -22665,6 +23281,10 @@
           </a:solidFill>
           <a:ln/>
         </p:spPr>
+        <p:txBody>
+          <a:bodyPr/>
+          <a:p/>
+        </p:txBody>
       </p:sp>
       <p:sp>
         <p:nvSpPr>
@@ -22685,6 +23305,10 @@
           </a:solidFill>
           <a:ln/>
         </p:spPr>
+        <p:txBody>
+          <a:bodyPr/>
+          <a:p/>
+        </p:txBody>
       </p:sp>
       <p:sp>
         <p:nvSpPr>
@@ -22777,6 +23401,10 @@
           </a:solidFill>
           <a:ln/>
         </p:spPr>
+        <p:txBody>
+          <a:bodyPr/>
+          <a:p/>
+        </p:txBody>
       </p:sp>
       <p:sp>
         <p:nvSpPr>
@@ -22797,6 +23425,10 @@
           </a:solidFill>
           <a:ln/>
         </p:spPr>
+        <p:txBody>
+          <a:bodyPr/>
+          <a:p/>
+        </p:txBody>
       </p:sp>
       <p:sp>
         <p:nvSpPr>
@@ -22913,6 +23545,10 @@
           </a:solidFill>
           <a:ln/>
         </p:spPr>
+        <p:txBody>
+          <a:bodyPr/>
+          <a:p/>
+        </p:txBody>
       </p:sp>
       <p:sp>
         <p:nvSpPr>
@@ -22933,6 +23569,10 @@
           </a:solidFill>
           <a:ln/>
         </p:spPr>
+        <p:txBody>
+          <a:bodyPr/>
+          <a:p/>
+        </p:txBody>
       </p:sp>
       <p:sp>
         <p:nvSpPr>
@@ -23111,6 +23751,10 @@
             <a:prstDash val="solid"/>
           </a:ln>
         </p:spPr>
+        <p:txBody>
+          <a:bodyPr/>
+          <a:p/>
+        </p:txBody>
       </p:sp>
       <p:sp>
         <p:nvSpPr>
@@ -23136,6 +23780,10 @@
             <a:prstDash val="solid"/>
           </a:ln>
         </p:spPr>
+        <p:txBody>
+          <a:bodyPr/>
+          <a:p/>
+        </p:txBody>
       </p:sp>
       <p:sp>
         <p:nvSpPr>
@@ -23161,6 +23809,10 @@
             <a:prstDash val="solid"/>
           </a:ln>
         </p:spPr>
+        <p:txBody>
+          <a:bodyPr/>
+          <a:p/>
+        </p:txBody>
       </p:sp>
       <p:sp>
         <p:nvSpPr>
@@ -23181,6 +23833,10 @@
           </a:solidFill>
           <a:ln/>
         </p:spPr>
+        <p:txBody>
+          <a:bodyPr/>
+          <a:p/>
+        </p:txBody>
       </p:sp>
       <p:sp>
         <p:nvSpPr>
@@ -23419,6 +24075,10 @@
           </a:solidFill>
           <a:ln/>
         </p:spPr>
+        <p:txBody>
+          <a:bodyPr/>
+          <a:p/>
+        </p:txBody>
       </p:sp>
       <p:sp>
         <p:nvSpPr>
@@ -23451,6 +24111,10 @@
             </a:outerShdw>
           </a:effectLst>
         </p:spPr>
+        <p:txBody>
+          <a:bodyPr/>
+          <a:p/>
+        </p:txBody>
       </p:sp>
       <p:pic>
         <p:nvPicPr>
@@ -23543,6 +24207,10 @@
             </a:outerShdw>
           </a:effectLst>
         </p:spPr>
+        <p:txBody>
+          <a:bodyPr/>
+          <a:p/>
+        </p:txBody>
       </p:sp>
       <p:pic>
         <p:nvPicPr>
@@ -23635,6 +24303,10 @@
             </a:outerShdw>
           </a:effectLst>
         </p:spPr>
+        <p:txBody>
+          <a:bodyPr/>
+          <a:p/>
+        </p:txBody>
       </p:sp>
       <p:pic>
         <p:nvPicPr>
@@ -23727,6 +24399,10 @@
             </a:outerShdw>
           </a:effectLst>
         </p:spPr>
+        <p:txBody>
+          <a:bodyPr/>
+          <a:p/>
+        </p:txBody>
       </p:sp>
       <p:pic>
         <p:nvPicPr>
@@ -24033,6 +24709,10 @@
             <a:prstDash val="solid"/>
           </a:ln>
         </p:spPr>
+        <p:txBody>
+          <a:bodyPr/>
+          <a:p/>
+        </p:txBody>
       </p:sp>
       <p:sp>
         <p:nvSpPr>
@@ -24058,6 +24738,10 @@
             <a:prstDash val="solid"/>
           </a:ln>
         </p:spPr>
+        <p:txBody>
+          <a:bodyPr/>
+          <a:p/>
+        </p:txBody>
       </p:sp>
       <p:sp>
         <p:nvSpPr>
@@ -24083,6 +24767,10 @@
             <a:prstDash val="solid"/>
           </a:ln>
         </p:spPr>
+        <p:txBody>
+          <a:bodyPr/>
+          <a:p/>
+        </p:txBody>
       </p:sp>
       <p:sp>
         <p:nvSpPr>
@@ -24103,6 +24791,10 @@
           </a:solidFill>
           <a:ln/>
         </p:spPr>
+        <p:txBody>
+          <a:bodyPr/>
+          <a:p/>
+        </p:txBody>
       </p:sp>
       <p:sp>
         <p:nvSpPr>
@@ -24341,6 +25033,10 @@
           </a:solidFill>
           <a:ln/>
         </p:spPr>
+        <p:txBody>
+          <a:bodyPr/>
+          <a:p/>
+        </p:txBody>
       </p:sp>
       <p:sp>
         <p:nvSpPr>
@@ -24361,6 +25057,10 @@
           </a:solidFill>
           <a:ln/>
         </p:spPr>
+        <p:txBody>
+          <a:bodyPr/>
+          <a:p/>
+        </p:txBody>
       </p:sp>
       <p:sp>
         <p:nvSpPr>
@@ -24381,6 +25081,10 @@
           </a:solidFill>
           <a:ln/>
         </p:spPr>
+        <p:txBody>
+          <a:bodyPr/>
+          <a:p/>
+        </p:txBody>
       </p:sp>
       <p:sp>
         <p:nvSpPr>
@@ -24545,6 +25249,10 @@
           </a:solidFill>
           <a:ln/>
         </p:spPr>
+        <p:txBody>
+          <a:bodyPr/>
+          <a:p/>
+        </p:txBody>
       </p:sp>
       <p:sp>
         <p:nvSpPr>
@@ -24565,6 +25273,10 @@
           </a:solidFill>
           <a:ln/>
         </p:spPr>
+        <p:txBody>
+          <a:bodyPr/>
+          <a:p/>
+        </p:txBody>
       </p:sp>
       <p:sp>
         <p:nvSpPr>
@@ -24729,6 +25441,10 @@
           </a:solidFill>
           <a:ln/>
         </p:spPr>
+        <p:txBody>
+          <a:bodyPr/>
+          <a:p/>
+        </p:txBody>
       </p:sp>
       <p:sp>
         <p:nvSpPr>
@@ -24749,6 +25465,10 @@
           </a:solidFill>
           <a:ln/>
         </p:spPr>
+        <p:txBody>
+          <a:bodyPr/>
+          <a:p/>
+        </p:txBody>
       </p:sp>
       <p:sp>
         <p:nvSpPr>
@@ -24913,6 +25633,10 @@
           </a:solidFill>
           <a:ln/>
         </p:spPr>
+        <p:txBody>
+          <a:bodyPr/>
+          <a:p/>
+        </p:txBody>
       </p:sp>
       <p:sp>
         <p:nvSpPr>
@@ -24933,6 +25657,10 @@
           </a:solidFill>
           <a:ln/>
         </p:spPr>
+        <p:txBody>
+          <a:bodyPr/>
+          <a:p/>
+        </p:txBody>
       </p:sp>
       <p:sp>
         <p:nvSpPr>
@@ -25591,6 +26319,10 @@
           </a:solidFill>
           <a:ln/>
         </p:spPr>
+        <p:txBody>
+          <a:bodyPr/>
+          <a:p/>
+        </p:txBody>
       </p:sp>
       <p:sp>
         <p:nvSpPr>
@@ -25611,6 +26343,10 @@
           </a:solidFill>
           <a:ln/>
         </p:spPr>
+        <p:txBody>
+          <a:bodyPr/>
+          <a:p/>
+        </p:txBody>
       </p:sp>
       <p:sp>
         <p:nvSpPr>
@@ -25824,6 +26560,10 @@
           </a:solidFill>
           <a:ln/>
         </p:spPr>
+        <p:txBody>
+          <a:bodyPr/>
+          <a:p/>
+        </p:txBody>
       </p:sp>
       <p:graphicFrame>
         <p:nvGraphicFramePr>
@@ -27131,6 +27871,10 @@
           </a:solidFill>
           <a:ln/>
         </p:spPr>
+        <p:txBody>
+          <a:bodyPr/>
+          <a:p/>
+        </p:txBody>
       </p:sp>
       <p:sp>
         <p:nvSpPr>
@@ -27151,6 +27895,10 @@
           </a:solidFill>
           <a:ln/>
         </p:spPr>
+        <p:txBody>
+          <a:bodyPr/>
+          <a:p/>
+        </p:txBody>
       </p:sp>
       <p:sp>
         <p:nvSpPr>
@@ -27364,6 +28112,10 @@
           </a:solidFill>
           <a:ln/>
         </p:spPr>
+        <p:txBody>
+          <a:bodyPr/>
+          <a:p/>
+        </p:txBody>
       </p:sp>
       <p:sp>
         <p:nvSpPr>
@@ -27384,6 +28136,10 @@
           </a:solidFill>
           <a:ln/>
         </p:spPr>
+        <p:txBody>
+          <a:bodyPr/>
+          <a:p/>
+        </p:txBody>
       </p:sp>
       <p:sp>
         <p:nvSpPr>
@@ -27404,6 +28160,10 @@
           </a:solidFill>
           <a:ln/>
         </p:spPr>
+        <p:txBody>
+          <a:bodyPr/>
+          <a:p/>
+        </p:txBody>
       </p:sp>
       <p:sp>
         <p:nvSpPr>
@@ -27817,6 +28577,10 @@
           </a:solidFill>
           <a:ln/>
         </p:spPr>
+        <p:txBody>
+          <a:bodyPr/>
+          <a:p/>
+        </p:txBody>
       </p:sp>
       <p:sp>
         <p:nvSpPr>
@@ -27837,6 +28601,10 @@
           </a:solidFill>
           <a:ln/>
         </p:spPr>
+        <p:txBody>
+          <a:bodyPr/>
+          <a:p/>
+        </p:txBody>
       </p:sp>
       <p:sp>
         <p:nvSpPr>
@@ -28050,6 +28818,10 @@
           </a:solidFill>
           <a:ln/>
         </p:spPr>
+        <p:txBody>
+          <a:bodyPr/>
+          <a:p/>
+        </p:txBody>
       </p:sp>
       <p:sp>
         <p:nvSpPr>
@@ -28070,6 +28842,10 @@
           </a:solidFill>
           <a:ln/>
         </p:spPr>
+        <p:txBody>
+          <a:bodyPr/>
+          <a:p/>
+        </p:txBody>
       </p:sp>
       <p:sp>
         <p:nvSpPr>
@@ -28090,6 +28866,10 @@
           </a:solidFill>
           <a:ln/>
         </p:spPr>
+        <p:txBody>
+          <a:bodyPr/>
+          <a:p/>
+        </p:txBody>
       </p:sp>
       <p:sp>
         <p:nvSpPr>
@@ -28182,6 +28962,10 @@
           </a:solidFill>
           <a:ln/>
         </p:spPr>
+        <p:txBody>
+          <a:bodyPr/>
+          <a:p/>
+        </p:txBody>
       </p:sp>
       <p:sp>
         <p:nvSpPr>
@@ -28202,6 +28986,10 @@
           </a:solidFill>
           <a:ln/>
         </p:spPr>
+        <p:txBody>
+          <a:bodyPr/>
+          <a:p/>
+        </p:txBody>
       </p:sp>
       <p:sp>
         <p:nvSpPr>
@@ -28294,6 +29082,10 @@
           </a:solidFill>
           <a:ln/>
         </p:spPr>
+        <p:txBody>
+          <a:bodyPr/>
+          <a:p/>
+        </p:txBody>
       </p:sp>
       <p:sp>
         <p:nvSpPr>
@@ -28314,6 +29106,10 @@
           </a:solidFill>
           <a:ln/>
         </p:spPr>
+        <p:txBody>
+          <a:bodyPr/>
+          <a:p/>
+        </p:txBody>
       </p:sp>
       <p:sp>
         <p:nvSpPr>
@@ -28406,6 +29202,10 @@
           </a:solidFill>
           <a:ln/>
         </p:spPr>
+        <p:txBody>
+          <a:bodyPr/>
+          <a:p/>
+        </p:txBody>
       </p:sp>
       <p:sp>
         <p:nvSpPr>
@@ -28426,6 +29226,10 @@
           </a:solidFill>
           <a:ln/>
         </p:spPr>
+        <p:txBody>
+          <a:bodyPr/>
+          <a:p/>
+        </p:txBody>
       </p:sp>
       <p:sp>
         <p:nvSpPr>
@@ -28633,6 +29437,10 @@
           </a:solidFill>
           <a:ln/>
         </p:spPr>
+        <p:txBody>
+          <a:bodyPr/>
+          <a:p/>
+        </p:txBody>
       </p:sp>
       <p:sp>
         <p:nvSpPr>
@@ -28653,6 +29461,10 @@
           </a:solidFill>
           <a:ln/>
         </p:spPr>
+        <p:txBody>
+          <a:bodyPr/>
+          <a:p/>
+        </p:txBody>
       </p:sp>
       <p:sp>
         <p:nvSpPr>
@@ -28831,6 +29643,10 @@
             <a:prstDash val="solid"/>
           </a:ln>
         </p:spPr>
+        <p:txBody>
+          <a:bodyPr/>
+          <a:p/>
+        </p:txBody>
       </p:sp>
       <p:sp>
         <p:nvSpPr>
@@ -28856,6 +29672,10 @@
             <a:prstDash val="solid"/>
           </a:ln>
         </p:spPr>
+        <p:txBody>
+          <a:bodyPr/>
+          <a:p/>
+        </p:txBody>
       </p:sp>
       <p:sp>
         <p:nvSpPr>
@@ -28881,6 +29701,10 @@
             <a:prstDash val="solid"/>
           </a:ln>
         </p:spPr>
+        <p:txBody>
+          <a:bodyPr/>
+          <a:p/>
+        </p:txBody>
       </p:sp>
       <p:sp>
         <p:nvSpPr>
@@ -28901,6 +29725,10 @@
           </a:solidFill>
           <a:ln/>
         </p:spPr>
+        <p:txBody>
+          <a:bodyPr/>
+          <a:p/>
+        </p:txBody>
       </p:sp>
       <p:sp>
         <p:nvSpPr>
@@ -29139,6 +29967,10 @@
           </a:solidFill>
           <a:ln/>
         </p:spPr>
+        <p:txBody>
+          <a:bodyPr/>
+          <a:p/>
+        </p:txBody>
       </p:sp>
       <p:sp>
         <p:nvSpPr>
@@ -29159,6 +29991,10 @@
           </a:solidFill>
           <a:ln/>
         </p:spPr>
+        <p:txBody>
+          <a:bodyPr/>
+          <a:p/>
+        </p:txBody>
       </p:sp>
       <p:sp>
         <p:nvSpPr>
@@ -31017,6 +31853,10 @@
           </a:solidFill>
           <a:ln/>
         </p:spPr>
+        <p:txBody>
+          <a:bodyPr/>
+          <a:p/>
+        </p:txBody>
       </p:sp>
       <p:sp>
         <p:nvSpPr>
@@ -31037,6 +31877,10 @@
           </a:solidFill>
           <a:ln/>
         </p:spPr>
+        <p:txBody>
+          <a:bodyPr/>
+          <a:p/>
+        </p:txBody>
       </p:sp>
       <p:sp>
         <p:nvSpPr>
@@ -31129,6 +31973,10 @@
           </a:solidFill>
           <a:ln/>
         </p:spPr>
+        <p:txBody>
+          <a:bodyPr/>
+          <a:p/>
+        </p:txBody>
       </p:sp>
       <p:sp>
         <p:nvSpPr>
@@ -31149,6 +31997,10 @@
           </a:solidFill>
           <a:ln/>
         </p:spPr>
+        <p:txBody>
+          <a:bodyPr/>
+          <a:p/>
+        </p:txBody>
       </p:sp>
       <p:sp>
         <p:nvSpPr>
@@ -31241,6 +32093,10 @@
           </a:solidFill>
           <a:ln/>
         </p:spPr>
+        <p:txBody>
+          <a:bodyPr/>
+          <a:p/>
+        </p:txBody>
       </p:sp>
       <p:sp>
         <p:nvSpPr>
@@ -31261,6 +32117,10 @@
           </a:solidFill>
           <a:ln/>
         </p:spPr>
+        <p:txBody>
+          <a:bodyPr/>
+          <a:p/>
+        </p:txBody>
       </p:sp>
       <p:sp>
         <p:nvSpPr>
@@ -31353,6 +32213,10 @@
           </a:solidFill>
           <a:ln/>
         </p:spPr>
+        <p:txBody>
+          <a:bodyPr/>
+          <a:p/>
+        </p:txBody>
       </p:sp>
       <p:sp>
         <p:nvSpPr>
@@ -31373,6 +32237,10 @@
           </a:solidFill>
           <a:ln/>
         </p:spPr>
+        <p:txBody>
+          <a:bodyPr/>
+          <a:p/>
+        </p:txBody>
       </p:sp>
       <p:sp>
         <p:nvSpPr>
@@ -31586,6 +32454,10 @@
           </a:solidFill>
           <a:ln/>
         </p:spPr>
+        <p:txBody>
+          <a:bodyPr/>
+          <a:p/>
+        </p:txBody>
       </p:sp>
       <p:sp>
         <p:nvSpPr>
@@ -31606,6 +32478,10 @@
           </a:solidFill>
           <a:ln/>
         </p:spPr>
+        <p:txBody>
+          <a:bodyPr/>
+          <a:p/>
+        </p:txBody>
       </p:sp>
       <p:sp>
         <p:nvSpPr>
@@ -31626,6 +32502,10 @@
           </a:solidFill>
           <a:ln/>
         </p:spPr>
+        <p:txBody>
+          <a:bodyPr/>
+          <a:p/>
+        </p:txBody>
       </p:sp>
       <p:sp>
         <p:nvSpPr>
@@ -31718,6 +32598,10 @@
           </a:solidFill>
           <a:ln/>
         </p:spPr>
+        <p:txBody>
+          <a:bodyPr/>
+          <a:p/>
+        </p:txBody>
       </p:sp>
       <p:sp>
         <p:nvSpPr>
@@ -31738,6 +32622,10 @@
           </a:solidFill>
           <a:ln/>
         </p:spPr>
+        <p:txBody>
+          <a:bodyPr/>
+          <a:p/>
+        </p:txBody>
       </p:sp>
       <p:sp>
         <p:nvSpPr>
@@ -31830,6 +32718,10 @@
           </a:solidFill>
           <a:ln/>
         </p:spPr>
+        <p:txBody>
+          <a:bodyPr/>
+          <a:p/>
+        </p:txBody>
       </p:sp>
       <p:sp>
         <p:nvSpPr>
@@ -31850,6 +32742,10 @@
           </a:solidFill>
           <a:ln/>
         </p:spPr>
+        <p:txBody>
+          <a:bodyPr/>
+          <a:p/>
+        </p:txBody>
       </p:sp>
       <p:sp>
         <p:nvSpPr>
@@ -31942,6 +32838,10 @@
           </a:solidFill>
           <a:ln/>
         </p:spPr>
+        <p:txBody>
+          <a:bodyPr/>
+          <a:p/>
+        </p:txBody>
       </p:sp>
       <p:sp>
         <p:nvSpPr>
@@ -31962,6 +32862,10 @@
           </a:solidFill>
           <a:ln/>
         </p:spPr>
+        <p:txBody>
+          <a:bodyPr/>
+          <a:p/>
+        </p:txBody>
       </p:sp>
       <p:sp>
         <p:nvSpPr>
@@ -32315,6 +33219,10 @@
           </a:solidFill>
           <a:ln/>
         </p:spPr>
+        <p:txBody>
+          <a:bodyPr/>
+          <a:p/>
+        </p:txBody>
       </p:sp>
       <p:sp>
         <p:nvSpPr>
@@ -32481,6 +33389,10 @@
           </a:solidFill>
           <a:ln/>
         </p:spPr>
+        <p:txBody>
+          <a:bodyPr/>
+          <a:p/>
+        </p:txBody>
       </p:sp>
       <p:sp>
         <p:nvSpPr>
@@ -32501,6 +33413,10 @@
           </a:solidFill>
           <a:ln/>
         </p:spPr>
+        <p:txBody>
+          <a:bodyPr/>
+          <a:p/>
+        </p:txBody>
       </p:sp>
       <p:sp>
         <p:nvSpPr>
@@ -32714,6 +33630,10 @@
           </a:solidFill>
           <a:ln/>
         </p:spPr>
+        <p:txBody>
+          <a:bodyPr/>
+          <a:p/>
+        </p:txBody>
       </p:sp>
       <p:graphicFrame>
         <p:nvGraphicFramePr>
@@ -33605,6 +34525,10 @@
           </a:solidFill>
           <a:ln/>
         </p:spPr>
+        <p:txBody>
+          <a:bodyPr/>
+          <a:p/>
+        </p:txBody>
       </p:sp>
       <p:sp>
         <p:nvSpPr>
@@ -33625,6 +34549,10 @@
           </a:solidFill>
           <a:ln/>
         </p:spPr>
+        <p:txBody>
+          <a:bodyPr/>
+          <a:p/>
+        </p:txBody>
       </p:sp>
       <p:sp>
         <p:nvSpPr>
@@ -33838,6 +34766,10 @@
           </a:solidFill>
           <a:ln/>
         </p:spPr>
+        <p:txBody>
+          <a:bodyPr/>
+          <a:p/>
+        </p:txBody>
       </p:sp>
       <p:sp>
         <p:nvSpPr>
@@ -33858,6 +34790,10 @@
           </a:solidFill>
           <a:ln/>
         </p:spPr>
+        <p:txBody>
+          <a:bodyPr/>
+          <a:p/>
+        </p:txBody>
       </p:sp>
       <p:sp>
         <p:nvSpPr>
@@ -33878,6 +34814,10 @@
           </a:solidFill>
           <a:ln/>
         </p:spPr>
+        <p:txBody>
+          <a:bodyPr/>
+          <a:p/>
+        </p:txBody>
       </p:sp>
       <p:sp>
         <p:nvSpPr>
@@ -33970,6 +34910,10 @@
           </a:solidFill>
           <a:ln/>
         </p:spPr>
+        <p:txBody>
+          <a:bodyPr/>
+          <a:p/>
+        </p:txBody>
       </p:sp>
       <p:sp>
         <p:nvSpPr>
@@ -33990,6 +34934,10 @@
           </a:solidFill>
           <a:ln/>
         </p:spPr>
+        <p:txBody>
+          <a:bodyPr/>
+          <a:p/>
+        </p:txBody>
       </p:sp>
       <p:sp>
         <p:nvSpPr>
@@ -34082,6 +35030,10 @@
           </a:solidFill>
           <a:ln/>
         </p:spPr>
+        <p:txBody>
+          <a:bodyPr/>
+          <a:p/>
+        </p:txBody>
       </p:sp>
       <p:sp>
         <p:nvSpPr>
@@ -34102,6 +35054,10 @@
           </a:solidFill>
           <a:ln/>
         </p:spPr>
+        <p:txBody>
+          <a:bodyPr/>
+          <a:p/>
+        </p:txBody>
       </p:sp>
       <p:sp>
         <p:nvSpPr>
@@ -34194,6 +35150,10 @@
           </a:solidFill>
           <a:ln/>
         </p:spPr>
+        <p:txBody>
+          <a:bodyPr/>
+          <a:p/>
+        </p:txBody>
       </p:sp>
       <p:sp>
         <p:nvSpPr>
@@ -34214,6 +35174,10 @@
           </a:solidFill>
           <a:ln/>
         </p:spPr>
+        <p:txBody>
+          <a:bodyPr/>
+          <a:p/>
+        </p:txBody>
       </p:sp>
       <p:sp>
         <p:nvSpPr>
@@ -35568,6 +36532,10 @@
           </a:solidFill>
           <a:ln/>
         </p:spPr>
+        <p:txBody>
+          <a:bodyPr/>
+          <a:p/>
+        </p:txBody>
       </p:sp>
       <p:sp>
         <p:nvSpPr>
@@ -35588,6 +36556,10 @@
           </a:solidFill>
           <a:ln/>
         </p:spPr>
+        <p:txBody>
+          <a:bodyPr/>
+          <a:p/>
+        </p:txBody>
       </p:sp>
       <p:sp>
         <p:nvSpPr>
@@ -35801,6 +36773,10 @@
           </a:solidFill>
           <a:ln/>
         </p:spPr>
+        <p:txBody>
+          <a:bodyPr/>
+          <a:p/>
+        </p:txBody>
       </p:sp>
       <p:sp>
         <p:nvSpPr>
@@ -35821,6 +36797,10 @@
           </a:solidFill>
           <a:ln/>
         </p:spPr>
+        <p:txBody>
+          <a:bodyPr/>
+          <a:p/>
+        </p:txBody>
       </p:sp>
       <p:sp>
         <p:nvSpPr>
@@ -35841,6 +36821,10 @@
           </a:solidFill>
           <a:ln/>
         </p:spPr>
+        <p:txBody>
+          <a:bodyPr/>
+          <a:p/>
+        </p:txBody>
       </p:sp>
       <p:sp>
         <p:nvSpPr>
@@ -35933,6 +36917,10 @@
           </a:solidFill>
           <a:ln/>
         </p:spPr>
+        <p:txBody>
+          <a:bodyPr/>
+          <a:p/>
+        </p:txBody>
       </p:sp>
       <p:sp>
         <p:nvSpPr>
@@ -35953,6 +36941,10 @@
           </a:solidFill>
           <a:ln/>
         </p:spPr>
+        <p:txBody>
+          <a:bodyPr/>
+          <a:p/>
+        </p:txBody>
       </p:sp>
       <p:sp>
         <p:nvSpPr>
@@ -36045,6 +37037,10 @@
           </a:solidFill>
           <a:ln/>
         </p:spPr>
+        <p:txBody>
+          <a:bodyPr/>
+          <a:p/>
+        </p:txBody>
       </p:sp>
       <p:sp>
         <p:nvSpPr>
@@ -36065,6 +37061,10 @@
           </a:solidFill>
           <a:ln/>
         </p:spPr>
+        <p:txBody>
+          <a:bodyPr/>
+          <a:p/>
+        </p:txBody>
       </p:sp>
       <p:sp>
         <p:nvSpPr>
@@ -36157,6 +37157,10 @@
           </a:solidFill>
           <a:ln/>
         </p:spPr>
+        <p:txBody>
+          <a:bodyPr/>
+          <a:p/>
+        </p:txBody>
       </p:sp>
       <p:sp>
         <p:nvSpPr>
@@ -36177,6 +37181,10 @@
           </a:solidFill>
           <a:ln/>
         </p:spPr>
+        <p:txBody>
+          <a:bodyPr/>
+          <a:p/>
+        </p:txBody>
       </p:sp>
       <p:sp>
         <p:nvSpPr>
@@ -37531,6 +38539,10 @@
           </a:solidFill>
           <a:ln/>
         </p:spPr>
+        <p:txBody>
+          <a:bodyPr/>
+          <a:p/>
+        </p:txBody>
       </p:sp>
       <p:sp>
         <p:nvSpPr>
@@ -37551,6 +38563,10 @@
           </a:solidFill>
           <a:ln/>
         </p:spPr>
+        <p:txBody>
+          <a:bodyPr/>
+          <a:p/>
+        </p:txBody>
       </p:sp>
       <p:sp>
         <p:nvSpPr>
@@ -37764,6 +38780,10 @@
           </a:solidFill>
           <a:ln/>
         </p:spPr>
+        <p:txBody>
+          <a:bodyPr/>
+          <a:p/>
+        </p:txBody>
       </p:sp>
       <p:sp>
         <p:nvSpPr>
@@ -37796,6 +38816,10 @@
             </a:outerShdw>
           </a:effectLst>
         </p:spPr>
+        <p:txBody>
+          <a:bodyPr/>
+          <a:p/>
+        </p:txBody>
       </p:sp>
       <p:sp>
         <p:nvSpPr>
@@ -37900,6 +38924,10 @@
             </a:outerShdw>
           </a:effectLst>
         </p:spPr>
+        <p:txBody>
+          <a:bodyPr/>
+          <a:p/>
+        </p:txBody>
       </p:sp>
       <p:sp>
         <p:nvSpPr>
@@ -37996,6 +39024,10 @@
             <a:tailEnd type="triangle"/>
           </a:ln>
         </p:spPr>
+        <p:txBody>
+          <a:bodyPr/>
+          <a:p/>
+        </p:txBody>
       </p:sp>
       <p:sp>
         <p:nvSpPr>
@@ -38028,6 +39060,10 @@
             </a:outerShdw>
           </a:effectLst>
         </p:spPr>
+        <p:txBody>
+          <a:bodyPr/>
+          <a:p/>
+        </p:txBody>
       </p:sp>
       <p:sp>
         <p:nvSpPr>
@@ -38124,6 +39160,10 @@
             <a:tailEnd type="triangle"/>
           </a:ln>
         </p:spPr>
+        <p:txBody>
+          <a:bodyPr/>
+          <a:p/>
+        </p:txBody>
       </p:sp>
       <p:sp>
         <p:nvSpPr>
@@ -38156,6 +39196,10 @@
             </a:outerShdw>
           </a:effectLst>
         </p:spPr>
+        <p:txBody>
+          <a:bodyPr/>
+          <a:p/>
+        </p:txBody>
       </p:sp>
       <p:sp>
         <p:nvSpPr>
@@ -38252,6 +39296,10 @@
             <a:tailEnd type="triangle"/>
           </a:ln>
         </p:spPr>
+        <p:txBody>
+          <a:bodyPr/>
+          <a:p/>
+        </p:txBody>
       </p:sp>
       <p:sp>
         <p:nvSpPr>
@@ -38284,6 +39332,10 @@
             </a:outerShdw>
           </a:effectLst>
         </p:spPr>
+        <p:txBody>
+          <a:bodyPr/>
+          <a:p/>
+        </p:txBody>
       </p:sp>
       <p:sp>
         <p:nvSpPr>
@@ -38380,6 +39432,10 @@
             <a:tailEnd type="triangle"/>
           </a:ln>
         </p:spPr>
+        <p:txBody>
+          <a:bodyPr/>
+          <a:p/>
+        </p:txBody>
       </p:sp>
       <p:sp>
         <p:nvSpPr>
@@ -38412,6 +39468,10 @@
             </a:outerShdw>
           </a:effectLst>
         </p:spPr>
+        <p:txBody>
+          <a:bodyPr/>
+          <a:p/>
+        </p:txBody>
       </p:sp>
       <p:sp>
         <p:nvSpPr>
@@ -38508,6 +39568,10 @@
             <a:tailEnd type="triangle"/>
           </a:ln>
         </p:spPr>
+        <p:txBody>
+          <a:bodyPr/>
+          <a:p/>
+        </p:txBody>
       </p:sp>
       <p:sp>
         <p:nvSpPr>
@@ -38528,6 +39592,10 @@
           </a:solidFill>
           <a:ln/>
         </p:spPr>
+        <p:txBody>
+          <a:bodyPr/>
+          <a:p/>
+        </p:txBody>
       </p:sp>
       <p:sp>
         <p:nvSpPr>
@@ -38548,6 +39616,10 @@
           </a:solidFill>
           <a:ln/>
         </p:spPr>
+        <p:txBody>
+          <a:bodyPr/>
+          <a:p/>
+        </p:txBody>
       </p:sp>
       <p:sp>
         <p:nvSpPr>
@@ -38640,6 +39712,10 @@
           </a:solidFill>
           <a:ln/>
         </p:spPr>
+        <p:txBody>
+          <a:bodyPr/>
+          <a:p/>
+        </p:txBody>
       </p:sp>
       <p:sp>
         <p:nvSpPr>
@@ -38660,6 +39736,10 @@
           </a:solidFill>
           <a:ln/>
         </p:spPr>
+        <p:txBody>
+          <a:bodyPr/>
+          <a:p/>
+        </p:txBody>
       </p:sp>
       <p:sp>
         <p:nvSpPr>
@@ -38752,6 +39832,10 @@
           </a:solidFill>
           <a:ln/>
         </p:spPr>
+        <p:txBody>
+          <a:bodyPr/>
+          <a:p/>
+        </p:txBody>
       </p:sp>
       <p:sp>
         <p:nvSpPr>
@@ -38772,6 +39856,10 @@
           </a:solidFill>
           <a:ln/>
         </p:spPr>
+        <p:txBody>
+          <a:bodyPr/>
+          <a:p/>
+        </p:txBody>
       </p:sp>
       <p:sp>
         <p:nvSpPr>
@@ -38864,6 +39952,10 @@
           </a:solidFill>
           <a:ln/>
         </p:spPr>
+        <p:txBody>
+          <a:bodyPr/>
+          <a:p/>
+        </p:txBody>
       </p:sp>
       <p:sp>
         <p:nvSpPr>
@@ -38884,6 +39976,10 @@
           </a:solidFill>
           <a:ln/>
         </p:spPr>
+        <p:txBody>
+          <a:bodyPr/>
+          <a:p/>
+        </p:txBody>
       </p:sp>
       <p:sp>
         <p:nvSpPr>
@@ -39227,7 +40323,7 @@
                   <a:srgbClr val="4A5058"/>
                 </a:solidFill>
               </a:rPr>
-              <a:t>Plus 18 source plugins, a server, integration tests and benchmarks.</a:t>
+              <a:t>Plus 19 source plugins, a server, integration tests and benchmarks.</a:t>
             </a:r>
             <a:endParaRPr lang="en-US" sz="1500" dirty="0"/>
           </a:p>
@@ -39363,6 +40459,10 @@
             <a:prstDash val="solid"/>
           </a:ln>
         </p:spPr>
+        <p:txBody>
+          <a:bodyPr/>
+          <a:p/>
+        </p:txBody>
       </p:sp>
       <p:sp>
         <p:nvSpPr>
@@ -39388,6 +40488,10 @@
             <a:prstDash val="solid"/>
           </a:ln>
         </p:spPr>
+        <p:txBody>
+          <a:bodyPr/>
+          <a:p/>
+        </p:txBody>
       </p:sp>
       <p:sp>
         <p:nvSpPr>
@@ -39413,6 +40517,10 @@
             <a:prstDash val="solid"/>
           </a:ln>
         </p:spPr>
+        <p:txBody>
+          <a:bodyPr/>
+          <a:p/>
+        </p:txBody>
       </p:sp>
       <p:sp>
         <p:nvSpPr>
@@ -39433,6 +40541,10 @@
           </a:solidFill>
           <a:ln/>
         </p:spPr>
+        <p:txBody>
+          <a:bodyPr/>
+          <a:p/>
+        </p:txBody>
       </p:sp>
       <p:sp>
         <p:nvSpPr>
@@ -39671,6 +40783,10 @@
           </a:solidFill>
           <a:ln/>
         </p:spPr>
+        <p:txBody>
+          <a:bodyPr/>
+          <a:p/>
+        </p:txBody>
       </p:sp>
       <p:graphicFrame>
         <p:nvGraphicFramePr>
@@ -41348,6 +42464,10 @@
           </a:solidFill>
           <a:ln/>
         </p:spPr>
+        <p:txBody>
+          <a:bodyPr/>
+          <a:p/>
+        </p:txBody>
       </p:sp>
       <p:sp>
         <p:nvSpPr>
@@ -41368,6 +42488,10 @@
           </a:solidFill>
           <a:ln/>
         </p:spPr>
+        <p:txBody>
+          <a:bodyPr/>
+          <a:p/>
+        </p:txBody>
       </p:sp>
       <p:sp>
         <p:nvSpPr>
@@ -41388,6 +42512,10 @@
           </a:solidFill>
           <a:ln/>
         </p:spPr>
+        <p:txBody>
+          <a:bodyPr/>
+          <a:p/>
+        </p:txBody>
       </p:sp>
       <p:sp>
         <p:nvSpPr>
@@ -41618,6 +42746,10 @@
             </a:outerShdw>
           </a:effectLst>
         </p:spPr>
+        <p:txBody>
+          <a:bodyPr/>
+          <a:p/>
+        </p:txBody>
       </p:sp>
       <p:sp>
         <p:nvSpPr>
@@ -41722,6 +42854,10 @@
             </a:outerShdw>
           </a:effectLst>
         </p:spPr>
+        <p:txBody>
+          <a:bodyPr/>
+          <a:p/>
+        </p:txBody>
       </p:sp>
       <p:sp>
         <p:nvSpPr>
@@ -41826,6 +42962,10 @@
             </a:outerShdw>
           </a:effectLst>
         </p:spPr>
+        <p:txBody>
+          <a:bodyPr/>
+          <a:p/>
+        </p:txBody>
       </p:sp>
       <p:sp>
         <p:nvSpPr>
@@ -41930,6 +43070,10 @@
             </a:outerShdw>
           </a:effectLst>
         </p:spPr>
+        <p:txBody>
+          <a:bodyPr/>
+          <a:p/>
+        </p:txBody>
       </p:sp>
       <p:sp>
         <p:nvSpPr>
@@ -42022,6 +43166,10 @@
           </a:solidFill>
           <a:ln/>
         </p:spPr>
+        <p:txBody>
+          <a:bodyPr/>
+          <a:p/>
+        </p:txBody>
       </p:sp>
       <p:sp>
         <p:nvSpPr>
@@ -42042,6 +43190,10 @@
           </a:solidFill>
           <a:ln/>
         </p:spPr>
+        <p:txBody>
+          <a:bodyPr/>
+          <a:p/>
+        </p:txBody>
       </p:sp>
       <p:sp>
         <p:nvSpPr>
@@ -42184,6 +43336,10 @@
             <a:prstDash val="solid"/>
           </a:ln>
         </p:spPr>
+        <p:txBody>
+          <a:bodyPr/>
+          <a:p/>
+        </p:txBody>
       </p:sp>
       <p:sp>
         <p:nvSpPr>
@@ -42209,6 +43365,10 @@
             <a:prstDash val="solid"/>
           </a:ln>
         </p:spPr>
+        <p:txBody>
+          <a:bodyPr/>
+          <a:p/>
+        </p:txBody>
       </p:sp>
       <p:sp>
         <p:nvSpPr>
@@ -42234,6 +43394,10 @@
             <a:prstDash val="solid"/>
           </a:ln>
         </p:spPr>
+        <p:txBody>
+          <a:bodyPr/>
+          <a:p/>
+        </p:txBody>
       </p:sp>
       <p:sp>
         <p:nvSpPr>
@@ -42290,6 +43454,10 @@
           </a:solidFill>
           <a:ln/>
         </p:spPr>
+        <p:txBody>
+          <a:bodyPr/>
+          <a:p/>
+        </p:txBody>
       </p:sp>
       <p:sp>
         <p:nvSpPr>
@@ -42528,6 +43696,10 @@
           </a:solidFill>
           <a:ln/>
         </p:spPr>
+        <p:txBody>
+          <a:bodyPr/>
+          <a:p/>
+        </p:txBody>
       </p:sp>
       <p:sp>
         <p:nvSpPr>
@@ -42548,6 +43720,10 @@
           </a:solidFill>
           <a:ln/>
         </p:spPr>
+        <p:txBody>
+          <a:bodyPr/>
+          <a:p/>
+        </p:txBody>
       </p:sp>
       <p:sp>
         <p:nvSpPr>
@@ -42719,6 +43895,10 @@
           </a:solidFill>
           <a:ln/>
         </p:spPr>
+        <p:txBody>
+          <a:bodyPr/>
+          <a:p/>
+        </p:txBody>
       </p:sp>
       <p:sp>
         <p:nvSpPr>
@@ -42890,6 +44070,10 @@
           </a:solidFill>
           <a:ln/>
         </p:spPr>
+        <p:txBody>
+          <a:bodyPr/>
+          <a:p/>
+        </p:txBody>
       </p:sp>
       <p:sp>
         <p:nvSpPr>
@@ -42910,6 +44094,10 @@
           </a:solidFill>
           <a:ln/>
         </p:spPr>
+        <p:txBody>
+          <a:bodyPr/>
+          <a:p/>
+        </p:txBody>
       </p:sp>
       <p:sp>
         <p:nvSpPr>
@@ -43123,6 +44311,10 @@
           </a:solidFill>
           <a:ln/>
         </p:spPr>
+        <p:txBody>
+          <a:bodyPr/>
+          <a:p/>
+        </p:txBody>
       </p:sp>
       <p:sp>
         <p:nvSpPr>
@@ -43155,6 +44347,10 @@
             </a:outerShdw>
           </a:effectLst>
         </p:spPr>
+        <p:txBody>
+          <a:bodyPr/>
+          <a:p/>
+        </p:txBody>
       </p:sp>
       <p:sp>
         <p:nvSpPr>
@@ -43259,6 +44455,10 @@
             </a:outerShdw>
           </a:effectLst>
         </p:spPr>
+        <p:txBody>
+          <a:bodyPr/>
+          <a:p/>
+        </p:txBody>
       </p:sp>
       <p:sp>
         <p:nvSpPr>
@@ -43363,6 +44563,10 @@
             </a:outerShdw>
           </a:effectLst>
         </p:spPr>
+        <p:txBody>
+          <a:bodyPr/>
+          <a:p/>
+        </p:txBody>
       </p:sp>
       <p:sp>
         <p:nvSpPr>
@@ -43467,6 +44671,10 @@
             </a:outerShdw>
           </a:effectLst>
         </p:spPr>
+        <p:txBody>
+          <a:bodyPr/>
+          <a:p/>
+        </p:txBody>
       </p:sp>
       <p:sp>
         <p:nvSpPr>
@@ -43563,6 +44771,10 @@
             <a:tailEnd type="triangle"/>
           </a:ln>
         </p:spPr>
+        <p:txBody>
+          <a:bodyPr/>
+          <a:p/>
+        </p:txBody>
       </p:sp>
       <p:sp>
         <p:nvSpPr>
@@ -43587,6 +44799,10 @@
             <a:tailEnd type="triangle"/>
           </a:ln>
         </p:spPr>
+        <p:txBody>
+          <a:bodyPr/>
+          <a:p/>
+        </p:txBody>
       </p:sp>
       <p:sp>
         <p:nvSpPr>
@@ -43611,6 +44827,10 @@
             <a:tailEnd type="triangle"/>
           </a:ln>
         </p:spPr>
+        <p:txBody>
+          <a:bodyPr/>
+          <a:p/>
+        </p:txBody>
       </p:sp>
       <p:sp>
         <p:nvSpPr>
@@ -43643,6 +44863,10 @@
             </a:outerShdw>
           </a:effectLst>
         </p:spPr>
+        <p:txBody>
+          <a:bodyPr/>
+          <a:p/>
+        </p:txBody>
       </p:sp>
       <p:sp>
         <p:nvSpPr>
@@ -43747,6 +44971,10 @@
             </a:outerShdw>
           </a:effectLst>
         </p:spPr>
+        <p:txBody>
+          <a:bodyPr/>
+          <a:p/>
+        </p:txBody>
       </p:sp>
       <p:sp>
         <p:nvSpPr>
@@ -43887,6 +45115,10 @@
             </a:outerShdw>
           </a:effectLst>
         </p:spPr>
+        <p:txBody>
+          <a:bodyPr/>
+          <a:p/>
+        </p:txBody>
       </p:sp>
       <p:sp>
         <p:nvSpPr>
@@ -43983,6 +45215,10 @@
             <a:tailEnd type="triangle"/>
           </a:ln>
         </p:spPr>
+        <p:txBody>
+          <a:bodyPr/>
+          <a:p/>
+        </p:txBody>
       </p:sp>
       <p:sp>
         <p:nvSpPr>
@@ -44007,6 +45243,10 @@
             <a:tailEnd type="triangle"/>
           </a:ln>
         </p:spPr>
+        <p:txBody>
+          <a:bodyPr/>
+          <a:p/>
+        </p:txBody>
       </p:sp>
       <p:sp>
         <p:nvSpPr>
@@ -44027,6 +45267,10 @@
           </a:solidFill>
           <a:ln/>
         </p:spPr>
+        <p:txBody>
+          <a:bodyPr/>
+          <a:p/>
+        </p:txBody>
       </p:sp>
       <p:sp>
         <p:nvSpPr>
@@ -44047,6 +45291,10 @@
           </a:solidFill>
           <a:ln/>
         </p:spPr>
+        <p:txBody>
+          <a:bodyPr/>
+          <a:p/>
+        </p:txBody>
       </p:sp>
       <p:sp>
         <p:nvSpPr>
@@ -44260,6 +45508,10 @@
           </a:solidFill>
           <a:ln/>
         </p:spPr>
+        <p:txBody>
+          <a:bodyPr/>
+          <a:p/>
+        </p:txBody>
       </p:sp>
       <p:sp>
         <p:nvSpPr>
@@ -44280,6 +45532,10 @@
           </a:solidFill>
           <a:ln/>
         </p:spPr>
+        <p:txBody>
+          <a:bodyPr/>
+          <a:p/>
+        </p:txBody>
       </p:sp>
       <p:sp>
         <p:nvSpPr>
@@ -44408,6 +45664,10 @@
           </a:solidFill>
           <a:ln/>
         </p:spPr>
+        <p:txBody>
+          <a:bodyPr/>
+          <a:p/>
+        </p:txBody>
       </p:sp>
       <p:sp>
         <p:nvSpPr>
@@ -44536,6 +45796,10 @@
           </a:solidFill>
           <a:ln/>
         </p:spPr>
+        <p:txBody>
+          <a:bodyPr/>
+          <a:p/>
+        </p:txBody>
       </p:sp>
       <p:sp>
         <p:nvSpPr>
@@ -44664,6 +45928,10 @@
           </a:solidFill>
           <a:ln/>
         </p:spPr>
+        <p:txBody>
+          <a:bodyPr/>
+          <a:p/>
+        </p:txBody>
       </p:sp>
       <p:sp>
         <p:nvSpPr>
@@ -44792,6 +46060,10 @@
           </a:solidFill>
           <a:ln/>
         </p:spPr>
+        <p:txBody>
+          <a:bodyPr/>
+          <a:p/>
+        </p:txBody>
       </p:sp>
       <p:sp>
         <p:nvSpPr>
@@ -44920,6 +46192,10 @@
           </a:solidFill>
           <a:ln/>
         </p:spPr>
+        <p:txBody>
+          <a:bodyPr/>
+          <a:p/>
+        </p:txBody>
       </p:sp>
       <p:sp>
         <p:nvSpPr>
@@ -45048,6 +46324,10 @@
           </a:solidFill>
           <a:ln/>
         </p:spPr>
+        <p:txBody>
+          <a:bodyPr/>
+          <a:p/>
+        </p:txBody>
       </p:sp>
       <p:sp>
         <p:nvSpPr>
@@ -45068,6 +46348,10 @@
           </a:solidFill>
           <a:ln/>
         </p:spPr>
+        <p:txBody>
+          <a:bodyPr/>
+          <a:p/>
+        </p:txBody>
       </p:sp>
       <p:sp>
         <p:nvSpPr>
@@ -45281,6 +46565,10 @@
           </a:solidFill>
           <a:ln/>
         </p:spPr>
+        <p:txBody>
+          <a:bodyPr/>
+          <a:p/>
+        </p:txBody>
       </p:sp>
       <p:graphicFrame>
         <p:nvGraphicFramePr>
@@ -46563,6 +47851,10 @@
           </a:solidFill>
           <a:ln/>
         </p:spPr>
+        <p:txBody>
+          <a:bodyPr/>
+          <a:p/>
+        </p:txBody>
       </p:sp>
       <p:sp>
         <p:nvSpPr>
@@ -46583,6 +47875,10 @@
           </a:solidFill>
           <a:ln/>
         </p:spPr>
+        <p:txBody>
+          <a:bodyPr/>
+          <a:p/>
+        </p:txBody>
       </p:sp>
       <p:sp>
         <p:nvSpPr>
@@ -46796,6 +48092,10 @@
           </a:solidFill>
           <a:ln/>
         </p:spPr>
+        <p:txBody>
+          <a:bodyPr/>
+          <a:p/>
+        </p:txBody>
       </p:sp>
       <p:graphicFrame>
         <p:nvGraphicFramePr>
